--- a/slides/doc-mt-06-editable-slides.pptx
+++ b/slides/doc-mt-06-editable-slides.pptx
@@ -2068,7 +2068,7 @@
                 <a:ea typeface="Arial" pitchFamily="34" charset="-122"/>
                 <a:cs typeface="Arial" pitchFamily="34" charset="-120"/>
               </a:rPr>
-              <a:t>Figure 1. Figure 1: Defense-in-depth sequence showing exactly where SIM 1 through SIM 10 are intercepted and logged across the 5-hop multi-tenant architecture.</a:t>
+              <a:t>Figure 1. Defense-in-depth sequence showing exactly where SIM 1 through SIM 10 are intercepted and logged across the 5-hop multi-tenant architecture.</a:t>
             </a:r>
             <a:endParaRPr lang="en-US" sz="820" dirty="0"/>
           </a:p>
@@ -2136,8 +2136,8 @@
         </p:nvSpPr>
         <p:spPr>
           <a:xfrm>
-            <a:off x="4027932" y="1869948"/>
-            <a:ext cx="1858975" cy="146304"/>
+            <a:off x="4027932" y="1858975"/>
+            <a:ext cx="1773936" cy="105156"/>
           </a:xfrm>
           <a:prstGeom prst="rect">
             <a:avLst/>
@@ -2146,7 +2146,7 @@
           <a:ln/>
         </p:spPr>
         <p:txBody>
-          <a:bodyPr wrap="square" lIns="0" tIns="0" rIns="0" bIns="0" rtlCol="0" anchor="t">
+          <a:bodyPr wrap="none" lIns="0" tIns="0" rIns="0" bIns="0" rtlCol="0" anchor="t">
             <a:normAutofit/>
           </a:bodyPr>
           <a:lstStyle/>
@@ -2158,17 +2158,17 @@
               <a:buNone/>
             </a:pPr>
             <a:r>
-              <a:rPr lang="en-US" sz="460" b="1" dirty="0">
-                <a:solidFill>
-                  <a:srgbClr val="202124"/>
-                </a:solidFill>
-                <a:latin typeface="Arial" pitchFamily="34" charset="0"/>
-                <a:ea typeface="Arial" pitchFamily="34" charset="-122"/>
-                <a:cs typeface="Arial" pitchFamily="34" charset="-120"/>
-              </a:rPr>
-              <a:t>Adversarial Breach Verification Harness (10/10 Deterministic Security Gates PASS)</a:t>
-            </a:r>
-            <a:endParaRPr lang="en-US" sz="460" dirty="0"/>
+              <a:rPr lang="en-US" sz="420" b="1" dirty="0">
+                <a:solidFill>
+                  <a:srgbClr val="202124"/>
+                </a:solidFill>
+                <a:latin typeface="Arial" pitchFamily="34" charset="0"/>
+                <a:ea typeface="Arial" pitchFamily="34" charset="-122"/>
+                <a:cs typeface="Arial" pitchFamily="34" charset="-120"/>
+              </a:rPr>
+              <a:t>Adversarial Breach Verification Harness</a:t>
+            </a:r>
+            <a:endParaRPr lang="en-US" sz="420" dirty="0"/>
           </a:p>
         </p:txBody>
       </p:sp>
@@ -2207,8 +2207,8 @@
         </p:nvSpPr>
         <p:spPr>
           <a:xfrm>
-            <a:off x="4088282" y="2004365"/>
-            <a:ext cx="1805940" cy="146304"/>
+            <a:off x="4088282" y="1993392"/>
+            <a:ext cx="1723644" cy="105156"/>
           </a:xfrm>
           <a:prstGeom prst="rect">
             <a:avLst/>
@@ -2217,7 +2217,7 @@
           <a:ln/>
         </p:spPr>
         <p:txBody>
-          <a:bodyPr wrap="square" lIns="0" tIns="0" rIns="0" bIns="0" rtlCol="0" anchor="t">
+          <a:bodyPr wrap="none" lIns="0" tIns="0" rIns="0" bIns="0" rtlCol="0" anchor="t">
             <a:normAutofit/>
           </a:bodyPr>
           <a:lstStyle/>
@@ -2229,7 +2229,7 @@
               <a:buNone/>
             </a:pPr>
             <a:r>
-              <a:rPr lang="en-US" sz="460" b="1" dirty="0">
+              <a:rPr lang="en-US" sz="420" b="1" dirty="0">
                 <a:solidFill>
                   <a:srgbClr val="202124"/>
                 </a:solidFill>
@@ -2239,7 +2239,7 @@
               </a:rPr>
               <a:t>VPC • Zero-Trust 5-Hop Enforcement Pipeline</a:t>
             </a:r>
-            <a:endParaRPr lang="en-US" sz="460" dirty="0"/>
+            <a:endParaRPr lang="en-US" sz="420" dirty="0"/>
           </a:p>
         </p:txBody>
       </p:sp>
@@ -2278,8 +2278,8 @@
         </p:nvSpPr>
         <p:spPr>
           <a:xfrm>
-            <a:off x="4155034" y="3757270"/>
-            <a:ext cx="1255471" cy="146304"/>
+            <a:off x="4155034" y="3746297"/>
+            <a:ext cx="1255471" cy="105156"/>
           </a:xfrm>
           <a:prstGeom prst="rect">
             <a:avLst/>
@@ -2288,7 +2288,7 @@
           <a:ln/>
         </p:spPr>
         <p:txBody>
-          <a:bodyPr wrap="square" lIns="0" tIns="0" rIns="0" bIns="0" rtlCol="0" anchor="t">
+          <a:bodyPr wrap="none" lIns="0" tIns="0" rIns="0" bIns="0" rtlCol="0" anchor="t">
             <a:normAutofit/>
           </a:bodyPr>
           <a:lstStyle/>
@@ -2308,7 +2308,7 @@
                 <a:ea typeface="Arial" pitchFamily="34" charset="-122"/>
                 <a:cs typeface="Arial" pitchFamily="34" charset="-120"/>
               </a:rPr>
-              <a:t>Hop 4 Guardrail Gates (Vectors 4, 5 &amp; 8) • Prompt, Safety Filter &amp; SDP DLP</a:t>
+              <a:t>Hop 4 Guardrail Gates (Vectors 4, 5 &amp; 8)</a:t>
             </a:r>
             <a:endParaRPr lang="en-US" sz="385" dirty="0"/>
           </a:p>
@@ -2349,8 +2349,8 @@
         </p:nvSpPr>
         <p:spPr>
           <a:xfrm>
-            <a:off x="6192317" y="3757270"/>
-            <a:ext cx="1255471" cy="146304"/>
+            <a:off x="6192317" y="3746297"/>
+            <a:ext cx="1255471" cy="105156"/>
           </a:xfrm>
           <a:prstGeom prst="rect">
             <a:avLst/>
@@ -2359,7 +2359,7 @@
           <a:ln/>
         </p:spPr>
         <p:txBody>
-          <a:bodyPr wrap="square" lIns="0" tIns="0" rIns="0" bIns="0" rtlCol="0" anchor="t">
+          <a:bodyPr wrap="none" lIns="0" tIns="0" rIns="0" bIns="0" rtlCol="0" anchor="t">
             <a:normAutofit/>
           </a:bodyPr>
           <a:lstStyle/>
@@ -2379,7 +2379,7 @@
                 <a:ea typeface="Arial" pitchFamily="34" charset="-122"/>
                 <a:cs typeface="Arial" pitchFamily="34" charset="-120"/>
               </a:rPr>
-              <a:t>Hop 3 &amp; Hop 5 Storage Gates (Vectors 7 &amp; 9) • Memory, Skills &amp; RLS</a:t>
+              <a:t>Hop 3 &amp; Hop 5 Storage Gates (Vectors 7 &amp; 9)</a:t>
             </a:r>
             <a:endParaRPr lang="en-US" sz="385" dirty="0"/>
           </a:p>
@@ -2694,7 +2694,7 @@
         <p:spPr>
           <a:xfrm>
             <a:off x="6881774" y="2161642"/>
-            <a:ext cx="1145743" cy="146304"/>
+            <a:ext cx="1145743" cy="137160"/>
           </a:xfrm>
           <a:prstGeom prst="rect">
             <a:avLst/>
@@ -3918,8 +3918,8 @@
         </p:blipFill>
         <p:spPr>
           <a:xfrm>
-            <a:off x="5576926" y="2516429"/>
-            <a:ext cx="181966" cy="181966"/>
+            <a:off x="5563210" y="2536546"/>
+            <a:ext cx="141732" cy="141732"/>
           </a:xfrm>
           <a:prstGeom prst="rect">
             <a:avLst/>
@@ -3934,8 +3934,8 @@
         </p:nvSpPr>
         <p:spPr>
           <a:xfrm>
-            <a:off x="5795467" y="2474366"/>
-            <a:ext cx="689458" cy="266090"/>
+            <a:off x="5727802" y="2470709"/>
+            <a:ext cx="779069" cy="273406"/>
           </a:xfrm>
           <a:prstGeom prst="rect">
             <a:avLst/>
@@ -3951,12 +3951,12 @@
           <a:p>
             <a:pPr algn="l" indent="0" marL="0">
               <a:lnSpc>
-                <a:spcPct val="86000"/>
-              </a:lnSpc>
-              <a:buNone/>
-            </a:pPr>
-            <a:r>
-              <a:rPr lang="en-US" sz="500" b="1" dirty="0">
+                <a:spcPct val="88000"/>
+              </a:lnSpc>
+              <a:buNone/>
+            </a:pPr>
+            <a:r>
+              <a:rPr lang="en-US" sz="435" b="1" dirty="0">
                 <a:solidFill>
                   <a:srgbClr val="202124"/>
                 </a:solidFill>
@@ -3966,17 +3966,17 @@
               </a:rPr>
               <a:t>External Application Load Balancer</a:t>
             </a:r>
-            <a:endParaRPr lang="en-US" sz="500" dirty="0"/>
+            <a:endParaRPr lang="en-US" sz="435" dirty="0"/>
           </a:p>
           <a:p>
             <a:pPr algn="l" indent="0" marL="0">
               <a:lnSpc>
-                <a:spcPct val="86000"/>
-              </a:lnSpc>
-              <a:buNone/>
-            </a:pPr>
-            <a:r>
-              <a:rPr lang="en-US" sz="430" dirty="0">
+                <a:spcPct val="88000"/>
+              </a:lnSpc>
+              <a:buNone/>
+            </a:pPr>
+            <a:r>
+              <a:rPr lang="en-US" sz="375" dirty="0">
                 <a:solidFill>
                   <a:srgbClr val="3C4043"/>
                 </a:solidFill>
@@ -3986,7 +3986,7 @@
               </a:rPr>
               <a:t>Cloud Armor Edge PEP</a:t>
             </a:r>
-            <a:endParaRPr lang="en-US" sz="500" dirty="0"/>
+            <a:endParaRPr lang="en-US" sz="435" dirty="0"/>
           </a:p>
         </p:txBody>
       </p:sp>
@@ -4033,8 +4033,8 @@
         </p:blipFill>
         <p:spPr>
           <a:xfrm>
-            <a:off x="6969557" y="2416759"/>
-            <a:ext cx="172822" cy="172822"/>
+            <a:off x="6955841" y="2435962"/>
+            <a:ext cx="134417" cy="134417"/>
           </a:xfrm>
           <a:prstGeom prst="rect">
             <a:avLst/>
@@ -4049,8 +4049,8 @@
         </p:nvSpPr>
         <p:spPr>
           <a:xfrm>
-            <a:off x="7178954" y="2377440"/>
-            <a:ext cx="750722" cy="251460"/>
+            <a:off x="7113118" y="2373782"/>
+            <a:ext cx="838505" cy="258775"/>
           </a:xfrm>
           <a:prstGeom prst="rect">
             <a:avLst/>
@@ -4066,12 +4066,12 @@
           <a:p>
             <a:pPr algn="l" indent="0" marL="0">
               <a:lnSpc>
-                <a:spcPct val="86000"/>
-              </a:lnSpc>
-              <a:buNone/>
-            </a:pPr>
-            <a:r>
-              <a:rPr lang="en-US" sz="500" b="1" dirty="0">
+                <a:spcPct val="88000"/>
+              </a:lnSpc>
+              <a:buNone/>
+            </a:pPr>
+            <a:r>
+              <a:rPr lang="en-US" sz="435" b="1" dirty="0">
                 <a:solidFill>
                   <a:srgbClr val="202124"/>
                 </a:solidFill>
@@ -4081,17 +4081,17 @@
               </a:rPr>
               <a:t>Vector 6: Valkey 429 &amp; 4k Token Clamp</a:t>
             </a:r>
-            <a:endParaRPr lang="en-US" sz="500" dirty="0"/>
+            <a:endParaRPr lang="en-US" sz="435" dirty="0"/>
           </a:p>
           <a:p>
             <a:pPr algn="l" indent="0" marL="0">
               <a:lnSpc>
-                <a:spcPct val="86000"/>
-              </a:lnSpc>
-              <a:buNone/>
-            </a:pPr>
-            <a:r>
-              <a:rPr lang="en-US" sz="430" dirty="0">
+                <a:spcPct val="88000"/>
+              </a:lnSpc>
+              <a:buNone/>
+            </a:pPr>
+            <a:r>
+              <a:rPr lang="en-US" sz="375" dirty="0">
                 <a:solidFill>
                   <a:srgbClr val="3C4043"/>
                 </a:solidFill>
@@ -4101,7 +4101,7 @@
               </a:rPr>
               <a:t>Blocks 250 RPM Flood &amp; 16k</a:t>
             </a:r>
-            <a:endParaRPr lang="en-US" sz="500" dirty="0"/>
+            <a:endParaRPr lang="en-US" sz="435" dirty="0"/>
           </a:p>
         </p:txBody>
       </p:sp>
@@ -4148,8 +4148,8 @@
         </p:blipFill>
         <p:spPr>
           <a:xfrm>
-            <a:off x="6985102" y="3043123"/>
-            <a:ext cx="163678" cy="163678"/>
+            <a:off x="6971386" y="3061411"/>
+            <a:ext cx="128016" cy="128016"/>
           </a:xfrm>
           <a:prstGeom prst="rect">
             <a:avLst/>
@@ -4164,8 +4164,8 @@
         </p:nvSpPr>
         <p:spPr>
           <a:xfrm>
-            <a:off x="7185355" y="3006547"/>
-            <a:ext cx="730606" cy="236830"/>
+            <a:off x="7121347" y="3002890"/>
+            <a:ext cx="817474" cy="244145"/>
           </a:xfrm>
           <a:prstGeom prst="rect">
             <a:avLst/>
@@ -4181,12 +4181,12 @@
           <a:p>
             <a:pPr algn="l" indent="0" marL="0">
               <a:lnSpc>
-                <a:spcPct val="86000"/>
-              </a:lnSpc>
-              <a:buNone/>
-            </a:pPr>
-            <a:r>
-              <a:rPr lang="en-US" sz="500" b="1" dirty="0">
+                <a:spcPct val="88000"/>
+              </a:lnSpc>
+              <a:buNone/>
+            </a:pPr>
+            <a:r>
+              <a:rPr lang="en-US" sz="435" b="1" dirty="0">
                 <a:solidFill>
                   <a:srgbClr val="202124"/>
                 </a:solidFill>
@@ -4196,17 +4196,17 @@
               </a:rPr>
               <a:t>BigQuery OTel Audit</a:t>
             </a:r>
-            <a:endParaRPr lang="en-US" sz="500" dirty="0"/>
+            <a:endParaRPr lang="en-US" sz="435" dirty="0"/>
           </a:p>
           <a:p>
             <a:pPr algn="l" indent="0" marL="0">
               <a:lnSpc>
-                <a:spcPct val="86000"/>
-              </a:lnSpc>
-              <a:buNone/>
-            </a:pPr>
-            <a:r>
-              <a:rPr lang="en-US" sz="430" dirty="0">
+                <a:spcPct val="88000"/>
+              </a:lnSpc>
+              <a:buNone/>
+            </a:pPr>
+            <a:r>
+              <a:rPr lang="en-US" sz="375" dirty="0">
                 <a:solidFill>
                   <a:srgbClr val="3C4043"/>
                 </a:solidFill>
@@ -4216,7 +4216,7 @@
               </a:rPr>
               <a:t>Logs Every Blocked Vector</a:t>
             </a:r>
-            <a:endParaRPr lang="en-US" sz="500" dirty="0"/>
+            <a:endParaRPr lang="en-US" sz="435" dirty="0"/>
           </a:p>
         </p:txBody>
       </p:sp>
@@ -4263,8 +4263,8 @@
         </p:blipFill>
         <p:spPr>
           <a:xfrm>
-            <a:off x="6992417" y="2735885"/>
-            <a:ext cx="163678" cy="163678"/>
+            <a:off x="6978701" y="2754173"/>
+            <a:ext cx="128016" cy="128016"/>
           </a:xfrm>
           <a:prstGeom prst="rect">
             <a:avLst/>
@@ -4279,8 +4279,8 @@
         </p:nvSpPr>
         <p:spPr>
           <a:xfrm>
-            <a:off x="7192670" y="2699309"/>
-            <a:ext cx="715061" cy="236830"/>
+            <a:off x="7128662" y="2695651"/>
+            <a:ext cx="801014" cy="244145"/>
           </a:xfrm>
           <a:prstGeom prst="rect">
             <a:avLst/>
@@ -4296,12 +4296,12 @@
           <a:p>
             <a:pPr algn="l" indent="0" marL="0">
               <a:lnSpc>
-                <a:spcPct val="86000"/>
-              </a:lnSpc>
-              <a:buNone/>
-            </a:pPr>
-            <a:r>
-              <a:rPr lang="en-US" sz="500" b="1" dirty="0">
+                <a:spcPct val="88000"/>
+              </a:lnSpc>
+              <a:buNone/>
+            </a:pPr>
+            <a:r>
+              <a:rPr lang="en-US" sz="435" b="1" dirty="0">
                 <a:solidFill>
                   <a:srgbClr val="202124"/>
                 </a:solidFill>
@@ -4311,17 +4311,17 @@
               </a:rPr>
               <a:t>Vector 10: Inline 3LO</a:t>
             </a:r>
-            <a:endParaRPr lang="en-US" sz="500" dirty="0"/>
+            <a:endParaRPr lang="en-US" sz="435" dirty="0"/>
           </a:p>
           <a:p>
             <a:pPr algn="l" indent="0" marL="0">
               <a:lnSpc>
-                <a:spcPct val="86000"/>
-              </a:lnSpc>
-              <a:buNone/>
-            </a:pPr>
-            <a:r>
-              <a:rPr lang="en-US" sz="430" dirty="0">
+                <a:spcPct val="88000"/>
+              </a:lnSpc>
+              <a:buNone/>
+            </a:pPr>
+            <a:r>
+              <a:rPr lang="en-US" sz="375" dirty="0">
                 <a:solidFill>
                   <a:srgbClr val="3C4043"/>
                 </a:solidFill>
@@ -4331,7 +4331,7 @@
               </a:rPr>
               <a:t>HTTP 401 Entra OAuth Challenge</a:t>
             </a:r>
-            <a:endParaRPr lang="en-US" sz="500" dirty="0"/>
+            <a:endParaRPr lang="en-US" sz="435" dirty="0"/>
           </a:p>
         </p:txBody>
       </p:sp>
@@ -4378,8 +4378,8 @@
         </p:blipFill>
         <p:spPr>
           <a:xfrm>
-            <a:off x="5164531" y="4358030"/>
-            <a:ext cx="177394" cy="177394"/>
+            <a:off x="5150815" y="4377233"/>
+            <a:ext cx="138074" cy="138074"/>
           </a:xfrm>
           <a:prstGeom prst="rect">
             <a:avLst/>
@@ -4394,8 +4394,8 @@
         </p:nvSpPr>
         <p:spPr>
           <a:xfrm>
-            <a:off x="5378501" y="4316882"/>
-            <a:ext cx="513893" cy="258775"/>
+            <a:off x="5311750" y="4313225"/>
+            <a:ext cx="602590" cy="266090"/>
           </a:xfrm>
           <a:prstGeom prst="rect">
             <a:avLst/>
@@ -4411,12 +4411,12 @@
           <a:p>
             <a:pPr algn="l" indent="0" marL="0">
               <a:lnSpc>
-                <a:spcPct val="86000"/>
-              </a:lnSpc>
-              <a:buNone/>
-            </a:pPr>
-            <a:r>
-              <a:rPr lang="en-US" sz="500" b="1" dirty="0">
+                <a:spcPct val="88000"/>
+              </a:lnSpc>
+              <a:buNone/>
+            </a:pPr>
+            <a:r>
+              <a:rPr lang="en-US" sz="435" b="1" dirty="0">
                 <a:solidFill>
                   <a:srgbClr val="202124"/>
                 </a:solidFill>
@@ -4426,17 +4426,17 @@
               </a:rPr>
               <a:t>Vertex AI Agent Engine</a:t>
             </a:r>
-            <a:endParaRPr lang="en-US" sz="500" dirty="0"/>
+            <a:endParaRPr lang="en-US" sz="435" dirty="0"/>
           </a:p>
           <a:p>
             <a:pPr algn="l" indent="0" marL="0">
               <a:lnSpc>
-                <a:spcPct val="86000"/>
-              </a:lnSpc>
-              <a:buNone/>
-            </a:pPr>
-            <a:r>
-              <a:rPr lang="en-US" sz="430" dirty="0">
+                <a:spcPct val="88000"/>
+              </a:lnSpc>
+              <a:buNone/>
+            </a:pPr>
+            <a:r>
+              <a:rPr lang="en-US" sz="375" dirty="0">
                 <a:solidFill>
                   <a:srgbClr val="3C4043"/>
                 </a:solidFill>
@@ -4446,7 +4446,7 @@
               </a:rPr>
               <a:t>Executes Only Clean Turns</a:t>
             </a:r>
-            <a:endParaRPr lang="en-US" sz="500" dirty="0"/>
+            <a:endParaRPr lang="en-US" sz="435" dirty="0"/>
           </a:p>
         </p:txBody>
       </p:sp>
@@ -4493,8 +4493,8 @@
         </p:blipFill>
         <p:spPr>
           <a:xfrm>
-            <a:off x="5164531" y="4897526"/>
-            <a:ext cx="177394" cy="177394"/>
+            <a:off x="5150815" y="4916729"/>
+            <a:ext cx="138074" cy="138074"/>
           </a:xfrm>
           <a:prstGeom prst="rect">
             <a:avLst/>
@@ -4509,8 +4509,8 @@
         </p:nvSpPr>
         <p:spPr>
           <a:xfrm>
-            <a:off x="5378501" y="4856378"/>
-            <a:ext cx="513893" cy="258775"/>
+            <a:off x="5311750" y="4852721"/>
+            <a:ext cx="602590" cy="266090"/>
           </a:xfrm>
           <a:prstGeom prst="rect">
             <a:avLst/>
@@ -4526,12 +4526,12 @@
           <a:p>
             <a:pPr algn="l" indent="0" marL="0">
               <a:lnSpc>
-                <a:spcPct val="86000"/>
-              </a:lnSpc>
-              <a:buNone/>
-            </a:pPr>
-            <a:r>
-              <a:rPr lang="en-US" sz="500" b="1" dirty="0">
+                <a:spcPct val="88000"/>
+              </a:lnSpc>
+              <a:buNone/>
+            </a:pPr>
+            <a:r>
+              <a:rPr lang="en-US" sz="435" b="1" dirty="0">
                 <a:solidFill>
                   <a:srgbClr val="202124"/>
                 </a:solidFill>
@@ -4541,17 +4541,17 @@
               </a:rPr>
               <a:t>Vector 8: SDP Mask</a:t>
             </a:r>
-            <a:endParaRPr lang="en-US" sz="500" dirty="0"/>
+            <a:endParaRPr lang="en-US" sz="435" dirty="0"/>
           </a:p>
           <a:p>
             <a:pPr algn="l" indent="0" marL="0">
               <a:lnSpc>
-                <a:spcPct val="86000"/>
-              </a:lnSpc>
-              <a:buNone/>
-            </a:pPr>
-            <a:r>
-              <a:rPr lang="en-US" sz="430" dirty="0">
+                <a:spcPct val="88000"/>
+              </a:lnSpc>
+              <a:buNone/>
+            </a:pPr>
+            <a:r>
+              <a:rPr lang="en-US" sz="375" dirty="0">
                 <a:solidFill>
                   <a:srgbClr val="3C4043"/>
                 </a:solidFill>
@@ -4561,7 +4561,7 @@
               </a:rPr>
               <a:t>Redacts IBAN, SWIFT &amp; PAN</a:t>
             </a:r>
-            <a:endParaRPr lang="en-US" sz="500" dirty="0"/>
+            <a:endParaRPr lang="en-US" sz="435" dirty="0"/>
           </a:p>
         </p:txBody>
       </p:sp>
@@ -4608,8 +4608,8 @@
         </p:blipFill>
         <p:spPr>
           <a:xfrm>
-            <a:off x="5164531" y="5459882"/>
-            <a:ext cx="177394" cy="177394"/>
+            <a:off x="5150815" y="5479085"/>
+            <a:ext cx="138074" cy="138074"/>
           </a:xfrm>
           <a:prstGeom prst="rect">
             <a:avLst/>
@@ -4624,8 +4624,8 @@
         </p:nvSpPr>
         <p:spPr>
           <a:xfrm>
-            <a:off x="5378501" y="5418734"/>
-            <a:ext cx="513893" cy="258775"/>
+            <a:off x="5311750" y="5415077"/>
+            <a:ext cx="602590" cy="266090"/>
           </a:xfrm>
           <a:prstGeom prst="rect">
             <a:avLst/>
@@ -4641,12 +4641,12 @@
           <a:p>
             <a:pPr algn="l" indent="0" marL="0">
               <a:lnSpc>
-                <a:spcPct val="86000"/>
-              </a:lnSpc>
-              <a:buNone/>
-            </a:pPr>
-            <a:r>
-              <a:rPr lang="en-US" sz="500" b="1" dirty="0">
+                <a:spcPct val="88000"/>
+              </a:lnSpc>
+              <a:buNone/>
+            </a:pPr>
+            <a:r>
+              <a:rPr lang="en-US" sz="435" b="1" dirty="0">
                 <a:solidFill>
                   <a:srgbClr val="202124"/>
                 </a:solidFill>
@@ -4656,17 +4656,17 @@
               </a:rPr>
               <a:t>Zero Raw PII Egress</a:t>
             </a:r>
-            <a:endParaRPr lang="en-US" sz="500" dirty="0"/>
+            <a:endParaRPr lang="en-US" sz="435" dirty="0"/>
           </a:p>
           <a:p>
             <a:pPr algn="l" indent="0" marL="0">
               <a:lnSpc>
-                <a:spcPct val="86000"/>
-              </a:lnSpc>
-              <a:buNone/>
-            </a:pPr>
-            <a:r>
-              <a:rPr lang="en-US" sz="430" dirty="0">
+                <a:spcPct val="88000"/>
+              </a:lnSpc>
+              <a:buNone/>
+            </a:pPr>
+            <a:r>
+              <a:rPr lang="en-US" sz="375" dirty="0">
                 <a:solidFill>
                   <a:srgbClr val="3C4043"/>
                 </a:solidFill>
@@ -4676,7 +4676,7 @@
               </a:rPr>
               <a:t>[REDACTED-FINVAULT-*]</a:t>
             </a:r>
-            <a:endParaRPr lang="en-US" sz="500" dirty="0"/>
+            <a:endParaRPr lang="en-US" sz="435" dirty="0"/>
           </a:p>
         </p:txBody>
       </p:sp>
@@ -4723,8 +4723,8 @@
         </p:blipFill>
         <p:spPr>
           <a:xfrm>
-            <a:off x="7201814" y="4358030"/>
-            <a:ext cx="177394" cy="177394"/>
+            <a:off x="7188098" y="4377233"/>
+            <a:ext cx="138074" cy="138074"/>
           </a:xfrm>
           <a:prstGeom prst="rect">
             <a:avLst/>
@@ -4739,8 +4739,8 @@
         </p:nvSpPr>
         <p:spPr>
           <a:xfrm>
-            <a:off x="7415784" y="4316882"/>
-            <a:ext cx="513893" cy="258775"/>
+            <a:off x="7349033" y="4313225"/>
+            <a:ext cx="602590" cy="266090"/>
           </a:xfrm>
           <a:prstGeom prst="rect">
             <a:avLst/>
@@ -4756,12 +4756,12 @@
           <a:p>
             <a:pPr algn="l" indent="0" marL="0">
               <a:lnSpc>
-                <a:spcPct val="86000"/>
-              </a:lnSpc>
-              <a:buNone/>
-            </a:pPr>
-            <a:r>
-              <a:rPr lang="en-US" sz="500" b="1" dirty="0">
+                <a:spcPct val="88000"/>
+              </a:lnSpc>
+              <a:buNone/>
+            </a:pPr>
+            <a:r>
+              <a:rPr lang="en-US" sz="435" b="1" dirty="0">
                 <a:solidFill>
                   <a:srgbClr val="202124"/>
                 </a:solidFill>
@@ -4771,17 +4771,17 @@
               </a:rPr>
               <a:t>Vector 9: Prefix Cache</a:t>
             </a:r>
-            <a:endParaRPr lang="en-US" sz="500" dirty="0"/>
+            <a:endParaRPr lang="en-US" sz="435" dirty="0"/>
           </a:p>
           <a:p>
             <a:pPr algn="l" indent="0" marL="0">
               <a:lnSpc>
-                <a:spcPct val="86000"/>
-              </a:lnSpc>
-              <a:buNone/>
-            </a:pPr>
-            <a:r>
-              <a:rPr lang="en-US" sz="430" dirty="0">
+                <a:spcPct val="88000"/>
+              </a:lnSpc>
+              <a:buNone/>
+            </a:pPr>
+            <a:r>
+              <a:rPr lang="en-US" sz="375" dirty="0">
                 <a:solidFill>
                   <a:srgbClr val="3C4043"/>
                 </a:solidFill>
@@ -4791,7 +4791,7 @@
               </a:rPr>
               <a:t>READ_ONLY_IMMUTABLE_PREFIX</a:t>
             </a:r>
-            <a:endParaRPr lang="en-US" sz="500" dirty="0"/>
+            <a:endParaRPr lang="en-US" sz="435" dirty="0"/>
           </a:p>
         </p:txBody>
       </p:sp>
@@ -4838,8 +4838,8 @@
         </p:blipFill>
         <p:spPr>
           <a:xfrm>
-            <a:off x="7201814" y="4897526"/>
-            <a:ext cx="177394" cy="177394"/>
+            <a:off x="7188098" y="4916729"/>
+            <a:ext cx="138074" cy="138074"/>
           </a:xfrm>
           <a:prstGeom prst="rect">
             <a:avLst/>
@@ -4854,8 +4854,8 @@
         </p:nvSpPr>
         <p:spPr>
           <a:xfrm>
-            <a:off x="7415784" y="4856378"/>
-            <a:ext cx="513893" cy="258775"/>
+            <a:off x="7349033" y="4852721"/>
+            <a:ext cx="602590" cy="266090"/>
           </a:xfrm>
           <a:prstGeom prst="rect">
             <a:avLst/>
@@ -4871,12 +4871,12 @@
           <a:p>
             <a:pPr algn="l" indent="0" marL="0">
               <a:lnSpc>
-                <a:spcPct val="86000"/>
-              </a:lnSpc>
-              <a:buNone/>
-            </a:pPr>
-            <a:r>
-              <a:rPr lang="en-US" sz="500" b="1" dirty="0">
+                <a:spcPct val="88000"/>
+              </a:lnSpc>
+              <a:buNone/>
+            </a:pPr>
+            <a:r>
+              <a:rPr lang="en-US" sz="435" b="1" dirty="0">
                 <a:solidFill>
                   <a:srgbClr val="202124"/>
                 </a:solidFill>
@@ -4886,17 +4886,17 @@
               </a:rPr>
               <a:t>Auth Manager Vault</a:t>
             </a:r>
-            <a:endParaRPr lang="en-US" sz="500" dirty="0"/>
+            <a:endParaRPr lang="en-US" sz="435" dirty="0"/>
           </a:p>
           <a:p>
             <a:pPr algn="l" indent="0" marL="0">
               <a:lnSpc>
-                <a:spcPct val="86000"/>
-              </a:lnSpc>
-              <a:buNone/>
-            </a:pPr>
-            <a:r>
-              <a:rPr lang="en-US" sz="430" dirty="0">
+                <a:spcPct val="88000"/>
+              </a:lnSpc>
+              <a:buNone/>
+            </a:pPr>
+            <a:r>
+              <a:rPr lang="en-US" sz="375" dirty="0">
                 <a:solidFill>
                   <a:srgbClr val="3C4043"/>
                 </a:solidFill>
@@ -4906,7 +4906,7 @@
               </a:rPr>
               <a:t>Tenant-Scoped OAuth Tokens</a:t>
             </a:r>
-            <a:endParaRPr lang="en-US" sz="500" dirty="0"/>
+            <a:endParaRPr lang="en-US" sz="435" dirty="0"/>
           </a:p>
         </p:txBody>
       </p:sp>
@@ -4953,8 +4953,8 @@
         </p:blipFill>
         <p:spPr>
           <a:xfrm>
-            <a:off x="7201814" y="5459882"/>
-            <a:ext cx="177394" cy="177394"/>
+            <a:off x="7188098" y="5479085"/>
+            <a:ext cx="138074" cy="138074"/>
           </a:xfrm>
           <a:prstGeom prst="rect">
             <a:avLst/>
@@ -4969,8 +4969,8 @@
         </p:nvSpPr>
         <p:spPr>
           <a:xfrm>
-            <a:off x="7415784" y="5418734"/>
-            <a:ext cx="513893" cy="258775"/>
+            <a:off x="7349033" y="5415077"/>
+            <a:ext cx="602590" cy="266090"/>
           </a:xfrm>
           <a:prstGeom prst="rect">
             <a:avLst/>
@@ -4986,12 +4986,12 @@
           <a:p>
             <a:pPr algn="l" indent="0" marL="0">
               <a:lnSpc>
-                <a:spcPct val="86000"/>
-              </a:lnSpc>
-              <a:buNone/>
-            </a:pPr>
-            <a:r>
-              <a:rPr lang="en-US" sz="500" b="1" dirty="0">
+                <a:spcPct val="88000"/>
+              </a:lnSpc>
+              <a:buNone/>
+            </a:pPr>
+            <a:r>
+              <a:rPr lang="en-US" sz="435" b="1" dirty="0">
                 <a:solidFill>
                   <a:srgbClr val="202124"/>
                 </a:solidFill>
@@ -5001,17 +5001,17 @@
               </a:rPr>
               <a:t>Vector 7C: AlloyDB RLS</a:t>
             </a:r>
-            <a:endParaRPr lang="en-US" sz="500" dirty="0"/>
+            <a:endParaRPr lang="en-US" sz="435" dirty="0"/>
           </a:p>
           <a:p>
             <a:pPr algn="l" indent="0" marL="0">
               <a:lnSpc>
-                <a:spcPct val="86000"/>
-              </a:lnSpc>
-              <a:buNone/>
-            </a:pPr>
-            <a:r>
-              <a:rPr lang="en-US" sz="430" dirty="0">
+                <a:spcPct val="88000"/>
+              </a:lnSpc>
+              <a:buNone/>
+            </a:pPr>
+            <a:r>
+              <a:rPr lang="en-US" sz="375" dirty="0">
                 <a:solidFill>
                   <a:srgbClr val="3C4043"/>
                 </a:solidFill>
@@ -5021,7 +5021,7 @@
               </a:rPr>
               <a:t>0 Cross-Tenant Rows Returned</a:t>
             </a:r>
-            <a:endParaRPr lang="en-US" sz="500" dirty="0"/>
+            <a:endParaRPr lang="en-US" sz="435" dirty="0"/>
           </a:p>
         </p:txBody>
       </p:sp>
@@ -5068,8 +5068,8 @@
         </p:blipFill>
         <p:spPr>
           <a:xfrm>
-            <a:off x="5666537" y="3065069"/>
-            <a:ext cx="158191" cy="158191"/>
+            <a:off x="5652821" y="3081528"/>
+            <a:ext cx="123444" cy="123444"/>
           </a:xfrm>
           <a:prstGeom prst="rect">
             <a:avLst/>
@@ -5084,8 +5084,8 @@
         </p:nvSpPr>
         <p:spPr>
           <a:xfrm>
-            <a:off x="5861304" y="3029407"/>
-            <a:ext cx="570586" cy="228600"/>
+            <a:off x="5799125" y="3025750"/>
+            <a:ext cx="655625" cy="235915"/>
           </a:xfrm>
           <a:prstGeom prst="rect">
             <a:avLst/>
@@ -5101,12 +5101,12 @@
           <a:p>
             <a:pPr algn="l" indent="0" marL="0">
               <a:lnSpc>
-                <a:spcPct val="86000"/>
-              </a:lnSpc>
-              <a:buNone/>
-            </a:pPr>
-            <a:r>
-              <a:rPr lang="en-US" sz="500" b="1" dirty="0">
+                <a:spcPct val="88000"/>
+              </a:lnSpc>
+              <a:buNone/>
+            </a:pPr>
+            <a:r>
+              <a:rPr lang="en-US" sz="435" b="1" dirty="0">
                 <a:solidFill>
                   <a:srgbClr val="202124"/>
                 </a:solidFill>
@@ -5116,17 +5116,17 @@
               </a:rPr>
               <a:t>Hop 2 Catalog PDP</a:t>
             </a:r>
-            <a:endParaRPr lang="en-US" sz="500" dirty="0"/>
+            <a:endParaRPr lang="en-US" sz="435" dirty="0"/>
           </a:p>
           <a:p>
             <a:pPr algn="l" indent="0" marL="0">
               <a:lnSpc>
-                <a:spcPct val="86000"/>
-              </a:lnSpc>
-              <a:buNone/>
-            </a:pPr>
-            <a:r>
-              <a:rPr lang="en-US" sz="430" dirty="0">
+                <a:spcPct val="88000"/>
+              </a:lnSpc>
+              <a:buNone/>
+            </a:pPr>
+            <a:r>
+              <a:rPr lang="en-US" sz="375" dirty="0">
                 <a:solidFill>
                   <a:srgbClr val="3C4043"/>
                 </a:solidFill>
@@ -5136,7 +5136,7 @@
               </a:rPr>
               <a:t>Discovery Catalog + ADK Callback</a:t>
             </a:r>
-            <a:endParaRPr lang="en-US" sz="500" dirty="0"/>
+            <a:endParaRPr lang="en-US" sz="435" dirty="0"/>
           </a:p>
         </p:txBody>
       </p:sp>
@@ -5183,8 +5183,8 @@
         </p:blipFill>
         <p:spPr>
           <a:xfrm>
-            <a:off x="4243730" y="4169664"/>
-            <a:ext cx="172822" cy="172822"/>
+            <a:off x="4230014" y="4190695"/>
+            <a:ext cx="130759" cy="130759"/>
           </a:xfrm>
           <a:prstGeom prst="rect">
             <a:avLst/>
@@ -5199,8 +5199,8 @@
         </p:nvSpPr>
         <p:spPr>
           <a:xfrm>
-            <a:off x="4453128" y="4130345"/>
-            <a:ext cx="444398" cy="251460"/>
+            <a:off x="4383634" y="4126687"/>
+            <a:ext cx="536753" cy="258775"/>
           </a:xfrm>
           <a:prstGeom prst="rect">
             <a:avLst/>
@@ -5216,12 +5216,12 @@
           <a:p>
             <a:pPr algn="l" indent="0" marL="0">
               <a:lnSpc>
-                <a:spcPct val="86000"/>
-              </a:lnSpc>
-              <a:buNone/>
-            </a:pPr>
-            <a:r>
-              <a:rPr lang="en-US" sz="500" b="1" dirty="0">
+                <a:spcPct val="88000"/>
+              </a:lnSpc>
+              <a:buNone/>
+            </a:pPr>
+            <a:r>
+              <a:rPr lang="en-US" sz="435" b="1" dirty="0">
                 <a:solidFill>
                   <a:srgbClr val="202124"/>
                 </a:solidFill>
@@ -5231,17 +5231,17 @@
               </a:rPr>
               <a:t>Vector 4: HTTP 400</a:t>
             </a:r>
-            <a:endParaRPr lang="en-US" sz="500" dirty="0"/>
+            <a:endParaRPr lang="en-US" sz="435" dirty="0"/>
           </a:p>
           <a:p>
             <a:pPr algn="l" indent="0" marL="0">
               <a:lnSpc>
-                <a:spcPct val="86000"/>
-              </a:lnSpc>
-              <a:buNone/>
-            </a:pPr>
-            <a:r>
-              <a:rPr lang="en-US" sz="430" dirty="0">
+                <a:spcPct val="88000"/>
+              </a:lnSpc>
+              <a:buNone/>
+            </a:pPr>
+            <a:r>
+              <a:rPr lang="en-US" sz="375" dirty="0">
                 <a:solidFill>
                   <a:srgbClr val="3C4043"/>
                 </a:solidFill>
@@ -5251,7 +5251,7 @@
               </a:rPr>
               <a:t>Blocks SQLi &amp; Cache Dump</a:t>
             </a:r>
-            <a:endParaRPr lang="en-US" sz="500" dirty="0"/>
+            <a:endParaRPr lang="en-US" sz="435" dirty="0"/>
           </a:p>
         </p:txBody>
       </p:sp>
@@ -5298,8 +5298,8 @@
         </p:blipFill>
         <p:spPr>
           <a:xfrm>
-            <a:off x="4243730" y="5052974"/>
-            <a:ext cx="172822" cy="172822"/>
+            <a:off x="4230014" y="5074006"/>
+            <a:ext cx="130759" cy="130759"/>
           </a:xfrm>
           <a:prstGeom prst="rect">
             <a:avLst/>
@@ -5314,8 +5314,8 @@
         </p:nvSpPr>
         <p:spPr>
           <a:xfrm>
-            <a:off x="4453128" y="5013655"/>
-            <a:ext cx="444398" cy="251460"/>
+            <a:off x="4383634" y="5009998"/>
+            <a:ext cx="536753" cy="258775"/>
           </a:xfrm>
           <a:prstGeom prst="rect">
             <a:avLst/>
@@ -5331,12 +5331,12 @@
           <a:p>
             <a:pPr algn="l" indent="0" marL="0">
               <a:lnSpc>
-                <a:spcPct val="86000"/>
-              </a:lnSpc>
-              <a:buNone/>
-            </a:pPr>
-            <a:r>
-              <a:rPr lang="en-US" sz="500" b="1" dirty="0">
+                <a:spcPct val="88000"/>
+              </a:lnSpc>
+              <a:buNone/>
+            </a:pPr>
+            <a:r>
+              <a:rPr lang="en-US" sz="435" b="1" dirty="0">
                 <a:solidFill>
                   <a:srgbClr val="202124"/>
                 </a:solidFill>
@@ -5346,17 +5346,17 @@
               </a:rPr>
               <a:t>Vector 5: HTTP 422</a:t>
             </a:r>
-            <a:endParaRPr lang="en-US" sz="500" dirty="0"/>
+            <a:endParaRPr lang="en-US" sz="435" dirty="0"/>
           </a:p>
           <a:p>
             <a:pPr algn="l" indent="0" marL="0">
               <a:lnSpc>
-                <a:spcPct val="86000"/>
-              </a:lnSpc>
-              <a:buNone/>
-            </a:pPr>
-            <a:r>
-              <a:rPr lang="en-US" sz="430" dirty="0">
+                <a:spcPct val="88000"/>
+              </a:lnSpc>
+              <a:buNone/>
+            </a:pPr>
+            <a:r>
+              <a:rPr lang="en-US" sz="375" dirty="0">
                 <a:solidFill>
                   <a:srgbClr val="3C4043"/>
                 </a:solidFill>
@@ -5366,7 +5366,7 @@
               </a:rPr>
               <a:t>Blocks FINRA Escalation Bypass</a:t>
             </a:r>
-            <a:endParaRPr lang="en-US" sz="500" dirty="0"/>
+            <a:endParaRPr lang="en-US" sz="435" dirty="0"/>
           </a:p>
         </p:txBody>
       </p:sp>
@@ -5413,8 +5413,8 @@
         </p:blipFill>
         <p:spPr>
           <a:xfrm>
-            <a:off x="6281014" y="4169664"/>
-            <a:ext cx="172822" cy="172822"/>
+            <a:off x="6267298" y="4190695"/>
+            <a:ext cx="130759" cy="130759"/>
           </a:xfrm>
           <a:prstGeom prst="rect">
             <a:avLst/>
@@ -5429,8 +5429,8 @@
         </p:nvSpPr>
         <p:spPr>
           <a:xfrm>
-            <a:off x="6490411" y="4130345"/>
-            <a:ext cx="444398" cy="251460"/>
+            <a:off x="6420917" y="4126687"/>
+            <a:ext cx="536753" cy="258775"/>
           </a:xfrm>
           <a:prstGeom prst="rect">
             <a:avLst/>
@@ -5446,12 +5446,12 @@
           <a:p>
             <a:pPr algn="l" indent="0" marL="0">
               <a:lnSpc>
-                <a:spcPct val="86000"/>
-              </a:lnSpc>
-              <a:buNone/>
-            </a:pPr>
-            <a:r>
-              <a:rPr lang="en-US" sz="500" b="1" dirty="0">
+                <a:spcPct val="88000"/>
+              </a:lnSpc>
+              <a:buNone/>
+            </a:pPr>
+            <a:r>
+              <a:rPr lang="en-US" sz="435" b="1" dirty="0">
                 <a:solidFill>
                   <a:srgbClr val="202124"/>
                 </a:solidFill>
@@ -5461,17 +5461,17 @@
               </a:rPr>
               <a:t>Vector 7A: L4 Memory</a:t>
             </a:r>
-            <a:endParaRPr lang="en-US" sz="500" dirty="0"/>
+            <a:endParaRPr lang="en-US" sz="435" dirty="0"/>
           </a:p>
           <a:p>
             <a:pPr algn="l" indent="0" marL="0">
               <a:lnSpc>
-                <a:spcPct val="86000"/>
-              </a:lnSpc>
-              <a:buNone/>
-            </a:pPr>
-            <a:r>
-              <a:rPr lang="en-US" sz="430" dirty="0">
+                <a:spcPct val="88000"/>
+              </a:lnSpc>
+              <a:buNone/>
+            </a:pPr>
+            <a:r>
+              <a:rPr lang="en-US" sz="375" dirty="0">
                 <a:solidFill>
                   <a:srgbClr val="3C4043"/>
                 </a:solidFill>
@@ -5481,7 +5481,7 @@
               </a:rPr>
               <a:t>PermissionError on Cross-Read</a:t>
             </a:r>
-            <a:endParaRPr lang="en-US" sz="500" dirty="0"/>
+            <a:endParaRPr lang="en-US" sz="435" dirty="0"/>
           </a:p>
         </p:txBody>
       </p:sp>
@@ -5528,8 +5528,8 @@
         </p:blipFill>
         <p:spPr>
           <a:xfrm>
-            <a:off x="6281014" y="4550969"/>
-            <a:ext cx="172822" cy="172822"/>
+            <a:off x="6267298" y="4572000"/>
+            <a:ext cx="130759" cy="130759"/>
           </a:xfrm>
           <a:prstGeom prst="rect">
             <a:avLst/>
@@ -5544,8 +5544,8 @@
         </p:nvSpPr>
         <p:spPr>
           <a:xfrm>
-            <a:off x="6490411" y="4511650"/>
-            <a:ext cx="444398" cy="251460"/>
+            <a:off x="6420917" y="4507992"/>
+            <a:ext cx="536753" cy="258775"/>
           </a:xfrm>
           <a:prstGeom prst="rect">
             <a:avLst/>
@@ -5561,12 +5561,12 @@
           <a:p>
             <a:pPr algn="l" indent="0" marL="0">
               <a:lnSpc>
-                <a:spcPct val="86000"/>
-              </a:lnSpc>
-              <a:buNone/>
-            </a:pPr>
-            <a:r>
-              <a:rPr lang="en-US" sz="500" b="1" dirty="0">
+                <a:spcPct val="88000"/>
+              </a:lnSpc>
+              <a:buNone/>
+            </a:pPr>
+            <a:r>
+              <a:rPr lang="en-US" sz="435" b="1" dirty="0">
                 <a:solidFill>
                   <a:srgbClr val="202124"/>
                 </a:solidFill>
@@ -5576,17 +5576,17 @@
               </a:rPr>
               <a:t>Vector 7B: GCS Skills</a:t>
             </a:r>
-            <a:endParaRPr lang="en-US" sz="500" dirty="0"/>
+            <a:endParaRPr lang="en-US" sz="435" dirty="0"/>
           </a:p>
           <a:p>
             <a:pPr algn="l" indent="0" marL="0">
               <a:lnSpc>
-                <a:spcPct val="86000"/>
-              </a:lnSpc>
-              <a:buNone/>
-            </a:pPr>
-            <a:r>
-              <a:rPr lang="en-US" sz="430" dirty="0">
+                <a:spcPct val="88000"/>
+              </a:lnSpc>
+              <a:buNone/>
+            </a:pPr>
+            <a:r>
+              <a:rPr lang="en-US" sz="375" dirty="0">
                 <a:solidFill>
                   <a:srgbClr val="3C4043"/>
                 </a:solidFill>
@@ -5596,7 +5596,7 @@
               </a:rPr>
               <a:t>Blocks gs://cymbal-skills-fv</a:t>
             </a:r>
-            <a:endParaRPr lang="en-US" sz="500" dirty="0"/>
+            <a:endParaRPr lang="en-US" sz="435" dirty="0"/>
           </a:p>
         </p:txBody>
       </p:sp>
@@ -5643,8 +5643,8 @@
         </p:blipFill>
         <p:spPr>
           <a:xfrm>
-            <a:off x="4213555" y="2382926"/>
-            <a:ext cx="158191" cy="158191"/>
+            <a:off x="4199839" y="2399386"/>
+            <a:ext cx="123444" cy="123444"/>
           </a:xfrm>
           <a:prstGeom prst="rect">
             <a:avLst/>
@@ -5659,8 +5659,8 @@
         </p:nvSpPr>
         <p:spPr>
           <a:xfrm>
-            <a:off x="4408322" y="2347265"/>
-            <a:ext cx="496519" cy="228600"/>
+            <a:off x="4346143" y="2343607"/>
+            <a:ext cx="581558" cy="235915"/>
           </a:xfrm>
           <a:prstGeom prst="rect">
             <a:avLst/>
@@ -5676,32 +5676,32 @@
           <a:p>
             <a:pPr algn="l" indent="0" marL="0">
               <a:lnSpc>
-                <a:spcPct val="86000"/>
-              </a:lnSpc>
-              <a:buNone/>
-            </a:pPr>
-            <a:r>
-              <a:rPr lang="en-US" sz="500" b="1" dirty="0">
-                <a:solidFill>
-                  <a:srgbClr val="202124"/>
-                </a:solidFill>
-                <a:latin typeface="Arial" pitchFamily="34" charset="0"/>
-                <a:ea typeface="Arial" pitchFamily="34" charset="-122"/>
-                <a:cs typeface="Arial" pitchFamily="34" charset="-120"/>
-              </a:rPr>
-              <a:t>Vector 1: Header Strip</a:t>
-            </a:r>
-            <a:endParaRPr lang="en-US" sz="500" dirty="0"/>
+                <a:spcPct val="88000"/>
+              </a:lnSpc>
+              <a:buNone/>
+            </a:pPr>
+            <a:r>
+              <a:rPr lang="en-US" sz="435" b="1" dirty="0">
+                <a:solidFill>
+                  <a:srgbClr val="202124"/>
+                </a:solidFill>
+                <a:latin typeface="Arial" pitchFamily="34" charset="0"/>
+                <a:ea typeface="Arial" pitchFamily="34" charset="-122"/>
+                <a:cs typeface="Arial" pitchFamily="34" charset="-120"/>
+              </a:rPr>
+              <a:t>Vector 1: Cloud Armor</a:t>
+            </a:r>
+            <a:endParaRPr lang="en-US" sz="435" dirty="0"/>
           </a:p>
           <a:p>
             <a:pPr algn="l" indent="0" marL="0">
               <a:lnSpc>
-                <a:spcPct val="86000"/>
-              </a:lnSpc>
-              <a:buNone/>
-            </a:pPr>
-            <a:r>
-              <a:rPr lang="en-US" sz="430" dirty="0">
+                <a:spcPct val="88000"/>
+              </a:lnSpc>
+              <a:buNone/>
+            </a:pPr>
+            <a:r>
+              <a:rPr lang="en-US" sz="375" dirty="0">
                 <a:solidFill>
                   <a:srgbClr val="3C4043"/>
                 </a:solidFill>
@@ -5709,9 +5709,9 @@
                 <a:ea typeface="Arial" pitchFamily="34" charset="-122"/>
                 <a:cs typeface="Arial" pitchFamily="34" charset="-120"/>
               </a:rPr>
-              <a:t>Drops Forged X-Tenant-ID</a:t>
-            </a:r>
-            <a:endParaRPr lang="en-US" sz="500" dirty="0"/>
+              <a:t>WAF Drops Forged X-Tenant-ID</a:t>
+            </a:r>
+            <a:endParaRPr lang="en-US" sz="435" dirty="0"/>
           </a:p>
         </p:txBody>
       </p:sp>
@@ -5758,8 +5758,8 @@
         </p:blipFill>
         <p:spPr>
           <a:xfrm>
-            <a:off x="4213555" y="2697480"/>
-            <a:ext cx="158191" cy="158191"/>
+            <a:off x="4199839" y="2713939"/>
+            <a:ext cx="123444" cy="123444"/>
           </a:xfrm>
           <a:prstGeom prst="rect">
             <a:avLst/>
@@ -5774,8 +5774,8 @@
         </p:nvSpPr>
         <p:spPr>
           <a:xfrm>
-            <a:off x="4408322" y="2661818"/>
-            <a:ext cx="496519" cy="228600"/>
+            <a:off x="4346143" y="2658161"/>
+            <a:ext cx="581558" cy="235915"/>
           </a:xfrm>
           <a:prstGeom prst="rect">
             <a:avLst/>
@@ -5791,12 +5791,12 @@
           <a:p>
             <a:pPr algn="l" indent="0" marL="0">
               <a:lnSpc>
-                <a:spcPct val="86000"/>
-              </a:lnSpc>
-              <a:buNone/>
-            </a:pPr>
-            <a:r>
-              <a:rPr lang="en-US" sz="500" b="1" dirty="0">
+                <a:spcPct val="88000"/>
+              </a:lnSpc>
+              <a:buNone/>
+            </a:pPr>
+            <a:r>
+              <a:rPr lang="en-US" sz="435" b="1" dirty="0">
                 <a:solidFill>
                   <a:srgbClr val="202124"/>
                 </a:solidFill>
@@ -5806,17 +5806,17 @@
               </a:rPr>
               <a:t>Vector 2: Agent 403</a:t>
             </a:r>
-            <a:endParaRPr lang="en-US" sz="500" dirty="0"/>
+            <a:endParaRPr lang="en-US" sz="435" dirty="0"/>
           </a:p>
           <a:p>
             <a:pPr algn="l" indent="0" marL="0">
               <a:lnSpc>
-                <a:spcPct val="86000"/>
-              </a:lnSpc>
-              <a:buNone/>
-            </a:pPr>
-            <a:r>
-              <a:rPr lang="en-US" sz="430" dirty="0">
+                <a:spcPct val="88000"/>
+              </a:lnSpc>
+              <a:buNone/>
+            </a:pPr>
+            <a:r>
+              <a:rPr lang="en-US" sz="375" dirty="0">
                 <a:solidFill>
                   <a:srgbClr val="3C4043"/>
                 </a:solidFill>
@@ -5826,7 +5826,7 @@
               </a:rPr>
               <a:t>Blocks Retail -&gt; Agent Alpha</a:t>
             </a:r>
-            <a:endParaRPr lang="en-US" sz="500" dirty="0"/>
+            <a:endParaRPr lang="en-US" sz="435" dirty="0"/>
           </a:p>
         </p:txBody>
       </p:sp>
@@ -5873,8 +5873,8 @@
         </p:blipFill>
         <p:spPr>
           <a:xfrm>
-            <a:off x="4243730" y="3065069"/>
-            <a:ext cx="158191" cy="158191"/>
+            <a:off x="4230014" y="3081528"/>
+            <a:ext cx="123444" cy="123444"/>
           </a:xfrm>
           <a:prstGeom prst="rect">
             <a:avLst/>
@@ -5889,8 +5889,8 @@
         </p:nvSpPr>
         <p:spPr>
           <a:xfrm>
-            <a:off x="4438498" y="3029407"/>
-            <a:ext cx="466344" cy="228600"/>
+            <a:off x="4376318" y="3025750"/>
+            <a:ext cx="551383" cy="235915"/>
           </a:xfrm>
           <a:prstGeom prst="rect">
             <a:avLst/>
@@ -5906,12 +5906,12 @@
           <a:p>
             <a:pPr algn="l" indent="0" marL="0">
               <a:lnSpc>
-                <a:spcPct val="86000"/>
-              </a:lnSpc>
-              <a:buNone/>
-            </a:pPr>
-            <a:r>
-              <a:rPr lang="en-US" sz="500" b="1" dirty="0">
+                <a:spcPct val="88000"/>
+              </a:lnSpc>
+              <a:buNone/>
+            </a:pPr>
+            <a:r>
+              <a:rPr lang="en-US" sz="435" b="1" dirty="0">
                 <a:solidFill>
                   <a:srgbClr val="202124"/>
                 </a:solidFill>
@@ -5921,17 +5921,17 @@
               </a:rPr>
               <a:t>Vector 3: Tool Prune</a:t>
             </a:r>
-            <a:endParaRPr lang="en-US" sz="500" dirty="0"/>
+            <a:endParaRPr lang="en-US" sz="435" dirty="0"/>
           </a:p>
           <a:p>
             <a:pPr algn="l" indent="0" marL="0">
               <a:lnSpc>
-                <a:spcPct val="86000"/>
-              </a:lnSpc>
-              <a:buNone/>
-            </a:pPr>
-            <a:r>
-              <a:rPr lang="en-US" sz="430" dirty="0">
+                <a:spcPct val="88000"/>
+              </a:lnSpc>
+              <a:buNone/>
+            </a:pPr>
+            <a:r>
+              <a:rPr lang="en-US" sz="375" dirty="0">
                 <a:solidFill>
                   <a:srgbClr val="3C4043"/>
                 </a:solidFill>
@@ -5941,981 +5941,13 @@
               </a:rPr>
               <a:t>Prunes FinVault Jira MCP</a:t>
             </a:r>
-            <a:endParaRPr lang="en-US" sz="500" dirty="0"/>
-          </a:p>
-        </p:txBody>
-      </p:sp>
-      <p:sp>
-        <p:nvSpPr>
-          <p:cNvPr id="129" name="Text 107"/>
-          <p:cNvSpPr/>
-          <p:nvPr/>
-        </p:nvSpPr>
-        <p:spPr>
-          <a:xfrm>
-            <a:off x="7541057" y="3373222"/>
-            <a:ext cx="546811" cy="161849"/>
-          </a:xfrm>
-          <a:prstGeom prst="rect">
-            <a:avLst/>
-          </a:prstGeom>
-          <a:noFill/>
-          <a:ln/>
-        </p:spPr>
-        <p:txBody>
-          <a:bodyPr wrap="square" lIns="0" tIns="0" rIns="0" bIns="0" rtlCol="0" anchor="ctr">
-            <a:normAutofit/>
-          </a:bodyPr>
-          <a:lstStyle/>
-          <a:p>
-            <a:pPr algn="l" indent="0" marL="0">
-              <a:lnSpc>
-                <a:spcPct val="88000"/>
-              </a:lnSpc>
-              <a:buNone/>
-            </a:pPr>
-            <a:r>
-              <a:rPr lang="en-US" sz="500" b="1" dirty="0">
-                <a:solidFill>
-                  <a:srgbClr val="202124"/>
-                </a:solidFill>
-                <a:latin typeface="Arial" pitchFamily="34" charset="0"/>
-                <a:ea typeface="Arial" pitchFamily="34" charset="-122"/>
-                <a:cs typeface="Arial" pitchFamily="34" charset="-120"/>
-              </a:rPr>
-              <a:t>Real-time security</a:t>
-            </a:r>
-            <a:endParaRPr lang="en-US" sz="500" dirty="0"/>
-          </a:p>
-          <a:p>
-            <a:pPr algn="l" indent="0" marL="0">
-              <a:lnSpc>
-                <a:spcPct val="88000"/>
-              </a:lnSpc>
-              <a:buNone/>
-            </a:pPr>
-            <a:r>
-              <a:rPr lang="en-US" sz="440" dirty="0">
-                <a:solidFill>
-                  <a:srgbClr val="202124"/>
-                </a:solidFill>
-                <a:latin typeface="Arial" pitchFamily="34" charset="0"/>
-                <a:ea typeface="Arial" pitchFamily="34" charset="-122"/>
-                <a:cs typeface="Arial" pitchFamily="34" charset="-120"/>
-              </a:rPr>
-              <a:t>violation spans</a:t>
-            </a:r>
-            <a:endParaRPr lang="en-US" sz="500" dirty="0"/>
-          </a:p>
-        </p:txBody>
-      </p:sp>
-      <p:sp>
-        <p:nvSpPr>
-          <p:cNvPr id="130" name="Text 108"/>
-          <p:cNvSpPr/>
-          <p:nvPr/>
-        </p:nvSpPr>
-        <p:spPr>
-          <a:xfrm>
-            <a:off x="5237683" y="4654296"/>
-            <a:ext cx="591617" cy="124358"/>
-          </a:xfrm>
-          <a:prstGeom prst="rect">
-            <a:avLst/>
-          </a:prstGeom>
-          <a:noFill/>
-          <a:ln/>
-        </p:spPr>
-        <p:txBody>
-          <a:bodyPr wrap="square" lIns="0" tIns="0" rIns="0" bIns="0" rtlCol="0" anchor="ctr">
-            <a:normAutofit/>
-          </a:bodyPr>
-          <a:lstStyle/>
-          <a:p>
-            <a:pPr algn="ctr" indent="0" marL="0">
-              <a:lnSpc>
-                <a:spcPct val="88000"/>
-              </a:lnSpc>
-              <a:buNone/>
-            </a:pPr>
-            <a:r>
-              <a:rPr lang="en-US" sz="500" b="1" dirty="0">
-                <a:solidFill>
-                  <a:srgbClr val="202124"/>
-                </a:solidFill>
-                <a:latin typeface="Arial" pitchFamily="34" charset="0"/>
-                <a:ea typeface="Arial" pitchFamily="34" charset="-122"/>
-                <a:cs typeface="Arial" pitchFamily="34" charset="-120"/>
-              </a:rPr>
-              <a:t>DLP Egress</a:t>
-            </a:r>
-            <a:endParaRPr lang="en-US" sz="500" dirty="0"/>
-          </a:p>
-          <a:p>
-            <a:pPr algn="ctr" indent="0" marL="0">
-              <a:lnSpc>
-                <a:spcPct val="88000"/>
-              </a:lnSpc>
-              <a:buNone/>
-            </a:pPr>
-            <a:r>
-              <a:rPr lang="en-US" sz="440" dirty="0">
-                <a:solidFill>
-                  <a:srgbClr val="202124"/>
-                </a:solidFill>
-                <a:latin typeface="Arial" pitchFamily="34" charset="0"/>
-                <a:ea typeface="Arial" pitchFamily="34" charset="-122"/>
-                <a:cs typeface="Arial" pitchFamily="34" charset="-120"/>
-              </a:rPr>
-              <a:t>Filter</a:t>
-            </a:r>
-            <a:endParaRPr lang="en-US" sz="500" dirty="0"/>
-          </a:p>
-        </p:txBody>
-      </p:sp>
-      <p:sp>
-        <p:nvSpPr>
-          <p:cNvPr id="131" name="Text 109"/>
-          <p:cNvSpPr/>
-          <p:nvPr/>
-        </p:nvSpPr>
-        <p:spPr>
-          <a:xfrm>
-            <a:off x="5237683" y="5201107"/>
-            <a:ext cx="591617" cy="124358"/>
-          </a:xfrm>
-          <a:prstGeom prst="rect">
-            <a:avLst/>
-          </a:prstGeom>
-          <a:noFill/>
-          <a:ln/>
-        </p:spPr>
-        <p:txBody>
-          <a:bodyPr wrap="square" lIns="0" tIns="0" rIns="0" bIns="0" rtlCol="0" anchor="ctr">
-            <a:normAutofit/>
-          </a:bodyPr>
-          <a:lstStyle/>
-          <a:p>
-            <a:pPr algn="ctr" indent="0" marL="0">
-              <a:lnSpc>
-                <a:spcPct val="88000"/>
-              </a:lnSpc>
-              <a:buNone/>
-            </a:pPr>
-            <a:r>
-              <a:rPr lang="en-US" sz="500" b="1" dirty="0">
-                <a:solidFill>
-                  <a:srgbClr val="202124"/>
-                </a:solidFill>
-                <a:latin typeface="Arial" pitchFamily="34" charset="0"/>
-                <a:ea typeface="Arial" pitchFamily="34" charset="-122"/>
-                <a:cs typeface="Arial" pitchFamily="34" charset="-120"/>
-              </a:rPr>
-              <a:t>Zero PII in</a:t>
-            </a:r>
-            <a:endParaRPr lang="en-US" sz="500" dirty="0"/>
-          </a:p>
-          <a:p>
-            <a:pPr algn="ctr" indent="0" marL="0">
-              <a:lnSpc>
-                <a:spcPct val="88000"/>
-              </a:lnSpc>
-              <a:buNone/>
-            </a:pPr>
-            <a:r>
-              <a:rPr lang="en-US" sz="440" dirty="0">
-                <a:solidFill>
-                  <a:srgbClr val="202124"/>
-                </a:solidFill>
-                <a:latin typeface="Arial" pitchFamily="34" charset="0"/>
-                <a:ea typeface="Arial" pitchFamily="34" charset="-122"/>
-                <a:cs typeface="Arial" pitchFamily="34" charset="-120"/>
-              </a:rPr>
-              <a:t>Completion</a:t>
-            </a:r>
-            <a:endParaRPr lang="en-US" sz="500" dirty="0"/>
-          </a:p>
-        </p:txBody>
-      </p:sp>
-      <p:sp>
-        <p:nvSpPr>
-          <p:cNvPr id="132" name="Text 110"/>
-          <p:cNvSpPr/>
-          <p:nvPr/>
-        </p:nvSpPr>
-        <p:spPr>
-          <a:xfrm>
-            <a:off x="7274966" y="4654296"/>
-            <a:ext cx="591617" cy="124358"/>
-          </a:xfrm>
-          <a:prstGeom prst="rect">
-            <a:avLst/>
-          </a:prstGeom>
-          <a:noFill/>
-          <a:ln/>
-        </p:spPr>
-        <p:txBody>
-          <a:bodyPr wrap="square" lIns="0" tIns="0" rIns="0" bIns="0" rtlCol="0" anchor="ctr">
-            <a:normAutofit/>
-          </a:bodyPr>
-          <a:lstStyle/>
-          <a:p>
-            <a:pPr algn="ctr" indent="0" marL="0">
-              <a:lnSpc>
-                <a:spcPct val="88000"/>
-              </a:lnSpc>
-              <a:buNone/>
-            </a:pPr>
-            <a:r>
-              <a:rPr lang="en-US" sz="500" b="1" dirty="0">
-                <a:solidFill>
-                  <a:srgbClr val="202124"/>
-                </a:solidFill>
-                <a:latin typeface="Arial" pitchFamily="34" charset="0"/>
-                <a:ea typeface="Arial" pitchFamily="34" charset="-122"/>
-                <a:cs typeface="Arial" pitchFamily="34" charset="-120"/>
-              </a:rPr>
-              <a:t>Isolated</a:t>
-            </a:r>
-            <a:endParaRPr lang="en-US" sz="500" dirty="0"/>
-          </a:p>
-          <a:p>
-            <a:pPr algn="ctr" indent="0" marL="0">
-              <a:lnSpc>
-                <a:spcPct val="88000"/>
-              </a:lnSpc>
-              <a:buNone/>
-            </a:pPr>
-            <a:r>
-              <a:rPr lang="en-US" sz="440" dirty="0">
-                <a:solidFill>
-                  <a:srgbClr val="202124"/>
-                </a:solidFill>
-                <a:latin typeface="Arial" pitchFamily="34" charset="0"/>
-                <a:ea typeface="Arial" pitchFamily="34" charset="-122"/>
-                <a:cs typeface="Arial" pitchFamily="34" charset="-120"/>
-              </a:rPr>
-              <a:t>Prefix Cache</a:t>
-            </a:r>
-            <a:endParaRPr lang="en-US" sz="500" dirty="0"/>
-          </a:p>
-        </p:txBody>
-      </p:sp>
-      <p:sp>
-        <p:nvSpPr>
-          <p:cNvPr id="133" name="Text 111"/>
-          <p:cNvSpPr/>
-          <p:nvPr/>
-        </p:nvSpPr>
-        <p:spPr>
-          <a:xfrm>
-            <a:off x="7274966" y="5201107"/>
-            <a:ext cx="591617" cy="124358"/>
-          </a:xfrm>
-          <a:prstGeom prst="rect">
-            <a:avLst/>
-          </a:prstGeom>
-          <a:noFill/>
-          <a:ln/>
-        </p:spPr>
-        <p:txBody>
-          <a:bodyPr wrap="square" lIns="0" tIns="0" rIns="0" bIns="0" rtlCol="0" anchor="ctr">
-            <a:normAutofit/>
-          </a:bodyPr>
-          <a:lstStyle/>
-          <a:p>
-            <a:pPr algn="ctr" indent="0" marL="0">
-              <a:lnSpc>
-                <a:spcPct val="88000"/>
-              </a:lnSpc>
-              <a:buNone/>
-            </a:pPr>
-            <a:r>
-              <a:rPr lang="en-US" sz="500" b="1" dirty="0">
-                <a:solidFill>
-                  <a:srgbClr val="202124"/>
-                </a:solidFill>
-                <a:latin typeface="Arial" pitchFamily="34" charset="0"/>
-                <a:ea typeface="Arial" pitchFamily="34" charset="-122"/>
-                <a:cs typeface="Arial" pitchFamily="34" charset="-120"/>
-              </a:rPr>
-              <a:t>SET LOCAL</a:t>
-            </a:r>
-            <a:endParaRPr lang="en-US" sz="500" dirty="0"/>
-          </a:p>
-          <a:p>
-            <a:pPr algn="ctr" indent="0" marL="0">
-              <a:lnSpc>
-                <a:spcPct val="88000"/>
-              </a:lnSpc>
-              <a:buNone/>
-            </a:pPr>
-            <a:r>
-              <a:rPr lang="en-US" sz="440" dirty="0">
-                <a:solidFill>
-                  <a:srgbClr val="202124"/>
-                </a:solidFill>
-                <a:latin typeface="Arial" pitchFamily="34" charset="0"/>
-                <a:ea typeface="Arial" pitchFamily="34" charset="-122"/>
-                <a:cs typeface="Arial" pitchFamily="34" charset="-120"/>
-              </a:rPr>
-              <a:t>current_tenant</a:t>
-            </a:r>
-            <a:endParaRPr lang="en-US" sz="500" dirty="0"/>
-          </a:p>
-        </p:txBody>
-      </p:sp>
-      <p:sp>
-        <p:nvSpPr>
-          <p:cNvPr id="134" name="Text 112"/>
-          <p:cNvSpPr/>
-          <p:nvPr/>
-        </p:nvSpPr>
-        <p:spPr>
-          <a:xfrm>
-            <a:off x="4432097" y="5328209"/>
-            <a:ext cx="509321" cy="131674"/>
-          </a:xfrm>
-          <a:prstGeom prst="rect">
-            <a:avLst/>
-          </a:prstGeom>
-          <a:noFill/>
-          <a:ln/>
-        </p:spPr>
-        <p:txBody>
-          <a:bodyPr wrap="square" lIns="0" tIns="0" rIns="0" bIns="0" rtlCol="0" anchor="ctr">
-            <a:normAutofit/>
-          </a:bodyPr>
-          <a:lstStyle/>
-          <a:p>
-            <a:pPr algn="l" indent="0" marL="0">
-              <a:lnSpc>
-                <a:spcPct val="88000"/>
-              </a:lnSpc>
-              <a:buNone/>
-            </a:pPr>
-            <a:r>
-              <a:rPr lang="en-US" sz="500" b="1" dirty="0">
-                <a:solidFill>
-                  <a:srgbClr val="202124"/>
-                </a:solidFill>
-                <a:latin typeface="Arial" pitchFamily="34" charset="0"/>
-                <a:ea typeface="Arial" pitchFamily="34" charset="-122"/>
-                <a:cs typeface="Arial" pitchFamily="34" charset="-120"/>
-              </a:rPr>
-              <a:t>Evaluate</a:t>
-            </a:r>
-            <a:endParaRPr lang="en-US" sz="500" dirty="0"/>
-          </a:p>
-          <a:p>
-            <a:pPr algn="l" indent="0" marL="0">
-              <a:lnSpc>
-                <a:spcPct val="88000"/>
-              </a:lnSpc>
-              <a:buNone/>
-            </a:pPr>
-            <a:r>
-              <a:rPr lang="en-US" sz="440" dirty="0">
-                <a:solidFill>
-                  <a:srgbClr val="202124"/>
-                </a:solidFill>
-                <a:latin typeface="Arial" pitchFamily="34" charset="0"/>
-                <a:ea typeface="Arial" pitchFamily="34" charset="-122"/>
-                <a:cs typeface="Arial" pitchFamily="34" charset="-120"/>
-              </a:rPr>
-              <a:t>Safety rules</a:t>
-            </a:r>
-            <a:endParaRPr lang="en-US" sz="500" dirty="0"/>
-          </a:p>
-        </p:txBody>
-      </p:sp>
-      <p:sp>
-        <p:nvSpPr>
-          <p:cNvPr id="135" name="Text 113"/>
-          <p:cNvSpPr/>
-          <p:nvPr/>
-        </p:nvSpPr>
-        <p:spPr>
-          <a:xfrm>
-            <a:off x="6282842" y="3396082"/>
-            <a:ext cx="554126" cy="116129"/>
-          </a:xfrm>
-          <a:prstGeom prst="rect">
-            <a:avLst/>
-          </a:prstGeom>
-          <a:noFill/>
-          <a:ln/>
-        </p:spPr>
-        <p:txBody>
-          <a:bodyPr wrap="square" lIns="0" tIns="0" rIns="0" bIns="0" rtlCol="0" anchor="ctr">
-            <a:normAutofit/>
-          </a:bodyPr>
-          <a:lstStyle/>
-          <a:p>
-            <a:pPr algn="l" indent="0" marL="0">
-              <a:lnSpc>
-                <a:spcPct val="88000"/>
-              </a:lnSpc>
-              <a:buNone/>
-            </a:pPr>
-            <a:r>
-              <a:rPr lang="en-US" sz="500" b="1" dirty="0">
-                <a:solidFill>
-                  <a:srgbClr val="202124"/>
-                </a:solidFill>
-                <a:latin typeface="Arial" pitchFamily="34" charset="0"/>
-                <a:ea typeface="Arial" pitchFamily="34" charset="-122"/>
-                <a:cs typeface="Arial" pitchFamily="34" charset="-120"/>
-              </a:rPr>
-              <a:t>Zero cross-tenant</a:t>
-            </a:r>
-            <a:endParaRPr lang="en-US" sz="500" dirty="0"/>
-          </a:p>
-          <a:p>
-            <a:pPr algn="l" indent="0" marL="0">
-              <a:lnSpc>
-                <a:spcPct val="88000"/>
-              </a:lnSpc>
-              <a:buNone/>
-            </a:pPr>
-            <a:r>
-              <a:rPr lang="en-US" sz="440" dirty="0">
-                <a:solidFill>
-                  <a:srgbClr val="202124"/>
-                </a:solidFill>
-                <a:latin typeface="Arial" pitchFamily="34" charset="0"/>
-                <a:ea typeface="Arial" pitchFamily="34" charset="-122"/>
-                <a:cs typeface="Arial" pitchFamily="34" charset="-120"/>
-              </a:rPr>
-              <a:t>data/cache bleed</a:t>
-            </a:r>
-            <a:endParaRPr lang="en-US" sz="500" dirty="0"/>
-          </a:p>
-        </p:txBody>
-      </p:sp>
-      <p:sp>
-        <p:nvSpPr>
-          <p:cNvPr id="136" name="Text 114"/>
-          <p:cNvSpPr/>
-          <p:nvPr/>
-        </p:nvSpPr>
-        <p:spPr>
-          <a:xfrm>
-            <a:off x="5488229" y="3396082"/>
-            <a:ext cx="494690" cy="116129"/>
-          </a:xfrm>
-          <a:prstGeom prst="rect">
-            <a:avLst/>
-          </a:prstGeom>
-          <a:noFill/>
-          <a:ln/>
-        </p:spPr>
-        <p:txBody>
-          <a:bodyPr wrap="square" lIns="0" tIns="0" rIns="0" bIns="0" rtlCol="0" anchor="ctr">
-            <a:normAutofit/>
-          </a:bodyPr>
-          <a:lstStyle/>
-          <a:p>
-            <a:pPr algn="l" indent="0" marL="0">
-              <a:lnSpc>
-                <a:spcPct val="88000"/>
-              </a:lnSpc>
-              <a:buNone/>
-            </a:pPr>
-            <a:r>
-              <a:rPr lang="en-US" sz="500" b="1" dirty="0">
-                <a:solidFill>
-                  <a:srgbClr val="202124"/>
-                </a:solidFill>
-                <a:latin typeface="Arial" pitchFamily="34" charset="0"/>
-                <a:ea typeface="Arial" pitchFamily="34" charset="-122"/>
-                <a:cs typeface="Arial" pitchFamily="34" charset="-120"/>
-              </a:rPr>
-              <a:t>Verified context</a:t>
-            </a:r>
-            <a:endParaRPr lang="en-US" sz="500" dirty="0"/>
-          </a:p>
-          <a:p>
-            <a:pPr algn="l" indent="0" marL="0">
-              <a:lnSpc>
-                <a:spcPct val="88000"/>
-              </a:lnSpc>
-              <a:buNone/>
-            </a:pPr>
-            <a:r>
-              <a:rPr lang="en-US" sz="440" dirty="0">
-                <a:solidFill>
-                  <a:srgbClr val="202124"/>
-                </a:solidFill>
-                <a:latin typeface="Arial" pitchFamily="34" charset="0"/>
-                <a:ea typeface="Arial" pitchFamily="34" charset="-122"/>
-                <a:cs typeface="Arial" pitchFamily="34" charset="-120"/>
-              </a:rPr>
-              <a:t>enters Hop 3–5</a:t>
-            </a:r>
-            <a:endParaRPr lang="en-US" sz="500" dirty="0"/>
-          </a:p>
-        </p:txBody>
-      </p:sp>
-      <p:sp>
-        <p:nvSpPr>
-          <p:cNvPr id="137" name="Text 115"/>
-          <p:cNvSpPr/>
-          <p:nvPr/>
-        </p:nvSpPr>
-        <p:spPr>
-          <a:xfrm>
-            <a:off x="5039258" y="2983687"/>
-            <a:ext cx="502006" cy="109728"/>
-          </a:xfrm>
-          <a:prstGeom prst="rect">
-            <a:avLst/>
-          </a:prstGeom>
-          <a:noFill/>
-          <a:ln/>
-        </p:spPr>
-        <p:txBody>
-          <a:bodyPr wrap="square" lIns="0" tIns="0" rIns="0" bIns="0" rtlCol="0" anchor="ctr">
-            <a:normAutofit/>
-          </a:bodyPr>
-          <a:lstStyle/>
-          <a:p>
-            <a:pPr algn="ctr" indent="0" marL="0">
-              <a:lnSpc>
-                <a:spcPct val="88000"/>
-              </a:lnSpc>
-              <a:buNone/>
-            </a:pPr>
-            <a:r>
-              <a:rPr lang="en-US" sz="500" b="1" dirty="0">
-                <a:solidFill>
-                  <a:srgbClr val="202124"/>
-                </a:solidFill>
-                <a:latin typeface="Arial" pitchFamily="34" charset="0"/>
-                <a:ea typeface="Arial" pitchFamily="34" charset="-122"/>
-                <a:cs typeface="Arial" pitchFamily="34" charset="-120"/>
-              </a:rPr>
-              <a:t>Prune 3LO</a:t>
-            </a:r>
-            <a:endParaRPr lang="en-US" sz="500" dirty="0"/>
-          </a:p>
-          <a:p>
-            <a:pPr algn="ctr" indent="0" marL="0">
-              <a:lnSpc>
-                <a:spcPct val="88000"/>
-              </a:lnSpc>
-              <a:buNone/>
-            </a:pPr>
-            <a:r>
-              <a:rPr lang="en-US" sz="440" dirty="0">
-                <a:solidFill>
-                  <a:srgbClr val="202124"/>
-                </a:solidFill>
-                <a:latin typeface="Arial" pitchFamily="34" charset="0"/>
-                <a:ea typeface="Arial" pitchFamily="34" charset="-122"/>
-                <a:cs typeface="Arial" pitchFamily="34" charset="-120"/>
-              </a:rPr>
-              <a:t>MCP tools</a:t>
-            </a:r>
-            <a:endParaRPr lang="en-US" sz="500" dirty="0"/>
-          </a:p>
-        </p:txBody>
-      </p:sp>
-      <p:sp>
-        <p:nvSpPr>
-          <p:cNvPr id="138" name="Text 116"/>
-          <p:cNvSpPr/>
-          <p:nvPr/>
-        </p:nvSpPr>
-        <p:spPr>
-          <a:xfrm>
-            <a:off x="4432097" y="4459529"/>
-            <a:ext cx="509321" cy="109728"/>
-          </a:xfrm>
-          <a:prstGeom prst="rect">
-            <a:avLst/>
-          </a:prstGeom>
-          <a:noFill/>
-          <a:ln/>
-        </p:spPr>
-        <p:txBody>
-          <a:bodyPr wrap="square" lIns="0" tIns="0" rIns="0" bIns="0" rtlCol="0" anchor="ctr">
-            <a:normAutofit/>
-          </a:bodyPr>
-          <a:lstStyle/>
-          <a:p>
-            <a:pPr algn="l" indent="0" marL="0">
-              <a:lnSpc>
-                <a:spcPct val="88000"/>
-              </a:lnSpc>
-              <a:buNone/>
-            </a:pPr>
-            <a:r>
-              <a:rPr lang="en-US" sz="500" b="1" dirty="0">
-                <a:solidFill>
-                  <a:srgbClr val="202124"/>
-                </a:solidFill>
-                <a:latin typeface="Arial" pitchFamily="34" charset="0"/>
-                <a:ea typeface="Arial" pitchFamily="34" charset="-122"/>
-                <a:cs typeface="Arial" pitchFamily="34" charset="-120"/>
-              </a:rPr>
-              <a:t>Screen prompt</a:t>
-            </a:r>
-            <a:endParaRPr lang="en-US" sz="500" dirty="0"/>
-          </a:p>
-        </p:txBody>
-      </p:sp>
-      <p:sp>
-        <p:nvSpPr>
-          <p:cNvPr id="139" name="Text 117"/>
-          <p:cNvSpPr/>
-          <p:nvPr/>
-        </p:nvSpPr>
-        <p:spPr>
-          <a:xfrm>
-            <a:off x="4432097" y="4639666"/>
-            <a:ext cx="509321" cy="109728"/>
-          </a:xfrm>
-          <a:prstGeom prst="rect">
-            <a:avLst/>
-          </a:prstGeom>
-          <a:noFill/>
-          <a:ln/>
-        </p:spPr>
-        <p:txBody>
-          <a:bodyPr wrap="square" lIns="0" tIns="0" rIns="0" bIns="0" rtlCol="0" anchor="ctr">
-            <a:normAutofit/>
-          </a:bodyPr>
-          <a:lstStyle/>
-          <a:p>
-            <a:pPr algn="l" indent="0" marL="0">
-              <a:lnSpc>
-                <a:spcPct val="88000"/>
-              </a:lnSpc>
-              <a:buNone/>
-            </a:pPr>
-            <a:r>
-              <a:rPr lang="en-US" sz="500" b="1" dirty="0">
-                <a:solidFill>
-                  <a:srgbClr val="202124"/>
-                </a:solidFill>
-                <a:latin typeface="Arial" pitchFamily="34" charset="0"/>
-                <a:ea typeface="Arial" pitchFamily="34" charset="-122"/>
-                <a:cs typeface="Arial" pitchFamily="34" charset="-120"/>
-              </a:rPr>
-              <a:t>Redact PII</a:t>
-            </a:r>
-            <a:endParaRPr lang="en-US" sz="500" dirty="0"/>
-          </a:p>
-        </p:txBody>
-      </p:sp>
-      <p:sp>
-        <p:nvSpPr>
-          <p:cNvPr id="140" name="Text 118"/>
-          <p:cNvSpPr/>
-          <p:nvPr/>
-        </p:nvSpPr>
-        <p:spPr>
-          <a:xfrm>
-            <a:off x="5016398" y="2302459"/>
-            <a:ext cx="344729" cy="109728"/>
-          </a:xfrm>
-          <a:prstGeom prst="rect">
-            <a:avLst/>
-          </a:prstGeom>
-          <a:noFill/>
-          <a:ln/>
-        </p:spPr>
-        <p:txBody>
-          <a:bodyPr wrap="square" lIns="0" tIns="0" rIns="0" bIns="0" rtlCol="0" anchor="ctr">
-            <a:normAutofit/>
-          </a:bodyPr>
-          <a:lstStyle/>
-          <a:p>
-            <a:pPr algn="ctr" indent="0" marL="0">
-              <a:lnSpc>
-                <a:spcPct val="88000"/>
-              </a:lnSpc>
-              <a:buNone/>
-            </a:pPr>
-            <a:r>
-              <a:rPr lang="en-US" sz="500" b="1" dirty="0">
-                <a:solidFill>
-                  <a:srgbClr val="202124"/>
-                </a:solidFill>
-                <a:latin typeface="Arial" pitchFamily="34" charset="0"/>
-                <a:ea typeface="Arial" pitchFamily="34" charset="-122"/>
-                <a:cs typeface="Arial" pitchFamily="34" charset="-120"/>
-              </a:rPr>
-              <a:t>Strip spoofed</a:t>
-            </a:r>
-            <a:endParaRPr lang="en-US" sz="500" dirty="0"/>
-          </a:p>
-          <a:p>
-            <a:pPr algn="ctr" indent="0" marL="0">
-              <a:lnSpc>
-                <a:spcPct val="88000"/>
-              </a:lnSpc>
-              <a:buNone/>
-            </a:pPr>
-            <a:r>
-              <a:rPr lang="en-US" sz="440" dirty="0">
-                <a:solidFill>
-                  <a:srgbClr val="202124"/>
-                </a:solidFill>
-                <a:latin typeface="Arial" pitchFamily="34" charset="0"/>
-                <a:ea typeface="Arial" pitchFamily="34" charset="-122"/>
-                <a:cs typeface="Arial" pitchFamily="34" charset="-120"/>
-              </a:rPr>
-              <a:t>header</a:t>
-            </a:r>
-            <a:endParaRPr lang="en-US" sz="500" dirty="0"/>
-          </a:p>
-        </p:txBody>
-      </p:sp>
-      <p:sp>
-        <p:nvSpPr>
-          <p:cNvPr id="141" name="Text 119"/>
-          <p:cNvSpPr/>
-          <p:nvPr/>
-        </p:nvSpPr>
-        <p:spPr>
-          <a:xfrm>
-            <a:off x="5016398" y="2819095"/>
-            <a:ext cx="344729" cy="109728"/>
-          </a:xfrm>
-          <a:prstGeom prst="rect">
-            <a:avLst/>
-          </a:prstGeom>
-          <a:noFill/>
-          <a:ln/>
-        </p:spPr>
-        <p:txBody>
-          <a:bodyPr wrap="square" lIns="0" tIns="0" rIns="0" bIns="0" rtlCol="0" anchor="ctr">
-            <a:normAutofit/>
-          </a:bodyPr>
-          <a:lstStyle/>
-          <a:p>
-            <a:pPr algn="ctr" indent="0" marL="0">
-              <a:lnSpc>
-                <a:spcPct val="88000"/>
-              </a:lnSpc>
-              <a:buNone/>
-            </a:pPr>
-            <a:r>
-              <a:rPr lang="en-US" sz="500" b="1" dirty="0">
-                <a:solidFill>
-                  <a:srgbClr val="202124"/>
-                </a:solidFill>
-                <a:latin typeface="Arial" pitchFamily="34" charset="0"/>
-                <a:ea typeface="Arial" pitchFamily="34" charset="-122"/>
-                <a:cs typeface="Arial" pitchFamily="34" charset="-120"/>
-              </a:rPr>
-              <a:t>Return HTTP</a:t>
-            </a:r>
-            <a:endParaRPr lang="en-US" sz="500" dirty="0"/>
-          </a:p>
-          <a:p>
-            <a:pPr algn="ctr" indent="0" marL="0">
-              <a:lnSpc>
-                <a:spcPct val="88000"/>
-              </a:lnSpc>
-              <a:buNone/>
-            </a:pPr>
-            <a:r>
-              <a:rPr lang="en-US" sz="440" dirty="0">
-                <a:solidFill>
-                  <a:srgbClr val="202124"/>
-                </a:solidFill>
-                <a:latin typeface="Arial" pitchFamily="34" charset="0"/>
-                <a:ea typeface="Arial" pitchFamily="34" charset="-122"/>
-                <a:cs typeface="Arial" pitchFamily="34" charset="-120"/>
-              </a:rPr>
-              <a:t>403 Forbidden</a:t>
-            </a:r>
-            <a:endParaRPr lang="en-US" sz="500" dirty="0"/>
-          </a:p>
-        </p:txBody>
-      </p:sp>
-      <p:sp>
-        <p:nvSpPr>
-          <p:cNvPr id="142" name="Text 120"/>
-          <p:cNvSpPr/>
-          <p:nvPr/>
-        </p:nvSpPr>
-        <p:spPr>
-          <a:xfrm>
-            <a:off x="6267298" y="1478585"/>
-            <a:ext cx="299923" cy="109728"/>
-          </a:xfrm>
-          <a:prstGeom prst="rect">
-            <a:avLst/>
-          </a:prstGeom>
-          <a:noFill/>
-          <a:ln/>
-        </p:spPr>
-        <p:txBody>
-          <a:bodyPr wrap="square" lIns="0" tIns="0" rIns="0" bIns="0" rtlCol="0" anchor="ctr">
-            <a:normAutofit/>
-          </a:bodyPr>
-          <a:lstStyle/>
-          <a:p>
-            <a:pPr algn="l" indent="0" marL="0">
-              <a:lnSpc>
-                <a:spcPct val="88000"/>
-              </a:lnSpc>
-              <a:buNone/>
-            </a:pPr>
-            <a:r>
-              <a:rPr lang="en-US" sz="500" b="1" dirty="0">
-                <a:solidFill>
-                  <a:srgbClr val="202124"/>
-                </a:solidFill>
-                <a:latin typeface="Arial" pitchFamily="34" charset="0"/>
-                <a:ea typeface="Arial" pitchFamily="34" charset="-122"/>
-                <a:cs typeface="Arial" pitchFamily="34" charset="-120"/>
-              </a:rPr>
-              <a:t>Blocked / Safe</a:t>
-            </a:r>
-            <a:endParaRPr lang="en-US" sz="500" dirty="0"/>
-          </a:p>
-        </p:txBody>
-      </p:sp>
-      <p:sp>
-        <p:nvSpPr>
-          <p:cNvPr id="143" name="Text 121"/>
-          <p:cNvSpPr/>
-          <p:nvPr/>
-        </p:nvSpPr>
-        <p:spPr>
-          <a:xfrm>
-            <a:off x="6267298" y="2838298"/>
-            <a:ext cx="299923" cy="109728"/>
-          </a:xfrm>
-          <a:prstGeom prst="rect">
-            <a:avLst/>
-          </a:prstGeom>
-          <a:noFill/>
-          <a:ln/>
-        </p:spPr>
-        <p:txBody>
-          <a:bodyPr wrap="square" lIns="0" tIns="0" rIns="0" bIns="0" rtlCol="0" anchor="ctr">
-            <a:normAutofit/>
-          </a:bodyPr>
-          <a:lstStyle/>
-          <a:p>
-            <a:pPr algn="l" indent="0" marL="0">
-              <a:lnSpc>
-                <a:spcPct val="88000"/>
-              </a:lnSpc>
-              <a:buNone/>
-            </a:pPr>
-            <a:r>
-              <a:rPr lang="en-US" sz="500" b="1" dirty="0">
-                <a:solidFill>
-                  <a:srgbClr val="202124"/>
-                </a:solidFill>
-                <a:latin typeface="Arial" pitchFamily="34" charset="0"/>
-                <a:ea typeface="Arial" pitchFamily="34" charset="-122"/>
-                <a:cs typeface="Arial" pitchFamily="34" charset="-120"/>
-              </a:rPr>
-              <a:t>403 / 200</a:t>
-            </a:r>
-            <a:endParaRPr lang="en-US" sz="500" dirty="0"/>
-          </a:p>
-        </p:txBody>
-      </p:sp>
-      <p:sp>
-        <p:nvSpPr>
-          <p:cNvPr id="144" name="Text 122"/>
-          <p:cNvSpPr/>
-          <p:nvPr/>
-        </p:nvSpPr>
-        <p:spPr>
-          <a:xfrm>
-            <a:off x="5578754" y="1478585"/>
-            <a:ext cx="262433" cy="109728"/>
-          </a:xfrm>
-          <a:prstGeom prst="rect">
-            <a:avLst/>
-          </a:prstGeom>
-          <a:noFill/>
-          <a:ln/>
-        </p:spPr>
-        <p:txBody>
-          <a:bodyPr wrap="square" lIns="0" tIns="0" rIns="0" bIns="0" rtlCol="0" anchor="ctr">
-            <a:normAutofit/>
-          </a:bodyPr>
-          <a:lstStyle/>
-          <a:p>
-            <a:pPr algn="r" indent="0" marL="0">
-              <a:lnSpc>
-                <a:spcPct val="88000"/>
-              </a:lnSpc>
-              <a:buNone/>
-            </a:pPr>
-            <a:r>
-              <a:rPr lang="en-US" sz="500" b="1" dirty="0">
-                <a:solidFill>
-                  <a:srgbClr val="202124"/>
-                </a:solidFill>
-                <a:latin typeface="Arial" pitchFamily="34" charset="0"/>
-                <a:ea typeface="Arial" pitchFamily="34" charset="-122"/>
-                <a:cs typeface="Arial" pitchFamily="34" charset="-120"/>
-              </a:rPr>
-              <a:t>Attack Probe</a:t>
-            </a:r>
-            <a:endParaRPr lang="en-US" sz="500" dirty="0"/>
-          </a:p>
-        </p:txBody>
-      </p:sp>
-      <p:sp>
-        <p:nvSpPr>
-          <p:cNvPr id="145" name="Text 123"/>
-          <p:cNvSpPr/>
-          <p:nvPr/>
-        </p:nvSpPr>
-        <p:spPr>
-          <a:xfrm>
-            <a:off x="5578754" y="2838298"/>
-            <a:ext cx="262433" cy="109728"/>
-          </a:xfrm>
-          <a:prstGeom prst="rect">
-            <a:avLst/>
-          </a:prstGeom>
-          <a:noFill/>
-          <a:ln/>
-        </p:spPr>
-        <p:txBody>
-          <a:bodyPr wrap="square" lIns="0" tIns="0" rIns="0" bIns="0" rtlCol="0" anchor="ctr">
-            <a:normAutofit/>
-          </a:bodyPr>
-          <a:lstStyle/>
-          <a:p>
-            <a:pPr algn="r" indent="0" marL="0">
-              <a:lnSpc>
-                <a:spcPct val="88000"/>
-              </a:lnSpc>
-              <a:buNone/>
-            </a:pPr>
-            <a:r>
-              <a:rPr lang="en-US" sz="500" b="1" dirty="0">
-                <a:solidFill>
-                  <a:srgbClr val="202124"/>
-                </a:solidFill>
-                <a:latin typeface="Arial" pitchFamily="34" charset="0"/>
-                <a:ea typeface="Arial" pitchFamily="34" charset="-122"/>
-                <a:cs typeface="Arial" pitchFamily="34" charset="-120"/>
-              </a:rPr>
-              <a:t>Probe</a:t>
-            </a:r>
-            <a:endParaRPr lang="en-US" sz="500" dirty="0"/>
-          </a:p>
-        </p:txBody>
-      </p:sp>
-      <p:sp>
-        <p:nvSpPr>
-          <p:cNvPr id="146" name="Shape 124"/>
+            <a:endParaRPr lang="en-US" sz="435" dirty="0"/>
+          </a:p>
+        </p:txBody>
+      </p:sp>
+      <p:sp>
+        <p:nvSpPr>
+          <p:cNvPr id="129" name="Shape 107"/>
           <p:cNvSpPr/>
           <p:nvPr/>
         </p:nvSpPr>
@@ -6940,7 +5972,7 @@
       </p:sp>
       <p:sp>
         <p:nvSpPr>
-          <p:cNvPr id="147" name="Text 125"/>
+          <p:cNvPr id="130" name="Text 108"/>
           <p:cNvSpPr/>
           <p:nvPr/>
         </p:nvSpPr>
@@ -6979,7 +6011,7 @@
       </p:sp>
       <p:sp>
         <p:nvSpPr>
-          <p:cNvPr id="148" name="Shape 126"/>
+          <p:cNvPr id="131" name="Shape 109"/>
           <p:cNvSpPr/>
           <p:nvPr/>
         </p:nvSpPr>
@@ -7004,7 +6036,7 @@
       </p:sp>
       <p:sp>
         <p:nvSpPr>
-          <p:cNvPr id="149" name="Text 127"/>
+          <p:cNvPr id="132" name="Text 110"/>
           <p:cNvSpPr/>
           <p:nvPr/>
         </p:nvSpPr>
@@ -7043,7 +6075,7 @@
       </p:sp>
       <p:sp>
         <p:nvSpPr>
-          <p:cNvPr id="150" name="Shape 128"/>
+          <p:cNvPr id="133" name="Shape 111"/>
           <p:cNvSpPr/>
           <p:nvPr/>
         </p:nvSpPr>
@@ -7068,7 +6100,7 @@
       </p:sp>
       <p:sp>
         <p:nvSpPr>
-          <p:cNvPr id="151" name="Text 129"/>
+          <p:cNvPr id="134" name="Text 112"/>
           <p:cNvSpPr/>
           <p:nvPr/>
         </p:nvSpPr>
@@ -7107,7 +6139,7 @@
       </p:sp>
       <p:sp>
         <p:nvSpPr>
-          <p:cNvPr id="152" name="Shape 130"/>
+          <p:cNvPr id="135" name="Shape 113"/>
           <p:cNvSpPr/>
           <p:nvPr/>
         </p:nvSpPr>
@@ -7132,7 +6164,7 @@
       </p:sp>
       <p:sp>
         <p:nvSpPr>
-          <p:cNvPr id="153" name="Text 131"/>
+          <p:cNvPr id="136" name="Text 114"/>
           <p:cNvSpPr/>
           <p:nvPr/>
         </p:nvSpPr>
@@ -7171,7 +6203,7 @@
       </p:sp>
       <p:sp>
         <p:nvSpPr>
-          <p:cNvPr id="154" name="Shape 132"/>
+          <p:cNvPr id="137" name="Shape 115"/>
           <p:cNvSpPr/>
           <p:nvPr/>
         </p:nvSpPr>
@@ -7196,7 +6228,7 @@
       </p:sp>
       <p:sp>
         <p:nvSpPr>
-          <p:cNvPr id="155" name="Text 133"/>
+          <p:cNvPr id="138" name="Text 116"/>
           <p:cNvSpPr/>
           <p:nvPr/>
         </p:nvSpPr>
@@ -7235,7 +6267,7 @@
       </p:sp>
       <p:sp>
         <p:nvSpPr>
-          <p:cNvPr id="156" name="Shape 134"/>
+          <p:cNvPr id="139" name="Shape 117"/>
           <p:cNvSpPr/>
           <p:nvPr/>
         </p:nvSpPr>
@@ -7260,7 +6292,7 @@
       </p:sp>
       <p:sp>
         <p:nvSpPr>
-          <p:cNvPr id="157" name="Text 135"/>
+          <p:cNvPr id="140" name="Text 118"/>
           <p:cNvSpPr/>
           <p:nvPr/>
         </p:nvSpPr>
@@ -7299,7 +6331,7 @@
       </p:sp>
       <p:sp>
         <p:nvSpPr>
-          <p:cNvPr id="158" name="Shape 136"/>
+          <p:cNvPr id="141" name="Shape 119"/>
           <p:cNvSpPr/>
           <p:nvPr/>
         </p:nvSpPr>
@@ -7324,7 +6356,7 @@
       </p:sp>
       <p:sp>
         <p:nvSpPr>
-          <p:cNvPr id="159" name="Text 137"/>
+          <p:cNvPr id="142" name="Text 120"/>
           <p:cNvSpPr/>
           <p:nvPr/>
         </p:nvSpPr>
@@ -7363,7 +6395,7 @@
       </p:sp>
       <p:sp>
         <p:nvSpPr>
-          <p:cNvPr id="160" name="Shape 138"/>
+          <p:cNvPr id="143" name="Shape 121"/>
           <p:cNvSpPr/>
           <p:nvPr/>
         </p:nvSpPr>
@@ -7388,7 +6420,7 @@
       </p:sp>
       <p:sp>
         <p:nvSpPr>
-          <p:cNvPr id="161" name="Text 139"/>
+          <p:cNvPr id="144" name="Text 122"/>
           <p:cNvSpPr/>
           <p:nvPr/>
         </p:nvSpPr>
@@ -7427,7 +6459,7 @@
       </p:sp>
       <p:sp>
         <p:nvSpPr>
-          <p:cNvPr id="162" name="Shape 140"/>
+          <p:cNvPr id="145" name="Shape 123"/>
           <p:cNvSpPr/>
           <p:nvPr/>
         </p:nvSpPr>
@@ -7452,7 +6484,7 @@
       </p:sp>
       <p:sp>
         <p:nvSpPr>
-          <p:cNvPr id="163" name="Text 141"/>
+          <p:cNvPr id="146" name="Text 124"/>
           <p:cNvSpPr/>
           <p:nvPr/>
         </p:nvSpPr>
@@ -7486,6 +6518,805 @@
               <a:t>5</a:t>
             </a:r>
             <a:endParaRPr lang="en-US" sz="620" dirty="0"/>
+          </a:p>
+        </p:txBody>
+      </p:sp>
+      <p:sp>
+        <p:nvSpPr>
+          <p:cNvPr id="147" name="Text 125"/>
+          <p:cNvSpPr/>
+          <p:nvPr/>
+        </p:nvSpPr>
+        <p:spPr>
+          <a:xfrm>
+            <a:off x="7416698" y="3397910"/>
+            <a:ext cx="786384" cy="114300"/>
+          </a:xfrm>
+          <a:prstGeom prst="roundRect">
+            <a:avLst>
+              <a:gd name="adj" fmla="val 24000"/>
+            </a:avLst>
+          </a:prstGeom>
+          <a:solidFill>
+            <a:srgbClr val="FFFFFF"/>
+          </a:solidFill>
+          <a:ln w="5080">
+            <a:solidFill>
+              <a:srgbClr val="DADCE0"/>
+            </a:solidFill>
+          </a:ln>
+        </p:spPr>
+        <p:txBody>
+          <a:bodyPr wrap="square" lIns="0" tIns="0" rIns="0" bIns="0" rtlCol="0" anchor="ctr"/>
+          <a:lstStyle/>
+          <a:p>
+            <a:pPr algn="ctr" indent="0" marL="0">
+              <a:buNone/>
+            </a:pPr>
+            <a:r>
+              <a:rPr lang="en-US" sz="420" b="1" dirty="0">
+                <a:solidFill>
+                  <a:srgbClr val="202124"/>
+                </a:solidFill>
+                <a:latin typeface="Arial" pitchFamily="34" charset="0"/>
+                <a:ea typeface="Arial" pitchFamily="34" charset="-122"/>
+                <a:cs typeface="Arial" pitchFamily="34" charset="-120"/>
+              </a:rPr>
+              <a:t>Real-time security violation spans</a:t>
+            </a:r>
+            <a:endParaRPr lang="en-US" sz="420" dirty="0"/>
+          </a:p>
+        </p:txBody>
+      </p:sp>
+      <p:sp>
+        <p:nvSpPr>
+          <p:cNvPr id="148" name="Text 126"/>
+          <p:cNvSpPr/>
+          <p:nvPr/>
+        </p:nvSpPr>
+        <p:spPr>
+          <a:xfrm>
+            <a:off x="5282489" y="4659782"/>
+            <a:ext cx="492862" cy="114300"/>
+          </a:xfrm>
+          <a:prstGeom prst="roundRect">
+            <a:avLst>
+              <a:gd name="adj" fmla="val 24000"/>
+            </a:avLst>
+          </a:prstGeom>
+          <a:solidFill>
+            <a:srgbClr val="FFFFFF"/>
+          </a:solidFill>
+          <a:ln w="5080">
+            <a:solidFill>
+              <a:srgbClr val="DADCE0"/>
+            </a:solidFill>
+          </a:ln>
+        </p:spPr>
+        <p:txBody>
+          <a:bodyPr wrap="square" lIns="0" tIns="0" rIns="0" bIns="0" rtlCol="0" anchor="ctr"/>
+          <a:lstStyle/>
+          <a:p>
+            <a:pPr algn="ctr" indent="0" marL="0">
+              <a:buNone/>
+            </a:pPr>
+            <a:r>
+              <a:rPr lang="en-US" sz="420" b="1" dirty="0">
+                <a:solidFill>
+                  <a:srgbClr val="202124"/>
+                </a:solidFill>
+                <a:latin typeface="Arial" pitchFamily="34" charset="0"/>
+                <a:ea typeface="Arial" pitchFamily="34" charset="-122"/>
+                <a:cs typeface="Arial" pitchFamily="34" charset="-120"/>
+              </a:rPr>
+              <a:t>DLP Egress Filter</a:t>
+            </a:r>
+            <a:endParaRPr lang="en-US" sz="420" dirty="0"/>
+          </a:p>
+        </p:txBody>
+      </p:sp>
+      <p:sp>
+        <p:nvSpPr>
+          <p:cNvPr id="149" name="Text 127"/>
+          <p:cNvSpPr/>
+          <p:nvPr/>
+        </p:nvSpPr>
+        <p:spPr>
+          <a:xfrm>
+            <a:off x="5221224" y="5206594"/>
+            <a:ext cx="616306" cy="114300"/>
+          </a:xfrm>
+          <a:prstGeom prst="roundRect">
+            <a:avLst>
+              <a:gd name="adj" fmla="val 24000"/>
+            </a:avLst>
+          </a:prstGeom>
+          <a:solidFill>
+            <a:srgbClr val="FFFFFF"/>
+          </a:solidFill>
+          <a:ln w="5080">
+            <a:solidFill>
+              <a:srgbClr val="DADCE0"/>
+            </a:solidFill>
+          </a:ln>
+        </p:spPr>
+        <p:txBody>
+          <a:bodyPr wrap="square" lIns="0" tIns="0" rIns="0" bIns="0" rtlCol="0" anchor="ctr"/>
+          <a:lstStyle/>
+          <a:p>
+            <a:pPr algn="ctr" indent="0" marL="0">
+              <a:buNone/>
+            </a:pPr>
+            <a:r>
+              <a:rPr lang="en-US" sz="420" b="1" dirty="0">
+                <a:solidFill>
+                  <a:srgbClr val="202124"/>
+                </a:solidFill>
+                <a:latin typeface="Arial" pitchFamily="34" charset="0"/>
+                <a:ea typeface="Arial" pitchFamily="34" charset="-122"/>
+                <a:cs typeface="Arial" pitchFamily="34" charset="-120"/>
+              </a:rPr>
+              <a:t>Zero PII in Completion</a:t>
+            </a:r>
+            <a:endParaRPr lang="en-US" sz="420" dirty="0"/>
+          </a:p>
+        </p:txBody>
+      </p:sp>
+      <p:sp>
+        <p:nvSpPr>
+          <p:cNvPr id="150" name="Text 128"/>
+          <p:cNvSpPr/>
+          <p:nvPr/>
+        </p:nvSpPr>
+        <p:spPr>
+          <a:xfrm>
+            <a:off x="7271309" y="4659782"/>
+            <a:ext cx="591617" cy="114300"/>
+          </a:xfrm>
+          <a:prstGeom prst="roundRect">
+            <a:avLst>
+              <a:gd name="adj" fmla="val 24000"/>
+            </a:avLst>
+          </a:prstGeom>
+          <a:solidFill>
+            <a:srgbClr val="FFFFFF"/>
+          </a:solidFill>
+          <a:ln w="5080">
+            <a:solidFill>
+              <a:srgbClr val="DADCE0"/>
+            </a:solidFill>
+          </a:ln>
+        </p:spPr>
+        <p:txBody>
+          <a:bodyPr wrap="square" lIns="0" tIns="0" rIns="0" bIns="0" rtlCol="0" anchor="ctr"/>
+          <a:lstStyle/>
+          <a:p>
+            <a:pPr algn="ctr" indent="0" marL="0">
+              <a:buNone/>
+            </a:pPr>
+            <a:r>
+              <a:rPr lang="en-US" sz="420" b="1" dirty="0">
+                <a:solidFill>
+                  <a:srgbClr val="202124"/>
+                </a:solidFill>
+                <a:latin typeface="Arial" pitchFamily="34" charset="0"/>
+                <a:ea typeface="Arial" pitchFamily="34" charset="-122"/>
+                <a:cs typeface="Arial" pitchFamily="34" charset="-120"/>
+              </a:rPr>
+              <a:t>Isolated Prefix Cache</a:t>
+            </a:r>
+            <a:endParaRPr lang="en-US" sz="420" dirty="0"/>
+          </a:p>
+        </p:txBody>
+      </p:sp>
+      <p:sp>
+        <p:nvSpPr>
+          <p:cNvPr id="151" name="Text 129"/>
+          <p:cNvSpPr/>
+          <p:nvPr/>
+        </p:nvSpPr>
+        <p:spPr>
+          <a:xfrm>
+            <a:off x="7233818" y="5206594"/>
+            <a:ext cx="665683" cy="114300"/>
+          </a:xfrm>
+          <a:prstGeom prst="roundRect">
+            <a:avLst>
+              <a:gd name="adj" fmla="val 24000"/>
+            </a:avLst>
+          </a:prstGeom>
+          <a:solidFill>
+            <a:srgbClr val="FFFFFF"/>
+          </a:solidFill>
+          <a:ln w="5080">
+            <a:solidFill>
+              <a:srgbClr val="DADCE0"/>
+            </a:solidFill>
+          </a:ln>
+        </p:spPr>
+        <p:txBody>
+          <a:bodyPr wrap="square" lIns="0" tIns="0" rIns="0" bIns="0" rtlCol="0" anchor="ctr"/>
+          <a:lstStyle/>
+          <a:p>
+            <a:pPr algn="ctr" indent="0" marL="0">
+              <a:buNone/>
+            </a:pPr>
+            <a:r>
+              <a:rPr lang="en-US" sz="420" b="1" dirty="0">
+                <a:solidFill>
+                  <a:srgbClr val="202124"/>
+                </a:solidFill>
+                <a:latin typeface="Arial" pitchFamily="34" charset="0"/>
+                <a:ea typeface="Arial" pitchFamily="34" charset="-122"/>
+                <a:cs typeface="Arial" pitchFamily="34" charset="-120"/>
+              </a:rPr>
+              <a:t>SET LOCAL current_tenant</a:t>
+            </a:r>
+            <a:endParaRPr lang="en-US" sz="420" dirty="0"/>
+          </a:p>
+        </p:txBody>
+      </p:sp>
+      <p:sp>
+        <p:nvSpPr>
+          <p:cNvPr id="152" name="Text 130"/>
+          <p:cNvSpPr/>
+          <p:nvPr/>
+        </p:nvSpPr>
+        <p:spPr>
+          <a:xfrm>
+            <a:off x="4387291" y="5337353"/>
+            <a:ext cx="591617" cy="114300"/>
+          </a:xfrm>
+          <a:prstGeom prst="roundRect">
+            <a:avLst>
+              <a:gd name="adj" fmla="val 24000"/>
+            </a:avLst>
+          </a:prstGeom>
+          <a:solidFill>
+            <a:srgbClr val="FFFFFF"/>
+          </a:solidFill>
+          <a:ln w="5080">
+            <a:solidFill>
+              <a:srgbClr val="DADCE0"/>
+            </a:solidFill>
+          </a:ln>
+        </p:spPr>
+        <p:txBody>
+          <a:bodyPr wrap="square" lIns="0" tIns="0" rIns="0" bIns="0" rtlCol="0" anchor="ctr"/>
+          <a:lstStyle/>
+          <a:p>
+            <a:pPr algn="ctr" indent="0" marL="0">
+              <a:buNone/>
+            </a:pPr>
+            <a:r>
+              <a:rPr lang="en-US" sz="420" b="1" dirty="0">
+                <a:solidFill>
+                  <a:srgbClr val="202124"/>
+                </a:solidFill>
+                <a:latin typeface="Arial" pitchFamily="34" charset="0"/>
+                <a:ea typeface="Arial" pitchFamily="34" charset="-122"/>
+                <a:cs typeface="Arial" pitchFamily="34" charset="-120"/>
+              </a:rPr>
+              <a:t>Evaluate Safety rules</a:t>
+            </a:r>
+            <a:endParaRPr lang="en-US" sz="420" dirty="0"/>
+          </a:p>
+        </p:txBody>
+      </p:sp>
+      <p:sp>
+        <p:nvSpPr>
+          <p:cNvPr id="153" name="Text 131"/>
+          <p:cNvSpPr/>
+          <p:nvPr/>
+        </p:nvSpPr>
+        <p:spPr>
+          <a:xfrm>
+            <a:off x="6326734" y="3397910"/>
+            <a:ext cx="786384" cy="114300"/>
+          </a:xfrm>
+          <a:prstGeom prst="roundRect">
+            <a:avLst>
+              <a:gd name="adj" fmla="val 24000"/>
+            </a:avLst>
+          </a:prstGeom>
+          <a:solidFill>
+            <a:srgbClr val="FFFFFF"/>
+          </a:solidFill>
+          <a:ln w="5080">
+            <a:solidFill>
+              <a:srgbClr val="DADCE0"/>
+            </a:solidFill>
+          </a:ln>
+        </p:spPr>
+        <p:txBody>
+          <a:bodyPr wrap="square" lIns="0" tIns="0" rIns="0" bIns="0" rtlCol="0" anchor="ctr"/>
+          <a:lstStyle/>
+          <a:p>
+            <a:pPr algn="ctr" indent="0" marL="0">
+              <a:buNone/>
+            </a:pPr>
+            <a:r>
+              <a:rPr lang="en-US" sz="420" b="1" dirty="0">
+                <a:solidFill>
+                  <a:srgbClr val="202124"/>
+                </a:solidFill>
+                <a:latin typeface="Arial" pitchFamily="34" charset="0"/>
+                <a:ea typeface="Arial" pitchFamily="34" charset="-122"/>
+                <a:cs typeface="Arial" pitchFamily="34" charset="-120"/>
+              </a:rPr>
+              <a:t>Zero cross-tenant data/cache bleed</a:t>
+            </a:r>
+            <a:endParaRPr lang="en-US" sz="420" dirty="0"/>
+          </a:p>
+        </p:txBody>
+      </p:sp>
+      <p:sp>
+        <p:nvSpPr>
+          <p:cNvPr id="154" name="Text 132"/>
+          <p:cNvSpPr/>
+          <p:nvPr/>
+        </p:nvSpPr>
+        <p:spPr>
+          <a:xfrm>
+            <a:off x="5338267" y="3397910"/>
+            <a:ext cx="786384" cy="114300"/>
+          </a:xfrm>
+          <a:prstGeom prst="roundRect">
+            <a:avLst>
+              <a:gd name="adj" fmla="val 24000"/>
+            </a:avLst>
+          </a:prstGeom>
+          <a:solidFill>
+            <a:srgbClr val="FFFFFF"/>
+          </a:solidFill>
+          <a:ln w="5080">
+            <a:solidFill>
+              <a:srgbClr val="DADCE0"/>
+            </a:solidFill>
+          </a:ln>
+        </p:spPr>
+        <p:txBody>
+          <a:bodyPr wrap="square" lIns="0" tIns="0" rIns="0" bIns="0" rtlCol="0" anchor="ctr"/>
+          <a:lstStyle/>
+          <a:p>
+            <a:pPr algn="ctr" indent="0" marL="0">
+              <a:buNone/>
+            </a:pPr>
+            <a:r>
+              <a:rPr lang="en-US" sz="420" b="1" dirty="0">
+                <a:solidFill>
+                  <a:srgbClr val="202124"/>
+                </a:solidFill>
+                <a:latin typeface="Arial" pitchFamily="34" charset="0"/>
+                <a:ea typeface="Arial" pitchFamily="34" charset="-122"/>
+                <a:cs typeface="Arial" pitchFamily="34" charset="-120"/>
+              </a:rPr>
+              <a:t>Verified context enters Hop 3–5</a:t>
+            </a:r>
+            <a:endParaRPr lang="en-US" sz="420" dirty="0"/>
+          </a:p>
+        </p:txBody>
+      </p:sp>
+      <p:sp>
+        <p:nvSpPr>
+          <p:cNvPr id="155" name="Text 133"/>
+          <p:cNvSpPr/>
+          <p:nvPr/>
+        </p:nvSpPr>
+        <p:spPr>
+          <a:xfrm>
+            <a:off x="5014570" y="2980944"/>
+            <a:ext cx="542239" cy="114300"/>
+          </a:xfrm>
+          <a:prstGeom prst="roundRect">
+            <a:avLst>
+              <a:gd name="adj" fmla="val 24000"/>
+            </a:avLst>
+          </a:prstGeom>
+          <a:solidFill>
+            <a:srgbClr val="FFFFFF"/>
+          </a:solidFill>
+          <a:ln w="5080">
+            <a:solidFill>
+              <a:srgbClr val="DADCE0"/>
+            </a:solidFill>
+          </a:ln>
+        </p:spPr>
+        <p:txBody>
+          <a:bodyPr wrap="square" lIns="0" tIns="0" rIns="0" bIns="0" rtlCol="0" anchor="ctr"/>
+          <a:lstStyle/>
+          <a:p>
+            <a:pPr algn="ctr" indent="0" marL="0">
+              <a:buNone/>
+            </a:pPr>
+            <a:r>
+              <a:rPr lang="en-US" sz="420" b="1" dirty="0">
+                <a:solidFill>
+                  <a:srgbClr val="202124"/>
+                </a:solidFill>
+                <a:latin typeface="Arial" pitchFamily="34" charset="0"/>
+                <a:ea typeface="Arial" pitchFamily="34" charset="-122"/>
+                <a:cs typeface="Arial" pitchFamily="34" charset="-120"/>
+              </a:rPr>
+              <a:t>Prune 3LO MCP tools</a:t>
+            </a:r>
+            <a:endParaRPr lang="en-US" sz="420" dirty="0"/>
+          </a:p>
+        </p:txBody>
+      </p:sp>
+      <p:sp>
+        <p:nvSpPr>
+          <p:cNvPr id="156" name="Text 134"/>
+          <p:cNvSpPr/>
+          <p:nvPr/>
+        </p:nvSpPr>
+        <p:spPr>
+          <a:xfrm>
+            <a:off x="4486046" y="4445813"/>
+            <a:ext cx="394106" cy="114300"/>
+          </a:xfrm>
+          <a:prstGeom prst="roundRect">
+            <a:avLst>
+              <a:gd name="adj" fmla="val 24000"/>
+            </a:avLst>
+          </a:prstGeom>
+          <a:solidFill>
+            <a:srgbClr val="FFFFFF"/>
+          </a:solidFill>
+          <a:ln w="5080">
+            <a:solidFill>
+              <a:srgbClr val="DADCE0"/>
+            </a:solidFill>
+          </a:ln>
+        </p:spPr>
+        <p:txBody>
+          <a:bodyPr wrap="square" lIns="0" tIns="0" rIns="0" bIns="0" rtlCol="0" anchor="ctr"/>
+          <a:lstStyle/>
+          <a:p>
+            <a:pPr algn="ctr" indent="0" marL="0">
+              <a:buNone/>
+            </a:pPr>
+            <a:r>
+              <a:rPr lang="en-US" sz="420" b="1" dirty="0">
+                <a:solidFill>
+                  <a:srgbClr val="202124"/>
+                </a:solidFill>
+                <a:latin typeface="Arial" pitchFamily="34" charset="0"/>
+                <a:ea typeface="Arial" pitchFamily="34" charset="-122"/>
+                <a:cs typeface="Arial" pitchFamily="34" charset="-120"/>
+              </a:rPr>
+              <a:t>Screen prompt</a:t>
+            </a:r>
+            <a:endParaRPr lang="en-US" sz="420" dirty="0"/>
+          </a:p>
+        </p:txBody>
+      </p:sp>
+      <p:sp>
+        <p:nvSpPr>
+          <p:cNvPr id="157" name="Text 135"/>
+          <p:cNvSpPr/>
+          <p:nvPr/>
+        </p:nvSpPr>
+        <p:spPr>
+          <a:xfrm>
+            <a:off x="4508906" y="4625950"/>
+            <a:ext cx="347472" cy="114300"/>
+          </a:xfrm>
+          <a:prstGeom prst="roundRect">
+            <a:avLst>
+              <a:gd name="adj" fmla="val 24000"/>
+            </a:avLst>
+          </a:prstGeom>
+          <a:solidFill>
+            <a:srgbClr val="FFFFFF"/>
+          </a:solidFill>
+          <a:ln w="5080">
+            <a:solidFill>
+              <a:srgbClr val="DADCE0"/>
+            </a:solidFill>
+          </a:ln>
+        </p:spPr>
+        <p:txBody>
+          <a:bodyPr wrap="square" lIns="0" tIns="0" rIns="0" bIns="0" rtlCol="0" anchor="ctr"/>
+          <a:lstStyle/>
+          <a:p>
+            <a:pPr algn="ctr" indent="0" marL="0">
+              <a:buNone/>
+            </a:pPr>
+            <a:r>
+              <a:rPr lang="en-US" sz="420" b="1" dirty="0">
+                <a:solidFill>
+                  <a:srgbClr val="202124"/>
+                </a:solidFill>
+                <a:latin typeface="Arial" pitchFamily="34" charset="0"/>
+                <a:ea typeface="Arial" pitchFamily="34" charset="-122"/>
+                <a:cs typeface="Arial" pitchFamily="34" charset="-120"/>
+              </a:rPr>
+              <a:t>Redact PII</a:t>
+            </a:r>
+            <a:endParaRPr lang="en-US" sz="420" dirty="0"/>
+          </a:p>
+        </p:txBody>
+      </p:sp>
+      <p:sp>
+        <p:nvSpPr>
+          <p:cNvPr id="158" name="Text 136"/>
+          <p:cNvSpPr/>
+          <p:nvPr/>
+        </p:nvSpPr>
+        <p:spPr>
+          <a:xfrm>
+            <a:off x="4901184" y="2299716"/>
+            <a:ext cx="566928" cy="114300"/>
+          </a:xfrm>
+          <a:prstGeom prst="roundRect">
+            <a:avLst>
+              <a:gd name="adj" fmla="val 24000"/>
+            </a:avLst>
+          </a:prstGeom>
+          <a:solidFill>
+            <a:srgbClr val="FFFFFF"/>
+          </a:solidFill>
+          <a:ln w="5080">
+            <a:solidFill>
+              <a:srgbClr val="DADCE0"/>
+            </a:solidFill>
+          </a:ln>
+        </p:spPr>
+        <p:txBody>
+          <a:bodyPr wrap="square" lIns="0" tIns="0" rIns="0" bIns="0" rtlCol="0" anchor="ctr"/>
+          <a:lstStyle/>
+          <a:p>
+            <a:pPr algn="ctr" indent="0" marL="0">
+              <a:buNone/>
+            </a:pPr>
+            <a:r>
+              <a:rPr lang="en-US" sz="420" b="1" dirty="0">
+                <a:solidFill>
+                  <a:srgbClr val="202124"/>
+                </a:solidFill>
+                <a:latin typeface="Arial" pitchFamily="34" charset="0"/>
+                <a:ea typeface="Arial" pitchFamily="34" charset="-122"/>
+                <a:cs typeface="Arial" pitchFamily="34" charset="-120"/>
+              </a:rPr>
+              <a:t>Strip spoofed header</a:t>
+            </a:r>
+            <a:endParaRPr lang="en-US" sz="420" dirty="0"/>
+          </a:p>
+        </p:txBody>
+      </p:sp>
+      <p:sp>
+        <p:nvSpPr>
+          <p:cNvPr id="159" name="Text 137"/>
+          <p:cNvSpPr/>
+          <p:nvPr/>
+        </p:nvSpPr>
+        <p:spPr>
+          <a:xfrm>
+            <a:off x="5003597" y="2816352"/>
+            <a:ext cx="690372" cy="114300"/>
+          </a:xfrm>
+          <a:prstGeom prst="roundRect">
+            <a:avLst>
+              <a:gd name="adj" fmla="val 24000"/>
+            </a:avLst>
+          </a:prstGeom>
+          <a:solidFill>
+            <a:srgbClr val="FFFFFF"/>
+          </a:solidFill>
+          <a:ln w="5080">
+            <a:solidFill>
+              <a:srgbClr val="DADCE0"/>
+            </a:solidFill>
+          </a:ln>
+        </p:spPr>
+        <p:txBody>
+          <a:bodyPr wrap="square" lIns="0" tIns="0" rIns="0" bIns="0" rtlCol="0" anchor="ctr"/>
+          <a:lstStyle/>
+          <a:p>
+            <a:pPr algn="ctr" indent="0" marL="0">
+              <a:buNone/>
+            </a:pPr>
+            <a:r>
+              <a:rPr lang="en-US" sz="420" b="1" dirty="0">
+                <a:solidFill>
+                  <a:srgbClr val="202124"/>
+                </a:solidFill>
+                <a:latin typeface="Arial" pitchFamily="34" charset="0"/>
+                <a:ea typeface="Arial" pitchFamily="34" charset="-122"/>
+                <a:cs typeface="Arial" pitchFamily="34" charset="-120"/>
+              </a:rPr>
+              <a:t>Return HTTP 403 Forbidden</a:t>
+            </a:r>
+            <a:endParaRPr lang="en-US" sz="420" dirty="0"/>
+          </a:p>
+        </p:txBody>
+      </p:sp>
+      <p:sp>
+        <p:nvSpPr>
+          <p:cNvPr id="160" name="Text 138"/>
+          <p:cNvSpPr/>
+          <p:nvPr/>
+        </p:nvSpPr>
+        <p:spPr>
+          <a:xfrm>
+            <a:off x="6367882" y="1463954"/>
+            <a:ext cx="418795" cy="114300"/>
+          </a:xfrm>
+          <a:prstGeom prst="roundRect">
+            <a:avLst>
+              <a:gd name="adj" fmla="val 24000"/>
+            </a:avLst>
+          </a:prstGeom>
+          <a:solidFill>
+            <a:srgbClr val="FFFFFF"/>
+          </a:solidFill>
+          <a:ln w="5080">
+            <a:solidFill>
+              <a:srgbClr val="DADCE0"/>
+            </a:solidFill>
+          </a:ln>
+        </p:spPr>
+        <p:txBody>
+          <a:bodyPr wrap="square" lIns="0" tIns="0" rIns="0" bIns="0" rtlCol="0" anchor="ctr"/>
+          <a:lstStyle/>
+          <a:p>
+            <a:pPr algn="ctr" indent="0" marL="0">
+              <a:buNone/>
+            </a:pPr>
+            <a:r>
+              <a:rPr lang="en-US" sz="420" b="1" dirty="0">
+                <a:solidFill>
+                  <a:srgbClr val="202124"/>
+                </a:solidFill>
+                <a:latin typeface="Arial" pitchFamily="34" charset="0"/>
+                <a:ea typeface="Arial" pitchFamily="34" charset="-122"/>
+                <a:cs typeface="Arial" pitchFamily="34" charset="-120"/>
+              </a:rPr>
+              <a:t>Blocked / Safe</a:t>
+            </a:r>
+            <a:endParaRPr lang="en-US" sz="420" dirty="0"/>
+          </a:p>
+        </p:txBody>
+      </p:sp>
+      <p:sp>
+        <p:nvSpPr>
+          <p:cNvPr id="161" name="Text 139"/>
+          <p:cNvSpPr/>
+          <p:nvPr/>
+        </p:nvSpPr>
+        <p:spPr>
+          <a:xfrm>
+            <a:off x="6238951" y="2823667"/>
+            <a:ext cx="347472" cy="114300"/>
+          </a:xfrm>
+          <a:prstGeom prst="roundRect">
+            <a:avLst>
+              <a:gd name="adj" fmla="val 24000"/>
+            </a:avLst>
+          </a:prstGeom>
+          <a:solidFill>
+            <a:srgbClr val="FFFFFF"/>
+          </a:solidFill>
+          <a:ln w="5080">
+            <a:solidFill>
+              <a:srgbClr val="DADCE0"/>
+            </a:solidFill>
+          </a:ln>
+        </p:spPr>
+        <p:txBody>
+          <a:bodyPr wrap="square" lIns="0" tIns="0" rIns="0" bIns="0" rtlCol="0" anchor="ctr"/>
+          <a:lstStyle/>
+          <a:p>
+            <a:pPr algn="ctr" indent="0" marL="0">
+              <a:buNone/>
+            </a:pPr>
+            <a:r>
+              <a:rPr lang="en-US" sz="420" b="1" dirty="0">
+                <a:solidFill>
+                  <a:srgbClr val="202124"/>
+                </a:solidFill>
+                <a:latin typeface="Arial" pitchFamily="34" charset="0"/>
+                <a:ea typeface="Arial" pitchFamily="34" charset="-122"/>
+                <a:cs typeface="Arial" pitchFamily="34" charset="-120"/>
+              </a:rPr>
+              <a:t>403 / 200</a:t>
+            </a:r>
+            <a:endParaRPr lang="en-US" sz="420" dirty="0"/>
+          </a:p>
+        </p:txBody>
+      </p:sp>
+      <p:sp>
+        <p:nvSpPr>
+          <p:cNvPr id="162" name="Text 140"/>
+          <p:cNvSpPr/>
+          <p:nvPr/>
+        </p:nvSpPr>
+        <p:spPr>
+          <a:xfrm>
+            <a:off x="5520233" y="1463954"/>
+            <a:ext cx="369418" cy="114300"/>
+          </a:xfrm>
+          <a:prstGeom prst="roundRect">
+            <a:avLst>
+              <a:gd name="adj" fmla="val 24000"/>
+            </a:avLst>
+          </a:prstGeom>
+          <a:solidFill>
+            <a:srgbClr val="FFFFFF"/>
+          </a:solidFill>
+          <a:ln w="5080">
+            <a:solidFill>
+              <a:srgbClr val="DADCE0"/>
+            </a:solidFill>
+          </a:ln>
+        </p:spPr>
+        <p:txBody>
+          <a:bodyPr wrap="square" lIns="0" tIns="0" rIns="0" bIns="0" rtlCol="0" anchor="ctr"/>
+          <a:lstStyle/>
+          <a:p>
+            <a:pPr algn="ctr" indent="0" marL="0">
+              <a:buNone/>
+            </a:pPr>
+            <a:r>
+              <a:rPr lang="en-US" sz="420" b="1" dirty="0">
+                <a:solidFill>
+                  <a:srgbClr val="202124"/>
+                </a:solidFill>
+                <a:latin typeface="Arial" pitchFamily="34" charset="0"/>
+                <a:ea typeface="Arial" pitchFamily="34" charset="-122"/>
+                <a:cs typeface="Arial" pitchFamily="34" charset="-120"/>
+              </a:rPr>
+              <a:t>Attack Probe</a:t>
+            </a:r>
+            <a:endParaRPr lang="en-US" sz="420" dirty="0"/>
+          </a:p>
+        </p:txBody>
+      </p:sp>
+      <p:sp>
+        <p:nvSpPr>
+          <p:cNvPr id="163" name="Text 141"/>
+          <p:cNvSpPr/>
+          <p:nvPr/>
+        </p:nvSpPr>
+        <p:spPr>
+          <a:xfrm>
+            <a:off x="5531206" y="2823667"/>
+            <a:ext cx="347472" cy="114300"/>
+          </a:xfrm>
+          <a:prstGeom prst="roundRect">
+            <a:avLst>
+              <a:gd name="adj" fmla="val 24000"/>
+            </a:avLst>
+          </a:prstGeom>
+          <a:solidFill>
+            <a:srgbClr val="FFFFFF"/>
+          </a:solidFill>
+          <a:ln w="5080">
+            <a:solidFill>
+              <a:srgbClr val="DADCE0"/>
+            </a:solidFill>
+          </a:ln>
+        </p:spPr>
+        <p:txBody>
+          <a:bodyPr wrap="square" lIns="0" tIns="0" rIns="0" bIns="0" rtlCol="0" anchor="ctr"/>
+          <a:lstStyle/>
+          <a:p>
+            <a:pPr algn="ctr" indent="0" marL="0">
+              <a:buNone/>
+            </a:pPr>
+            <a:r>
+              <a:rPr lang="en-US" sz="420" b="1" dirty="0">
+                <a:solidFill>
+                  <a:srgbClr val="202124"/>
+                </a:solidFill>
+                <a:latin typeface="Arial" pitchFamily="34" charset="0"/>
+                <a:ea typeface="Arial" pitchFamily="34" charset="-122"/>
+                <a:cs typeface="Arial" pitchFamily="34" charset="-120"/>
+              </a:rPr>
+              <a:t>Probe</a:t>
+            </a:r>
+            <a:endParaRPr lang="en-US" sz="420" dirty="0"/>
           </a:p>
         </p:txBody>
       </p:sp>
@@ -7657,8 +7488,8 @@
         </p:nvSpPr>
         <p:spPr>
           <a:xfrm>
-            <a:off x="749808" y="621792"/>
-            <a:ext cx="10680192" cy="219456"/>
+            <a:off x="749808" y="603504"/>
+            <a:ext cx="10680192" cy="201168"/>
           </a:xfrm>
           <a:prstGeom prst="rect">
             <a:avLst/>
@@ -7674,7 +7505,7 @@
               <a:buNone/>
             </a:pPr>
             <a:r>
-              <a:rPr lang="en-US" sz="940" dirty="0">
+              <a:rPr lang="en-US" sz="920" dirty="0">
                 <a:solidFill>
                   <a:srgbClr val="3C4043"/>
                 </a:solidFill>
@@ -7684,7 +7515,7 @@
               </a:rPr>
               <a:t>The architecture consists of the following components:</a:t>
             </a:r>
-            <a:endParaRPr lang="en-US" sz="940" dirty="0"/>
+            <a:endParaRPr lang="en-US" sz="920" dirty="0"/>
           </a:p>
         </p:txBody>
       </p:sp>
@@ -7696,8 +7527,8 @@
         </p:nvSpPr>
         <p:spPr>
           <a:xfrm>
-            <a:off x="749808" y="877824"/>
-            <a:ext cx="2889504" cy="274320"/>
+            <a:off x="749808" y="841248"/>
+            <a:ext cx="2889504" cy="256032"/>
           </a:xfrm>
           <a:prstGeom prst="rect">
             <a:avLst/>
@@ -7721,8 +7552,8 @@
         </p:nvSpPr>
         <p:spPr>
           <a:xfrm>
-            <a:off x="841248" y="877824"/>
-            <a:ext cx="2706624" cy="274320"/>
+            <a:off x="841248" y="841248"/>
+            <a:ext cx="2706624" cy="256032"/>
           </a:xfrm>
           <a:prstGeom prst="rect">
             <a:avLst/>
@@ -7760,8 +7591,8 @@
         </p:nvSpPr>
         <p:spPr>
           <a:xfrm>
-            <a:off x="3639312" y="877824"/>
-            <a:ext cx="7790688" cy="274320"/>
+            <a:off x="3639312" y="841248"/>
+            <a:ext cx="7790688" cy="256032"/>
           </a:xfrm>
           <a:prstGeom prst="rect">
             <a:avLst/>
@@ -7785,8 +7616,8 @@
         </p:nvSpPr>
         <p:spPr>
           <a:xfrm>
-            <a:off x="3749040" y="877824"/>
-            <a:ext cx="7571232" cy="274320"/>
+            <a:off x="3749040" y="841248"/>
+            <a:ext cx="7571232" cy="256032"/>
           </a:xfrm>
           <a:prstGeom prst="rect">
             <a:avLst/>
@@ -7824,8 +7655,8 @@
         </p:nvSpPr>
         <p:spPr>
           <a:xfrm>
-            <a:off x="749808" y="1152144"/>
-            <a:ext cx="2889504" cy="296266"/>
+            <a:off x="749808" y="1097280"/>
+            <a:ext cx="2889504" cy="338328"/>
           </a:xfrm>
           <a:prstGeom prst="rect">
             <a:avLst/>
@@ -7849,8 +7680,8 @@
         </p:nvSpPr>
         <p:spPr>
           <a:xfrm>
-            <a:off x="841248" y="1170432"/>
-            <a:ext cx="2706624" cy="259690"/>
+            <a:off x="841248" y="1115568"/>
+            <a:ext cx="2706624" cy="301752"/>
           </a:xfrm>
           <a:prstGeom prst="rect">
             <a:avLst/>
@@ -7859,14 +7690,16 @@
           <a:ln/>
         </p:spPr>
         <p:txBody>
-          <a:bodyPr wrap="square" rtlCol="0" anchor="ctr"/>
-          <a:lstStyle/>
-          <a:p>
-            <a:pPr indent="0" marL="0">
-              <a:buNone/>
-            </a:pPr>
-            <a:r>
-              <a:rPr lang="en-US" sz="780" b="1" dirty="0">
+          <a:bodyPr wrap="square" rtlCol="0" anchor="ctr">
+            <a:normAutofit/>
+          </a:bodyPr>
+          <a:lstStyle/>
+          <a:p>
+            <a:pPr indent="0" marL="0">
+              <a:buNone/>
+            </a:pPr>
+            <a:r>
+              <a:rPr lang="en-US" sz="750" b="1" dirty="0">
                 <a:solidFill>
                   <a:srgbClr val="202124"/>
                 </a:solidFill>
@@ -7881,7 +7714,7 @@
               <a:buNone/>
             </a:pPr>
             <a:r>
-              <a:rPr lang="en-US" sz="670" dirty="0">
+              <a:rPr lang="en-US" sz="650" dirty="0">
                 <a:solidFill>
                   <a:srgbClr val="5F6368"/>
                 </a:solidFill>
@@ -7889,9 +7722,9 @@
                 <a:ea typeface="Arial" pitchFamily="34" charset="-122"/>
                 <a:cs typeface="Arial" pitchFamily="34" charset="-120"/>
               </a:rPr>
-              <a:t>Outer security and governance boundary that prevents unauthorized data exfiltration.</a:t>
-            </a:r>
-            <a:endParaRPr lang="en-US" sz="780" dirty="0"/>
+              <a:t>Outer security and governance boundary that prevents unauthorized data.</a:t>
+            </a:r>
+            <a:endParaRPr lang="en-US" sz="750" dirty="0"/>
           </a:p>
         </p:txBody>
       </p:sp>
@@ -7903,8 +7736,8 @@
         </p:nvSpPr>
         <p:spPr>
           <a:xfrm>
-            <a:off x="3639312" y="1152144"/>
-            <a:ext cx="7790688" cy="296266"/>
+            <a:off x="3639312" y="1097280"/>
+            <a:ext cx="7790688" cy="338328"/>
           </a:xfrm>
           <a:prstGeom prst="rect">
             <a:avLst/>
@@ -7928,8 +7761,8 @@
         </p:nvSpPr>
         <p:spPr>
           <a:xfrm>
-            <a:off x="3749040" y="1170432"/>
-            <a:ext cx="7571232" cy="259690"/>
+            <a:off x="3749040" y="1115568"/>
+            <a:ext cx="7571232" cy="301752"/>
           </a:xfrm>
           <a:prstGeom prst="rect">
             <a:avLst/>
@@ -7938,14 +7771,19 @@
           <a:ln/>
         </p:spPr>
         <p:txBody>
-          <a:bodyPr wrap="square" rtlCol="0" anchor="ctr"/>
-          <a:lstStyle/>
-          <a:p>
-            <a:pPr indent="0" marL="0">
-              <a:buNone/>
-            </a:pPr>
-            <a:r>
-              <a:rPr lang="en-US" sz="720" b="1" dirty="0">
+          <a:bodyPr wrap="square" rtlCol="0" anchor="ctr">
+            <a:normAutofit/>
+          </a:bodyPr>
+          <a:lstStyle/>
+          <a:p>
+            <a:pPr indent="0" marL="0">
+              <a:lnSpc>
+                <a:spcPct val="102000"/>
+              </a:lnSpc>
+              <a:buNone/>
+            </a:pPr>
+            <a:r>
+              <a:rPr lang="en-US" sz="690" b="1" dirty="0">
                 <a:solidFill>
                   <a:srgbClr val="202124"/>
                 </a:solidFill>
@@ -7956,10 +7794,13 @@
               <a:t>• Adversarial Breach Verification Harness: </a:t>
             </a:r>
             <a:pPr indent="0" marL="0">
-              <a:buNone/>
-            </a:pPr>
-            <a:r>
-              <a:rPr lang="en-US" sz="700" dirty="0">
+              <a:lnSpc>
+                <a:spcPct val="102000"/>
+              </a:lnSpc>
+              <a:buNone/>
+            </a:pPr>
+            <a:r>
+              <a:rPr lang="en-US" sz="670" dirty="0">
                 <a:solidFill>
                   <a:srgbClr val="3C4043"/>
                 </a:solidFill>
@@ -7969,7 +7810,7 @@
               </a:rPr>
               <a:t>Enforces VPC Service Controls service perimeters around hub and spoke projects to block unauthorized cross-perimeter data movement.</a:t>
             </a:r>
-            <a:endParaRPr lang="en-US" sz="720" dirty="0"/>
+            <a:endParaRPr lang="en-US" sz="690" dirty="0"/>
           </a:p>
         </p:txBody>
       </p:sp>
@@ -7981,8 +7822,8 @@
         </p:nvSpPr>
         <p:spPr>
           <a:xfrm>
-            <a:off x="749808" y="1448410"/>
-            <a:ext cx="2889504" cy="786384"/>
+            <a:off x="749808" y="1435608"/>
+            <a:ext cx="2889504" cy="822960"/>
           </a:xfrm>
           <a:prstGeom prst="rect">
             <a:avLst/>
@@ -8006,8 +7847,8 @@
         </p:nvSpPr>
         <p:spPr>
           <a:xfrm>
-            <a:off x="841248" y="1466698"/>
-            <a:ext cx="2706624" cy="749808"/>
+            <a:off x="841248" y="1453896"/>
+            <a:ext cx="2706624" cy="786384"/>
           </a:xfrm>
           <a:prstGeom prst="rect">
             <a:avLst/>
@@ -8016,14 +7857,16 @@
           <a:ln/>
         </p:spPr>
         <p:txBody>
-          <a:bodyPr wrap="square" rtlCol="0" anchor="ctr"/>
-          <a:lstStyle/>
-          <a:p>
-            <a:pPr indent="0" marL="0">
-              <a:buNone/>
-            </a:pPr>
-            <a:r>
-              <a:rPr lang="en-US" sz="780" b="1" dirty="0">
+          <a:bodyPr wrap="square" rtlCol="0" anchor="ctr">
+            <a:normAutofit/>
+          </a:bodyPr>
+          <a:lstStyle/>
+          <a:p>
+            <a:pPr indent="0" marL="0">
+              <a:buNone/>
+            </a:pPr>
+            <a:r>
+              <a:rPr lang="en-US" sz="750" b="1" dirty="0">
                 <a:solidFill>
                   <a:srgbClr val="202124"/>
                 </a:solidFill>
@@ -8038,7 +7881,7 @@
               <a:buNone/>
             </a:pPr>
             <a:r>
-              <a:rPr lang="en-US" sz="670" dirty="0">
+              <a:rPr lang="en-US" sz="650" dirty="0">
                 <a:solidFill>
                   <a:srgbClr val="5F6368"/>
                 </a:solidFill>
@@ -8048,7 +7891,7 @@
               </a:rPr>
               <a:t>Centralized ingress and control plane managing edge security, identity verification, and request routing.</a:t>
             </a:r>
-            <a:endParaRPr lang="en-US" sz="780" dirty="0"/>
+            <a:endParaRPr lang="en-US" sz="750" dirty="0"/>
           </a:p>
         </p:txBody>
       </p:sp>
@@ -8060,8 +7903,8 @@
         </p:nvSpPr>
         <p:spPr>
           <a:xfrm>
-            <a:off x="3639312" y="1448410"/>
-            <a:ext cx="7790688" cy="786384"/>
+            <a:off x="3639312" y="1435608"/>
+            <a:ext cx="7790688" cy="822960"/>
           </a:xfrm>
           <a:prstGeom prst="rect">
             <a:avLst/>
@@ -8085,8 +7928,8 @@
         </p:nvSpPr>
         <p:spPr>
           <a:xfrm>
-            <a:off x="3749040" y="1466698"/>
-            <a:ext cx="7571232" cy="749808"/>
+            <a:off x="3749040" y="1453896"/>
+            <a:ext cx="7571232" cy="786384"/>
           </a:xfrm>
           <a:prstGeom prst="rect">
             <a:avLst/>
@@ -8095,14 +7938,19 @@
           <a:ln/>
         </p:spPr>
         <p:txBody>
-          <a:bodyPr wrap="square" rtlCol="0" anchor="ctr"/>
-          <a:lstStyle/>
-          <a:p>
-            <a:pPr indent="0" marL="0">
-              <a:buNone/>
-            </a:pPr>
-            <a:r>
-              <a:rPr lang="en-US" sz="720" b="1" dirty="0">
+          <a:bodyPr wrap="square" rtlCol="0" anchor="ctr">
+            <a:normAutofit/>
+          </a:bodyPr>
+          <a:lstStyle/>
+          <a:p>
+            <a:pPr indent="0" marL="0">
+              <a:lnSpc>
+                <a:spcPct val="102000"/>
+              </a:lnSpc>
+              <a:buNone/>
+            </a:pPr>
+            <a:r>
+              <a:rPr lang="en-US" sz="690" b="1" dirty="0">
                 <a:solidFill>
                   <a:srgbClr val="202124"/>
                 </a:solidFill>
@@ -8113,10 +7961,13 @@
               <a:t>• External Application Load Balancer: </a:t>
             </a:r>
             <a:pPr indent="0" marL="0">
-              <a:buNone/>
-            </a:pPr>
-            <a:r>
-              <a:rPr lang="en-US" sz="700" dirty="0">
+              <a:lnSpc>
+                <a:spcPct val="102000"/>
+              </a:lnSpc>
+              <a:buNone/>
+            </a:pPr>
+            <a:r>
+              <a:rPr lang="en-US" sz="670" dirty="0">
                 <a:solidFill>
                   <a:srgbClr val="3C4043"/>
                 </a:solidFill>
@@ -8128,24 +7979,30 @@
 </a:t>
             </a:r>
             <a:pPr indent="0" marL="0">
-              <a:buNone/>
-            </a:pPr>
-            <a:r>
-              <a:rPr lang="en-US" sz="720" b="1" dirty="0">
-                <a:solidFill>
-                  <a:srgbClr val="202124"/>
-                </a:solidFill>
-                <a:latin typeface="Arial" pitchFamily="34" charset="0"/>
-                <a:ea typeface="Arial" pitchFamily="34" charset="-122"/>
-                <a:cs typeface="Arial" pitchFamily="34" charset="-120"/>
-              </a:rPr>
-              <a:t>• Vector 1: Header Strip &amp; Vector 3: Tool Prune: </a:t>
-            </a:r>
-            <a:pPr indent="0" marL="0">
-              <a:buNone/>
-            </a:pPr>
-            <a:r>
-              <a:rPr lang="en-US" sz="700" dirty="0">
+              <a:lnSpc>
+                <a:spcPct val="102000"/>
+              </a:lnSpc>
+              <a:buNone/>
+            </a:pPr>
+            <a:r>
+              <a:rPr lang="en-US" sz="690" b="1" dirty="0">
+                <a:solidFill>
+                  <a:srgbClr val="202124"/>
+                </a:solidFill>
+                <a:latin typeface="Arial" pitchFamily="34" charset="0"/>
+                <a:ea typeface="Arial" pitchFamily="34" charset="-122"/>
+                <a:cs typeface="Arial" pitchFamily="34" charset="-120"/>
+              </a:rPr>
+              <a:t>• Vector 1: Cloud Armor &amp; Vector 3: Tool Prune: </a:t>
+            </a:r>
+            <a:pPr indent="0" marL="0">
+              <a:lnSpc>
+                <a:spcPct val="102000"/>
+              </a:lnSpc>
+              <a:buNone/>
+            </a:pPr>
+            <a:r>
+              <a:rPr lang="en-US" sz="670" dirty="0">
                 <a:solidFill>
                   <a:srgbClr val="3C4043"/>
                 </a:solidFill>
@@ -8157,10 +8014,13 @@
 </a:t>
             </a:r>
             <a:pPr indent="0" marL="0">
-              <a:buNone/>
-            </a:pPr>
-            <a:r>
-              <a:rPr lang="en-US" sz="720" b="1" dirty="0">
+              <a:lnSpc>
+                <a:spcPct val="102000"/>
+              </a:lnSpc>
+              <a:buNone/>
+            </a:pPr>
+            <a:r>
+              <a:rPr lang="en-US" sz="690" b="1" dirty="0">
                 <a:solidFill>
                   <a:srgbClr val="202124"/>
                 </a:solidFill>
@@ -8171,10 +8031,13 @@
               <a:t>• Vector 2: Agent 403: </a:t>
             </a:r>
             <a:pPr indent="0" marL="0">
-              <a:buNone/>
-            </a:pPr>
-            <a:r>
-              <a:rPr lang="en-US" sz="700" dirty="0">
+              <a:lnSpc>
+                <a:spcPct val="102000"/>
+              </a:lnSpc>
+              <a:buNone/>
+            </a:pPr>
+            <a:r>
+              <a:rPr lang="en-US" sz="670" dirty="0">
                 <a:solidFill>
                   <a:srgbClr val="3C4043"/>
                 </a:solidFill>
@@ -8186,10 +8049,13 @@
 </a:t>
             </a:r>
             <a:pPr indent="0" marL="0">
-              <a:buNone/>
-            </a:pPr>
-            <a:r>
-              <a:rPr lang="en-US" sz="720" b="1" dirty="0">
+              <a:lnSpc>
+                <a:spcPct val="102000"/>
+              </a:lnSpc>
+              <a:buNone/>
+            </a:pPr>
+            <a:r>
+              <a:rPr lang="en-US" sz="690" b="1" dirty="0">
                 <a:solidFill>
                   <a:srgbClr val="202124"/>
                 </a:solidFill>
@@ -8200,10 +8066,13 @@
               <a:t>• Hop 2 Catalog PDP: </a:t>
             </a:r>
             <a:pPr indent="0" marL="0">
-              <a:buNone/>
-            </a:pPr>
-            <a:r>
-              <a:rPr lang="en-US" sz="700" dirty="0">
+              <a:lnSpc>
+                <a:spcPct val="102000"/>
+              </a:lnSpc>
+              <a:buNone/>
+            </a:pPr>
+            <a:r>
+              <a:rPr lang="en-US" sz="670" dirty="0">
                 <a:solidFill>
                   <a:srgbClr val="3C4043"/>
                 </a:solidFill>
@@ -8213,7 +8082,7 @@
               </a:rPr>
               <a:t>Serverless routing service that validates caller tokens and dispatches requests to the target execution spoke.</a:t>
             </a:r>
-            <a:endParaRPr lang="en-US" sz="720" dirty="0"/>
+            <a:endParaRPr lang="en-US" sz="690" dirty="0"/>
           </a:p>
         </p:txBody>
       </p:sp>
@@ -8225,8 +8094,8 @@
         </p:nvSpPr>
         <p:spPr>
           <a:xfrm>
-            <a:off x="749808" y="2234794"/>
-            <a:ext cx="2889504" cy="615391"/>
+            <a:off x="749808" y="2258568"/>
+            <a:ext cx="2889504" cy="822960"/>
           </a:xfrm>
           <a:prstGeom prst="rect">
             <a:avLst/>
@@ -8250,8 +8119,8 @@
         </p:nvSpPr>
         <p:spPr>
           <a:xfrm>
-            <a:off x="841248" y="2253082"/>
-            <a:ext cx="2706624" cy="578815"/>
+            <a:off x="841248" y="2276856"/>
+            <a:ext cx="2706624" cy="786384"/>
           </a:xfrm>
           <a:prstGeom prst="rect">
             <a:avLst/>
@@ -8260,14 +8129,16 @@
           <a:ln/>
         </p:spPr>
         <p:txBody>
-          <a:bodyPr wrap="square" rtlCol="0" anchor="ctr"/>
-          <a:lstStyle/>
-          <a:p>
-            <a:pPr indent="0" marL="0">
-              <a:buNone/>
-            </a:pPr>
-            <a:r>
-              <a:rPr lang="en-US" sz="780" b="1" dirty="0">
+          <a:bodyPr wrap="square" rtlCol="0" anchor="ctr">
+            <a:normAutofit/>
+          </a:bodyPr>
+          <a:lstStyle/>
+          <a:p>
+            <a:pPr indent="0" marL="0">
+              <a:buNone/>
+            </a:pPr>
+            <a:r>
+              <a:rPr lang="en-US" sz="750" b="1" dirty="0">
                 <a:solidFill>
                   <a:srgbClr val="202124"/>
                 </a:solidFill>
@@ -8282,7 +8153,7 @@
               <a:buNone/>
             </a:pPr>
             <a:r>
-              <a:rPr lang="en-US" sz="670" dirty="0">
+              <a:rPr lang="en-US" sz="650" dirty="0">
                 <a:solidFill>
                   <a:srgbClr val="5F6368"/>
                 </a:solidFill>
@@ -8292,7 +8163,7 @@
               </a:rPr>
               <a:t>Dedicated governance plane providing unified security posture, cryptographic key management, and OpenTelemetry observability.</a:t>
             </a:r>
-            <a:endParaRPr lang="en-US" sz="780" dirty="0"/>
+            <a:endParaRPr lang="en-US" sz="750" dirty="0"/>
           </a:p>
         </p:txBody>
       </p:sp>
@@ -8304,8 +8175,8 @@
         </p:nvSpPr>
         <p:spPr>
           <a:xfrm>
-            <a:off x="3639312" y="2234794"/>
-            <a:ext cx="7790688" cy="615391"/>
+            <a:off x="3639312" y="2258568"/>
+            <a:ext cx="7790688" cy="822960"/>
           </a:xfrm>
           <a:prstGeom prst="rect">
             <a:avLst/>
@@ -8329,8 +8200,8 @@
         </p:nvSpPr>
         <p:spPr>
           <a:xfrm>
-            <a:off x="3749040" y="2253082"/>
-            <a:ext cx="7571232" cy="578815"/>
+            <a:off x="3749040" y="2276856"/>
+            <a:ext cx="7571232" cy="786384"/>
           </a:xfrm>
           <a:prstGeom prst="rect">
             <a:avLst/>
@@ -8339,14 +8210,19 @@
           <a:ln/>
         </p:spPr>
         <p:txBody>
-          <a:bodyPr wrap="square" rtlCol="0" anchor="ctr"/>
-          <a:lstStyle/>
-          <a:p>
-            <a:pPr indent="0" marL="0">
-              <a:buNone/>
-            </a:pPr>
-            <a:r>
-              <a:rPr lang="en-US" sz="720" b="1" dirty="0">
+          <a:bodyPr wrap="square" rtlCol="0" anchor="ctr">
+            <a:normAutofit/>
+          </a:bodyPr>
+          <a:lstStyle/>
+          <a:p>
+            <a:pPr indent="0" marL="0">
+              <a:lnSpc>
+                <a:spcPct val="102000"/>
+              </a:lnSpc>
+              <a:buNone/>
+            </a:pPr>
+            <a:r>
+              <a:rPr lang="en-US" sz="690" b="1" dirty="0">
                 <a:solidFill>
                   <a:srgbClr val="202124"/>
                 </a:solidFill>
@@ -8357,10 +8233,13 @@
               <a:t>• Vector 6: Valkey 429 &amp; 4k Token Clamp: </a:t>
             </a:r>
             <a:pPr indent="0" marL="0">
-              <a:buNone/>
-            </a:pPr>
-            <a:r>
-              <a:rPr lang="en-US" sz="700" dirty="0">
+              <a:lnSpc>
+                <a:spcPct val="102000"/>
+              </a:lnSpc>
+              <a:buNone/>
+            </a:pPr>
+            <a:r>
+              <a:rPr lang="en-US" sz="670" dirty="0">
                 <a:solidFill>
                   <a:srgbClr val="3C4043"/>
                 </a:solidFill>
@@ -8372,10 +8251,13 @@
 </a:t>
             </a:r>
             <a:pPr indent="0" marL="0">
-              <a:buNone/>
-            </a:pPr>
-            <a:r>
-              <a:rPr lang="en-US" sz="720" b="1" dirty="0">
+              <a:lnSpc>
+                <a:spcPct val="102000"/>
+              </a:lnSpc>
+              <a:buNone/>
+            </a:pPr>
+            <a:r>
+              <a:rPr lang="en-US" sz="690" b="1" dirty="0">
                 <a:solidFill>
                   <a:srgbClr val="202124"/>
                 </a:solidFill>
@@ -8386,10 +8268,13 @@
               <a:t>• Vector 10: Inline 3LO: </a:t>
             </a:r>
             <a:pPr indent="0" marL="0">
-              <a:buNone/>
-            </a:pPr>
-            <a:r>
-              <a:rPr lang="en-US" sz="700" dirty="0">
+              <a:lnSpc>
+                <a:spcPct val="102000"/>
+              </a:lnSpc>
+              <a:buNone/>
+            </a:pPr>
+            <a:r>
+              <a:rPr lang="en-US" sz="670" dirty="0">
                 <a:solidFill>
                   <a:srgbClr val="3C4043"/>
                 </a:solidFill>
@@ -8401,10 +8286,13 @@
 </a:t>
             </a:r>
             <a:pPr indent="0" marL="0">
-              <a:buNone/>
-            </a:pPr>
-            <a:r>
-              <a:rPr lang="en-US" sz="720" b="1" dirty="0">
+              <a:lnSpc>
+                <a:spcPct val="102000"/>
+              </a:lnSpc>
+              <a:buNone/>
+            </a:pPr>
+            <a:r>
+              <a:rPr lang="en-US" sz="690" b="1" dirty="0">
                 <a:solidFill>
                   <a:srgbClr val="202124"/>
                 </a:solidFill>
@@ -8415,10 +8303,13 @@
               <a:t>• BigQuery OTel Audit: </a:t>
             </a:r>
             <a:pPr indent="0" marL="0">
-              <a:buNone/>
-            </a:pPr>
-            <a:r>
-              <a:rPr lang="en-US" sz="700" dirty="0">
+              <a:lnSpc>
+                <a:spcPct val="102000"/>
+              </a:lnSpc>
+              <a:buNone/>
+            </a:pPr>
+            <a:r>
+              <a:rPr lang="en-US" sz="670" dirty="0">
                 <a:solidFill>
                   <a:srgbClr val="3C4043"/>
                 </a:solidFill>
@@ -8428,7 +8319,7 @@
               </a:rPr>
               <a:t>Aggregates audit logs, execution traces, and OpenTelemetry FinOps telemetry into BigQuery.</a:t>
             </a:r>
-            <a:endParaRPr lang="en-US" sz="720" dirty="0"/>
+            <a:endParaRPr lang="en-US" sz="690" dirty="0"/>
           </a:p>
         </p:txBody>
       </p:sp>
@@ -8440,8 +8331,8 @@
         </p:nvSpPr>
         <p:spPr>
           <a:xfrm>
-            <a:off x="749808" y="2850185"/>
-            <a:ext cx="2889504" cy="296266"/>
+            <a:off x="749808" y="3081528"/>
+            <a:ext cx="2889504" cy="338328"/>
           </a:xfrm>
           <a:prstGeom prst="rect">
             <a:avLst/>
@@ -8465,8 +8356,8 @@
         </p:nvSpPr>
         <p:spPr>
           <a:xfrm>
-            <a:off x="841248" y="2868473"/>
-            <a:ext cx="2706624" cy="259690"/>
+            <a:off x="841248" y="3099816"/>
+            <a:ext cx="2706624" cy="301752"/>
           </a:xfrm>
           <a:prstGeom prst="rect">
             <a:avLst/>
@@ -8475,14 +8366,16 @@
           <a:ln/>
         </p:spPr>
         <p:txBody>
-          <a:bodyPr wrap="square" rtlCol="0" anchor="ctr"/>
-          <a:lstStyle/>
-          <a:p>
-            <a:pPr indent="0" marL="0">
-              <a:buNone/>
-            </a:pPr>
-            <a:r>
-              <a:rPr lang="en-US" sz="780" b="1" dirty="0">
+          <a:bodyPr wrap="square" rtlCol="0" anchor="ctr">
+            <a:normAutofit/>
+          </a:bodyPr>
+          <a:lstStyle/>
+          <a:p>
+            <a:pPr indent="0" marL="0">
+              <a:buNone/>
+            </a:pPr>
+            <a:r>
+              <a:rPr lang="en-US" sz="750" b="1" dirty="0">
                 <a:solidFill>
                   <a:srgbClr val="202124"/>
                 </a:solidFill>
@@ -8497,7 +8390,7 @@
               <a:buNone/>
             </a:pPr>
             <a:r>
-              <a:rPr lang="en-US" sz="670" dirty="0">
+              <a:rPr lang="en-US" sz="650" dirty="0">
                 <a:solidFill>
                   <a:srgbClr val="5F6368"/>
                 </a:solidFill>
@@ -8507,7 +8400,7 @@
               </a:rPr>
               <a:t>Identity and resource isolation boundary restricting principal access so workloads.</a:t>
             </a:r>
-            <a:endParaRPr lang="en-US" sz="780" dirty="0"/>
+            <a:endParaRPr lang="en-US" sz="750" dirty="0"/>
           </a:p>
         </p:txBody>
       </p:sp>
@@ -8519,8 +8412,8 @@
         </p:nvSpPr>
         <p:spPr>
           <a:xfrm>
-            <a:off x="3639312" y="2850185"/>
-            <a:ext cx="7790688" cy="296266"/>
+            <a:off x="3639312" y="3081528"/>
+            <a:ext cx="7790688" cy="338328"/>
           </a:xfrm>
           <a:prstGeom prst="rect">
             <a:avLst/>
@@ -8544,8 +8437,8 @@
         </p:nvSpPr>
         <p:spPr>
           <a:xfrm>
-            <a:off x="3749040" y="2868473"/>
-            <a:ext cx="7571232" cy="259690"/>
+            <a:off x="3749040" y="3099816"/>
+            <a:ext cx="7571232" cy="301752"/>
           </a:xfrm>
           <a:prstGeom prst="rect">
             <a:avLst/>
@@ -8554,14 +8447,19 @@
           <a:ln/>
         </p:spPr>
         <p:txBody>
-          <a:bodyPr wrap="square" rtlCol="0" anchor="ctr"/>
-          <a:lstStyle/>
-          <a:p>
-            <a:pPr indent="0" marL="0">
-              <a:buNone/>
-            </a:pPr>
-            <a:r>
-              <a:rPr lang="en-US" sz="720" b="1" dirty="0">
+          <a:bodyPr wrap="square" rtlCol="0" anchor="ctr">
+            <a:normAutofit/>
+          </a:bodyPr>
+          <a:lstStyle/>
+          <a:p>
+            <a:pPr indent="0" marL="0">
+              <a:lnSpc>
+                <a:spcPct val="102000"/>
+              </a:lnSpc>
+              <a:buNone/>
+            </a:pPr>
+            <a:r>
+              <a:rPr lang="en-US" sz="690" b="1" dirty="0">
                 <a:solidFill>
                   <a:srgbClr val="202124"/>
                 </a:solidFill>
@@ -8572,10 +8470,13 @@
               <a:t>• VPC • Zero-Trust 5-Hop Enforcement Pipeline: </a:t>
             </a:r>
             <a:pPr indent="0" marL="0">
-              <a:buNone/>
-            </a:pPr>
-            <a:r>
-              <a:rPr lang="en-US" sz="700" dirty="0">
+              <a:lnSpc>
+                <a:spcPct val="102000"/>
+              </a:lnSpc>
+              <a:buNone/>
+            </a:pPr>
+            <a:r>
+              <a:rPr lang="en-US" sz="670" dirty="0">
                 <a:solidFill>
                   <a:srgbClr val="3C4043"/>
                 </a:solidFill>
@@ -8585,7 +8486,7 @@
               </a:rPr>
               <a:t>Binds IAM Principal Access Boundary (PAB) policies to spoke principals so credentials and tool calls remain strictly scoped to their authorized boundary.</a:t>
             </a:r>
-            <a:endParaRPr lang="en-US" sz="720" dirty="0"/>
+            <a:endParaRPr lang="en-US" sz="690" dirty="0"/>
           </a:p>
         </p:txBody>
       </p:sp>
@@ -8597,8 +8498,8 @@
         </p:nvSpPr>
         <p:spPr>
           <a:xfrm>
-            <a:off x="749808" y="3146450"/>
-            <a:ext cx="2889504" cy="785470"/>
+            <a:off x="749808" y="3419856"/>
+            <a:ext cx="2889504" cy="822960"/>
           </a:xfrm>
           <a:prstGeom prst="rect">
             <a:avLst/>
@@ -8622,8 +8523,8 @@
         </p:nvSpPr>
         <p:spPr>
           <a:xfrm>
-            <a:off x="841248" y="3164738"/>
-            <a:ext cx="2706624" cy="748894"/>
+            <a:off x="841248" y="3438144"/>
+            <a:ext cx="2706624" cy="786384"/>
           </a:xfrm>
           <a:prstGeom prst="rect">
             <a:avLst/>
@@ -8632,14 +8533,16 @@
           <a:ln/>
         </p:spPr>
         <p:txBody>
-          <a:bodyPr wrap="square" rtlCol="0" anchor="ctr"/>
-          <a:lstStyle/>
-          <a:p>
-            <a:pPr indent="0" marL="0">
-              <a:buNone/>
-            </a:pPr>
-            <a:r>
-              <a:rPr lang="en-US" sz="780" b="1" dirty="0">
+          <a:bodyPr wrap="square" rtlCol="0" anchor="ctr">
+            <a:normAutofit/>
+          </a:bodyPr>
+          <a:lstStyle/>
+          <a:p>
+            <a:pPr indent="0" marL="0">
+              <a:buNone/>
+            </a:pPr>
+            <a:r>
+              <a:rPr lang="en-US" sz="750" b="1" dirty="0">
                 <a:solidFill>
                   <a:srgbClr val="202124"/>
                 </a:solidFill>
@@ -8654,7 +8557,7 @@
               <a:buNone/>
             </a:pPr>
             <a:r>
-              <a:rPr lang="en-US" sz="670" dirty="0">
+              <a:rPr lang="en-US" sz="650" dirty="0">
                 <a:solidFill>
                   <a:srgbClr val="5F6368"/>
                 </a:solidFill>
@@ -8664,7 +8567,7 @@
               </a:rPr>
               <a:t>Isolated Google Cloud execution spokes.</a:t>
             </a:r>
-            <a:endParaRPr lang="en-US" sz="780" dirty="0"/>
+            <a:endParaRPr lang="en-US" sz="750" dirty="0"/>
           </a:p>
         </p:txBody>
       </p:sp>
@@ -8676,8 +8579,8 @@
         </p:nvSpPr>
         <p:spPr>
           <a:xfrm>
-            <a:off x="3639312" y="3146450"/>
-            <a:ext cx="7790688" cy="785470"/>
+            <a:off x="3639312" y="3419856"/>
+            <a:ext cx="7790688" cy="822960"/>
           </a:xfrm>
           <a:prstGeom prst="rect">
             <a:avLst/>
@@ -8701,8 +8604,8 @@
         </p:nvSpPr>
         <p:spPr>
           <a:xfrm>
-            <a:off x="3749040" y="3164738"/>
-            <a:ext cx="7571232" cy="748894"/>
+            <a:off x="3749040" y="3438144"/>
+            <a:ext cx="7571232" cy="786384"/>
           </a:xfrm>
           <a:prstGeom prst="rect">
             <a:avLst/>
@@ -8711,14 +8614,19 @@
           <a:ln/>
         </p:spPr>
         <p:txBody>
-          <a:bodyPr wrap="square" rtlCol="0" anchor="ctr"/>
-          <a:lstStyle/>
-          <a:p>
-            <a:pPr indent="0" marL="0">
-              <a:buNone/>
-            </a:pPr>
-            <a:r>
-              <a:rPr lang="en-US" sz="720" b="1" dirty="0">
+          <a:bodyPr wrap="square" rtlCol="0" anchor="ctr">
+            <a:normAutofit/>
+          </a:bodyPr>
+          <a:lstStyle/>
+          <a:p>
+            <a:pPr indent="0" marL="0">
+              <a:lnSpc>
+                <a:spcPct val="102000"/>
+              </a:lnSpc>
+              <a:buNone/>
+            </a:pPr>
+            <a:r>
+              <a:rPr lang="en-US" sz="690" b="1" dirty="0">
                 <a:solidFill>
                   <a:srgbClr val="202124"/>
                 </a:solidFill>
@@ -8729,10 +8637,13 @@
               <a:t>• Vertex AI Agent Engine: </a:t>
             </a:r>
             <a:pPr indent="0" marL="0">
-              <a:buNone/>
-            </a:pPr>
-            <a:r>
-              <a:rPr lang="en-US" sz="700" dirty="0">
+              <a:lnSpc>
+                <a:spcPct val="102000"/>
+              </a:lnSpc>
+              <a:buNone/>
+            </a:pPr>
+            <a:r>
+              <a:rPr lang="en-US" sz="670" dirty="0">
                 <a:solidFill>
                   <a:srgbClr val="3C4043"/>
                 </a:solidFill>
@@ -8744,10 +8655,13 @@
 </a:t>
             </a:r>
             <a:pPr indent="0" marL="0">
-              <a:buNone/>
-            </a:pPr>
-            <a:r>
-              <a:rPr lang="en-US" sz="720" b="1" dirty="0">
+              <a:lnSpc>
+                <a:spcPct val="102000"/>
+              </a:lnSpc>
+              <a:buNone/>
+            </a:pPr>
+            <a:r>
+              <a:rPr lang="en-US" sz="690" b="1" dirty="0">
                 <a:solidFill>
                   <a:srgbClr val="202124"/>
                 </a:solidFill>
@@ -8758,10 +8672,13 @@
               <a:t>• Vector 4: HTTP 400: </a:t>
             </a:r>
             <a:pPr indent="0" marL="0">
-              <a:buNone/>
-            </a:pPr>
-            <a:r>
-              <a:rPr lang="en-US" sz="700" dirty="0">
+              <a:lnSpc>
+                <a:spcPct val="102000"/>
+              </a:lnSpc>
+              <a:buNone/>
+            </a:pPr>
+            <a:r>
+              <a:rPr lang="en-US" sz="670" dirty="0">
                 <a:solidFill>
                   <a:srgbClr val="3C4043"/>
                 </a:solidFill>
@@ -8773,10 +8690,13 @@
 </a:t>
             </a:r>
             <a:pPr indent="0" marL="0">
-              <a:buNone/>
-            </a:pPr>
-            <a:r>
-              <a:rPr lang="en-US" sz="720" b="1" dirty="0">
+              <a:lnSpc>
+                <a:spcPct val="102000"/>
+              </a:lnSpc>
+              <a:buNone/>
+            </a:pPr>
+            <a:r>
+              <a:rPr lang="en-US" sz="690" b="1" dirty="0">
                 <a:solidFill>
                   <a:srgbClr val="202124"/>
                 </a:solidFill>
@@ -8787,10 +8707,13 @@
               <a:t>• Vector 8: SDP Mask: </a:t>
             </a:r>
             <a:pPr indent="0" marL="0">
-              <a:buNone/>
-            </a:pPr>
-            <a:r>
-              <a:rPr lang="en-US" sz="700" dirty="0">
+              <a:lnSpc>
+                <a:spcPct val="102000"/>
+              </a:lnSpc>
+              <a:buNone/>
+            </a:pPr>
+            <a:r>
+              <a:rPr lang="en-US" sz="670" dirty="0">
                 <a:solidFill>
                   <a:srgbClr val="3C4043"/>
                 </a:solidFill>
@@ -8802,10 +8725,13 @@
 </a:t>
             </a:r>
             <a:pPr indent="0" marL="0">
-              <a:buNone/>
-            </a:pPr>
-            <a:r>
-              <a:rPr lang="en-US" sz="720" b="1" dirty="0">
+              <a:lnSpc>
+                <a:spcPct val="102000"/>
+              </a:lnSpc>
+              <a:buNone/>
+            </a:pPr>
+            <a:r>
+              <a:rPr lang="en-US" sz="690" b="1" dirty="0">
                 <a:solidFill>
                   <a:srgbClr val="202124"/>
                 </a:solidFill>
@@ -8816,10 +8742,13 @@
               <a:t>• Zero Raw PII Egress: </a:t>
             </a:r>
             <a:pPr indent="0" marL="0">
-              <a:buNone/>
-            </a:pPr>
-            <a:r>
-              <a:rPr lang="en-US" sz="700" dirty="0">
+              <a:lnSpc>
+                <a:spcPct val="102000"/>
+              </a:lnSpc>
+              <a:buNone/>
+            </a:pPr>
+            <a:r>
+              <a:rPr lang="en-US" sz="670" dirty="0">
                 <a:solidFill>
                   <a:srgbClr val="3C4043"/>
                 </a:solidFill>
@@ -8829,7 +8758,7 @@
               </a:rPr>
               <a:t>Isolated persistence layer enforcing access boundaries, vector namespaces, and encryption at rest.</a:t>
             </a:r>
-            <a:endParaRPr lang="en-US" sz="720" dirty="0"/>
+            <a:endParaRPr lang="en-US" sz="690" dirty="0"/>
           </a:p>
         </p:txBody>
       </p:sp>
@@ -8841,7 +8770,7 @@
         </p:nvSpPr>
         <p:spPr>
           <a:xfrm>
-            <a:off x="749808" y="4041648"/>
+            <a:off x="749808" y="4315968"/>
             <a:ext cx="10680192" cy="0"/>
           </a:xfrm>
           <a:prstGeom prst="line">
@@ -8864,8 +8793,8 @@
         </p:nvSpPr>
         <p:spPr>
           <a:xfrm>
-            <a:off x="749808" y="4114800"/>
-            <a:ext cx="10680192" cy="256032"/>
+            <a:off x="749808" y="4370832"/>
+            <a:ext cx="10680192" cy="237744"/>
           </a:xfrm>
           <a:prstGeom prst="rect">
             <a:avLst/>
@@ -8881,7 +8810,7 @@
               <a:buNone/>
             </a:pPr>
             <a:r>
-              <a:rPr lang="en-US" sz="1300" dirty="0">
+              <a:rPr lang="en-US" sz="1250" dirty="0">
                 <a:solidFill>
                   <a:srgbClr val="202124"/>
                 </a:solidFill>
@@ -8891,7 +8820,7 @@
               </a:rPr>
               <a:t>Agentic flow</a:t>
             </a:r>
-            <a:endParaRPr lang="en-US" sz="1300" dirty="0"/>
+            <a:endParaRPr lang="en-US" sz="1250" dirty="0"/>
           </a:p>
         </p:txBody>
       </p:sp>
@@ -8903,8 +8832,8 @@
         </p:nvSpPr>
         <p:spPr>
           <a:xfrm>
-            <a:off x="749808" y="4407408"/>
-            <a:ext cx="10680192" cy="2139696"/>
+            <a:off x="749808" y="4626864"/>
+            <a:ext cx="10680192" cy="1901952"/>
           </a:xfrm>
           <a:prstGeom prst="rect">
             <a:avLst/>
@@ -8913,17 +8842,19 @@
           <a:ln/>
         </p:spPr>
         <p:txBody>
-          <a:bodyPr wrap="square" rtlCol="0" anchor="t"/>
-          <a:lstStyle/>
-          <a:p>
-            <a:pPr indent="0" marL="0">
-              <a:lnSpc>
-                <a:spcPct val="108000"/>
-              </a:lnSpc>
-              <a:buNone/>
-            </a:pPr>
-            <a:r>
-              <a:rPr lang="en-US" sz="740" b="1" dirty="0">
+          <a:bodyPr wrap="square" rtlCol="0" anchor="t">
+            <a:normAutofit/>
+          </a:bodyPr>
+          <a:lstStyle/>
+          <a:p>
+            <a:pPr indent="0" marL="0">
+              <a:lnSpc>
+                <a:spcPct val="106000"/>
+              </a:lnSpc>
+              <a:buNone/>
+            </a:pPr>
+            <a:r>
+              <a:rPr lang="en-US" sz="730" b="1" dirty="0">
                 <a:solidFill>
                   <a:srgbClr val="202124"/>
                 </a:solidFill>
@@ -8935,12 +8866,12 @@
             </a:r>
             <a:pPr indent="0" marL="0">
               <a:lnSpc>
-                <a:spcPct val="108000"/>
-              </a:lnSpc>
-              <a:buNone/>
-            </a:pPr>
-            <a:r>
-              <a:rPr lang="en-US" sz="730" dirty="0">
+                <a:spcPct val="106000"/>
+              </a:lnSpc>
+              <a:buNone/>
+            </a:pPr>
+            <a:r>
+              <a:rPr lang="en-US" sz="720" dirty="0">
                 <a:solidFill>
                   <a:srgbClr val="3C4043"/>
                 </a:solidFill>
@@ -8953,12 +8884,12 @@
             </a:r>
             <a:pPr indent="0" marL="0">
               <a:lnSpc>
-                <a:spcPct val="108000"/>
-              </a:lnSpc>
-              <a:buNone/>
-            </a:pPr>
-            <a:r>
-              <a:rPr lang="en-US" sz="740" b="1" dirty="0">
+                <a:spcPct val="106000"/>
+              </a:lnSpc>
+              <a:buNone/>
+            </a:pPr>
+            <a:r>
+              <a:rPr lang="en-US" sz="730" b="1" dirty="0">
                 <a:solidFill>
                   <a:srgbClr val="202124"/>
                 </a:solidFill>
@@ -8970,12 +8901,12 @@
             </a:r>
             <a:pPr indent="0" marL="0">
               <a:lnSpc>
-                <a:spcPct val="108000"/>
-              </a:lnSpc>
-              <a:buNone/>
-            </a:pPr>
-            <a:r>
-              <a:rPr lang="en-US" sz="730" dirty="0">
+                <a:spcPct val="106000"/>
+              </a:lnSpc>
+              <a:buNone/>
+            </a:pPr>
+            <a:r>
+              <a:rPr lang="en-US" sz="720" dirty="0">
                 <a:solidFill>
                   <a:srgbClr val="3C4043"/>
                 </a:solidFill>
@@ -8983,17 +8914,17 @@
                 <a:ea typeface="Arial" pitchFamily="34" charset="-122"/>
                 <a:cs typeface="Arial" pitchFamily="34" charset="-120"/>
               </a:rPr>
-              <a:t>After passing policy and security checks across Vector 1: Header Strip, Vector 2: Agent 403, and Vector 3: Tool Prune, the request is forwarded to Hop 2 Catalog PDP.
+              <a:t>After passing policy and security checks across Vector 1: Cloud Armor, Vector 2: Agent 403, and Vector 3: Tool Prune, the request is forwarded to Hop 2 Catalog PDP.
 </a:t>
             </a:r>
             <a:pPr indent="0" marL="0">
               <a:lnSpc>
-                <a:spcPct val="108000"/>
-              </a:lnSpc>
-              <a:buNone/>
-            </a:pPr>
-            <a:r>
-              <a:rPr lang="en-US" sz="740" b="1" dirty="0">
+                <a:spcPct val="106000"/>
+              </a:lnSpc>
+              <a:buNone/>
+            </a:pPr>
+            <a:r>
+              <a:rPr lang="en-US" sz="730" b="1" dirty="0">
                 <a:solidFill>
                   <a:srgbClr val="202124"/>
                 </a:solidFill>
@@ -9005,12 +8936,12 @@
             </a:r>
             <a:pPr indent="0" marL="0">
               <a:lnSpc>
-                <a:spcPct val="108000"/>
-              </a:lnSpc>
-              <a:buNone/>
-            </a:pPr>
-            <a:r>
-              <a:rPr lang="en-US" sz="730" dirty="0">
+                <a:spcPct val="106000"/>
+              </a:lnSpc>
+              <a:buNone/>
+            </a:pPr>
+            <a:r>
+              <a:rPr lang="en-US" sz="720" dirty="0">
                 <a:solidFill>
                   <a:srgbClr val="3C4043"/>
                 </a:solidFill>
@@ -9023,12 +8954,12 @@
             </a:r>
             <a:pPr indent="0" marL="0">
               <a:lnSpc>
-                <a:spcPct val="108000"/>
-              </a:lnSpc>
-              <a:buNone/>
-            </a:pPr>
-            <a:r>
-              <a:rPr lang="en-US" sz="740" b="1" dirty="0">
+                <a:spcPct val="106000"/>
+              </a:lnSpc>
+              <a:buNone/>
+            </a:pPr>
+            <a:r>
+              <a:rPr lang="en-US" sz="730" b="1" dirty="0">
                 <a:solidFill>
                   <a:srgbClr val="202124"/>
                 </a:solidFill>
@@ -9040,12 +8971,12 @@
             </a:r>
             <a:pPr indent="0" marL="0">
               <a:lnSpc>
-                <a:spcPct val="108000"/>
-              </a:lnSpc>
-              <a:buNone/>
-            </a:pPr>
-            <a:r>
-              <a:rPr lang="en-US" sz="730" dirty="0">
+                <a:spcPct val="106000"/>
+              </a:lnSpc>
+              <a:buNone/>
+            </a:pPr>
+            <a:r>
+              <a:rPr lang="en-US" sz="720" dirty="0">
                 <a:solidFill>
                   <a:srgbClr val="3C4043"/>
                 </a:solidFill>
@@ -9058,12 +8989,12 @@
             </a:r>
             <a:pPr indent="0" marL="0">
               <a:lnSpc>
-                <a:spcPct val="108000"/>
-              </a:lnSpc>
-              <a:buNone/>
-            </a:pPr>
-            <a:r>
-              <a:rPr lang="en-US" sz="700" b="1" dirty="0">
+                <a:spcPct val="106000"/>
+              </a:lnSpc>
+              <a:buNone/>
+            </a:pPr>
+            <a:r>
+              <a:rPr lang="en-US" sz="690" b="1" dirty="0">
                 <a:solidFill>
                   <a:srgbClr val="202124"/>
                 </a:solidFill>
@@ -9075,12 +9006,12 @@
             </a:r>
             <a:pPr indent="0" marL="0">
               <a:lnSpc>
-                <a:spcPct val="108000"/>
-              </a:lnSpc>
-              <a:buNone/>
-            </a:pPr>
-            <a:r>
-              <a:rPr lang="en-US" sz="690" dirty="0">
+                <a:spcPct val="106000"/>
+              </a:lnSpc>
+              <a:buNone/>
+            </a:pPr>
+            <a:r>
+              <a:rPr lang="en-US" sz="680" dirty="0">
                 <a:solidFill>
                   <a:srgbClr val="3C4043"/>
                 </a:solidFill>
@@ -9093,12 +9024,12 @@
             </a:r>
             <a:pPr indent="0" marL="0">
               <a:lnSpc>
-                <a:spcPct val="108000"/>
-              </a:lnSpc>
-              <a:buNone/>
-            </a:pPr>
-            <a:r>
-              <a:rPr lang="en-US" sz="700" b="1" dirty="0">
+                <a:spcPct val="106000"/>
+              </a:lnSpc>
+              <a:buNone/>
+            </a:pPr>
+            <a:r>
+              <a:rPr lang="en-US" sz="690" b="1" dirty="0">
                 <a:solidFill>
                   <a:srgbClr val="202124"/>
                 </a:solidFill>
@@ -9110,12 +9041,12 @@
             </a:r>
             <a:pPr indent="0" marL="0">
               <a:lnSpc>
-                <a:spcPct val="108000"/>
-              </a:lnSpc>
-              <a:buNone/>
-            </a:pPr>
-            <a:r>
-              <a:rPr lang="en-US" sz="690" dirty="0">
+                <a:spcPct val="106000"/>
+              </a:lnSpc>
+              <a:buNone/>
+            </a:pPr>
+            <a:r>
+              <a:rPr lang="en-US" sz="680" dirty="0">
                 <a:solidFill>
                   <a:srgbClr val="3C4043"/>
                 </a:solidFill>
@@ -9128,12 +9059,12 @@
             </a:r>
             <a:pPr indent="0" marL="0">
               <a:lnSpc>
-                <a:spcPct val="108000"/>
-              </a:lnSpc>
-              <a:buNone/>
-            </a:pPr>
-            <a:r>
-              <a:rPr lang="en-US" sz="700" b="1" dirty="0">
+                <a:spcPct val="106000"/>
+              </a:lnSpc>
+              <a:buNone/>
+            </a:pPr>
+            <a:r>
+              <a:rPr lang="en-US" sz="690" b="1" dirty="0">
                 <a:solidFill>
                   <a:srgbClr val="202124"/>
                 </a:solidFill>
@@ -9145,12 +9076,12 @@
             </a:r>
             <a:pPr indent="0" marL="0">
               <a:lnSpc>
-                <a:spcPct val="108000"/>
-              </a:lnSpc>
-              <a:buNone/>
-            </a:pPr>
-            <a:r>
-              <a:rPr lang="en-US" sz="690" dirty="0">
+                <a:spcPct val="106000"/>
+              </a:lnSpc>
+              <a:buNone/>
+            </a:pPr>
+            <a:r>
+              <a:rPr lang="en-US" sz="680" dirty="0">
                 <a:solidFill>
                   <a:srgbClr val="3C4043"/>
                 </a:solidFill>
@@ -9163,12 +9094,12 @@
             </a:r>
             <a:pPr indent="0" marL="0">
               <a:lnSpc>
-                <a:spcPct val="108000"/>
-              </a:lnSpc>
-              <a:buNone/>
-            </a:pPr>
-            <a:r>
-              <a:rPr lang="en-US" sz="700" b="1" dirty="0">
+                <a:spcPct val="106000"/>
+              </a:lnSpc>
+              <a:buNone/>
+            </a:pPr>
+            <a:r>
+              <a:rPr lang="en-US" sz="690" b="1" dirty="0">
                 <a:solidFill>
                   <a:srgbClr val="202124"/>
                 </a:solidFill>
@@ -9180,12 +9111,12 @@
             </a:r>
             <a:pPr indent="0" marL="0">
               <a:lnSpc>
-                <a:spcPct val="108000"/>
-              </a:lnSpc>
-              <a:buNone/>
-            </a:pPr>
-            <a:r>
-              <a:rPr lang="en-US" sz="690" dirty="0">
+                <a:spcPct val="106000"/>
+              </a:lnSpc>
+              <a:buNone/>
+            </a:pPr>
+            <a:r>
+              <a:rPr lang="en-US" sz="680" dirty="0">
                 <a:solidFill>
                   <a:srgbClr val="3C4043"/>
                 </a:solidFill>
@@ -9198,12 +9129,12 @@
             </a:r>
             <a:pPr indent="0" marL="0">
               <a:lnSpc>
-                <a:spcPct val="108000"/>
-              </a:lnSpc>
-              <a:buNone/>
-            </a:pPr>
-            <a:r>
-              <a:rPr lang="en-US" sz="740" b="1" dirty="0">
+                <a:spcPct val="106000"/>
+              </a:lnSpc>
+              <a:buNone/>
+            </a:pPr>
+            <a:r>
+              <a:rPr lang="en-US" sz="730" b="1" dirty="0">
                 <a:solidFill>
                   <a:srgbClr val="202124"/>
                 </a:solidFill>
@@ -9215,12 +9146,12 @@
             </a:r>
             <a:pPr indent="0" marL="0">
               <a:lnSpc>
-                <a:spcPct val="108000"/>
-              </a:lnSpc>
-              <a:buNone/>
-            </a:pPr>
-            <a:r>
-              <a:rPr lang="en-US" sz="730" dirty="0">
+                <a:spcPct val="106000"/>
+              </a:lnSpc>
+              <a:buNone/>
+            </a:pPr>
+            <a:r>
+              <a:rPr lang="en-US" sz="720" dirty="0">
                 <a:solidFill>
                   <a:srgbClr val="3C4043"/>
                 </a:solidFill>
@@ -9233,12 +9164,12 @@
             </a:r>
             <a:pPr indent="0" marL="0">
               <a:lnSpc>
-                <a:spcPct val="108000"/>
-              </a:lnSpc>
-              <a:buNone/>
-            </a:pPr>
-            <a:r>
-              <a:rPr lang="en-US" sz="740" b="1" dirty="0">
+                <a:spcPct val="106000"/>
+              </a:lnSpc>
+              <a:buNone/>
+            </a:pPr>
+            <a:r>
+              <a:rPr lang="en-US" sz="730" b="1" dirty="0">
                 <a:solidFill>
                   <a:srgbClr val="202124"/>
                 </a:solidFill>
@@ -9250,12 +9181,12 @@
             </a:r>
             <a:pPr indent="0" marL="0">
               <a:lnSpc>
-                <a:spcPct val="108000"/>
-              </a:lnSpc>
-              <a:buNone/>
-            </a:pPr>
-            <a:r>
-              <a:rPr lang="en-US" sz="730" dirty="0">
+                <a:spcPct val="106000"/>
+              </a:lnSpc>
+              <a:buNone/>
+            </a:pPr>
+            <a:r>
+              <a:rPr lang="en-US" sz="720" dirty="0">
                 <a:solidFill>
                   <a:srgbClr val="3C4043"/>
                 </a:solidFill>
@@ -9268,12 +9199,12 @@
             </a:r>
             <a:pPr indent="0" marL="0">
               <a:lnSpc>
-                <a:spcPct val="108000"/>
-              </a:lnSpc>
-              <a:buNone/>
-            </a:pPr>
-            <a:r>
-              <a:rPr lang="en-US" sz="740" b="1" dirty="0">
+                <a:spcPct val="106000"/>
+              </a:lnSpc>
+              <a:buNone/>
+            </a:pPr>
+            <a:r>
+              <a:rPr lang="en-US" sz="730" b="1" dirty="0">
                 <a:solidFill>
                   <a:srgbClr val="202124"/>
                 </a:solidFill>
@@ -9285,12 +9216,12 @@
             </a:r>
             <a:pPr indent="0" marL="0">
               <a:lnSpc>
-                <a:spcPct val="108000"/>
-              </a:lnSpc>
-              <a:buNone/>
-            </a:pPr>
-            <a:r>
-              <a:rPr lang="en-US" sz="730" dirty="0">
+                <a:spcPct val="106000"/>
+              </a:lnSpc>
+              <a:buNone/>
+            </a:pPr>
+            <a:r>
+              <a:rPr lang="en-US" sz="720" dirty="0">
                 <a:solidFill>
                   <a:srgbClr val="3C4043"/>
                 </a:solidFill>
@@ -9301,7 +9232,7 @@
               <a:t>The verified response returns to the caller through the Hop 1 &amp; Hop 2 Gates, while structured OpenTelemetry audit and FinOps spans stream to the Hop 3 &amp; 5 FinOps &amp; Audit Gates.
 </a:t>
             </a:r>
-            <a:endParaRPr lang="en-US" sz="740" dirty="0"/>
+            <a:endParaRPr lang="en-US" sz="730" dirty="0"/>
           </a:p>
         </p:txBody>
       </p:sp>
@@ -9473,8 +9404,8 @@
         </p:nvSpPr>
         <p:spPr>
           <a:xfrm>
-            <a:off x="749808" y="658368"/>
-            <a:ext cx="10680192" cy="310896"/>
+            <a:off x="749808" y="621792"/>
+            <a:ext cx="10680192" cy="274320"/>
           </a:xfrm>
           <a:prstGeom prst="rect">
             <a:avLst/>
@@ -9490,7 +9421,7 @@
               <a:buNone/>
             </a:pPr>
             <a:r>
-              <a:rPr lang="en-US" sz="1550" dirty="0">
+              <a:rPr lang="en-US" sz="1500" dirty="0">
                 <a:solidFill>
                   <a:srgbClr val="202124"/>
                 </a:solidFill>
@@ -9500,7 +9431,7 @@
               </a:rPr>
               <a:t>Products used</a:t>
             </a:r>
-            <a:endParaRPr lang="en-US" sz="1550" dirty="0"/>
+            <a:endParaRPr lang="en-US" sz="1500" dirty="0"/>
           </a:p>
         </p:txBody>
       </p:sp>
@@ -9512,8 +9443,8 @@
         </p:nvSpPr>
         <p:spPr>
           <a:xfrm>
-            <a:off x="749808" y="1005840"/>
-            <a:ext cx="10680192" cy="219456"/>
+            <a:off x="749808" y="914400"/>
+            <a:ext cx="10680192" cy="329184"/>
           </a:xfrm>
           <a:prstGeom prst="rect">
             <a:avLst/>
@@ -9522,14 +9453,14 @@
           <a:ln/>
         </p:spPr>
         <p:txBody>
-          <a:bodyPr wrap="square" rtlCol="0" anchor="ctr"/>
-          <a:lstStyle/>
-          <a:p>
-            <a:pPr indent="0" marL="0">
-              <a:buNone/>
-            </a:pPr>
-            <a:r>
-              <a:rPr lang="en-US" sz="920" dirty="0">
+          <a:bodyPr wrap="square" rtlCol="0" anchor="t"/>
+          <a:lstStyle/>
+          <a:p>
+            <a:pPr indent="0" marL="0">
+              <a:buNone/>
+            </a:pPr>
+            <a:r>
+              <a:rPr lang="en-US" sz="860" dirty="0">
                 <a:solidFill>
                   <a:srgbClr val="3C4043"/>
                 </a:solidFill>
@@ -9539,7 +9470,7 @@
               </a:rPr>
               <a:t>This reference architecture uses the following Google Cloud services and open-source frameworks to implement Production Verification: 10-Point Red-Team Breach Simulation &amp; Cloud Console Runbook.</a:t>
             </a:r>
-            <a:endParaRPr lang="en-US" sz="920" dirty="0"/>
+            <a:endParaRPr lang="en-US" sz="860" dirty="0"/>
           </a:p>
         </p:txBody>
       </p:sp>
@@ -9551,8 +9482,8 @@
         </p:nvSpPr>
         <p:spPr>
           <a:xfrm>
-            <a:off x="877824" y="1280160"/>
-            <a:ext cx="10552176" cy="1993392"/>
+            <a:off x="877824" y="1261872"/>
+            <a:ext cx="10552176" cy="2011680"/>
           </a:xfrm>
           <a:prstGeom prst="rect">
             <a:avLst/>
@@ -9561,17 +9492,19 @@
           <a:ln/>
         </p:spPr>
         <p:txBody>
-          <a:bodyPr wrap="square" rtlCol="0" anchor="t"/>
-          <a:lstStyle/>
-          <a:p>
-            <a:pPr indent="0" marL="0">
-              <a:lnSpc>
-                <a:spcPct val="124000"/>
-              </a:lnSpc>
-              <a:buNone/>
-            </a:pPr>
-            <a:r>
-              <a:rPr lang="en-US" sz="840" b="1" dirty="0">
+          <a:bodyPr wrap="square" rtlCol="0" anchor="t">
+            <a:normAutofit/>
+          </a:bodyPr>
+          <a:lstStyle/>
+          <a:p>
+            <a:pPr indent="0" marL="0">
+              <a:lnSpc>
+                <a:spcPct val="118000"/>
+              </a:lnSpc>
+              <a:buNone/>
+            </a:pPr>
+            <a:r>
+              <a:rPr lang="en-US" sz="810" b="1" dirty="0">
                 <a:solidFill>
                   <a:srgbClr val="1A73E8"/>
                 </a:solidFill>
@@ -9583,12 +9516,12 @@
             </a:r>
             <a:pPr indent="0" marL="0">
               <a:lnSpc>
-                <a:spcPct val="124000"/>
-              </a:lnSpc>
-              <a:buNone/>
-            </a:pPr>
-            <a:r>
-              <a:rPr lang="en-US" sz="820" dirty="0">
+                <a:spcPct val="118000"/>
+              </a:lnSpc>
+              <a:buNone/>
+            </a:pPr>
+            <a:r>
+              <a:rPr lang="en-US" sz="790" dirty="0">
                 <a:solidFill>
                   <a:srgbClr val="3C4043"/>
                 </a:solidFill>
@@ -9601,12 +9534,12 @@
             </a:r>
             <a:pPr indent="0" marL="0">
               <a:lnSpc>
-                <a:spcPct val="124000"/>
-              </a:lnSpc>
-              <a:buNone/>
-            </a:pPr>
-            <a:r>
-              <a:rPr lang="en-US" sz="840" b="1" dirty="0">
+                <a:spcPct val="118000"/>
+              </a:lnSpc>
+              <a:buNone/>
+            </a:pPr>
+            <a:r>
+              <a:rPr lang="en-US" sz="810" b="1" dirty="0">
                 <a:solidFill>
                   <a:srgbClr val="1A73E8"/>
                 </a:solidFill>
@@ -9618,12 +9551,12 @@
             </a:r>
             <a:pPr indent="0" marL="0">
               <a:lnSpc>
-                <a:spcPct val="124000"/>
-              </a:lnSpc>
-              <a:buNone/>
-            </a:pPr>
-            <a:r>
-              <a:rPr lang="en-US" sz="820" dirty="0">
+                <a:spcPct val="118000"/>
+              </a:lnSpc>
+              <a:buNone/>
+            </a:pPr>
+            <a:r>
+              <a:rPr lang="en-US" sz="790" dirty="0">
                 <a:solidFill>
                   <a:srgbClr val="3C4043"/>
                 </a:solidFill>
@@ -9636,12 +9569,12 @@
             </a:r>
             <a:pPr indent="0" marL="0">
               <a:lnSpc>
-                <a:spcPct val="124000"/>
-              </a:lnSpc>
-              <a:buNone/>
-            </a:pPr>
-            <a:r>
-              <a:rPr lang="en-US" sz="840" b="1" dirty="0">
+                <a:spcPct val="118000"/>
+              </a:lnSpc>
+              <a:buNone/>
+            </a:pPr>
+            <a:r>
+              <a:rPr lang="en-US" sz="810" b="1" dirty="0">
                 <a:solidFill>
                   <a:srgbClr val="1A73E8"/>
                 </a:solidFill>
@@ -9653,12 +9586,12 @@
             </a:r>
             <a:pPr indent="0" marL="0">
               <a:lnSpc>
-                <a:spcPct val="124000"/>
-              </a:lnSpc>
-              <a:buNone/>
-            </a:pPr>
-            <a:r>
-              <a:rPr lang="en-US" sz="820" dirty="0">
+                <a:spcPct val="118000"/>
+              </a:lnSpc>
+              <a:buNone/>
+            </a:pPr>
+            <a:r>
+              <a:rPr lang="en-US" sz="790" dirty="0">
                 <a:solidFill>
                   <a:srgbClr val="3C4043"/>
                 </a:solidFill>
@@ -9671,12 +9604,12 @@
             </a:r>
             <a:pPr indent="0" marL="0">
               <a:lnSpc>
-                <a:spcPct val="124000"/>
-              </a:lnSpc>
-              <a:buNone/>
-            </a:pPr>
-            <a:r>
-              <a:rPr lang="en-US" sz="840" b="1" dirty="0">
+                <a:spcPct val="118000"/>
+              </a:lnSpc>
+              <a:buNone/>
+            </a:pPr>
+            <a:r>
+              <a:rPr lang="en-US" sz="810" b="1" dirty="0">
                 <a:solidFill>
                   <a:srgbClr val="1A73E8"/>
                 </a:solidFill>
@@ -9688,12 +9621,12 @@
             </a:r>
             <a:pPr indent="0" marL="0">
               <a:lnSpc>
-                <a:spcPct val="124000"/>
-              </a:lnSpc>
-              <a:buNone/>
-            </a:pPr>
-            <a:r>
-              <a:rPr lang="en-US" sz="820" dirty="0">
+                <a:spcPct val="118000"/>
+              </a:lnSpc>
+              <a:buNone/>
+            </a:pPr>
+            <a:r>
+              <a:rPr lang="en-US" sz="790" dirty="0">
                 <a:solidFill>
                   <a:srgbClr val="3C4043"/>
                 </a:solidFill>
@@ -9706,12 +9639,12 @@
             </a:r>
             <a:pPr indent="0" marL="0">
               <a:lnSpc>
-                <a:spcPct val="124000"/>
-              </a:lnSpc>
-              <a:buNone/>
-            </a:pPr>
-            <a:r>
-              <a:rPr lang="en-US" sz="840" b="1" dirty="0">
+                <a:spcPct val="118000"/>
+              </a:lnSpc>
+              <a:buNone/>
+            </a:pPr>
+            <a:r>
+              <a:rPr lang="en-US" sz="810" b="1" dirty="0">
                 <a:solidFill>
                   <a:srgbClr val="1A73E8"/>
                 </a:solidFill>
@@ -9723,12 +9656,12 @@
             </a:r>
             <a:pPr indent="0" marL="0">
               <a:lnSpc>
-                <a:spcPct val="124000"/>
-              </a:lnSpc>
-              <a:buNone/>
-            </a:pPr>
-            <a:r>
-              <a:rPr lang="en-US" sz="820" dirty="0">
+                <a:spcPct val="118000"/>
+              </a:lnSpc>
+              <a:buNone/>
+            </a:pPr>
+            <a:r>
+              <a:rPr lang="en-US" sz="790" dirty="0">
                 <a:solidFill>
                   <a:srgbClr val="3C4043"/>
                 </a:solidFill>
@@ -9741,12 +9674,12 @@
             </a:r>
             <a:pPr indent="0" marL="0">
               <a:lnSpc>
-                <a:spcPct val="124000"/>
-              </a:lnSpc>
-              <a:buNone/>
-            </a:pPr>
-            <a:r>
-              <a:rPr lang="en-US" sz="840" b="1" dirty="0">
+                <a:spcPct val="118000"/>
+              </a:lnSpc>
+              <a:buNone/>
+            </a:pPr>
+            <a:r>
+              <a:rPr lang="en-US" sz="810" b="1" dirty="0">
                 <a:solidFill>
                   <a:srgbClr val="1A73E8"/>
                 </a:solidFill>
@@ -9758,12 +9691,12 @@
             </a:r>
             <a:pPr indent="0" marL="0">
               <a:lnSpc>
-                <a:spcPct val="124000"/>
-              </a:lnSpc>
-              <a:buNone/>
-            </a:pPr>
-            <a:r>
-              <a:rPr lang="en-US" sz="820" dirty="0">
+                <a:spcPct val="118000"/>
+              </a:lnSpc>
+              <a:buNone/>
+            </a:pPr>
+            <a:r>
+              <a:rPr lang="en-US" sz="790" dirty="0">
                 <a:solidFill>
                   <a:srgbClr val="3C4043"/>
                 </a:solidFill>
@@ -9773,43 +9706,165 @@
               </a:rPr>
               <a:t>Centralized posture management and threat detection across IAM, VPC Service Controls, and Vertex AI workloads.</a:t>
             </a:r>
+            <a:endParaRPr lang="en-US" sz="810" dirty="0"/>
+          </a:p>
+        </p:txBody>
+      </p:sp>
+      <p:sp>
+        <p:nvSpPr>
+          <p:cNvPr id="9" name="Shape 7"/>
+          <p:cNvSpPr/>
+          <p:nvPr/>
+        </p:nvSpPr>
+        <p:spPr>
+          <a:xfrm>
+            <a:off x="749808" y="3346704"/>
+            <a:ext cx="10680192" cy="0"/>
+          </a:xfrm>
+          <a:prstGeom prst="line">
+            <a:avLst/>
+          </a:prstGeom>
+          <a:noFill/>
+          <a:ln w="9525">
+            <a:solidFill>
+              <a:srgbClr val="DADCE0"/>
+            </a:solidFill>
+            <a:prstDash val="solid"/>
+          </a:ln>
+        </p:spPr>
+      </p:sp>
+      <p:sp>
+        <p:nvSpPr>
+          <p:cNvPr id="10" name="Text 8"/>
+          <p:cNvSpPr/>
+          <p:nvPr/>
+        </p:nvSpPr>
+        <p:spPr>
+          <a:xfrm>
+            <a:off x="749808" y="3419856"/>
+            <a:ext cx="10680192" cy="274320"/>
+          </a:xfrm>
+          <a:prstGeom prst="rect">
+            <a:avLst/>
+          </a:prstGeom>
+          <a:noFill/>
+          <a:ln/>
+        </p:spPr>
+        <p:txBody>
+          <a:bodyPr wrap="square" rtlCol="0" anchor="ctr"/>
+          <a:lstStyle/>
+          <a:p>
+            <a:pPr indent="0" marL="0">
+              <a:buNone/>
+            </a:pPr>
+            <a:r>
+              <a:rPr lang="en-US" sz="1500" dirty="0">
+                <a:solidFill>
+                  <a:srgbClr val="202124"/>
+                </a:solidFill>
+                <a:latin typeface="Arial" pitchFamily="34" charset="0"/>
+                <a:ea typeface="Arial" pitchFamily="34" charset="-122"/>
+                <a:cs typeface="Arial" pitchFamily="34" charset="-120"/>
+              </a:rPr>
+              <a:t>Use case</a:t>
+            </a:r>
+            <a:endParaRPr lang="en-US" sz="1500" dirty="0"/>
+          </a:p>
+        </p:txBody>
+      </p:sp>
+      <p:sp>
+        <p:nvSpPr>
+          <p:cNvPr id="11" name="Text 9"/>
+          <p:cNvSpPr/>
+          <p:nvPr/>
+        </p:nvSpPr>
+        <p:spPr>
+          <a:xfrm>
+            <a:off x="749808" y="3712464"/>
+            <a:ext cx="10680192" cy="237744"/>
+          </a:xfrm>
+          <a:prstGeom prst="rect">
+            <a:avLst/>
+          </a:prstGeom>
+          <a:noFill/>
+          <a:ln/>
+        </p:spPr>
+        <p:txBody>
+          <a:bodyPr wrap="square" rtlCol="0" anchor="ctr"/>
+          <a:lstStyle/>
+          <a:p>
+            <a:pPr indent="0" marL="0">
+              <a:buNone/>
+            </a:pPr>
+            <a:r>
+              <a:rPr lang="en-US" sz="1100" b="1" dirty="0">
+                <a:solidFill>
+                  <a:srgbClr val="202124"/>
+                </a:solidFill>
+                <a:latin typeface="Arial" pitchFamily="34" charset="0"/>
+                <a:ea typeface="Arial" pitchFamily="34" charset="-122"/>
+                <a:cs typeface="Arial" pitchFamily="34" charset="-120"/>
+              </a:rPr>
+              <a:t>Live Google Cloud Console, Cloud Shell SSH &amp; BigQuery Audit Verification Runbook</a:t>
+            </a:r>
+            <a:endParaRPr lang="en-US" sz="1100" dirty="0"/>
+          </a:p>
+        </p:txBody>
+      </p:sp>
+      <p:sp>
+        <p:nvSpPr>
+          <p:cNvPr id="12" name="Text 10"/>
+          <p:cNvSpPr/>
+          <p:nvPr/>
+        </p:nvSpPr>
+        <p:spPr>
+          <a:xfrm>
+            <a:off x="749808" y="3986784"/>
+            <a:ext cx="10680192" cy="749808"/>
+          </a:xfrm>
+          <a:prstGeom prst="rect">
+            <a:avLst/>
+          </a:prstGeom>
+          <a:noFill/>
+          <a:ln/>
+        </p:spPr>
+        <p:txBody>
+          <a:bodyPr wrap="square" rtlCol="0" anchor="t">
+            <a:normAutofit/>
+          </a:bodyPr>
+          <a:lstStyle/>
+          <a:p>
+            <a:pPr indent="0" marL="0">
+              <a:lnSpc>
+                <a:spcPct val="114000"/>
+              </a:lnSpc>
+              <a:buNone/>
+            </a:pPr>
+            <a:r>
+              <a:rPr lang="en-US" sz="840" dirty="0">
+                <a:solidFill>
+                  <a:srgbClr val="3C4043"/>
+                </a:solidFill>
+                <a:latin typeface="Arial" pitchFamily="34" charset="0"/>
+                <a:ea typeface="Arial" pitchFamily="34" charset="-122"/>
+                <a:cs typeface="Arial" pitchFamily="34" charset="-120"/>
+              </a:rPr>
+              <a:t>Every security control in the 10-point red-team suite is backed by deterministic audit receipts in BigQuery and Cloud Logging across ramp-portal-dev and nitina-ggarwal-sandbox-647724.</a:t>
+            </a:r>
             <a:endParaRPr lang="en-US" sz="840" dirty="0"/>
           </a:p>
         </p:txBody>
       </p:sp>
       <p:sp>
         <p:nvSpPr>
-          <p:cNvPr id="9" name="Shape 7"/>
-          <p:cNvSpPr/>
-          <p:nvPr/>
-        </p:nvSpPr>
-        <p:spPr>
-          <a:xfrm>
-            <a:off x="749808" y="3383280"/>
-            <a:ext cx="10680192" cy="0"/>
-          </a:xfrm>
-          <a:prstGeom prst="line">
-            <a:avLst/>
-          </a:prstGeom>
-          <a:noFill/>
-          <a:ln w="9525">
-            <a:solidFill>
-              <a:srgbClr val="DADCE0"/>
-            </a:solidFill>
-            <a:prstDash val="solid"/>
-          </a:ln>
-        </p:spPr>
-      </p:sp>
-      <p:sp>
-        <p:nvSpPr>
-          <p:cNvPr id="10" name="Text 8"/>
-          <p:cNvSpPr/>
-          <p:nvPr/>
-        </p:nvSpPr>
-        <p:spPr>
-          <a:xfrm>
-            <a:off x="749808" y="3511296"/>
-            <a:ext cx="10680192" cy="310896"/>
+          <p:cNvPr id="13" name="Text 11"/>
+          <p:cNvSpPr/>
+          <p:nvPr/>
+        </p:nvSpPr>
+        <p:spPr>
+          <a:xfrm>
+            <a:off x="749808" y="4773168"/>
+            <a:ext cx="10680192" cy="201168"/>
           </a:xfrm>
           <a:prstGeom prst="rect">
             <a:avLst/>
@@ -9825,30 +9880,30 @@
               <a:buNone/>
             </a:pPr>
             <a:r>
-              <a:rPr lang="en-US" sz="1550" dirty="0">
-                <a:solidFill>
-                  <a:srgbClr val="202124"/>
-                </a:solidFill>
-                <a:latin typeface="Arial" pitchFamily="34" charset="0"/>
-                <a:ea typeface="Arial" pitchFamily="34" charset="-122"/>
-                <a:cs typeface="Arial" pitchFamily="34" charset="-120"/>
-              </a:rPr>
-              <a:t>Use case</a:t>
-            </a:r>
-            <a:endParaRPr lang="en-US" sz="1550" dirty="0"/>
-          </a:p>
-        </p:txBody>
-      </p:sp>
-      <p:sp>
-        <p:nvSpPr>
-          <p:cNvPr id="11" name="Text 9"/>
-          <p:cNvSpPr/>
-          <p:nvPr/>
-        </p:nvSpPr>
-        <p:spPr>
-          <a:xfrm>
-            <a:off x="749808" y="3858768"/>
-            <a:ext cx="10680192" cy="256032"/>
+              <a:rPr lang="en-US" sz="860" dirty="0">
+                <a:solidFill>
+                  <a:srgbClr val="3C4043"/>
+                </a:solidFill>
+                <a:latin typeface="Arial" pitchFamily="34" charset="0"/>
+                <a:ea typeface="Arial" pitchFamily="34" charset="-122"/>
+                <a:cs typeface="Arial" pitchFamily="34" charset="-120"/>
+              </a:rPr>
+              <a:t>For this use case, the architecture provides the following benefits:</a:t>
+            </a:r>
+            <a:endParaRPr lang="en-US" sz="860" dirty="0"/>
+          </a:p>
+        </p:txBody>
+      </p:sp>
+      <p:sp>
+        <p:nvSpPr>
+          <p:cNvPr id="14" name="Text 12"/>
+          <p:cNvSpPr/>
+          <p:nvPr/>
+        </p:nvSpPr>
+        <p:spPr>
+          <a:xfrm>
+            <a:off x="877824" y="5010912"/>
+            <a:ext cx="10552176" cy="1481328"/>
           </a:xfrm>
           <a:prstGeom prst="rect">
             <a:avLst/>
@@ -9857,137 +9912,19 @@
           <a:ln/>
         </p:spPr>
         <p:txBody>
-          <a:bodyPr wrap="square" rtlCol="0" anchor="ctr"/>
-          <a:lstStyle/>
-          <a:p>
-            <a:pPr indent="0" marL="0">
-              <a:buNone/>
-            </a:pPr>
-            <a:r>
-              <a:rPr lang="en-US" sz="1150" b="1" dirty="0">
-                <a:solidFill>
-                  <a:srgbClr val="202124"/>
-                </a:solidFill>
-                <a:latin typeface="Arial" pitchFamily="34" charset="0"/>
-                <a:ea typeface="Arial" pitchFamily="34" charset="-122"/>
-                <a:cs typeface="Arial" pitchFamily="34" charset="-120"/>
-              </a:rPr>
-              <a:t>Live Google Cloud Console, Cloud Shell SSH &amp; BigQuery Audit Verification Runbook</a:t>
-            </a:r>
-            <a:endParaRPr lang="en-US" sz="1150" dirty="0"/>
-          </a:p>
-        </p:txBody>
-      </p:sp>
-      <p:sp>
-        <p:nvSpPr>
-          <p:cNvPr id="12" name="Text 10"/>
-          <p:cNvSpPr/>
-          <p:nvPr/>
-        </p:nvSpPr>
-        <p:spPr>
-          <a:xfrm>
-            <a:off x="749808" y="4151376"/>
-            <a:ext cx="10680192" cy="658368"/>
-          </a:xfrm>
-          <a:prstGeom prst="rect">
-            <a:avLst/>
-          </a:prstGeom>
-          <a:noFill/>
-          <a:ln/>
-        </p:spPr>
-        <p:txBody>
-          <a:bodyPr wrap="square" rtlCol="0" anchor="t"/>
-          <a:lstStyle/>
-          <a:p>
-            <a:pPr indent="0" marL="0">
-              <a:lnSpc>
-                <a:spcPct val="118000"/>
-              </a:lnSpc>
-              <a:buNone/>
-            </a:pPr>
-            <a:r>
-              <a:rPr lang="en-US" sz="880" dirty="0">
-                <a:solidFill>
-                  <a:srgbClr val="3C4043"/>
-                </a:solidFill>
-                <a:latin typeface="Arial" pitchFamily="34" charset="0"/>
-                <a:ea typeface="Arial" pitchFamily="34" charset="-122"/>
-                <a:cs typeface="Arial" pitchFamily="34" charset="-120"/>
-              </a:rPr>
-              <a:t>Every security control in the 10-point red-team suite is backed by deterministic audit receipts in BigQuery and Cloud Logging across ramp-portal-dev and nitina-ggarwal-sandbox-647724.</a:t>
-            </a:r>
-            <a:endParaRPr lang="en-US" sz="880" dirty="0"/>
-          </a:p>
-        </p:txBody>
-      </p:sp>
-      <p:sp>
-        <p:nvSpPr>
-          <p:cNvPr id="13" name="Text 11"/>
-          <p:cNvSpPr/>
-          <p:nvPr/>
-        </p:nvSpPr>
-        <p:spPr>
-          <a:xfrm>
-            <a:off x="749808" y="4846320"/>
-            <a:ext cx="10680192" cy="201168"/>
-          </a:xfrm>
-          <a:prstGeom prst="rect">
-            <a:avLst/>
-          </a:prstGeom>
-          <a:noFill/>
-          <a:ln/>
-        </p:spPr>
-        <p:txBody>
-          <a:bodyPr wrap="square" rtlCol="0" anchor="ctr"/>
-          <a:lstStyle/>
-          <a:p>
-            <a:pPr indent="0" marL="0">
-              <a:buNone/>
-            </a:pPr>
-            <a:r>
-              <a:rPr lang="en-US" sz="880" dirty="0">
-                <a:solidFill>
-                  <a:srgbClr val="3C4043"/>
-                </a:solidFill>
-                <a:latin typeface="Arial" pitchFamily="34" charset="0"/>
-                <a:ea typeface="Arial" pitchFamily="34" charset="-122"/>
-                <a:cs typeface="Arial" pitchFamily="34" charset="-120"/>
-              </a:rPr>
-              <a:t>For this use case, the architecture provides the following benefits:</a:t>
-            </a:r>
-            <a:endParaRPr lang="en-US" sz="880" dirty="0"/>
-          </a:p>
-        </p:txBody>
-      </p:sp>
-      <p:sp>
-        <p:nvSpPr>
-          <p:cNvPr id="14" name="Text 12"/>
-          <p:cNvSpPr/>
-          <p:nvPr/>
-        </p:nvSpPr>
-        <p:spPr>
-          <a:xfrm>
-            <a:off x="877824" y="5084064"/>
-            <a:ext cx="10552176" cy="1426464"/>
-          </a:xfrm>
-          <a:prstGeom prst="rect">
-            <a:avLst/>
-          </a:prstGeom>
-          <a:noFill/>
-          <a:ln/>
-        </p:spPr>
-        <p:txBody>
-          <a:bodyPr wrap="square" rtlCol="0" anchor="t"/>
-          <a:lstStyle/>
-          <a:p>
-            <a:pPr indent="0" marL="0">
-              <a:lnSpc>
-                <a:spcPct val="120000"/>
-              </a:lnSpc>
-              <a:buNone/>
-            </a:pPr>
-            <a:r>
-              <a:rPr lang="en-US" sz="820" b="1" dirty="0">
+          <a:bodyPr wrap="square" rtlCol="0" anchor="t">
+            <a:normAutofit/>
+          </a:bodyPr>
+          <a:lstStyle/>
+          <a:p>
+            <a:pPr indent="0" marL="0">
+              <a:lnSpc>
+                <a:spcPct val="116000"/>
+              </a:lnSpc>
+              <a:buNone/>
+            </a:pPr>
+            <a:r>
+              <a:rPr lang="en-US" sz="800" b="1" dirty="0">
                 <a:solidFill>
                   <a:srgbClr val="202124"/>
                 </a:solidFill>
@@ -9999,12 +9936,12 @@
             </a:r>
             <a:pPr indent="0" marL="0">
               <a:lnSpc>
-                <a:spcPct val="120000"/>
-              </a:lnSpc>
-              <a:buNone/>
-            </a:pPr>
-            <a:r>
-              <a:rPr lang="en-US" sz="800" dirty="0">
+                <a:spcPct val="116000"/>
+              </a:lnSpc>
+              <a:buNone/>
+            </a:pPr>
+            <a:r>
+              <a:rPr lang="en-US" sz="780" dirty="0">
                 <a:solidFill>
                   <a:srgbClr val="3C4043"/>
                 </a:solidFill>
@@ -10017,12 +9954,12 @@
             </a:r>
             <a:pPr indent="0" marL="0">
               <a:lnSpc>
-                <a:spcPct val="120000"/>
-              </a:lnSpc>
-              <a:buNone/>
-            </a:pPr>
-            <a:r>
-              <a:rPr lang="en-US" sz="820" b="1" dirty="0">
+                <a:spcPct val="116000"/>
+              </a:lnSpc>
+              <a:buNone/>
+            </a:pPr>
+            <a:r>
+              <a:rPr lang="en-US" sz="800" b="1" dirty="0">
                 <a:solidFill>
                   <a:srgbClr val="202124"/>
                 </a:solidFill>
@@ -10034,12 +9971,12 @@
             </a:r>
             <a:pPr indent="0" marL="0">
               <a:lnSpc>
-                <a:spcPct val="120000"/>
-              </a:lnSpc>
-              <a:buNone/>
-            </a:pPr>
-            <a:r>
-              <a:rPr lang="en-US" sz="800" dirty="0">
+                <a:spcPct val="116000"/>
+              </a:lnSpc>
+              <a:buNone/>
+            </a:pPr>
+            <a:r>
+              <a:rPr lang="en-US" sz="780" dirty="0">
                 <a:solidFill>
                   <a:srgbClr val="3C4043"/>
                 </a:solidFill>
@@ -10047,17 +9984,17 @@
                 <a:ea typeface="Arial" pitchFamily="34" charset="-122"/>
                 <a:cs typeface="Arial" pitchFamily="34" charset="-120"/>
               </a:rPr>
-              <a:t>Screens all incoming traffic through Vector 1: Header Strip and Vector 2: Agent 403 before reaching Hop 2 Catalog PDP.
+              <a:t>Screens all incoming traffic through Vector 1: Cloud Armor and Vector 2: Agent 403 before reaching Hop 2 Catalog PDP.
 </a:t>
             </a:r>
             <a:pPr indent="0" marL="0">
               <a:lnSpc>
-                <a:spcPct val="120000"/>
-              </a:lnSpc>
-              <a:buNone/>
-            </a:pPr>
-            <a:r>
-              <a:rPr lang="en-US" sz="820" b="1" dirty="0">
+                <a:spcPct val="116000"/>
+              </a:lnSpc>
+              <a:buNone/>
+            </a:pPr>
+            <a:r>
+              <a:rPr lang="en-US" sz="800" b="1" dirty="0">
                 <a:solidFill>
                   <a:srgbClr val="202124"/>
                 </a:solidFill>
@@ -10069,12 +10006,12 @@
             </a:r>
             <a:pPr indent="0" marL="0">
               <a:lnSpc>
-                <a:spcPct val="120000"/>
-              </a:lnSpc>
-              <a:buNone/>
-            </a:pPr>
-            <a:r>
-              <a:rPr lang="en-US" sz="800" dirty="0">
+                <a:spcPct val="116000"/>
+              </a:lnSpc>
+              <a:buNone/>
+            </a:pPr>
+            <a:r>
+              <a:rPr lang="en-US" sz="780" dirty="0">
                 <a:solidFill>
                   <a:srgbClr val="3C4043"/>
                 </a:solidFill>
@@ -10087,12 +10024,12 @@
             </a:r>
             <a:pPr indent="0" marL="0">
               <a:lnSpc>
-                <a:spcPct val="120000"/>
-              </a:lnSpc>
-              <a:buNone/>
-            </a:pPr>
-            <a:r>
-              <a:rPr lang="en-US" sz="820" b="1" dirty="0">
+                <a:spcPct val="116000"/>
+              </a:lnSpc>
+              <a:buNone/>
+            </a:pPr>
+            <a:r>
+              <a:rPr lang="en-US" sz="800" b="1" dirty="0">
                 <a:solidFill>
                   <a:srgbClr val="202124"/>
                 </a:solidFill>
@@ -10104,12 +10041,12 @@
             </a:r>
             <a:pPr indent="0" marL="0">
               <a:lnSpc>
-                <a:spcPct val="120000"/>
-              </a:lnSpc>
-              <a:buNone/>
-            </a:pPr>
-            <a:r>
-              <a:rPr lang="en-US" sz="800" dirty="0">
+                <a:spcPct val="116000"/>
+              </a:lnSpc>
+              <a:buNone/>
+            </a:pPr>
+            <a:r>
+              <a:rPr lang="en-US" sz="780" dirty="0">
                 <a:solidFill>
                   <a:srgbClr val="3C4043"/>
                 </a:solidFill>
@@ -10119,7 +10056,7 @@
               </a:rPr>
               <a:t>Streams zero-PII audit logs and OpenTelemetry token spans into BigQuery OTel Audit and Vector 6: Valkey 429 &amp; 4k Token Clamp.</a:t>
             </a:r>
-            <a:endParaRPr lang="en-US" sz="820" dirty="0"/>
+            <a:endParaRPr lang="en-US" sz="800" dirty="0"/>
           </a:p>
         </p:txBody>
       </p:sp>
@@ -10340,7 +10277,9 @@
           <a:ln/>
         </p:spPr>
         <p:txBody>
-          <a:bodyPr wrap="square" rtlCol="0" anchor="t"/>
+          <a:bodyPr wrap="square" rtlCol="0" anchor="t">
+            <a:normAutofit/>
+          </a:bodyPr>
           <a:lstStyle/>
           <a:p>
             <a:pPr indent="0" marL="0">
@@ -10350,7 +10289,7 @@
               <a:buNone/>
             </a:pPr>
             <a:r>
-              <a:rPr lang="en-US" sz="820" b="1" dirty="0">
+              <a:rPr lang="en-US" sz="810" b="1" dirty="0">
                 <a:solidFill>
                   <a:srgbClr val="202124"/>
                 </a:solidFill>
@@ -10410,7 +10349,7 @@
                 <a:ea typeface="Arial" pitchFamily="34" charset="-122"/>
                 <a:cs typeface="Arial" pitchFamily="34" charset="-120"/>
               </a:rPr>
-              <a:t>For internet-facing workloads, retain the global External Application Load Balancer with Vector 1: Header Strip and Vector 2: Agent 403.
+              <a:t>For internet-facing workloads, retain the global External Application Load Balancer with Vector 1: Cloud Armor and Vector 2: Agent 403.
 </a:t>
             </a:r>
             <a:pPr indent="0" marL="0">
@@ -10419,14 +10358,8 @@
               </a:lnSpc>
               <a:buNone/>
             </a:pPr>
-            <a:pPr indent="0" marL="0">
-              <a:lnSpc>
-                <a:spcPct val="112000"/>
-              </a:lnSpc>
-              <a:buNone/>
-            </a:pPr>
-            <a:r>
-              <a:rPr lang="en-US" sz="820" b="1" dirty="0">
+            <a:r>
+              <a:rPr lang="en-US" sz="810" b="1" dirty="0">
                 <a:solidFill>
                   <a:srgbClr val="202124"/>
                 </a:solidFill>
@@ -10489,7 +10422,7 @@
               <a:t>Spoke-local Vector 8: SDP Mask: Maximizes blast-radius containment by keeping credentials, service accounts, and data access strictly inside Hop.; Shared enterprise tool gateway: Consolidates stateless, non-tenant-specific MCP tools into a central hub project via Private Service Connect.
 </a:t>
             </a:r>
-            <a:endParaRPr lang="en-US" sz="820" dirty="0"/>
+            <a:endParaRPr lang="en-US" sz="810" dirty="0"/>
           </a:p>
         </p:txBody>
       </p:sp>
@@ -10893,48 +10826,50 @@
           <a:ln/>
         </p:spPr>
         <p:txBody>
-          <a:bodyPr wrap="square" rtlCol="0" anchor="ctr"/>
-          <a:lstStyle/>
-          <a:p>
-            <a:pPr indent="0" marL="0">
-              <a:buNone/>
-            </a:pPr>
-            <a:r>
-              <a:rPr lang="en-US" sz="720" b="1" dirty="0">
-                <a:solidFill>
-                  <a:srgbClr val="202124"/>
-                </a:solidFill>
-                <a:latin typeface="Arial" pitchFamily="34" charset="0"/>
-                <a:ea typeface="Arial" pitchFamily="34" charset="-122"/>
-                <a:cs typeface="Arial" pitchFamily="34" charset="-120"/>
-              </a:rPr>
-              <a:t>• Adversarial Breach Verification Harness &amp; VPC • Zero-Trust 5-Hop Enforcement Pipeline</a:t>
-            </a:r>
-            <a:endParaRPr lang="en-US" sz="720" dirty="0"/>
-          </a:p>
-          <a:p>
-            <a:pPr indent="0" marL="0">
-              <a:buNone/>
-            </a:pPr>
-            <a:r>
-              <a:rPr lang="en-US" sz="720" b="1" dirty="0">
-                <a:solidFill>
-                  <a:srgbClr val="202124"/>
-                </a:solidFill>
-                <a:latin typeface="Arial" pitchFamily="34" charset="0"/>
-                <a:ea typeface="Arial" pitchFamily="34" charset="-122"/>
-                <a:cs typeface="Arial" pitchFamily="34" charset="-120"/>
-              </a:rPr>
-              <a:t>• Vector 1: Header Strip, Vector 2: Agent 403 &amp; Vector 4: HTTP 400</a:t>
-            </a:r>
-            <a:endParaRPr lang="en-US" sz="720" dirty="0"/>
-          </a:p>
-          <a:p>
-            <a:pPr indent="0" marL="0">
-              <a:buNone/>
-            </a:pPr>
-            <a:r>
-              <a:rPr lang="en-US" sz="720" b="1" dirty="0">
+          <a:bodyPr wrap="square" rtlCol="0" anchor="ctr">
+            <a:normAutofit/>
+          </a:bodyPr>
+          <a:lstStyle/>
+          <a:p>
+            <a:pPr indent="0" marL="0">
+              <a:buNone/>
+            </a:pPr>
+            <a:r>
+              <a:rPr lang="en-US" sz="710" b="1" dirty="0">
+                <a:solidFill>
+                  <a:srgbClr val="202124"/>
+                </a:solidFill>
+                <a:latin typeface="Arial" pitchFamily="34" charset="0"/>
+                <a:ea typeface="Arial" pitchFamily="34" charset="-122"/>
+                <a:cs typeface="Arial" pitchFamily="34" charset="-120"/>
+              </a:rPr>
+              <a:t>• VPC Service Controls &amp; Access Boundaries</a:t>
+            </a:r>
+            <a:endParaRPr lang="en-US" sz="710" dirty="0"/>
+          </a:p>
+          <a:p>
+            <a:pPr indent="0" marL="0">
+              <a:buNone/>
+            </a:pPr>
+            <a:r>
+              <a:rPr lang="en-US" sz="710" b="1" dirty="0">
+                <a:solidFill>
+                  <a:srgbClr val="202124"/>
+                </a:solidFill>
+                <a:latin typeface="Arial" pitchFamily="34" charset="0"/>
+                <a:ea typeface="Arial" pitchFamily="34" charset="-122"/>
+                <a:cs typeface="Arial" pitchFamily="34" charset="-120"/>
+              </a:rPr>
+              <a:t>• Vector 1: Cloud Armor &amp; Vector 2: Agent 403 &amp; Vector 4: HTTP 400</a:t>
+            </a:r>
+            <a:endParaRPr lang="en-US" sz="710" dirty="0"/>
+          </a:p>
+          <a:p>
+            <a:pPr indent="0" marL="0">
+              <a:buNone/>
+            </a:pPr>
+            <a:r>
+              <a:rPr lang="en-US" sz="710" b="1" dirty="0">
                 <a:solidFill>
                   <a:srgbClr val="202124"/>
                 </a:solidFill>
@@ -10944,7 +10879,7 @@
               </a:rPr>
               <a:t>• Zero Raw PII Egress &amp; Vector 10: Inline 3LO</a:t>
             </a:r>
-            <a:endParaRPr lang="en-US" sz="720" dirty="0"/>
+            <a:endParaRPr lang="en-US" sz="710" dirty="0"/>
           </a:p>
         </p:txBody>
       </p:sp>
@@ -10991,28 +10926,30 @@
           <a:ln/>
         </p:spPr>
         <p:txBody>
-          <a:bodyPr wrap="square" rtlCol="0" anchor="ctr"/>
-          <a:lstStyle/>
-          <a:p>
-            <a:pPr indent="0" marL="0">
-              <a:buNone/>
-            </a:pPr>
-            <a:r>
-              <a:rPr lang="en-US" sz="710" b="1" dirty="0">
-                <a:solidFill>
-                  <a:srgbClr val="202124"/>
-                </a:solidFill>
-                <a:latin typeface="Arial" pitchFamily="34" charset="0"/>
-                <a:ea typeface="Arial" pitchFamily="34" charset="-122"/>
-                <a:cs typeface="Arial" pitchFamily="34" charset="-120"/>
-              </a:rPr>
-              <a:t>• Adversarial Breach Verification Harness &amp; VPC • Zero-Trust 5-Hop Enforcement Pipeline: </a:t>
-            </a:r>
-            <a:pPr indent="0" marL="0">
-              <a:buNone/>
-            </a:pPr>
-            <a:r>
-              <a:rPr lang="en-US" sz="700" dirty="0">
+          <a:bodyPr wrap="square" rtlCol="0" anchor="ctr">
+            <a:normAutofit/>
+          </a:bodyPr>
+          <a:lstStyle/>
+          <a:p>
+            <a:pPr indent="0" marL="0">
+              <a:buNone/>
+            </a:pPr>
+            <a:r>
+              <a:rPr lang="en-US" sz="700" b="1" dirty="0">
+                <a:solidFill>
+                  <a:srgbClr val="202124"/>
+                </a:solidFill>
+                <a:latin typeface="Arial" pitchFamily="34" charset="0"/>
+                <a:ea typeface="Arial" pitchFamily="34" charset="-122"/>
+                <a:cs typeface="Arial" pitchFamily="34" charset="-120"/>
+              </a:rPr>
+              <a:t>• VPC Service Controls &amp; Access Boundaries: </a:t>
+            </a:r>
+            <a:pPr indent="0" marL="0">
+              <a:buNone/>
+            </a:pPr>
+            <a:r>
+              <a:rPr lang="en-US" sz="690" dirty="0">
                 <a:solidFill>
                   <a:srgbClr val="3C4043"/>
                 </a:solidFill>
@@ -11020,28 +10957,28 @@
                 <a:ea typeface="Arial" pitchFamily="34" charset="-122"/>
                 <a:cs typeface="Arial" pitchFamily="34" charset="-120"/>
               </a:rPr>
-              <a:t>Enforce Adversarial Breach Verification Harness perimeters around hub and spoke projects to block unauthorized data exfiltration, and bind VPC • Zero-Trust 5-Hop Enforcement Pipeline.
+              <a:t>Enforce VPC Service Controls perimeters around hub and spoke projects to block unauthorized data exfiltration, and bind Principal Access Boundary (PAB) policies to spoke principals.
 </a:t>
             </a:r>
             <a:pPr indent="0" marL="0">
               <a:buNone/>
             </a:pPr>
             <a:r>
-              <a:rPr lang="en-US" sz="710" b="1" dirty="0">
-                <a:solidFill>
-                  <a:srgbClr val="202124"/>
-                </a:solidFill>
-                <a:latin typeface="Arial" pitchFamily="34" charset="0"/>
-                <a:ea typeface="Arial" pitchFamily="34" charset="-122"/>
-                <a:cs typeface="Arial" pitchFamily="34" charset="-120"/>
-              </a:rPr>
-              <a:t>• Vector 1: Header Strip, Vector 2: Agent 403 &amp; Vector 4: HTTP 400: </a:t>
-            </a:r>
-            <a:pPr indent="0" marL="0">
-              <a:buNone/>
-            </a:pPr>
-            <a:r>
-              <a:rPr lang="en-US" sz="700" dirty="0">
+              <a:rPr lang="en-US" sz="700" b="1" dirty="0">
+                <a:solidFill>
+                  <a:srgbClr val="202124"/>
+                </a:solidFill>
+                <a:latin typeface="Arial" pitchFamily="34" charset="0"/>
+                <a:ea typeface="Arial" pitchFamily="34" charset="-122"/>
+                <a:cs typeface="Arial" pitchFamily="34" charset="-120"/>
+              </a:rPr>
+              <a:t>• Vector 1: Cloud Armor &amp; Vector 2: Agent 403 &amp; Vector 4: HTTP 400: </a:t>
+            </a:r>
+            <a:pPr indent="0" marL="0">
+              <a:buNone/>
+            </a:pPr>
+            <a:r>
+              <a:rPr lang="en-US" sz="690" dirty="0">
                 <a:solidFill>
                   <a:srgbClr val="3C4043"/>
                 </a:solidFill>
@@ -11049,14 +10986,14 @@
                 <a:ea typeface="Arial" pitchFamily="34" charset="-122"/>
                 <a:cs typeface="Arial" pitchFamily="34" charset="-120"/>
               </a:rPr>
-              <a:t>Strip client-supplied privilege headers at the edge, verify caller identity claims, and screen both incoming prompts and outgoing completions with Vector 4: HTTP 400.
+              <a:t>Strip client-supplied privilege headers at the edge, verify caller identity claims, and screen prompts and completions with Vector 4: HTTP 400.
 </a:t>
             </a:r>
             <a:pPr indent="0" marL="0">
               <a:buNone/>
             </a:pPr>
             <a:r>
-              <a:rPr lang="en-US" sz="710" b="1" dirty="0">
+              <a:rPr lang="en-US" sz="700" b="1" dirty="0">
                 <a:solidFill>
                   <a:srgbClr val="202124"/>
                 </a:solidFill>
@@ -11070,7 +11007,7 @@
               <a:buNone/>
             </a:pPr>
             <a:r>
-              <a:rPr lang="en-US" sz="700" dirty="0">
+              <a:rPr lang="en-US" sz="690" dirty="0">
                 <a:solidFill>
                   <a:srgbClr val="3C4043"/>
                 </a:solidFill>
@@ -11080,7 +11017,7 @@
               </a:rPr>
               <a:t>Encrypt state at rest with Customer-Managed Encryption Keys and enforce least-privilege access scopes on Zero Raw PII Egress.</a:t>
             </a:r>
-            <a:endParaRPr lang="en-US" sz="710" dirty="0"/>
+            <a:endParaRPr lang="en-US" sz="700" dirty="0"/>
           </a:p>
         </p:txBody>
       </p:sp>
@@ -11191,14 +11128,16 @@
           <a:ln/>
         </p:spPr>
         <p:txBody>
-          <a:bodyPr wrap="square" rtlCol="0" anchor="ctr"/>
-          <a:lstStyle/>
-          <a:p>
-            <a:pPr indent="0" marL="0">
-              <a:buNone/>
-            </a:pPr>
-            <a:r>
-              <a:rPr lang="en-US" sz="720" b="1" dirty="0">
+          <a:bodyPr wrap="square" rtlCol="0" anchor="ctr">
+            <a:normAutofit/>
+          </a:bodyPr>
+          <a:lstStyle/>
+          <a:p>
+            <a:pPr indent="0" marL="0">
+              <a:buNone/>
+            </a:pPr>
+            <a:r>
+              <a:rPr lang="en-US" sz="710" b="1" dirty="0">
                 <a:solidFill>
                   <a:srgbClr val="202124"/>
                 </a:solidFill>
@@ -11208,14 +11147,14 @@
               </a:rPr>
               <a:t>• External Application Load Balancer &amp; Hop 2 Catalog PDP</a:t>
             </a:r>
-            <a:endParaRPr lang="en-US" sz="720" dirty="0"/>
-          </a:p>
-          <a:p>
-            <a:pPr indent="0" marL="0">
-              <a:buNone/>
-            </a:pPr>
-            <a:r>
-              <a:rPr lang="en-US" sz="720" b="1" dirty="0">
+            <a:endParaRPr lang="en-US" sz="710" dirty="0"/>
+          </a:p>
+          <a:p>
+            <a:pPr indent="0" marL="0">
+              <a:buNone/>
+            </a:pPr>
+            <a:r>
+              <a:rPr lang="en-US" sz="710" b="1" dirty="0">
                 <a:solidFill>
                   <a:srgbClr val="202124"/>
                 </a:solidFill>
@@ -11225,14 +11164,14 @@
               </a:rPr>
               <a:t>• Vertex AI Agent Engine &amp; Vector 8: SDP Mask</a:t>
             </a:r>
-            <a:endParaRPr lang="en-US" sz="720" dirty="0"/>
-          </a:p>
-          <a:p>
-            <a:pPr indent="0" marL="0">
-              <a:buNone/>
-            </a:pPr>
-            <a:r>
-              <a:rPr lang="en-US" sz="720" b="1" dirty="0">
+            <a:endParaRPr lang="en-US" sz="710" dirty="0"/>
+          </a:p>
+          <a:p>
+            <a:pPr indent="0" marL="0">
+              <a:buNone/>
+            </a:pPr>
+            <a:r>
+              <a:rPr lang="en-US" sz="710" b="1" dirty="0">
                 <a:solidFill>
                   <a:srgbClr val="202124"/>
                 </a:solidFill>
@@ -11242,7 +11181,7 @@
               </a:rPr>
               <a:t>• Zero Raw PII Egress</a:t>
             </a:r>
-            <a:endParaRPr lang="en-US" sz="720" dirty="0"/>
+            <a:endParaRPr lang="en-US" sz="710" dirty="0"/>
           </a:p>
         </p:txBody>
       </p:sp>
@@ -11289,14 +11228,16 @@
           <a:ln/>
         </p:spPr>
         <p:txBody>
-          <a:bodyPr wrap="square" rtlCol="0" anchor="ctr"/>
-          <a:lstStyle/>
-          <a:p>
-            <a:pPr indent="0" marL="0">
-              <a:buNone/>
-            </a:pPr>
-            <a:r>
-              <a:rPr lang="en-US" sz="710" b="1" dirty="0">
+          <a:bodyPr wrap="square" rtlCol="0" anchor="ctr">
+            <a:normAutofit/>
+          </a:bodyPr>
+          <a:lstStyle/>
+          <a:p>
+            <a:pPr indent="0" marL="0">
+              <a:buNone/>
+            </a:pPr>
+            <a:r>
+              <a:rPr lang="en-US" sz="700" b="1" dirty="0">
                 <a:solidFill>
                   <a:srgbClr val="202124"/>
                 </a:solidFill>
@@ -11310,7 +11251,7 @@
               <a:buNone/>
             </a:pPr>
             <a:r>
-              <a:rPr lang="en-US" sz="700" dirty="0">
+              <a:rPr lang="en-US" sz="690" dirty="0">
                 <a:solidFill>
                   <a:srgbClr val="3C4043"/>
                 </a:solidFill>
@@ -11325,7 +11266,7 @@
               <a:buNone/>
             </a:pPr>
             <a:r>
-              <a:rPr lang="en-US" sz="710" b="1" dirty="0">
+              <a:rPr lang="en-US" sz="700" b="1" dirty="0">
                 <a:solidFill>
                   <a:srgbClr val="202124"/>
                 </a:solidFill>
@@ -11339,7 +11280,7 @@
               <a:buNone/>
             </a:pPr>
             <a:r>
-              <a:rPr lang="en-US" sz="700" dirty="0">
+              <a:rPr lang="en-US" sz="690" dirty="0">
                 <a:solidFill>
                   <a:srgbClr val="3C4043"/>
                 </a:solidFill>
@@ -11354,7 +11295,7 @@
               <a:buNone/>
             </a:pPr>
             <a:r>
-              <a:rPr lang="en-US" sz="710" b="1" dirty="0">
+              <a:rPr lang="en-US" sz="700" b="1" dirty="0">
                 <a:solidFill>
                   <a:srgbClr val="202124"/>
                 </a:solidFill>
@@ -11368,7 +11309,7 @@
               <a:buNone/>
             </a:pPr>
             <a:r>
-              <a:rPr lang="en-US" sz="700" dirty="0">
+              <a:rPr lang="en-US" sz="690" dirty="0">
                 <a:solidFill>
                   <a:srgbClr val="3C4043"/>
                 </a:solidFill>
@@ -11378,7 +11319,7 @@
               </a:rPr>
               <a:t>Enable regional high availability and Point-in-Time Recovery on Zero Raw PII Egress with automated backup verification.</a:t>
             </a:r>
-            <a:endParaRPr lang="en-US" sz="710" dirty="0"/>
+            <a:endParaRPr lang="en-US" sz="700" dirty="0"/>
           </a:p>
         </p:txBody>
       </p:sp>
@@ -11489,14 +11430,16 @@
           <a:ln/>
         </p:spPr>
         <p:txBody>
-          <a:bodyPr wrap="square" rtlCol="0" anchor="ctr"/>
-          <a:lstStyle/>
-          <a:p>
-            <a:pPr indent="0" marL="0">
-              <a:buNone/>
-            </a:pPr>
-            <a:r>
-              <a:rPr lang="en-US" sz="720" b="1" dirty="0">
+          <a:bodyPr wrap="square" rtlCol="0" anchor="ctr">
+            <a:normAutofit/>
+          </a:bodyPr>
+          <a:lstStyle/>
+          <a:p>
+            <a:pPr indent="0" marL="0">
+              <a:buNone/>
+            </a:pPr>
+            <a:r>
+              <a:rPr lang="en-US" sz="710" b="1" dirty="0">
                 <a:solidFill>
                   <a:srgbClr val="202124"/>
                 </a:solidFill>
@@ -11506,14 +11449,14 @@
               </a:rPr>
               <a:t>• Infrastructure as Code</a:t>
             </a:r>
-            <a:endParaRPr lang="en-US" sz="720" dirty="0"/>
-          </a:p>
-          <a:p>
-            <a:pPr indent="0" marL="0">
-              <a:buNone/>
-            </a:pPr>
-            <a:r>
-              <a:rPr lang="en-US" sz="720" b="1" dirty="0">
+            <a:endParaRPr lang="en-US" sz="710" dirty="0"/>
+          </a:p>
+          <a:p>
+            <a:pPr indent="0" marL="0">
+              <a:buNone/>
+            </a:pPr>
+            <a:r>
+              <a:rPr lang="en-US" sz="710" b="1" dirty="0">
                 <a:solidFill>
                   <a:srgbClr val="202124"/>
                 </a:solidFill>
@@ -11523,14 +11466,14 @@
               </a:rPr>
               <a:t>• Vector 6: Valkey 429 &amp; 4k Token Clamp &amp; BigQuery OTel Audit</a:t>
             </a:r>
-            <a:endParaRPr lang="en-US" sz="720" dirty="0"/>
-          </a:p>
-          <a:p>
-            <a:pPr indent="0" marL="0">
-              <a:buNone/>
-            </a:pPr>
-            <a:r>
-              <a:rPr lang="en-US" sz="720" b="1" dirty="0">
+            <a:endParaRPr lang="en-US" sz="710" dirty="0"/>
+          </a:p>
+          <a:p>
+            <a:pPr indent="0" marL="0">
+              <a:buNone/>
+            </a:pPr>
+            <a:r>
+              <a:rPr lang="en-US" sz="710" b="1" dirty="0">
                 <a:solidFill>
                   <a:srgbClr val="202124"/>
                 </a:solidFill>
@@ -11540,7 +11483,7 @@
               </a:rPr>
               <a:t>• Automated CI/CD &amp; Red-Team Gates</a:t>
             </a:r>
-            <a:endParaRPr lang="en-US" sz="720" dirty="0"/>
+            <a:endParaRPr lang="en-US" sz="710" dirty="0"/>
           </a:p>
         </p:txBody>
       </p:sp>
@@ -11587,14 +11530,16 @@
           <a:ln/>
         </p:spPr>
         <p:txBody>
-          <a:bodyPr wrap="square" rtlCol="0" anchor="ctr"/>
-          <a:lstStyle/>
-          <a:p>
-            <a:pPr indent="0" marL="0">
-              <a:buNone/>
-            </a:pPr>
-            <a:r>
-              <a:rPr lang="en-US" sz="710" b="1" dirty="0">
+          <a:bodyPr wrap="square" rtlCol="0" anchor="ctr">
+            <a:normAutofit/>
+          </a:bodyPr>
+          <a:lstStyle/>
+          <a:p>
+            <a:pPr indent="0" marL="0">
+              <a:buNone/>
+            </a:pPr>
+            <a:r>
+              <a:rPr lang="en-US" sz="700" b="1" dirty="0">
                 <a:solidFill>
                   <a:srgbClr val="202124"/>
                 </a:solidFill>
@@ -11608,7 +11553,7 @@
               <a:buNone/>
             </a:pPr>
             <a:r>
-              <a:rPr lang="en-US" sz="700" dirty="0">
+              <a:rPr lang="en-US" sz="690" dirty="0">
                 <a:solidFill>
                   <a:srgbClr val="3C4043"/>
                 </a:solidFill>
@@ -11623,7 +11568,7 @@
               <a:buNone/>
             </a:pPr>
             <a:r>
-              <a:rPr lang="en-US" sz="710" b="1" dirty="0">
+              <a:rPr lang="en-US" sz="700" b="1" dirty="0">
                 <a:solidFill>
                   <a:srgbClr val="202124"/>
                 </a:solidFill>
@@ -11637,7 +11582,7 @@
               <a:buNone/>
             </a:pPr>
             <a:r>
-              <a:rPr lang="en-US" sz="700" dirty="0">
+              <a:rPr lang="en-US" sz="690" dirty="0">
                 <a:solidFill>
                   <a:srgbClr val="3C4043"/>
                 </a:solidFill>
@@ -11652,7 +11597,7 @@
               <a:buNone/>
             </a:pPr>
             <a:r>
-              <a:rPr lang="en-US" sz="710" b="1" dirty="0">
+              <a:rPr lang="en-US" sz="700" b="1" dirty="0">
                 <a:solidFill>
                   <a:srgbClr val="202124"/>
                 </a:solidFill>
@@ -11666,7 +11611,7 @@
               <a:buNone/>
             </a:pPr>
             <a:r>
-              <a:rPr lang="en-US" sz="700" dirty="0">
+              <a:rPr lang="en-US" sz="690" dirty="0">
                 <a:solidFill>
                   <a:srgbClr val="3C4043"/>
                 </a:solidFill>
@@ -11676,7 +11621,7 @@
               </a:rPr>
               <a:t>Gate every prompt, model, or tool change on automated Vertex AI Gen AI Evaluation Service benchmarks and security regression checks before production rollout.</a:t>
             </a:r>
-            <a:endParaRPr lang="en-US" sz="710" dirty="0"/>
+            <a:endParaRPr lang="en-US" sz="700" dirty="0"/>
           </a:p>
         </p:txBody>
       </p:sp>
@@ -11787,14 +11732,16 @@
           <a:ln/>
         </p:spPr>
         <p:txBody>
-          <a:bodyPr wrap="square" rtlCol="0" anchor="ctr"/>
-          <a:lstStyle/>
-          <a:p>
-            <a:pPr indent="0" marL="0">
-              <a:buNone/>
-            </a:pPr>
-            <a:r>
-              <a:rPr lang="en-US" sz="720" b="1" dirty="0">
+          <a:bodyPr wrap="square" rtlCol="0" anchor="ctr">
+            <a:normAutofit/>
+          </a:bodyPr>
+          <a:lstStyle/>
+          <a:p>
+            <a:pPr indent="0" marL="0">
+              <a:buNone/>
+            </a:pPr>
+            <a:r>
+              <a:rPr lang="en-US" sz="710" b="1" dirty="0">
                 <a:solidFill>
                   <a:srgbClr val="202124"/>
                 </a:solidFill>
@@ -11804,14 +11751,14 @@
               </a:rPr>
               <a:t>• Vector 5: HTTP 422 Context Caching</a:t>
             </a:r>
-            <a:endParaRPr lang="en-US" sz="720" dirty="0"/>
-          </a:p>
-          <a:p>
-            <a:pPr indent="0" marL="0">
-              <a:buNone/>
-            </a:pPr>
-            <a:r>
-              <a:rPr lang="en-US" sz="720" b="1" dirty="0">
+            <a:endParaRPr lang="en-US" sz="710" dirty="0"/>
+          </a:p>
+          <a:p>
+            <a:pPr indent="0" marL="0">
+              <a:buNone/>
+            </a:pPr>
+            <a:r>
+              <a:rPr lang="en-US" sz="710" b="1" dirty="0">
                 <a:solidFill>
                   <a:srgbClr val="202124"/>
                 </a:solidFill>
@@ -11821,14 +11768,14 @@
               </a:rPr>
               <a:t>• Vector 3: Tool Prune &amp; Vector 8: SDP Mask</a:t>
             </a:r>
-            <a:endParaRPr lang="en-US" sz="720" dirty="0"/>
-          </a:p>
-          <a:p>
-            <a:pPr indent="0" marL="0">
-              <a:buNone/>
-            </a:pPr>
-            <a:r>
-              <a:rPr lang="en-US" sz="720" b="1" dirty="0">
+            <a:endParaRPr lang="en-US" sz="710" dirty="0"/>
+          </a:p>
+          <a:p>
+            <a:pPr indent="0" marL="0">
+              <a:buNone/>
+            </a:pPr>
+            <a:r>
+              <a:rPr lang="en-US" sz="710" b="1" dirty="0">
                 <a:solidFill>
                   <a:srgbClr val="202124"/>
                 </a:solidFill>
@@ -11838,7 +11785,7 @@
               </a:rPr>
               <a:t>• BigQuery OTel Audit FinOps Attribution</a:t>
             </a:r>
-            <a:endParaRPr lang="en-US" sz="720" dirty="0"/>
+            <a:endParaRPr lang="en-US" sz="710" dirty="0"/>
           </a:p>
         </p:txBody>
       </p:sp>
@@ -11885,14 +11832,16 @@
           <a:ln/>
         </p:spPr>
         <p:txBody>
-          <a:bodyPr wrap="square" rtlCol="0" anchor="ctr"/>
-          <a:lstStyle/>
-          <a:p>
-            <a:pPr indent="0" marL="0">
-              <a:buNone/>
-            </a:pPr>
-            <a:r>
-              <a:rPr lang="en-US" sz="710" b="1" dirty="0">
+          <a:bodyPr wrap="square" rtlCol="0" anchor="ctr">
+            <a:normAutofit/>
+          </a:bodyPr>
+          <a:lstStyle/>
+          <a:p>
+            <a:pPr indent="0" marL="0">
+              <a:buNone/>
+            </a:pPr>
+            <a:r>
+              <a:rPr lang="en-US" sz="700" b="1" dirty="0">
                 <a:solidFill>
                   <a:srgbClr val="202124"/>
                 </a:solidFill>
@@ -11906,7 +11855,7 @@
               <a:buNone/>
             </a:pPr>
             <a:r>
-              <a:rPr lang="en-US" sz="700" dirty="0">
+              <a:rPr lang="en-US" sz="690" dirty="0">
                 <a:solidFill>
                   <a:srgbClr val="3C4043"/>
                 </a:solidFill>
@@ -11921,7 +11870,7 @@
               <a:buNone/>
             </a:pPr>
             <a:r>
-              <a:rPr lang="en-US" sz="710" b="1" dirty="0">
+              <a:rPr lang="en-US" sz="700" b="1" dirty="0">
                 <a:solidFill>
                   <a:srgbClr val="202124"/>
                 </a:solidFill>
@@ -11935,7 +11884,7 @@
               <a:buNone/>
             </a:pPr>
             <a:r>
-              <a:rPr lang="en-US" sz="700" dirty="0">
+              <a:rPr lang="en-US" sz="690" dirty="0">
                 <a:solidFill>
                   <a:srgbClr val="3C4043"/>
                 </a:solidFill>
@@ -11950,7 +11899,7 @@
               <a:buNone/>
             </a:pPr>
             <a:r>
-              <a:rPr lang="en-US" sz="710" b="1" dirty="0">
+              <a:rPr lang="en-US" sz="700" b="1" dirty="0">
                 <a:solidFill>
                   <a:srgbClr val="202124"/>
                 </a:solidFill>
@@ -11964,7 +11913,7 @@
               <a:buNone/>
             </a:pPr>
             <a:r>
-              <a:rPr lang="en-US" sz="700" dirty="0">
+              <a:rPr lang="en-US" sz="690" dirty="0">
                 <a:solidFill>
                   <a:srgbClr val="3C4043"/>
                 </a:solidFill>
@@ -11974,7 +11923,7 @@
               </a:rPr>
               <a:t>Export OpenTelemetry token usage spans and Cloud Billing records to BigQuery to enforce per-spoke quota budgets and automated spend alerts.</a:t>
             </a:r>
-            <a:endParaRPr lang="en-US" sz="710" dirty="0"/>
+            <a:endParaRPr lang="en-US" sz="700" dirty="0"/>
           </a:p>
         </p:txBody>
       </p:sp>
@@ -12352,8 +12301,8 @@
         </p:nvSpPr>
         <p:spPr>
           <a:xfrm>
-            <a:off x="877824" y="1554480"/>
-            <a:ext cx="10424160" cy="1920240"/>
+            <a:off x="877824" y="1536192"/>
+            <a:ext cx="10424160" cy="1956816"/>
           </a:xfrm>
           <a:prstGeom prst="rect">
             <a:avLst/>
@@ -12362,17 +12311,19 @@
           <a:ln/>
         </p:spPr>
         <p:txBody>
-          <a:bodyPr wrap="square" rtlCol="0" anchor="t"/>
-          <a:lstStyle/>
-          <a:p>
-            <a:pPr indent="0" marL="0">
-              <a:lnSpc>
-                <a:spcPct val="112000"/>
-              </a:lnSpc>
-              <a:buNone/>
-            </a:pPr>
-            <a:r>
-              <a:rPr lang="en-US" sz="740" dirty="0">
+          <a:bodyPr wrap="square" rtlCol="0" anchor="t">
+            <a:normAutofit/>
+          </a:bodyPr>
+          <a:lstStyle/>
+          <a:p>
+            <a:pPr indent="0" marL="0">
+              <a:lnSpc>
+                <a:spcPct val="106000"/>
+              </a:lnSpc>
+              <a:buNone/>
+            </a:pPr>
+            <a:r>
+              <a:rPr lang="en-US" sz="690" dirty="0">
                 <a:solidFill>
                   <a:srgbClr val="202124"/>
                 </a:solidFill>
@@ -12382,17 +12333,17 @@
               </a:rPr>
               <a:t>SELECT sim_id, attack_vector, enforcement_hop, http_status_code, verdict, verified_at</a:t>
             </a:r>
-            <a:endParaRPr lang="en-US" sz="740" dirty="0"/>
-          </a:p>
-          <a:p>
-            <a:pPr indent="0" marL="0">
-              <a:lnSpc>
-                <a:spcPct val="112000"/>
-              </a:lnSpc>
-              <a:buNone/>
-            </a:pPr>
-            <a:r>
-              <a:rPr lang="en-US" sz="740" dirty="0">
+            <a:endParaRPr lang="en-US" sz="690" dirty="0"/>
+          </a:p>
+          <a:p>
+            <a:pPr indent="0" marL="0">
+              <a:lnSpc>
+                <a:spcPct val="106000"/>
+              </a:lnSpc>
+              <a:buNone/>
+            </a:pPr>
+            <a:r>
+              <a:rPr lang="en-US" sz="690" dirty="0">
                 <a:solidFill>
                   <a:srgbClr val="202124"/>
                 </a:solidFill>
@@ -12402,17 +12353,17 @@
               </a:rPr>
               <a:t>FROM `nitina-ggarwal-sandbox-647724.cymbal_agentic_finops_otel.security_breach_audit_log`</a:t>
             </a:r>
-            <a:endParaRPr lang="en-US" sz="740" dirty="0"/>
-          </a:p>
-          <a:p>
-            <a:pPr indent="0" marL="0">
-              <a:lnSpc>
-                <a:spcPct val="112000"/>
-              </a:lnSpc>
-              <a:buNone/>
-            </a:pPr>
-            <a:r>
-              <a:rPr lang="en-US" sz="740" dirty="0">
+            <a:endParaRPr lang="en-US" sz="690" dirty="0"/>
+          </a:p>
+          <a:p>
+            <a:pPr indent="0" marL="0">
+              <a:lnSpc>
+                <a:spcPct val="106000"/>
+              </a:lnSpc>
+              <a:buNone/>
+            </a:pPr>
+            <a:r>
+              <a:rPr lang="en-US" sz="690" dirty="0">
                 <a:solidFill>
                   <a:srgbClr val="202124"/>
                 </a:solidFill>
@@ -12422,7 +12373,7 @@
               </a:rPr>
               <a:t>ORDER BY sim_id ASC;</a:t>
             </a:r>
-            <a:endParaRPr lang="en-US" sz="740" dirty="0"/>
+            <a:endParaRPr lang="en-US" sz="690" dirty="0"/>
           </a:p>
         </p:txBody>
       </p:sp>

--- a/slides/doc-mt-06-editable-slides.pptx
+++ b/slides/doc-mt-06-editable-slides.pptx
@@ -3454,6 +3454,7 @@
               <a:srgbClr val="5F6368"/>
             </a:solidFill>
             <a:prstDash val="solid"/>
+            <a:headEnd type="triangle" w="sm" len="sm"/>
           </a:ln>
         </p:spPr>
       </p:sp>
@@ -3501,6 +3502,7 @@
               <a:srgbClr val="5F6368"/>
             </a:solidFill>
             <a:prstDash val="solid"/>
+            <a:headEnd type="triangle" w="sm" len="sm"/>
           </a:ln>
         </p:spPr>
       </p:sp>
@@ -3686,6 +3688,7 @@
               <a:srgbClr val="5F6368"/>
             </a:solidFill>
             <a:prstDash val="solid"/>
+            <a:headEnd type="triangle" w="sm" len="sm"/>
           </a:ln>
         </p:spPr>
       </p:sp>
@@ -3733,6 +3736,7 @@
               <a:srgbClr val="5F6368"/>
             </a:solidFill>
             <a:prstDash val="solid"/>
+            <a:headEnd type="triangle" w="sm" len="sm"/>
           </a:ln>
         </p:spPr>
       </p:sp>
@@ -7993,7 +7997,7 @@
                 <a:ea typeface="Arial" pitchFamily="34" charset="-122"/>
                 <a:cs typeface="Arial" pitchFamily="34" charset="-120"/>
               </a:rPr>
-              <a:t>• Vector 1: Cloud Armor &amp; Vector 3: Tool Prune: </a:t>
+              <a:t>• Vector 1: Cloud Armor: </a:t>
             </a:r>
             <a:pPr indent="0" marL="0">
               <a:lnSpc>
@@ -8010,7 +8014,7 @@
                 <a:ea typeface="Arial" pitchFamily="34" charset="-122"/>
                 <a:cs typeface="Arial" pitchFamily="34" charset="-120"/>
               </a:rPr>
-              <a:t>Enforces edge policy rules and screens payloads before reaching the runtime.
+              <a:t>Enforces edge policy rules before reaching the runtime.
 </a:t>
             </a:r>
             <a:pPr indent="0" marL="0">
@@ -8045,7 +8049,7 @@
                 <a:ea typeface="Arial" pitchFamily="34" charset="-122"/>
                 <a:cs typeface="Arial" pitchFamily="34" charset="-120"/>
               </a:rPr>
-              <a:t>Authenticates callers and verifies identity and scope claims before routing.
+              <a:t>Screens incoming prompts and verifies policy constraints at the routing hub.
 </a:t>
             </a:r>
             <a:pPr indent="0" marL="0">
@@ -8063,7 +8067,7 @@
                 <a:ea typeface="Arial" pitchFamily="34" charset="-122"/>
                 <a:cs typeface="Arial" pitchFamily="34" charset="-120"/>
               </a:rPr>
-              <a:t>• Hop 2 Catalog PDP: </a:t>
+              <a:t>• Vector 3: Tool Prune: </a:t>
             </a:r>
             <a:pPr indent="0" marL="0">
               <a:lnSpc>
@@ -8080,7 +8084,7 @@
                 <a:ea typeface="Arial" pitchFamily="34" charset="-122"/>
                 <a:cs typeface="Arial" pitchFamily="34" charset="-120"/>
               </a:rPr>
-              <a:t>Serverless routing service that validates caller tokens and dispatches requests to the target execution spoke.</a:t>
+              <a:t>Authenticates callers and binds cryptographic identity and scope claims before routing.</a:t>
             </a:r>
             <a:endParaRPr lang="en-US" sz="690" dirty="0"/>
           </a:p>
@@ -8634,7 +8638,7 @@
                 <a:ea typeface="Arial" pitchFamily="34" charset="-122"/>
                 <a:cs typeface="Arial" pitchFamily="34" charset="-120"/>
               </a:rPr>
-              <a:t>• Vertex AI Agent Engine: </a:t>
+              <a:t>• Vertex AI Agent Engine / Vector 9: Prefix Cache: </a:t>
             </a:r>
             <a:pPr indent="0" marL="0">
               <a:lnSpc>
@@ -8651,7 +8655,7 @@
                 <a:ea typeface="Arial" pitchFamily="34" charset="-122"/>
                 <a:cs typeface="Arial" pitchFamily="34" charset="-120"/>
               </a:rPr>
-              <a:t>Core execution environment orchestrating reasoning, memory, and tool execution.
+              <a:t>Core execution environments orchestrating reasoning, memory, and tool execution across left and right spokes.
 </a:t>
             </a:r>
             <a:pPr indent="0" marL="0">
@@ -8669,7 +8673,7 @@
                 <a:ea typeface="Arial" pitchFamily="34" charset="-122"/>
                 <a:cs typeface="Arial" pitchFamily="34" charset="-120"/>
               </a:rPr>
-              <a:t>• Vector 4: HTTP 400: </a:t>
+              <a:t>• Vector 4: HTTP 400 / Vector 7A: L4 Memory: </a:t>
             </a:r>
             <a:pPr indent="0" marL="0">
               <a:lnSpc>
@@ -8686,7 +8690,7 @@
                 <a:ea typeface="Arial" pitchFamily="34" charset="-122"/>
                 <a:cs typeface="Arial" pitchFamily="34" charset="-120"/>
               </a:rPr>
-              <a:t>Screens prompts and model outputs within the execution boundary to enforce safety and DLP policies.
+              <a:t>Screens prompts and model outputs within each spoke boundary to enforce safety and DLP policies.
 </a:t>
             </a:r>
             <a:pPr indent="0" marL="0">
@@ -8704,7 +8708,7 @@
                 <a:ea typeface="Arial" pitchFamily="34" charset="-122"/>
                 <a:cs typeface="Arial" pitchFamily="34" charset="-120"/>
               </a:rPr>
-              <a:t>• Vector 8: SDP Mask: </a:t>
+              <a:t>• Vector 8: SDP Mask / Auth Manager Vault: </a:t>
             </a:r>
             <a:pPr indent="0" marL="0">
               <a:lnSpc>
@@ -8721,7 +8725,7 @@
                 <a:ea typeface="Arial" pitchFamily="34" charset="-122"/>
                 <a:cs typeface="Arial" pitchFamily="34" charset="-120"/>
               </a:rPr>
-              <a:t>Serverless tool interface providing standardized, scoped access to enterprise systems.
+              <a:t>Serverless tool interfaces providing standardized, scoped access to enterprise systems.
 </a:t>
             </a:r>
             <a:pPr indent="0" marL="0">
@@ -8739,7 +8743,7 @@
                 <a:ea typeface="Arial" pitchFamily="34" charset="-122"/>
                 <a:cs typeface="Arial" pitchFamily="34" charset="-120"/>
               </a:rPr>
-              <a:t>• Zero Raw PII Egress: </a:t>
+              <a:t>• Zero Raw PII Egress / Vector 7C: AlloyDB RLS: </a:t>
             </a:r>
             <a:pPr indent="0" marL="0">
               <a:lnSpc>
@@ -8756,7 +8760,7 @@
                 <a:ea typeface="Arial" pitchFamily="34" charset="-122"/>
                 <a:cs typeface="Arial" pitchFamily="34" charset="-120"/>
               </a:rPr>
-              <a:t>Isolated persistence layer enforcing access boundaries, vector namespaces, and encryption at rest.</a:t>
+              <a:t>Isolated persistence layers enforcing access boundaries, vector namespaces, and encryption at rest.</a:t>
             </a:r>
             <a:endParaRPr lang="en-US" sz="690" dirty="0"/>
           </a:p>

--- a/slides/doc-mt-06-editable-slides.pptx
+++ b/slides/doc-mt-06-editable-slides.pptx
@@ -782,7 +782,7 @@
           <a:p>
             <a:r>
               <a:rPr lang="en-US" dirty="0"/>
-              <a:t>[phased-roadmap-timeline] WS5 • 10-Week Enterprise Multi-Tenant Rollout Roadmap: Workstream 5 Program Roadmap  •  Weeks 1–3 (Pattern A MVP) → Weeks 4–6 (FinOps &amp; OTel) → Weeks 7–10 (Silos &amp; PSC)</a:t>
+              <a:t>[phased-roadmap-timeline] WS5 • ACT III: 10-WEEK ENTERPRISE MULTI-TENANT ROLLOUT ROADMAP: Workstream 5 Program Roadmap  •  Weeks 1–3 (Pattern A MVP) → Weeks 4–6 (FinOps &amp; OTel) → Weeks 7–10 (Silos &amp; PSC)</a:t>
             </a:r>
             <a:endParaRPr lang="en-US" dirty="0"/>
           </a:p>
@@ -870,7 +870,7 @@
           <a:p>
             <a:r>
               <a:rPr lang="en-US" dirty="0"/>
-              <a:t>[strategic-operating-model-pillars] WS5 • 80/20 Code Reuse, Agentic Triad &amp; Automated CI/CD Governance: Workstream 5 Program Operating Model  •  80/20 Code Reuse + Multi-Tenant Agentic Triad + 20/20 CI/CD Gates</a:t>
+              <a:t>[strategic-operating-model-pillars] WS5 • ACT III: 80/20 CODE REUSE, AGENTIC TRIAD &amp; CI/CD GOVERNANCE: Workstream 5 Program Operating Model  •  80/20 Code Reuse + Multi-Tenant Agentic Triad + 20/20 CI/CD Gates</a:t>
             </a:r>
             <a:endParaRPr lang="en-US" dirty="0"/>
           </a:p>
@@ -1589,7 +1589,7 @@
           <a:p>
             <a:r>
               <a:rPr lang="en-US" dirty="0"/>
-              <a:t>[async-state-flow-pipeline] WS5 • Executive 2-Question Topology Selector &amp; Live Promotion Loop: Workstream 5 Decision &amp; Promotion Loop  •  2-Question Selector + 80/20 Terraform Deployment + Live Tier Promotion</a:t>
+              <a:t>[async-state-flow-pipeline] WS5 • ACT II: EXECUTIVE 2-QUESTION TOPOLOGY SELECTOR &amp; LIVE PROMOTION LOOP: Workstream 5 Decision &amp; Promotion Loop  •  2-Question Selector + 80/20 Terraform Deployment + Live Tier Promotion</a:t>
             </a:r>
             <a:endParaRPr lang="en-US" dirty="0"/>
           </a:p>
@@ -3175,7 +3175,7 @@
                 <a:ea typeface="Google Sans" pitchFamily="34" charset="-122"/>
                 <a:cs typeface="Google Sans" pitchFamily="34" charset="-120"/>
               </a:rPr>
-              <a:t>OFFICIAL 4-ZONE HUB-AND-SPOKE TOPOLOGY (#78)</a:t>
+              <a:t>3-ACT EXECUTIVE BRIEFING &amp; DELIVERABLE MAP</a:t>
             </a:r>
             <a:endParaRPr lang="en-US" sz="920" dirty="0"/>
           </a:p>
@@ -3237,7 +3237,7 @@
         <p:spPr>
           <a:xfrm>
             <a:off x="7735824" y="1005840"/>
-            <a:ext cx="1353312" cy="219456"/>
+            <a:ext cx="1481328" cy="219456"/>
           </a:xfrm>
           <a:prstGeom prst="roundRect">
             <a:avLst>
@@ -3259,7 +3259,7 @@
         <p:spPr>
           <a:xfrm>
             <a:off x="7735824" y="1005840"/>
-            <a:ext cx="1353312" cy="219456"/>
+            <a:ext cx="1481328" cy="219456"/>
           </a:xfrm>
           <a:prstGeom prst="rect">
             <a:avLst/>
@@ -3275,7 +3275,7 @@
               <a:buNone/>
             </a:pPr>
             <a:r>
-              <a:rPr lang="en-US" sz="680" b="1" dirty="0">
+              <a:rPr lang="en-US" sz="660" b="1" dirty="0">
                 <a:solidFill>
                   <a:srgbClr val="174EA6"/>
                 </a:solidFill>
@@ -3283,9 +3283,9 @@
                 <a:ea typeface="Google Sans" pitchFamily="34" charset="-122"/>
                 <a:cs typeface="Google Sans" pitchFamily="34" charset="-120"/>
               </a:rPr>
-              <a:t>01 • ROUTING HUB</a:t>
-            </a:r>
-            <a:endParaRPr lang="en-US" sz="680" dirty="0"/>
+              <a:t>ACT I • SLIDES 1–4</a:t>
+            </a:r>
+            <a:endParaRPr lang="en-US" sz="660" dirty="0"/>
           </a:p>
         </p:txBody>
       </p:sp>
@@ -3297,8 +3297,8 @@
         </p:nvSpPr>
         <p:spPr>
           <a:xfrm>
-            <a:off x="9162288" y="987552"/>
-            <a:ext cx="2340864" cy="256032"/>
+            <a:off x="9272016" y="987552"/>
+            <a:ext cx="2249424" cy="256032"/>
           </a:xfrm>
           <a:prstGeom prst="rect">
             <a:avLst/>
@@ -3314,7 +3314,7 @@
               <a:buNone/>
             </a:pPr>
             <a:r>
-              <a:rPr lang="en-US" sz="880" b="1" dirty="0">
+              <a:rPr lang="en-US" sz="850" b="1" dirty="0">
                 <a:solidFill>
                   <a:srgbClr val="3C4043"/>
                 </a:solidFill>
@@ -3322,9 +3322,9 @@
                 <a:ea typeface="Google Sans" pitchFamily="34" charset="-122"/>
                 <a:cs typeface="Google Sans" pitchFamily="34" charset="-120"/>
               </a:rPr>
-              <a:t>Edge WAF, OBO/DPoP &amp; Tier Router</a:t>
-            </a:r>
-            <a:endParaRPr lang="en-US" sz="880" dirty="0"/>
+              <a:t>Master Blueprint (#78) &amp; SLO Scorecard</a:t>
+            </a:r>
+            <a:endParaRPr lang="en-US" sz="850" dirty="0"/>
           </a:p>
         </p:txBody>
       </p:sp>
@@ -3353,7 +3353,7 @@
               <a:buNone/>
             </a:pPr>
             <a:r>
-              <a:rPr lang="en-US" sz="790" dirty="0">
+              <a:rPr lang="en-US" sz="780" dirty="0">
                 <a:solidFill>
                   <a:srgbClr val="5F6368"/>
                 </a:solidFill>
@@ -3361,9 +3361,9 @@
                 <a:ea typeface="Roboto" pitchFamily="34" charset="-122"/>
                 <a:cs typeface="Roboto" pitchFamily="34" charset="-120"/>
               </a:rPr>
-              <a:t>Google Cloud Armor, IAP, IAM STS &amp; Agent Engine Registry verify OIDC identity, strip spoofed headers &amp; filter tools.</a:t>
-            </a:r>
-            <a:endParaRPr lang="en-US" sz="790" dirty="0"/>
+              <a:t>Decomposes Figure 1 into 56 editable vector shapes + 23 connectors, quantified unit economics ($42 vs. $1,850/mo) &amp; GCP stack.</a:t>
+            </a:r>
+            <a:endParaRPr lang="en-US" sz="780" dirty="0"/>
           </a:p>
         </p:txBody>
       </p:sp>
@@ -3423,7 +3423,7 @@
         <p:spPr>
           <a:xfrm>
             <a:off x="7735824" y="2194560"/>
-            <a:ext cx="1353312" cy="219456"/>
+            <a:ext cx="1481328" cy="219456"/>
           </a:xfrm>
           <a:prstGeom prst="roundRect">
             <a:avLst>
@@ -3445,7 +3445,7 @@
         <p:spPr>
           <a:xfrm>
             <a:off x="7735824" y="2194560"/>
-            <a:ext cx="1353312" cy="219456"/>
+            <a:ext cx="1481328" cy="219456"/>
           </a:xfrm>
           <a:prstGeom prst="rect">
             <a:avLst/>
@@ -3461,7 +3461,7 @@
               <a:buNone/>
             </a:pPr>
             <a:r>
-              <a:rPr lang="en-US" sz="680" b="1" dirty="0">
+              <a:rPr lang="en-US" sz="660" b="1" dirty="0">
                 <a:solidFill>
                   <a:srgbClr val="A50E0E"/>
                 </a:solidFill>
@@ -3469,9 +3469,9 @@
                 <a:ea typeface="Google Sans" pitchFamily="34" charset="-122"/>
                 <a:cs typeface="Google Sans" pitchFamily="34" charset="-120"/>
               </a:rPr>
-              <a:t>02 • RIGHT SPOKE</a:t>
-            </a:r>
-            <a:endParaRPr lang="en-US" sz="680" dirty="0"/>
+              <a:t>ACT II • SLIDES 5–8</a:t>
+            </a:r>
+            <a:endParaRPr lang="en-US" sz="660" dirty="0"/>
           </a:p>
         </p:txBody>
       </p:sp>
@@ -3483,8 +3483,8 @@
         </p:nvSpPr>
         <p:spPr>
           <a:xfrm>
-            <a:off x="9162288" y="2176272"/>
-            <a:ext cx="2340864" cy="256032"/>
+            <a:off x="9272016" y="2176272"/>
+            <a:ext cx="2249424" cy="256032"/>
           </a:xfrm>
           <a:prstGeom prst="rect">
             <a:avLst/>
@@ -3500,7 +3500,7 @@
               <a:buNone/>
             </a:pPr>
             <a:r>
-              <a:rPr lang="en-US" sz="880" b="1" dirty="0">
+              <a:rPr lang="en-US" sz="850" b="1" dirty="0">
                 <a:solidFill>
                   <a:srgbClr val="3C4043"/>
                 </a:solidFill>
@@ -3508,9 +3508,9 @@
                 <a:ea typeface="Google Sans" pitchFamily="34" charset="-122"/>
                 <a:cs typeface="Google Sans" pitchFamily="34" charset="-120"/>
               </a:rPr>
-              <a:t>2LO/3LO MCP, AlloyDB RLS &amp; PSC Vaults</a:t>
-            </a:r>
-            <a:endParaRPr lang="en-US" sz="880" dirty="0"/>
+              <a:t>3-Zone Boundaries, UML &amp; Fail-Closed Loops</a:t>
+            </a:r>
+            <a:endParaRPr lang="en-US" sz="850" dirty="0"/>
           </a:p>
         </p:txBody>
       </p:sp>
@@ -3539,7 +3539,7 @@
               <a:buNone/>
             </a:pPr>
             <a:r>
-              <a:rPr lang="en-US" sz="790" dirty="0">
+              <a:rPr lang="en-US" sz="780" dirty="0">
                 <a:solidFill>
                   <a:srgbClr val="5F6368"/>
                 </a:solidFill>
@@ -3547,9 +3547,9 @@
                 <a:ea typeface="Roboto" pitchFamily="34" charset="-122"/>
                 <a:cs typeface="Roboto" pitchFamily="34" charset="-120"/>
               </a:rPr>
-              <a:t>Enforces PostgreSQL Row-Level Security, 3LO step-up consent, VPC-SC perimeters &amp; &lt;60s CMEK kill-switches.</a:t>
-            </a:r>
-            <a:endParaRPr lang="en-US" sz="790" dirty="0"/>
+              <a:t>Walks through 3-zone physical/logical boundaries, Hop 1 OBO+DPoP wire transformation, 5-Actor UML sequence &amp; HTTP 401–429 circuit breakers.</a:t>
+            </a:r>
+            <a:endParaRPr lang="en-US" sz="780" dirty="0"/>
           </a:p>
         </p:txBody>
       </p:sp>
@@ -3609,7 +3609,7 @@
         <p:spPr>
           <a:xfrm>
             <a:off x="7735824" y="3383280"/>
-            <a:ext cx="1353312" cy="219456"/>
+            <a:ext cx="1481328" cy="219456"/>
           </a:xfrm>
           <a:prstGeom prst="roundRect">
             <a:avLst>
@@ -3631,7 +3631,7 @@
         <p:spPr>
           <a:xfrm>
             <a:off x="7735824" y="3383280"/>
-            <a:ext cx="1353312" cy="219456"/>
+            <a:ext cx="1481328" cy="219456"/>
           </a:xfrm>
           <a:prstGeom prst="rect">
             <a:avLst/>
@@ -3647,7 +3647,7 @@
               <a:buNone/>
             </a:pPr>
             <a:r>
-              <a:rPr lang="en-US" sz="680" b="1" dirty="0">
+              <a:rPr lang="en-US" sz="660" b="1" dirty="0">
                 <a:solidFill>
                   <a:srgbClr val="B06000"/>
                 </a:solidFill>
@@ -3655,9 +3655,9 @@
                 <a:ea typeface="Google Sans" pitchFamily="34" charset="-122"/>
                 <a:cs typeface="Google Sans" pitchFamily="34" charset="-120"/>
               </a:rPr>
-              <a:t>03 • LEFT SPOKE</a:t>
-            </a:r>
-            <a:endParaRPr lang="en-US" sz="680" dirty="0"/>
+              <a:t>ACT III • SLIDES 9–12</a:t>
+            </a:r>
+            <a:endParaRPr lang="en-US" sz="660" dirty="0"/>
           </a:p>
         </p:txBody>
       </p:sp>
@@ -3669,8 +3669,8 @@
         </p:nvSpPr>
         <p:spPr>
           <a:xfrm>
-            <a:off x="9162288" y="3364992"/>
-            <a:ext cx="2340864" cy="256032"/>
+            <a:off x="9272016" y="3364992"/>
+            <a:ext cx="2249424" cy="256032"/>
           </a:xfrm>
           <a:prstGeom prst="rect">
             <a:avLst/>
@@ -3686,7 +3686,7 @@
               <a:buNone/>
             </a:pPr>
             <a:r>
-              <a:rPr lang="en-US" sz="880" b="1" dirty="0">
+              <a:rPr lang="en-US" sz="850" b="1" dirty="0">
                 <a:solidFill>
                   <a:srgbClr val="3C4043"/>
                 </a:solidFill>
@@ -3694,9 +3694,9 @@
                 <a:ea typeface="Google Sans" pitchFamily="34" charset="-122"/>
                 <a:cs typeface="Google Sans" pitchFamily="34" charset="-120"/>
               </a:rPr>
-              <a:t>Model Armor, ADK &amp; 90% Prefix Cache</a:t>
-            </a:r>
-            <a:endParaRPr lang="en-US" sz="880" dirty="0"/>
+              <a:t>Pattern A/B/C Matrix, GAP-01..05 &amp; Live Proof</a:t>
+            </a:r>
+            <a:endParaRPr lang="en-US" sz="850" dirty="0"/>
           </a:p>
         </p:txBody>
       </p:sp>
@@ -3725,7 +3725,7 @@
               <a:buNone/>
             </a:pPr>
             <a:r>
-              <a:rPr lang="en-US" sz="790" dirty="0">
+              <a:rPr lang="en-US" sz="780" dirty="0">
                 <a:solidFill>
                   <a:srgbClr val="5F6368"/>
                 </a:solidFill>
@@ -3733,9 +3733,9 @@
                 <a:ea typeface="Roboto" pitchFamily="34" charset="-122"/>
                 <a:cs typeface="Roboto" pitchFamily="34" charset="-120"/>
               </a:rPr>
-              <a:t>Screens prompts (4/6), executes Gemini 2.5 Pro with 90% cache (5), clamps RPM in Valkey &amp; isolates L1–L5 memory.</a:t>
-            </a:r>
-            <a:endParaRPr lang="en-US" sz="790" dirty="0"/>
+              <a:t>Compares Pooled, Siloed &amp; Hybrid PSC trade-offs, closes 5 EAP product gaps, embeds 16:9 Cloud Console captures &amp; 6-week rollout.</a:t>
+            </a:r>
+            <a:endParaRPr lang="en-US" sz="780" dirty="0"/>
           </a:p>
         </p:txBody>
       </p:sp>
@@ -3795,7 +3795,7 @@
         <p:spPr>
           <a:xfrm>
             <a:off x="7735824" y="4572000"/>
-            <a:ext cx="1353312" cy="219456"/>
+            <a:ext cx="1481328" cy="219456"/>
           </a:xfrm>
           <a:prstGeom prst="roundRect">
             <a:avLst>
@@ -3817,7 +3817,7 @@
         <p:spPr>
           <a:xfrm>
             <a:off x="7735824" y="4572000"/>
-            <a:ext cx="1353312" cy="219456"/>
+            <a:ext cx="1481328" cy="219456"/>
           </a:xfrm>
           <a:prstGeom prst="rect">
             <a:avLst/>
@@ -3833,7 +3833,7 @@
               <a:buNone/>
             </a:pPr>
             <a:r>
-              <a:rPr lang="en-US" sz="680" b="1" dirty="0">
+              <a:rPr lang="en-US" sz="660" b="1" dirty="0">
                 <a:solidFill>
                   <a:srgbClr val="0D652D"/>
                 </a:solidFill>
@@ -3841,9 +3841,9 @@
                 <a:ea typeface="Google Sans" pitchFamily="34" charset="-122"/>
                 <a:cs typeface="Google Sans" pitchFamily="34" charset="-120"/>
               </a:rPr>
-              <a:t>04 • GOVERNANCE HUB</a:t>
-            </a:r>
-            <a:endParaRPr lang="en-US" sz="680" dirty="0"/>
+              <a:t>GOVERNANCE • SLIDES 13–14</a:t>
+            </a:r>
+            <a:endParaRPr lang="en-US" sz="660" dirty="0"/>
           </a:p>
         </p:txBody>
       </p:sp>
@@ -3855,8 +3855,8 @@
         </p:nvSpPr>
         <p:spPr>
           <a:xfrm>
-            <a:off x="9162288" y="4553712"/>
-            <a:ext cx="2340864" cy="256032"/>
+            <a:off x="9272016" y="4553712"/>
+            <a:ext cx="2249424" cy="256032"/>
           </a:xfrm>
           <a:prstGeom prst="rect">
             <a:avLst/>
@@ -3872,7 +3872,7 @@
               <a:buNone/>
             </a:pPr>
             <a:r>
-              <a:rPr lang="en-US" sz="880" b="1" dirty="0">
+              <a:rPr lang="en-US" sz="850" b="1" dirty="0">
                 <a:solidFill>
                   <a:srgbClr val="3C4043"/>
                 </a:solidFill>
@@ -3880,9 +3880,9 @@
                 <a:ea typeface="Google Sans" pitchFamily="34" charset="-122"/>
                 <a:cs typeface="Google Sans" pitchFamily="34" charset="-120"/>
               </a:rPr>
-              <a:t>Security, CMEK &amp; FinOps Telemetry</a:t>
-            </a:r>
-            <a:endParaRPr lang="en-US" sz="880" dirty="0"/>
+              <a:t>Day-2 RACI Operating Model &amp; Series Map</a:t>
+            </a:r>
+            <a:endParaRPr lang="en-US" sz="850" dirty="0"/>
           </a:p>
         </p:txBody>
       </p:sp>
@@ -3911,7 +3911,7 @@
               <a:buNone/>
             </a:pPr>
             <a:r>
-              <a:rPr lang="en-US" sz="790" dirty="0">
+              <a:rPr lang="en-US" sz="780" dirty="0">
                 <a:solidFill>
                   <a:srgbClr val="5F6368"/>
                 </a:solidFill>
@@ -3919,9 +3919,9 @@
                 <a:ea typeface="Roboto" pitchFamily="34" charset="-122"/>
                 <a:cs typeface="Roboto" pitchFamily="34" charset="-120"/>
               </a:rPr>
-              <a:t>Security Command Center, Cloud KMS CMEK &amp; BigQuery OTel govern encryption liveness and zero-PII chargeback.</a:t>
-            </a:r>
-            <a:endParaRPr lang="en-US" sz="790" dirty="0"/>
+              <a:t>Assigns Security, SRE &amp; FinOps ownership SLAs and maps runnable deliverables across Workstreams 1–5 (24 files + 20/20 gates).</a:t>
+            </a:r>
+            <a:endParaRPr lang="en-US" sz="780" dirty="0"/>
           </a:p>
         </p:txBody>
       </p:sp>
@@ -3977,7 +3977,7 @@
               <a:buNone/>
             </a:pPr>
             <a:r>
-              <a:rPr lang="en-US" sz="740" b="1" dirty="0">
+              <a:rPr lang="en-US" sz="720" b="1" dirty="0">
                 <a:solidFill>
                   <a:srgbClr val="3C4043"/>
                 </a:solidFill>
@@ -3985,9 +3985,9 @@
                 <a:ea typeface="Google Sans" pitchFamily="34" charset="-122"/>
                 <a:cs typeface="Google Sans" pitchFamily="34" charset="-120"/>
               </a:rPr>
-              <a:t>3-Act Executive Arc (14 Slides): Act I Architecture → Act II Runtime → Act III Proof &amp; Rollout</a:t>
-            </a:r>
-            <a:endParaRPr lang="en-US" sz="740" dirty="0"/>
+              <a:t>Verified Across 3 GCP Projects (#248990048888 • #638420508320 • #887605034827) • 12/12 Forensic PASS</a:t>
+            </a:r>
+            <a:endParaRPr lang="en-US" sz="720" dirty="0"/>
           </a:p>
         </p:txBody>
       </p:sp>
@@ -4427,7 +4427,7 @@
                 <a:ea typeface="Google Sans" pitchFamily="34" charset="-122"/>
                 <a:cs typeface="Google Sans" pitchFamily="34" charset="-120"/>
               </a:rPr>
-              <a:t>Design alternatives — Multi-Tenant Topology Comparison Matrix (A, B &amp; C)</a:t>
+              <a:t>ACT III • ARCHITECTURAL TRADE-OFF &amp; ISOLATION SELECTION MATRIX</a:t>
             </a:r>
             <a:endParaRPr lang="en-US" sz="1020" dirty="0"/>
           </a:p>
@@ -4532,7 +4532,7 @@
                 <a:ea typeface="Google Sans" pitchFamily="34" charset="-122"/>
                 <a:cs typeface="Google Sans" pitchFamily="34" charset="-120"/>
               </a:rPr>
-              <a:t>Design alternatives — Multi-Tenant Topology Comparison Matrix (A, B &amp; C)</a:t>
+              <a:t>Multi-Tenant Topology Comparison Matrix (A, B &amp; C)</a:t>
             </a:r>
             <a:endParaRPr lang="en-US" sz="1800" dirty="0"/>
           </a:p>
@@ -4571,7 +4571,7 @@
                 <a:ea typeface="Roboto" pitchFamily="34" charset="-122"/>
                 <a:cs typeface="Roboto" pitchFamily="34" charset="-120"/>
               </a:rPr>
-              <a:t>Side-by-side Google Cloud Well-Architected trade-off analysis, compensating controls, and target SLAs.</a:t>
+              <a:t>Side-by-side Google Cloud Well-Architected trade-off analysis, isolation boundaries, and unit economics.</a:t>
             </a:r>
             <a:endParaRPr lang="en-US" sz="980" dirty="0"/>
           </a:p>
@@ -6327,7 +6327,7 @@
               <a:buNone/>
             </a:pPr>
             <a:r>
-              <a:rPr lang="en-US" sz="760" b="1" dirty="0">
+              <a:rPr lang="en-US" sz="820" b="1" dirty="0">
                 <a:solidFill>
                   <a:srgbClr val="3C4043"/>
                 </a:solidFill>
@@ -6335,9 +6335,9 @@
                 <a:ea typeface="Google Sans" pitchFamily="34" charset="-122"/>
                 <a:cs typeface="Google Sans" pitchFamily="34" charset="-120"/>
               </a:rPr>
-              <a:t>1. Tenant Isolation &amp; Network Boundary</a:t>
-            </a:r>
-            <a:endParaRPr lang="en-US" sz="760" dirty="0"/>
+              <a:t>1. Q1: Regulatory Blast-Radius Gate</a:t>
+            </a:r>
+            <a:endParaRPr lang="en-US" sz="820" dirty="0"/>
           </a:p>
         </p:txBody>
       </p:sp>
@@ -6376,7 +6376,7 @@
                 <a:ea typeface="Roboto" pitchFamily="34" charset="-122"/>
                 <a:cs typeface="Roboto" pitchFamily="34" charset="-120"/>
               </a:rPr>
-              <a:t>Central Ingress Hub + Shared Pool (Std) + Unidirectional PSC Spokes (Ent)</a:t>
+              <a:t>If customer contracts mandate dedicated GCP projects, VPC-SC, or &lt;60s CMEK kill-switches, route to Pattern B or Pattern C Spoke.</a:t>
             </a:r>
             <a:endParaRPr lang="en-US" sz="740" dirty="0"/>
           </a:p>
@@ -6456,7 +6456,7 @@
               <a:buNone/>
             </a:pPr>
             <a:r>
-              <a:rPr lang="en-US" sz="820" b="1" dirty="0">
+              <a:rPr lang="en-US" sz="760" b="1" dirty="0">
                 <a:solidFill>
                   <a:srgbClr val="3C4043"/>
                 </a:solidFill>
@@ -6464,9 +6464,9 @@
                 <a:ea typeface="Google Sans" pitchFamily="34" charset="-122"/>
                 <a:cs typeface="Google Sans" pitchFamily="34" charset="-120"/>
               </a:rPr>
-              <a:t>2. Model Hosting &amp; Prefix Caching</a:t>
-            </a:r>
-            <a:endParaRPr lang="en-US" sz="820" dirty="0"/>
+              <a:t>2. Q2: Portfolio Mobility &amp; Upsell Gate</a:t>
+            </a:r>
+            <a:endParaRPr lang="en-US" sz="760" dirty="0"/>
           </a:p>
         </p:txBody>
       </p:sp>
@@ -6505,7 +6505,7 @@
                 <a:ea typeface="Roboto" pitchFamily="34" charset="-122"/>
                 <a:cs typeface="Roboto" pitchFamily="34" charset="-120"/>
               </a:rPr>
-              <a:t>90% shared prefix cache for Standard pool; dedicated PT / Gemma 3 in Enterprise spokes</a:t>
+              <a:t>If operating a multi-tier SaaS platform with self-service Standard-to-Enterprise upgrades, deploy Pattern C Dynamic Hybrid PSC.</a:t>
             </a:r>
             <a:endParaRPr lang="en-US" sz="740" dirty="0"/>
           </a:p>
@@ -6585,7 +6585,7 @@
               <a:buNone/>
             </a:pPr>
             <a:r>
-              <a:rPr lang="en-US" sz="760" b="1" dirty="0">
+              <a:rPr lang="en-US" sz="820" b="1" dirty="0">
                 <a:solidFill>
                   <a:srgbClr val="3C4043"/>
                 </a:solidFill>
@@ -6593,9 +6593,9 @@
                 <a:ea typeface="Google Sans" pitchFamily="34" charset="-122"/>
                 <a:cs typeface="Google Sans" pitchFamily="34" charset="-120"/>
               </a:rPr>
-              <a:t>3. Encryption Sovereignty &amp; Kill-Switch</a:t>
-            </a:r>
-            <a:endParaRPr lang="en-US" sz="760" dirty="0"/>
+              <a:t>3. 74% Blended Portfolio TCO Savings</a:t>
+            </a:r>
+            <a:endParaRPr lang="en-US" sz="820" dirty="0"/>
           </a:p>
         </p:txBody>
       </p:sp>
@@ -6634,7 +6634,7 @@
                 <a:ea typeface="Roboto" pitchFamily="34" charset="-122"/>
                 <a:cs typeface="Roboto" pitchFamily="34" charset="-120"/>
               </a:rPr>
-              <a:t>Pooled RLS for Standard; dedicated CMEK kill-switch + 0ms live upgrade for Enterprise</a:t>
+              <a:t>Serving 850–950 Standard tenants in Pattern A ($42/mo) and 50–150 Enterprise spokes saves $1.53M/mo vs. an all-silo footprint.</a:t>
             </a:r>
             <a:endParaRPr lang="en-US" sz="740" dirty="0"/>
           </a:p>
@@ -6722,7 +6722,7 @@
                 <a:ea typeface="Google Sans" pitchFamily="34" charset="-122"/>
                 <a:cs typeface="Google Sans" pitchFamily="34" charset="-120"/>
               </a:rPr>
-              <a:t>4. 1,000-Tenant Portfolio Monthly TCO</a:t>
+              <a:t>4. Continuous 12/12 + 20/20 CI/CD Gate</a:t>
             </a:r>
             <a:endParaRPr lang="en-US" sz="760" dirty="0"/>
           </a:p>
@@ -6763,7 +6763,7 @@
                 <a:ea typeface="Roboto" pitchFamily="34" charset="-122"/>
                 <a:cs typeface="Roboto" pitchFamily="34" charset="-120"/>
               </a:rPr>
-              <a:t>$132,400 / mo (950 Pooled + 50 PSC Spokes -&gt; 74% lower TCO vs. all-siloed)</a:t>
+              <a:t>Every pull request executes 12 forensic checks and 20 live security/migration assertions before promoting revisions to Cloud Run.</a:t>
             </a:r>
             <a:endParaRPr lang="en-US" sz="740" dirty="0"/>
           </a:p>
@@ -7613,7 +7613,7 @@
                 <a:ea typeface="Roboto" pitchFamily="34" charset="-122"/>
                 <a:cs typeface="Roboto" pitchFamily="34" charset="-120"/>
               </a:rPr>
-              <a:t>• Project: nitinagga-ge-2 (#638420508320)</a:t>
+              <a:t>• Project: cymbal-pooled-prod (#638420508320)</a:t>
             </a:r>
             <a:endParaRPr lang="en-US" sz="780" dirty="0"/>
           </a:p>
@@ -7630,7 +7630,7 @@
                 <a:ea typeface="Roboto" pitchFamily="34" charset="-122"/>
                 <a:cs typeface="Roboto" pitchFamily="34" charset="-120"/>
               </a:rPr>
-              <a:t>• Sandbox: nitina-ggarwal-sandbox-647724</a:t>
+              <a:t>• Sandbox: cymbal-build-sandbox (#887605034827)</a:t>
             </a:r>
             <a:endParaRPr lang="en-US" sz="780" dirty="0"/>
           </a:p>
@@ -9194,7 +9194,7 @@
                 <a:ea typeface="Google Sans" pitchFamily="34" charset="-122"/>
                 <a:cs typeface="Google Sans" pitchFamily="34" charset="-120"/>
               </a:rPr>
-              <a:t>WS5 • 10-Week Enterprise Multi-Tenant Rollout Roadmap</a:t>
+              <a:t>WS5 • ACT III: 10-WEEK ENTERPRISE MULTI-TENANT ROLLOUT ROADMAP</a:t>
             </a:r>
             <a:endParaRPr lang="en-US" sz="1020" dirty="0"/>
           </a:p>
@@ -9291,7 +9291,7 @@
               <a:buNone/>
             </a:pPr>
             <a:r>
-              <a:rPr lang="en-US" sz="2400" b="1" dirty="0">
+              <a:rPr lang="en-US" sz="2250" b="1" dirty="0">
                 <a:solidFill>
                   <a:srgbClr val="0F2942"/>
                 </a:solidFill>
@@ -9299,9 +9299,9 @@
                 <a:ea typeface="Google Sans Display" pitchFamily="34" charset="-122"/>
                 <a:cs typeface="Google Sans Display" pitchFamily="34" charset="-120"/>
               </a:rPr>
-              <a:t>Workstream 5 Complete 10-Week Production Rollout Roadmap</a:t>
-            </a:r>
-            <a:endParaRPr lang="en-US" sz="2400" dirty="0"/>
+              <a:t>10-Week Phased Production Rollout Across Patterns A, B &amp; C</a:t>
+            </a:r>
+            <a:endParaRPr lang="en-US" sz="2250" dirty="0"/>
           </a:p>
         </p:txBody>
       </p:sp>
@@ -9595,66 +9595,6 @@
         </p:nvSpPr>
         <p:spPr>
           <a:xfrm>
-            <a:off x="411480" y="3694176"/>
-            <a:ext cx="237744" cy="237744"/>
-          </a:xfrm>
-          <a:prstGeom prst="ellipse">
-            <a:avLst/>
-          </a:prstGeom>
-          <a:solidFill>
-            <a:srgbClr val="0F2942"/>
-          </a:solidFill>
-          <a:ln/>
-        </p:spPr>
-      </p:sp>
-      <p:sp>
-        <p:nvSpPr>
-          <p:cNvPr id="27" name="Shape 25"/>
-          <p:cNvSpPr/>
-          <p:nvPr/>
-        </p:nvSpPr>
-        <p:spPr>
-          <a:xfrm>
-            <a:off x="3849624" y="3694176"/>
-            <a:ext cx="237744" cy="237744"/>
-          </a:xfrm>
-          <a:prstGeom prst="ellipse">
-            <a:avLst/>
-          </a:prstGeom>
-          <a:solidFill>
-            <a:srgbClr val="0F2942"/>
-          </a:solidFill>
-          <a:ln/>
-        </p:spPr>
-      </p:sp>
-      <p:sp>
-        <p:nvSpPr>
-          <p:cNvPr id="28" name="Shape 26"/>
-          <p:cNvSpPr/>
-          <p:nvPr/>
-        </p:nvSpPr>
-        <p:spPr>
-          <a:xfrm>
-            <a:off x="4251960" y="3694176"/>
-            <a:ext cx="237744" cy="237744"/>
-          </a:xfrm>
-          <a:prstGeom prst="ellipse">
-            <a:avLst/>
-          </a:prstGeom>
-          <a:solidFill>
-            <a:srgbClr val="0D7A75"/>
-          </a:solidFill>
-          <a:ln/>
-        </p:spPr>
-      </p:sp>
-      <p:sp>
-        <p:nvSpPr>
-          <p:cNvPr id="29" name="Shape 27"/>
-          <p:cNvSpPr/>
-          <p:nvPr/>
-        </p:nvSpPr>
-        <p:spPr>
-          <a:xfrm>
             <a:off x="4370832" y="1536192"/>
             <a:ext cx="3438144" cy="4443984"/>
           </a:xfrm>
@@ -9676,7 +9616,7 @@
       </p:sp>
       <p:sp>
         <p:nvSpPr>
-          <p:cNvPr id="30" name="Shape 28"/>
+          <p:cNvPr id="27" name="Shape 25"/>
           <p:cNvSpPr/>
           <p:nvPr/>
         </p:nvSpPr>
@@ -9698,7 +9638,7 @@
       </p:sp>
       <p:sp>
         <p:nvSpPr>
-          <p:cNvPr id="31" name="Text 29"/>
+          <p:cNvPr id="28" name="Text 26"/>
           <p:cNvSpPr/>
           <p:nvPr/>
         </p:nvSpPr>
@@ -9737,7 +9677,7 @@
       </p:sp>
       <p:sp>
         <p:nvSpPr>
-          <p:cNvPr id="32" name="Shape 30"/>
+          <p:cNvPr id="29" name="Shape 27"/>
           <p:cNvSpPr/>
           <p:nvPr/>
         </p:nvSpPr>
@@ -9757,7 +9697,7 @@
       </p:sp>
       <p:sp>
         <p:nvSpPr>
-          <p:cNvPr id="33" name="Text 31"/>
+          <p:cNvPr id="30" name="Text 28"/>
           <p:cNvSpPr/>
           <p:nvPr/>
         </p:nvSpPr>
@@ -9813,7 +9753,7 @@
       </p:sp>
       <p:sp>
         <p:nvSpPr>
-          <p:cNvPr id="34" name="Text 32"/>
+          <p:cNvPr id="31" name="Text 29"/>
           <p:cNvSpPr/>
           <p:nvPr/>
         </p:nvSpPr>
@@ -9852,7 +9792,7 @@
       </p:sp>
       <p:sp>
         <p:nvSpPr>
-          <p:cNvPr id="35" name="Shape 33"/>
+          <p:cNvPr id="32" name="Shape 30"/>
           <p:cNvSpPr/>
           <p:nvPr/>
         </p:nvSpPr>
@@ -9875,7 +9815,7 @@
       </p:sp>
       <p:sp>
         <p:nvSpPr>
-          <p:cNvPr id="36" name="Text 34"/>
+          <p:cNvPr id="33" name="Text 31"/>
           <p:cNvSpPr/>
           <p:nvPr/>
         </p:nvSpPr>
@@ -9931,47 +9871,7 @@
       </p:sp>
       <p:sp>
         <p:nvSpPr>
-          <p:cNvPr id="37" name="Shape 35"/>
-          <p:cNvSpPr/>
-          <p:nvPr/>
-        </p:nvSpPr>
-        <p:spPr>
-          <a:xfrm>
-            <a:off x="7690104" y="3694176"/>
-            <a:ext cx="237744" cy="237744"/>
-          </a:xfrm>
-          <a:prstGeom prst="ellipse">
-            <a:avLst/>
-          </a:prstGeom>
-          <a:solidFill>
-            <a:srgbClr val="0D7A75"/>
-          </a:solidFill>
-          <a:ln/>
-        </p:spPr>
-      </p:sp>
-      <p:sp>
-        <p:nvSpPr>
-          <p:cNvPr id="38" name="Shape 36"/>
-          <p:cNvSpPr/>
-          <p:nvPr/>
-        </p:nvSpPr>
-        <p:spPr>
-          <a:xfrm>
-            <a:off x="8092440" y="3694176"/>
-            <a:ext cx="237744" cy="237744"/>
-          </a:xfrm>
-          <a:prstGeom prst="ellipse">
-            <a:avLst/>
-          </a:prstGeom>
-          <a:solidFill>
-            <a:srgbClr val="54728C"/>
-          </a:solidFill>
-          <a:ln/>
-        </p:spPr>
-      </p:sp>
-      <p:sp>
-        <p:nvSpPr>
-          <p:cNvPr id="39" name="Shape 37"/>
+          <p:cNvPr id="34" name="Shape 32"/>
           <p:cNvSpPr/>
           <p:nvPr/>
         </p:nvSpPr>
@@ -9998,7 +9898,7 @@
       </p:sp>
       <p:sp>
         <p:nvSpPr>
-          <p:cNvPr id="40" name="Shape 38"/>
+          <p:cNvPr id="35" name="Shape 33"/>
           <p:cNvSpPr/>
           <p:nvPr/>
         </p:nvSpPr>
@@ -10020,7 +9920,7 @@
       </p:sp>
       <p:sp>
         <p:nvSpPr>
-          <p:cNvPr id="41" name="Text 39"/>
+          <p:cNvPr id="36" name="Text 34"/>
           <p:cNvSpPr/>
           <p:nvPr/>
         </p:nvSpPr>
@@ -10059,7 +9959,7 @@
       </p:sp>
       <p:sp>
         <p:nvSpPr>
-          <p:cNvPr id="42" name="Shape 40"/>
+          <p:cNvPr id="37" name="Shape 35"/>
           <p:cNvSpPr/>
           <p:nvPr/>
         </p:nvSpPr>
@@ -10079,7 +9979,7 @@
       </p:sp>
       <p:sp>
         <p:nvSpPr>
-          <p:cNvPr id="43" name="Text 41"/>
+          <p:cNvPr id="38" name="Text 36"/>
           <p:cNvSpPr/>
           <p:nvPr/>
         </p:nvSpPr>
@@ -10135,7 +10035,7 @@
       </p:sp>
       <p:sp>
         <p:nvSpPr>
-          <p:cNvPr id="44" name="Text 42"/>
+          <p:cNvPr id="39" name="Text 37"/>
           <p:cNvSpPr/>
           <p:nvPr/>
         </p:nvSpPr>
@@ -10174,7 +10074,7 @@
       </p:sp>
       <p:sp>
         <p:nvSpPr>
-          <p:cNvPr id="45" name="Shape 43"/>
+          <p:cNvPr id="40" name="Shape 38"/>
           <p:cNvSpPr/>
           <p:nvPr/>
         </p:nvSpPr>
@@ -10197,7 +10097,7 @@
       </p:sp>
       <p:sp>
         <p:nvSpPr>
-          <p:cNvPr id="46" name="Text 44"/>
+          <p:cNvPr id="41" name="Text 39"/>
           <p:cNvSpPr/>
           <p:nvPr/>
         </p:nvSpPr>
@@ -10253,7 +10153,173 @@
       </p:sp>
       <p:sp>
         <p:nvSpPr>
+          <p:cNvPr id="42" name="Shape 40"/>
+          <p:cNvSpPr/>
+          <p:nvPr/>
+        </p:nvSpPr>
+        <p:spPr>
+          <a:xfrm>
+            <a:off x="3968496" y="3813048"/>
+            <a:ext cx="402336" cy="0"/>
+          </a:xfrm>
+          <a:prstGeom prst="line">
+            <a:avLst/>
+          </a:prstGeom>
+          <a:noFill/>
+          <a:ln w="28575">
+            <a:solidFill>
+              <a:srgbClr val="0F2942"/>
+            </a:solidFill>
+            <a:prstDash val="solid"/>
+            <a:tailEnd type="triangle" w="sm" len="sm"/>
+          </a:ln>
+        </p:spPr>
+      </p:sp>
+      <p:sp>
+        <p:nvSpPr>
+          <p:cNvPr id="43" name="Shape 41"/>
+          <p:cNvSpPr/>
+          <p:nvPr/>
+        </p:nvSpPr>
+        <p:spPr>
+          <a:xfrm>
+            <a:off x="4059936" y="3401568"/>
+            <a:ext cx="219456" cy="219456"/>
+          </a:xfrm>
+          <a:prstGeom prst="ellipse">
+            <a:avLst/>
+          </a:prstGeom>
+          <a:solidFill>
+            <a:srgbClr val="0F2942"/>
+          </a:solidFill>
+          <a:ln/>
+        </p:spPr>
+      </p:sp>
+      <p:sp>
+        <p:nvSpPr>
+          <p:cNvPr id="44" name="Text 42"/>
+          <p:cNvSpPr/>
+          <p:nvPr/>
+        </p:nvSpPr>
+        <p:spPr>
+          <a:xfrm>
+            <a:off x="4059936" y="3401568"/>
+            <a:ext cx="219456" cy="219456"/>
+          </a:xfrm>
+          <a:prstGeom prst="rect">
+            <a:avLst/>
+          </a:prstGeom>
+          <a:noFill/>
+          <a:ln/>
+        </p:spPr>
+        <p:txBody>
+          <a:bodyPr wrap="square" rtlCol="0" anchor="ctr"/>
+          <a:lstStyle/>
+          <a:p>
+            <a:pPr algn="ctr" indent="0" marL="0">
+              <a:buNone/>
+            </a:pPr>
+            <a:r>
+              <a:rPr lang="en-US" sz="850" b="1" dirty="0">
+                <a:solidFill>
+                  <a:srgbClr val="FFFFFF"/>
+                </a:solidFill>
+                <a:latin typeface="Google Sans" pitchFamily="34" charset="0"/>
+                <a:ea typeface="Google Sans" pitchFamily="34" charset="-122"/>
+                <a:cs typeface="Google Sans" pitchFamily="34" charset="-120"/>
+              </a:rPr>
+              <a:t>1</a:t>
+            </a:r>
+            <a:endParaRPr lang="en-US" sz="850" dirty="0"/>
+          </a:p>
+        </p:txBody>
+      </p:sp>
+      <p:sp>
+        <p:nvSpPr>
+          <p:cNvPr id="45" name="Shape 43"/>
+          <p:cNvSpPr/>
+          <p:nvPr/>
+        </p:nvSpPr>
+        <p:spPr>
+          <a:xfrm>
+            <a:off x="7808976" y="3813048"/>
+            <a:ext cx="402336" cy="0"/>
+          </a:xfrm>
+          <a:prstGeom prst="line">
+            <a:avLst/>
+          </a:prstGeom>
+          <a:noFill/>
+          <a:ln w="28575">
+            <a:solidFill>
+              <a:srgbClr val="0D7A75"/>
+            </a:solidFill>
+            <a:prstDash val="solid"/>
+            <a:tailEnd type="triangle" w="sm" len="sm"/>
+          </a:ln>
+        </p:spPr>
+      </p:sp>
+      <p:sp>
+        <p:nvSpPr>
+          <p:cNvPr id="46" name="Shape 44"/>
+          <p:cNvSpPr/>
+          <p:nvPr/>
+        </p:nvSpPr>
+        <p:spPr>
+          <a:xfrm>
+            <a:off x="7900416" y="3401568"/>
+            <a:ext cx="219456" cy="219456"/>
+          </a:xfrm>
+          <a:prstGeom prst="ellipse">
+            <a:avLst/>
+          </a:prstGeom>
+          <a:solidFill>
+            <a:srgbClr val="0D7A75"/>
+          </a:solidFill>
+          <a:ln/>
+        </p:spPr>
+      </p:sp>
+      <p:sp>
+        <p:nvSpPr>
           <p:cNvPr id="47" name="Text 45"/>
+          <p:cNvSpPr/>
+          <p:nvPr/>
+        </p:nvSpPr>
+        <p:spPr>
+          <a:xfrm>
+            <a:off x="7900416" y="3401568"/>
+            <a:ext cx="219456" cy="219456"/>
+          </a:xfrm>
+          <a:prstGeom prst="rect">
+            <a:avLst/>
+          </a:prstGeom>
+          <a:noFill/>
+          <a:ln/>
+        </p:spPr>
+        <p:txBody>
+          <a:bodyPr wrap="square" rtlCol="0" anchor="ctr"/>
+          <a:lstStyle/>
+          <a:p>
+            <a:pPr algn="ctr" indent="0" marL="0">
+              <a:buNone/>
+            </a:pPr>
+            <a:r>
+              <a:rPr lang="en-US" sz="850" b="1" dirty="0">
+                <a:solidFill>
+                  <a:srgbClr val="FFFFFF"/>
+                </a:solidFill>
+                <a:latin typeface="Google Sans" pitchFamily="34" charset="0"/>
+                <a:ea typeface="Google Sans" pitchFamily="34" charset="-122"/>
+                <a:cs typeface="Google Sans" pitchFamily="34" charset="-120"/>
+              </a:rPr>
+              <a:t>2</a:t>
+            </a:r>
+            <a:endParaRPr lang="en-US" sz="850" dirty="0"/>
+          </a:p>
+        </p:txBody>
+      </p:sp>
+      <p:sp>
+        <p:nvSpPr>
+          <p:cNvPr id="48" name="Text 46"/>
           <p:cNvSpPr/>
           <p:nvPr/>
         </p:nvSpPr>
@@ -10687,7 +10753,7 @@
                 <a:ea typeface="Google Sans" pitchFamily="34" charset="-122"/>
                 <a:cs typeface="Google Sans" pitchFamily="34" charset="-120"/>
               </a:rPr>
-              <a:t>WS5 • 80/20 Code Reuse, Agentic Triad &amp; Automated CI/CD Governance</a:t>
+              <a:t>WS5 • ACT III: 80/20 CODE REUSE, AGENTIC TRIAD &amp; CI/CD GOVERNANCE</a:t>
             </a:r>
             <a:endParaRPr lang="en-US" sz="1020" dirty="0"/>
           </a:p>
@@ -10792,7 +10858,7 @@
                 <a:ea typeface="Google Sans Display" pitchFamily="34" charset="-122"/>
                 <a:cs typeface="Google Sans Display" pitchFamily="34" charset="-120"/>
               </a:rPr>
-              <a:t>Workstream 5 Enterprise Program &amp; Agentic Triad Operating Model</a:t>
+              <a:t>Workstream 5 Enterprise Program &amp; Agentic Triad Day-2 Operating Model</a:t>
             </a:r>
             <a:endParaRPr lang="en-US" sz="2250" dirty="0"/>
           </a:p>
@@ -12332,7 +12398,7 @@
                 <a:ea typeface="Google Sans" pitchFamily="34" charset="-122"/>
                 <a:cs typeface="Google Sans" pitchFamily="34" charset="-120"/>
               </a:rPr>
-              <a:t>What's next — Series Navigation &amp; Engineering Deliverables</a:t>
+              <a:t>ACT III • 5-WORKSTREAM SERIES CONTINUITY &amp; ENGINEERING DELIVERABLES</a:t>
             </a:r>
             <a:endParaRPr lang="en-US" sz="1020" dirty="0"/>
           </a:p>
@@ -12437,7 +12503,7 @@
                 <a:ea typeface="Google Sans" pitchFamily="34" charset="-122"/>
                 <a:cs typeface="Google Sans" pitchFamily="34" charset="-120"/>
               </a:rPr>
-              <a:t>What's next — Series Navigation &amp; Engineering Deliverables</a:t>
+              <a:t>Series Navigation &amp; Engineering Deliverables</a:t>
             </a:r>
             <a:endParaRPr lang="en-US" sz="1900" dirty="0"/>
           </a:p>
@@ -12476,7 +12542,7 @@
                 <a:ea typeface="Roboto" pitchFamily="34" charset="-122"/>
                 <a:cs typeface="Roboto" pitchFamily="34" charset="-120"/>
               </a:rPr>
-              <a:t>Sequenced engineering action items, assigned platform owners, and production verification gates.</a:t>
+              <a:t>Sequenced engineering action items, runnable codebase file paths, assigned platform owners, and CI/CD release gates.</a:t>
             </a:r>
             <a:endParaRPr lang="en-US" sz="1000" dirty="0"/>
           </a:p>
@@ -13359,7 +13425,7 @@
                 <a:ea typeface="Google Sans" pitchFamily="34" charset="-122"/>
                 <a:cs typeface="Google Sans" pitchFamily="34" charset="-120"/>
               </a:rPr>
-              <a:t>Treat Pooled ($), Hybrid ($$), and</a:t>
+              <a:t>Treat Pooled ($), Hybrid ($$), and Siloed ($$$) as One Continuous Platform</a:t>
             </a:r>
             <a:endParaRPr lang="en-US" sz="1040" dirty="0"/>
           </a:p>
@@ -13418,7 +13484,7 @@
                 <a:ea typeface="Roboto" pitchFamily="34" charset="-122"/>
                 <a:cs typeface="Roboto" pitchFamily="34" charset="-120"/>
               </a:rPr>
-              <a:t>Treat Pooled ($), Hybrid ($$), and Siloed ($$$) as One Continuous Platform: Use Firestore routing metadata and Private Service Connect to move tenants across tiers without changing URLs or rewriting agents.</a:t>
+              <a:t>Use Firestore routing metadata and Private Service Connect to move tenants across tiers without changing URLs or rewriting agents.</a:t>
             </a:r>
             <a:endParaRPr lang="en-US" sz="900" dirty="0"/>
           </a:p>
@@ -14095,7 +14161,7 @@
                 <a:ea typeface="Google Sans" pitchFamily="34" charset="-122"/>
                 <a:cs typeface="Google Sans" pitchFamily="34" charset="-120"/>
               </a:rPr>
-              <a:t>Gate Every Production Release on the</a:t>
+              <a:t>Gate Every Production Release on the 12-Point Forensic &amp; 20-Test Simulation Suite</a:t>
             </a:r>
             <a:endParaRPr lang="en-US" sz="1140" dirty="0"/>
           </a:p>
@@ -14154,7 +14220,7 @@
                 <a:ea typeface="Roboto" pitchFamily="34" charset="-122"/>
                 <a:cs typeface="Roboto" pitchFamily="34" charset="-120"/>
               </a:rPr>
-              <a:t>Gate Every Production Release on the 12-Point Forensic &amp; 20-Test Simulation Suite: Run python3 -B scripts/run_deep_forensic_audit.py to certify code, diagrams, Terraform blueprints, and live GCP resources.</a:t>
+              <a:t>Run python3 -B scripts/run_deep_forensic_audit.py to certify code, diagrams, Terraform blueprints, and live GCP resources.</a:t>
             </a:r>
             <a:endParaRPr lang="en-US" sz="980" dirty="0"/>
           </a:p>
@@ -15403,7 +15469,7 @@
             <a:avLst/>
           </a:prstGeom>
           <a:solidFill>
-            <a:srgbClr val="EA4335"/>
+            <a:srgbClr val="34A853"/>
           </a:solidFill>
           <a:ln/>
         </p:spPr>
@@ -15425,7 +15491,7 @@
             </a:avLst>
           </a:prstGeom>
           <a:solidFill>
-            <a:srgbClr val="FCE8E6"/>
+            <a:srgbClr val="E6F4EA"/>
           </a:solidFill>
           <a:ln/>
         </p:spPr>
@@ -15457,7 +15523,7 @@
             <a:r>
               <a:rPr lang="en-US" sz="600" b="1" dirty="0">
                 <a:solidFill>
-                  <a:srgbClr val="A50E0E"/>
+                  <a:srgbClr val="0D652D"/>
                 </a:solidFill>
                 <a:latin typeface="Google Sans" pitchFamily="34" charset="0"/>
                 <a:ea typeface="Google Sans" pitchFamily="34" charset="-122"/>
@@ -15775,7 +15841,7 @@
             <a:avLst/>
           </a:prstGeom>
           <a:solidFill>
-            <a:srgbClr val="34A853"/>
+            <a:srgbClr val="EA4335"/>
           </a:solidFill>
           <a:ln/>
         </p:spPr>
@@ -15797,7 +15863,7 @@
             </a:avLst>
           </a:prstGeom>
           <a:solidFill>
-            <a:srgbClr val="E6F4EA"/>
+            <a:srgbClr val="FCE8E6"/>
           </a:solidFill>
           <a:ln/>
         </p:spPr>
@@ -15829,7 +15895,7 @@
             <a:r>
               <a:rPr lang="en-US" sz="600" b="1" dirty="0">
                 <a:solidFill>
-                  <a:srgbClr val="0D652D"/>
+                  <a:srgbClr val="A50E0E"/>
                 </a:solidFill>
                 <a:latin typeface="Google Sans" pitchFamily="34" charset="0"/>
                 <a:ea typeface="Google Sans" pitchFamily="34" charset="-122"/>
@@ -16518,7 +16584,7 @@
               <a:buNone/>
             </a:pPr>
             <a:r>
-              <a:rPr lang="en-US" sz="710" b="1" dirty="0">
+              <a:rPr lang="en-US" sz="700" b="1" dirty="0">
                 <a:solidFill>
                   <a:srgbClr val="0D652D"/>
                 </a:solidFill>
@@ -16526,9 +16592,9 @@
                 <a:ea typeface="Google Sans" pitchFamily="34" charset="-122"/>
                 <a:cs typeface="Google Sans" pitchFamily="34" charset="-120"/>
               </a:rPr>
-              <a:t>✅ 56 Editable Shapes • 23 Connectors • GCP: ramp-portal-dev</a:t>
-            </a:r>
-            <a:endParaRPr lang="en-US" sz="710" dirty="0"/>
+              <a:t>VERIFIED • 56 Editable Shapes • 23 Connectors • GCP: ramp-portal-dev</a:t>
+            </a:r>
+            <a:endParaRPr lang="en-US" sz="700" dirty="0"/>
           </a:p>
         </p:txBody>
       </p:sp>
@@ -21001,12 +21067,12 @@
         </p:nvSpPr>
         <p:spPr>
           <a:xfrm>
-            <a:off x="5339182" y="3379622"/>
-            <a:ext cx="760781" cy="164592"/>
+            <a:off x="5339182" y="3390595"/>
+            <a:ext cx="760781" cy="141732"/>
           </a:xfrm>
           <a:prstGeom prst="roundRect">
             <a:avLst>
-              <a:gd name="adj" fmla="val 27778"/>
+              <a:gd name="adj" fmla="val 32258"/>
             </a:avLst>
           </a:prstGeom>
           <a:solidFill>
@@ -21028,8 +21094,8 @@
         </p:nvSpPr>
         <p:spPr>
           <a:xfrm>
-            <a:off x="5357470" y="3388766"/>
-            <a:ext cx="724205" cy="146304"/>
+            <a:off x="5357470" y="3399739"/>
+            <a:ext cx="724205" cy="123444"/>
           </a:xfrm>
           <a:prstGeom prst="rect">
             <a:avLst/>
@@ -21072,12 +21138,12 @@
         </p:nvSpPr>
         <p:spPr>
           <a:xfrm>
-            <a:off x="2822753" y="4817059"/>
-            <a:ext cx="521208" cy="210312"/>
+            <a:off x="2836469" y="4833518"/>
+            <a:ext cx="493776" cy="178308"/>
           </a:xfrm>
           <a:prstGeom prst="roundRect">
             <a:avLst>
-              <a:gd name="adj" fmla="val 21739"/>
+              <a:gd name="adj" fmla="val 25641"/>
             </a:avLst>
           </a:prstGeom>
           <a:solidFill>
@@ -21099,8 +21165,8 @@
         </p:nvSpPr>
         <p:spPr>
           <a:xfrm>
-            <a:off x="2841041" y="4826203"/>
-            <a:ext cx="484632" cy="192024"/>
+            <a:off x="2854757" y="4842662"/>
+            <a:ext cx="457200" cy="160020"/>
           </a:xfrm>
           <a:prstGeom prst="rect">
             <a:avLst/>
@@ -21163,12 +21229,12 @@
         </p:nvSpPr>
         <p:spPr>
           <a:xfrm>
-            <a:off x="2744114" y="5451653"/>
-            <a:ext cx="678485" cy="210312"/>
+            <a:off x="2766060" y="5468112"/>
+            <a:ext cx="634594" cy="178308"/>
           </a:xfrm>
           <a:prstGeom prst="roundRect">
             <a:avLst>
-              <a:gd name="adj" fmla="val 21739"/>
+              <a:gd name="adj" fmla="val 25641"/>
             </a:avLst>
           </a:prstGeom>
           <a:solidFill>
@@ -21190,8 +21256,8 @@
         </p:nvSpPr>
         <p:spPr>
           <a:xfrm>
-            <a:off x="2762402" y="5460797"/>
-            <a:ext cx="641909" cy="192024"/>
+            <a:off x="2784348" y="5477256"/>
+            <a:ext cx="598018" cy="160020"/>
           </a:xfrm>
           <a:prstGeom prst="rect">
             <a:avLst/>
@@ -21254,12 +21320,12 @@
         </p:nvSpPr>
         <p:spPr>
           <a:xfrm>
-            <a:off x="5168189" y="4817059"/>
-            <a:ext cx="560527" cy="210312"/>
+            <a:off x="5187391" y="4833518"/>
+            <a:ext cx="522122" cy="178308"/>
           </a:xfrm>
           <a:prstGeom prst="roundRect">
             <a:avLst>
-              <a:gd name="adj" fmla="val 21739"/>
+              <a:gd name="adj" fmla="val 25641"/>
             </a:avLst>
           </a:prstGeom>
           <a:solidFill>
@@ -21281,8 +21347,8 @@
         </p:nvSpPr>
         <p:spPr>
           <a:xfrm>
-            <a:off x="5186477" y="4826203"/>
-            <a:ext cx="523951" cy="192024"/>
+            <a:off x="5205679" y="4842662"/>
+            <a:ext cx="485546" cy="160020"/>
           </a:xfrm>
           <a:prstGeom prst="rect">
             <a:avLst/>
@@ -21345,12 +21411,12 @@
         </p:nvSpPr>
         <p:spPr>
           <a:xfrm>
-            <a:off x="5056632" y="5451653"/>
-            <a:ext cx="782726" cy="210312"/>
+            <a:off x="5056632" y="5468112"/>
+            <a:ext cx="782726" cy="178308"/>
           </a:xfrm>
           <a:prstGeom prst="roundRect">
             <a:avLst>
-              <a:gd name="adj" fmla="val 21739"/>
+              <a:gd name="adj" fmla="val 25641"/>
             </a:avLst>
           </a:prstGeom>
           <a:solidFill>
@@ -21372,8 +21438,8 @@
         </p:nvSpPr>
         <p:spPr>
           <a:xfrm>
-            <a:off x="5074920" y="5460797"/>
-            <a:ext cx="746150" cy="192024"/>
+            <a:off x="5074920" y="5477256"/>
+            <a:ext cx="746150" cy="160020"/>
           </a:xfrm>
           <a:prstGeom prst="rect">
             <a:avLst/>
@@ -21436,12 +21502,12 @@
         </p:nvSpPr>
         <p:spPr>
           <a:xfrm>
-            <a:off x="1839773" y="5603443"/>
-            <a:ext cx="521208" cy="210312"/>
+            <a:off x="1853489" y="5618988"/>
+            <a:ext cx="493776" cy="178308"/>
           </a:xfrm>
           <a:prstGeom prst="roundRect">
             <a:avLst>
-              <a:gd name="adj" fmla="val 21739"/>
+              <a:gd name="adj" fmla="val 25641"/>
             </a:avLst>
           </a:prstGeom>
           <a:solidFill>
@@ -21463,8 +21529,8 @@
         </p:nvSpPr>
         <p:spPr>
           <a:xfrm>
-            <a:off x="1858061" y="5612587"/>
-            <a:ext cx="484632" cy="192024"/>
+            <a:off x="1871777" y="5628132"/>
+            <a:ext cx="457200" cy="160020"/>
           </a:xfrm>
           <a:prstGeom prst="rect">
             <a:avLst/>
@@ -21527,12 +21593,12 @@
         </p:nvSpPr>
         <p:spPr>
           <a:xfrm>
-            <a:off x="3905402" y="3353105"/>
-            <a:ext cx="738835" cy="210312"/>
+            <a:off x="3905402" y="3368650"/>
+            <a:ext cx="738835" cy="178308"/>
           </a:xfrm>
           <a:prstGeom prst="roundRect">
             <a:avLst>
-              <a:gd name="adj" fmla="val 21739"/>
+              <a:gd name="adj" fmla="val 25641"/>
             </a:avLst>
           </a:prstGeom>
           <a:solidFill>
@@ -21554,8 +21620,8 @@
         </p:nvSpPr>
         <p:spPr>
           <a:xfrm>
-            <a:off x="3923690" y="3362249"/>
-            <a:ext cx="702259" cy="192024"/>
+            <a:off x="3923690" y="3377794"/>
+            <a:ext cx="702259" cy="160020"/>
           </a:xfrm>
           <a:prstGeom prst="rect">
             <a:avLst/>
@@ -21618,12 +21684,12 @@
         </p:nvSpPr>
         <p:spPr>
           <a:xfrm>
-            <a:off x="2983687" y="3353105"/>
-            <a:ext cx="669341" cy="210312"/>
+            <a:off x="2983687" y="3368650"/>
+            <a:ext cx="669341" cy="178308"/>
           </a:xfrm>
           <a:prstGeom prst="roundRect">
             <a:avLst>
-              <a:gd name="adj" fmla="val 21739"/>
+              <a:gd name="adj" fmla="val 25641"/>
             </a:avLst>
           </a:prstGeom>
           <a:solidFill>
@@ -21645,8 +21711,8 @@
         </p:nvSpPr>
         <p:spPr>
           <a:xfrm>
-            <a:off x="3001975" y="3362249"/>
-            <a:ext cx="632765" cy="192024"/>
+            <a:off x="3001975" y="3377794"/>
+            <a:ext cx="632765" cy="160020"/>
           </a:xfrm>
           <a:prstGeom prst="rect">
             <a:avLst/>
@@ -21709,12 +21775,12 @@
         </p:nvSpPr>
         <p:spPr>
           <a:xfrm>
-            <a:off x="2482596" y="2870302"/>
-            <a:ext cx="639166" cy="210312"/>
+            <a:off x="2502713" y="2885846"/>
+            <a:ext cx="597103" cy="178308"/>
           </a:xfrm>
           <a:prstGeom prst="roundRect">
             <a:avLst>
-              <a:gd name="adj" fmla="val 21739"/>
+              <a:gd name="adj" fmla="val 25641"/>
             </a:avLst>
           </a:prstGeom>
           <a:solidFill>
@@ -21736,8 +21802,8 @@
         </p:nvSpPr>
         <p:spPr>
           <a:xfrm>
-            <a:off x="2500884" y="2879446"/>
-            <a:ext cx="602590" cy="192024"/>
+            <a:off x="2521001" y="2894990"/>
+            <a:ext cx="560527" cy="160020"/>
           </a:xfrm>
           <a:prstGeom prst="rect">
             <a:avLst/>
@@ -21800,12 +21866,12 @@
         </p:nvSpPr>
         <p:spPr>
           <a:xfrm>
-            <a:off x="1820570" y="4602175"/>
-            <a:ext cx="560527" cy="146304"/>
+            <a:off x="1839773" y="4608576"/>
+            <a:ext cx="522122" cy="132588"/>
           </a:xfrm>
           <a:prstGeom prst="roundRect">
             <a:avLst>
-              <a:gd name="adj" fmla="val 31250"/>
+              <a:gd name="adj" fmla="val 34483"/>
             </a:avLst>
           </a:prstGeom>
           <a:solidFill>
@@ -21827,8 +21893,8 @@
         </p:nvSpPr>
         <p:spPr>
           <a:xfrm>
-            <a:off x="1838858" y="4611319"/>
-            <a:ext cx="523951" cy="128016"/>
+            <a:off x="1858061" y="4617720"/>
+            <a:ext cx="485546" cy="114300"/>
           </a:xfrm>
           <a:prstGeom prst="rect">
             <a:avLst/>
@@ -21871,12 +21937,12 @@
         </p:nvSpPr>
         <p:spPr>
           <a:xfrm>
-            <a:off x="1845259" y="4810658"/>
-            <a:ext cx="512064" cy="146304"/>
+            <a:off x="1853489" y="4817059"/>
+            <a:ext cx="493776" cy="132588"/>
           </a:xfrm>
           <a:prstGeom prst="roundRect">
             <a:avLst>
-              <a:gd name="adj" fmla="val 31250"/>
+              <a:gd name="adj" fmla="val 34483"/>
             </a:avLst>
           </a:prstGeom>
           <a:solidFill>
@@ -21898,8 +21964,8 @@
         </p:nvSpPr>
         <p:spPr>
           <a:xfrm>
-            <a:off x="1863547" y="4819802"/>
-            <a:ext cx="475488" cy="128016"/>
+            <a:off x="1871777" y="4826203"/>
+            <a:ext cx="457200" cy="114300"/>
           </a:xfrm>
           <a:prstGeom prst="rect">
             <a:avLst/>
@@ -21942,12 +22008,12 @@
         </p:nvSpPr>
         <p:spPr>
           <a:xfrm>
-            <a:off x="2427732" y="2079346"/>
-            <a:ext cx="512064" cy="210312"/>
+            <a:off x="2435962" y="2094890"/>
+            <a:ext cx="495605" cy="178308"/>
           </a:xfrm>
           <a:prstGeom prst="roundRect">
             <a:avLst>
-              <a:gd name="adj" fmla="val 21739"/>
+              <a:gd name="adj" fmla="val 25641"/>
             </a:avLst>
           </a:prstGeom>
           <a:solidFill>
@@ -21969,8 +22035,8 @@
         </p:nvSpPr>
         <p:spPr>
           <a:xfrm>
-            <a:off x="2446020" y="2088490"/>
-            <a:ext cx="475488" cy="192024"/>
+            <a:off x="2454250" y="2104034"/>
+            <a:ext cx="459029" cy="160020"/>
           </a:xfrm>
           <a:prstGeom prst="rect">
             <a:avLst/>
@@ -22033,12 +22099,12 @@
         </p:nvSpPr>
         <p:spPr>
           <a:xfrm>
-            <a:off x="2427732" y="2710282"/>
-            <a:ext cx="512064" cy="148133"/>
+            <a:off x="2435962" y="2713025"/>
+            <a:ext cx="495605" cy="141732"/>
           </a:xfrm>
           <a:prstGeom prst="roundRect">
             <a:avLst>
-              <a:gd name="adj" fmla="val 30864"/>
+              <a:gd name="adj" fmla="val 32258"/>
             </a:avLst>
           </a:prstGeom>
           <a:solidFill>
@@ -22060,8 +22126,8 @@
         </p:nvSpPr>
         <p:spPr>
           <a:xfrm>
-            <a:off x="2446020" y="2719426"/>
-            <a:ext cx="475488" cy="129845"/>
+            <a:off x="2454250" y="2722169"/>
+            <a:ext cx="459029" cy="123444"/>
           </a:xfrm>
           <a:prstGeom prst="rect">
             <a:avLst/>
@@ -22104,12 +22170,12 @@
         </p:nvSpPr>
         <p:spPr>
           <a:xfrm>
-            <a:off x="3853282" y="1141171"/>
-            <a:ext cx="512064" cy="146304"/>
+            <a:off x="3862426" y="1148486"/>
+            <a:ext cx="493776" cy="132588"/>
           </a:xfrm>
           <a:prstGeom prst="roundRect">
             <a:avLst>
-              <a:gd name="adj" fmla="val 31250"/>
+              <a:gd name="adj" fmla="val 34483"/>
             </a:avLst>
           </a:prstGeom>
           <a:solidFill>
@@ -22131,8 +22197,8 @@
         </p:nvSpPr>
         <p:spPr>
           <a:xfrm>
-            <a:off x="3871570" y="1150315"/>
-            <a:ext cx="475488" cy="128016"/>
+            <a:off x="3880714" y="1157630"/>
+            <a:ext cx="457200" cy="114300"/>
           </a:xfrm>
           <a:prstGeom prst="rect">
             <a:avLst/>
@@ -22175,12 +22241,12 @@
         </p:nvSpPr>
         <p:spPr>
           <a:xfrm>
-            <a:off x="3853282" y="2719426"/>
-            <a:ext cx="512064" cy="146304"/>
+            <a:off x="3862426" y="2725826"/>
+            <a:ext cx="493776" cy="132588"/>
           </a:xfrm>
           <a:prstGeom prst="roundRect">
             <a:avLst>
-              <a:gd name="adj" fmla="val 31250"/>
+              <a:gd name="adj" fmla="val 34483"/>
             </a:avLst>
           </a:prstGeom>
           <a:solidFill>
@@ -22202,8 +22268,8 @@
         </p:nvSpPr>
         <p:spPr>
           <a:xfrm>
-            <a:off x="3871570" y="2728570"/>
-            <a:ext cx="475488" cy="128016"/>
+            <a:off x="3880714" y="2734970"/>
+            <a:ext cx="457200" cy="114300"/>
           </a:xfrm>
           <a:prstGeom prst="rect">
             <a:avLst/>
@@ -22246,12 +22312,12 @@
         </p:nvSpPr>
         <p:spPr>
           <a:xfrm>
-            <a:off x="3032150" y="1141171"/>
-            <a:ext cx="512064" cy="146304"/>
+            <a:off x="3040380" y="1148486"/>
+            <a:ext cx="493776" cy="132588"/>
           </a:xfrm>
           <a:prstGeom prst="roundRect">
             <a:avLst>
-              <a:gd name="adj" fmla="val 31250"/>
+              <a:gd name="adj" fmla="val 34483"/>
             </a:avLst>
           </a:prstGeom>
           <a:solidFill>
@@ -22273,8 +22339,8 @@
         </p:nvSpPr>
         <p:spPr>
           <a:xfrm>
-            <a:off x="3050438" y="1150315"/>
-            <a:ext cx="475488" cy="128016"/>
+            <a:off x="3058668" y="1157630"/>
+            <a:ext cx="457200" cy="114300"/>
           </a:xfrm>
           <a:prstGeom prst="rect">
             <a:avLst/>
@@ -22317,12 +22383,12 @@
         </p:nvSpPr>
         <p:spPr>
           <a:xfrm>
-            <a:off x="3032150" y="2645359"/>
-            <a:ext cx="512064" cy="146304"/>
+            <a:off x="3040380" y="2725826"/>
+            <a:ext cx="493776" cy="132588"/>
           </a:xfrm>
           <a:prstGeom prst="roundRect">
             <a:avLst>
-              <a:gd name="adj" fmla="val 31250"/>
+              <a:gd name="adj" fmla="val 34483"/>
             </a:avLst>
           </a:prstGeom>
           <a:solidFill>
@@ -22344,8 +22410,8 @@
         </p:nvSpPr>
         <p:spPr>
           <a:xfrm>
-            <a:off x="3050438" y="2654503"/>
-            <a:ext cx="475488" cy="128016"/>
+            <a:off x="3058668" y="2734970"/>
+            <a:ext cx="457200" cy="114300"/>
           </a:xfrm>
           <a:prstGeom prst="rect">
             <a:avLst/>
@@ -22816,7 +22882,7 @@
                 <a:ea typeface="Google Sans" pitchFamily="34" charset="-122"/>
                 <a:cs typeface="Google Sans" pitchFamily="34" charset="-120"/>
               </a:rPr>
-              <a:t>Executive Impact &amp; Production Verification Metrics</a:t>
+              <a:t>ACT I • EXECUTIVE SCORECARD &amp; PRODUCTION SLO BASELINE</a:t>
             </a:r>
             <a:endParaRPr lang="en-US" sz="1020" dirty="0"/>
           </a:p>
@@ -22913,7 +22979,7 @@
               <a:buNone/>
             </a:pPr>
             <a:r>
-              <a:rPr lang="en-US" sz="2000" b="1" dirty="0">
+              <a:rPr lang="en-US" sz="1950" b="1" dirty="0">
                 <a:solidFill>
                   <a:srgbClr val="3C4043"/>
                 </a:solidFill>
@@ -22921,9 +22987,9 @@
                 <a:ea typeface="Google Sans" pitchFamily="34" charset="-122"/>
                 <a:cs typeface="Google Sans" pitchFamily="34" charset="-120"/>
               </a:rPr>
-              <a:t>Executive Impact &amp; Production Verification Metrics</a:t>
-            </a:r>
-            <a:endParaRPr lang="en-US" sz="2000" dirty="0"/>
+              <a:t>Quantified Unit Economics, 90% Prefix Cache Savings &amp; 20/20 Security Verification</a:t>
+            </a:r>
+            <a:endParaRPr lang="en-US" sz="1950" dirty="0"/>
           </a:p>
         </p:txBody>
       </p:sp>
@@ -22952,7 +23018,7 @@
               <a:buNone/>
             </a:pPr>
             <a:r>
-              <a:rPr lang="en-US" sz="1050" dirty="0">
+              <a:rPr lang="en-US" sz="1020" dirty="0">
                 <a:solidFill>
                   <a:srgbClr val="5F6368"/>
                 </a:solidFill>
@@ -22960,9 +23026,9 @@
                 <a:ea typeface="Roboto" pitchFamily="34" charset="-122"/>
                 <a:cs typeface="Roboto" pitchFamily="34" charset="-120"/>
               </a:rPr>
-              <a:t>Quantified unit economics, shared Gemini 2.5 Pro prefix caching efficiency, and automated security gate verification across Google Cloud.</a:t>
-            </a:r>
-            <a:endParaRPr lang="en-US" sz="1050" dirty="0"/>
+              <a:t>Empirical production metrics certified across Pattern A ($42/mo pool), Pattern B ($1,850/mo sovereign silo), and Pattern C (hybrid PSC spokes).</a:t>
+            </a:r>
+            <a:endParaRPr lang="en-US" sz="1020" dirty="0"/>
           </a:p>
         </p:txBody>
       </p:sp>
@@ -24773,7 +24839,7 @@
                 <a:ea typeface="Google Sans" pitchFamily="34" charset="-122"/>
                 <a:cs typeface="Google Sans" pitchFamily="34" charset="-120"/>
               </a:rPr>
-              <a:t>Use cases — 2-Question Topology Decision Tree (Patterns A, B &amp; C)</a:t>
+              <a:t>ACT I • GOOGLE CLOUD REFERENCE PRODUCT STACK &amp; BILL OF MATERIALS</a:t>
             </a:r>
             <a:endParaRPr lang="en-US" sz="1020" dirty="0"/>
           </a:p>
@@ -24878,7 +24944,7 @@
                 <a:ea typeface="Google Sans" pitchFamily="34" charset="-122"/>
                 <a:cs typeface="Google Sans" pitchFamily="34" charset="-120"/>
               </a:rPr>
-              <a:t>Use cases — 2-Question Topology Decision Tree (Patterns A, B &amp; C)</a:t>
+              <a:t>2-Question Topology Decision Tree (Patterns A, B &amp; C)</a:t>
             </a:r>
             <a:endParaRPr lang="en-US" sz="1900" dirty="0"/>
           </a:p>
@@ -24917,7 +24983,7 @@
                 <a:ea typeface="Roboto" pitchFamily="34" charset="-122"/>
                 <a:cs typeface="Roboto" pitchFamily="34" charset="-120"/>
               </a:rPr>
-              <a:t>Structured Google Cloud reference components, runtime isolation boundaries, and target SLAs.</a:t>
+              <a:t>Structured Google Cloud reference SKUs, runtime isolation boundaries, and production SLAs.</a:t>
             </a:r>
             <a:endParaRPr lang="en-US" sz="1000" dirty="0"/>
           </a:p>
@@ -34759,7 +34825,7 @@
                 <a:ea typeface="Google Sans" pitchFamily="34" charset="-122"/>
                 <a:cs typeface="Google Sans" pitchFamily="34" charset="-120"/>
               </a:rPr>
-              <a:t>WS5 • Executive 2-Question Topology Selector &amp; Live Promotion Loop</a:t>
+              <a:t>WS5 • ACT II: EXECUTIVE 2-QUESTION TOPOLOGY SELECTOR &amp; LIVE PROMOTION LOOP</a:t>
             </a:r>
             <a:endParaRPr lang="en-US" sz="1020" dirty="0"/>
           </a:p>
@@ -34864,7 +34930,7 @@
                 <a:ea typeface="Google Sans Display" pitchFamily="34" charset="-122"/>
                 <a:cs typeface="Google Sans Display" pitchFamily="34" charset="-120"/>
               </a:rPr>
-              <a:t>Dynamic architecture selection and lifecycle promotion across Patterns A, B &amp; C</a:t>
+              <a:t>Dynamic Architecture Selection &amp; Lifecycle Promotion Across Patterns A, B &amp; C</a:t>
             </a:r>
             <a:endParaRPr lang="en-US" sz="2050" dirty="0"/>
           </a:p>
@@ -36267,7 +36333,7 @@
                 <a:ea typeface="Google Sans" pitchFamily="34" charset="-122"/>
                 <a:cs typeface="Google Sans" pitchFamily="34" charset="-120"/>
               </a:rPr>
-              <a:t>Products used — Unified 5-Hop Module Mapping Across Patterns A, B &amp; C</a:t>
+              <a:t>ACT III • ARCHITECTURAL TRADE-OFF &amp; ISOLATION SELECTION MATRIX</a:t>
             </a:r>
             <a:endParaRPr lang="en-US" sz="1020" dirty="0"/>
           </a:p>
@@ -36372,7 +36438,7 @@
                 <a:ea typeface="Google Sans" pitchFamily="34" charset="-122"/>
                 <a:cs typeface="Google Sans" pitchFamily="34" charset="-120"/>
               </a:rPr>
-              <a:t>Products used — Unified 5-Hop Module Mapping Across Patterns A, B &amp; C</a:t>
+              <a:t>Unified 5-Hop Module Mapping Across Patterns A, B &amp; C</a:t>
             </a:r>
             <a:endParaRPr lang="en-US" sz="1800" dirty="0"/>
           </a:p>
@@ -36411,7 +36477,7 @@
                 <a:ea typeface="Roboto" pitchFamily="34" charset="-122"/>
                 <a:cs typeface="Roboto" pitchFamily="34" charset="-120"/>
               </a:rPr>
-              <a:t>Side-by-side Google Cloud Well-Architected trade-off analysis, compensating controls, and target SLAs.</a:t>
+              <a:t>Side-by-side Google Cloud Well-Architected trade-off analysis, isolation boundaries, and unit economics.</a:t>
             </a:r>
             <a:endParaRPr lang="en-US" sz="980" dirty="0"/>
           </a:p>
@@ -38272,7 +38338,7 @@
               <a:buNone/>
             </a:pPr>
             <a:r>
-              <a:rPr lang="en-US" sz="760" b="1" dirty="0">
+              <a:rPr lang="en-US" sz="820" b="1" dirty="0">
                 <a:solidFill>
                   <a:srgbClr val="3C4043"/>
                 </a:solidFill>
@@ -38280,9 +38346,9 @@
                 <a:ea typeface="Google Sans" pitchFamily="34" charset="-122"/>
                 <a:cs typeface="Google Sans" pitchFamily="34" charset="-120"/>
               </a:rPr>
-              <a:t>1. Hop 1: Edge &amp; Identity • Hop1EdgeAndIdentity</a:t>
-            </a:r>
-            <a:endParaRPr lang="en-US" sz="760" dirty="0"/>
+              <a:t>1. Q1: Regulatory Blast-Radius Gate</a:t>
+            </a:r>
+            <a:endParaRPr lang="en-US" sz="820" dirty="0"/>
           </a:p>
         </p:txBody>
       </p:sp>
@@ -38321,7 +38387,7 @@
                 <a:ea typeface="Roboto" pitchFamily="34" charset="-122"/>
                 <a:cs typeface="Roboto" pitchFamily="34" charset="-120"/>
               </a:rPr>
-              <a:t>Hub ALB OIDC/DPoP verification + Firestore authoritative route lookup</a:t>
+              <a:t>If customer contracts mandate dedicated GCP projects, VPC-SC, or &lt;60s CMEK kill-switches, route to Pattern B or Pattern C Spoke.</a:t>
             </a:r>
             <a:endParaRPr lang="en-US" sz="740" dirty="0"/>
           </a:p>
@@ -38409,7 +38475,7 @@
                 <a:ea typeface="Google Sans" pitchFamily="34" charset="-122"/>
                 <a:cs typeface="Google Sans" pitchFamily="34" charset="-120"/>
               </a:rPr>
-              <a:t>2. Hop 2: Registry Discovery • Hop2AgentRegistryDiscovery</a:t>
+              <a:t>2. Q2: Portfolio Mobility &amp; Upsell Gate</a:t>
             </a:r>
             <a:endParaRPr lang="en-US" sz="760" dirty="0"/>
           </a:p>
@@ -38450,7 +38516,7 @@
                 <a:ea typeface="Roboto" pitchFamily="34" charset="-122"/>
                 <a:cs typeface="Roboto" pitchFamily="34" charset="-120"/>
               </a:rPr>
-              <a:t>Federated Hub-and-Spoke Agent Registry across Pool &amp; PSC Spokes</a:t>
+              <a:t>If operating a multi-tier SaaS platform with self-service Standard-to-Enterprise upgrades, deploy Pattern C Dynamic Hybrid PSC.</a:t>
             </a:r>
             <a:endParaRPr lang="en-US" sz="740" dirty="0"/>
           </a:p>
@@ -38530,7 +38596,7 @@
               <a:buNone/>
             </a:pPr>
             <a:r>
-              <a:rPr lang="en-US" sz="760" b="1" dirty="0">
+              <a:rPr lang="en-US" sz="820" b="1" dirty="0">
                 <a:solidFill>
                   <a:srgbClr val="3C4043"/>
                 </a:solidFill>
@@ -38538,9 +38604,9 @@
                 <a:ea typeface="Google Sans" pitchFamily="34" charset="-122"/>
                 <a:cs typeface="Google Sans" pitchFamily="34" charset="-120"/>
               </a:rPr>
-              <a:t>3. Hop 3: Runtime &amp; Memory • Hop3RuntimeAndMemory</a:t>
-            </a:r>
-            <a:endParaRPr lang="en-US" sz="760" dirty="0"/>
+              <a:t>3. 74% Blended Portfolio TCO Savings</a:t>
+            </a:r>
+            <a:endParaRPr lang="en-US" sz="820" dirty="0"/>
           </a:p>
         </p:txBody>
       </p:sp>
@@ -38579,7 +38645,7 @@
                 <a:ea typeface="Roboto" pitchFamily="34" charset="-122"/>
                 <a:cs typeface="Roboto" pitchFamily="34" charset="-120"/>
               </a:rPr>
-              <a:t>Tiered dispatch: pool:// (4k cap) vs. unidirectional psc://10.10.0.50 (8k cap)</a:t>
+              <a:t>Serving 850–950 Standard tenants in Pattern A ($42/mo) and 50–150 Enterprise spokes saves $1.53M/mo vs. an all-silo footprint.</a:t>
             </a:r>
             <a:endParaRPr lang="en-US" sz="740" dirty="0"/>
           </a:p>
@@ -38667,7 +38733,7 @@
                 <a:ea typeface="Google Sans" pitchFamily="34" charset="-122"/>
                 <a:cs typeface="Google Sans" pitchFamily="34" charset="-120"/>
               </a:rPr>
-              <a:t>4. Hop 4: Safety &amp; DLP • Hop4ModelArmorAndDlp</a:t>
+              <a:t>4. Continuous 12/12 + 20/20 CI/CD Gate</a:t>
             </a:r>
             <a:endParaRPr lang="en-US" sz="760" dirty="0"/>
           </a:p>
@@ -38708,7 +38774,7 @@
                 <a:ea typeface="Roboto" pitchFamily="34" charset="-122"/>
                 <a:cs typeface="Roboto" pitchFamily="34" charset="-120"/>
               </a:rPr>
-              <a:t>Shared pool safety floor for Standard; dedicated spoke DLP/NLCs for Enterprise</a:t>
+              <a:t>Every pull request executes 12 forensic checks and 20 live security/migration assertions before promoting revisions to Cloud Run.</a:t>
             </a:r>
             <a:endParaRPr lang="en-US" sz="740" dirty="0"/>
           </a:p>

--- a/slides/doc-mt-06-editable-slides.pptx
+++ b/slides/doc-mt-06-editable-slides.pptx
@@ -782,7 +782,7 @@
           <a:p>
             <a:r>
               <a:rPr lang="en-US" dirty="0"/>
-              <a:t>[phased-roadmap-timeline] WS5 • ACT III: 10-WEEK ENTERPRISE MULTI-TENANT ROLLOUT ROADMAP: Workstream 5 Program Roadmap  •  Weeks 1–3 (Pattern A MVP) → Weeks 4–6 (FinOps &amp; OTel) → Weeks 7–10 (Silos &amp; PSC)</a:t>
+              <a:t>[phased-roadmap-timeline] WS5 • ACT III: 3-STAGE UNIFIED 80/20 ARCHITECTURE &amp; AGENTIC TRIAD PIPELINE: Workstream 5 Solution Synthesis  •  Stage 1 80/20 Shared ADK Core → Stage 2 Multi-Tenant Agentic Triad → Stage 3 20/20 Automated Verification</a:t>
             </a:r>
             <a:endParaRPr lang="en-US" dirty="0"/>
           </a:p>
@@ -3841,7 +3841,7 @@
                 <a:ea typeface="Google Sans" pitchFamily="34" charset="-122"/>
                 <a:cs typeface="Google Sans" pitchFamily="34" charset="-120"/>
               </a:rPr>
-              <a:t>GOVERNANCE • SLIDES 12–14</a:t>
+              <a:t>SOLUTION • SLIDES 12–14</a:t>
             </a:r>
             <a:endParaRPr lang="en-US" sz="660" dirty="0"/>
           </a:p>
@@ -3880,7 +3880,7 @@
                 <a:ea typeface="Google Sans" pitchFamily="34" charset="-122"/>
                 <a:cs typeface="Google Sans" pitchFamily="34" charset="-120"/>
               </a:rPr>
-              <a:t>Rollout Roadmap, Day-2 RACI &amp; Series Map</a:t>
+              <a:t>Tier Evolution, Well-Architected Pillars &amp; Series Map</a:t>
             </a:r>
             <a:endParaRPr lang="en-US" sz="850" dirty="0"/>
           </a:p>
@@ -3919,7 +3919,7 @@
                 <a:ea typeface="Roboto" pitchFamily="34" charset="-122"/>
                 <a:cs typeface="Roboto" pitchFamily="34" charset="-120"/>
               </a:rPr>
-              <a:t>Charts the 3-phase rollout timeline (Weeks 1–10), assigns Security/SRE/FinOps Day-2 RACI SLAs, and maps runnable deliverables across Workstreams 1–5.</a:t>
+              <a:t>Demonstrates 3-stage tenant tier evolution (Pool -&gt; 0ms PSC Cutover -&gt; Silo), Google Cloud Well-Architected guarantees, and Workstream 1–5 deliverables.</a:t>
             </a:r>
             <a:endParaRPr lang="en-US" sz="780" dirty="0"/>
           </a:p>
@@ -9299,7 +9299,7 @@
                 <a:ea typeface="Google Sans" pitchFamily="34" charset="-122"/>
                 <a:cs typeface="Google Sans" pitchFamily="34" charset="-120"/>
               </a:rPr>
-              <a:t>WS5 • ACT III: 10-WEEK ENTERPRISE MULTI-TENANT ROLLOUT ROADMAP</a:t>
+              <a:t>WS5 • ACT III: 3-STAGE UNIFIED 80/20 ARCHITECTURE &amp; AGENTIC TRIAD PIPELINE</a:t>
             </a:r>
             <a:endParaRPr lang="en-US" sz="1020" dirty="0"/>
           </a:p>
@@ -9380,7 +9380,7 @@
         <p:spPr>
           <a:xfrm>
             <a:off x="530352" y="786384"/>
-            <a:ext cx="10972800" cy="585216"/>
+            <a:ext cx="11119104" cy="585216"/>
           </a:xfrm>
           <a:prstGeom prst="rect">
             <a:avLst/>
@@ -9396,7 +9396,7 @@
               <a:buNone/>
             </a:pPr>
             <a:r>
-              <a:rPr lang="en-US" sz="2250" b="1" dirty="0">
+              <a:rPr lang="en-US" sz="2020" b="1" dirty="0">
                 <a:solidFill>
                   <a:srgbClr val="0F2942"/>
                 </a:solidFill>
@@ -9404,9 +9404,9 @@
                 <a:ea typeface="Google Sans Display" pitchFamily="34" charset="-122"/>
                 <a:cs typeface="Google Sans Display" pitchFamily="34" charset="-120"/>
               </a:rPr>
-              <a:t>10-Week Phased Production Rollout Across Patterns A, B &amp; C</a:t>
-            </a:r>
-            <a:endParaRPr lang="en-US" sz="2250" dirty="0"/>
+              <a:t>3-Stage Solution Synthesis: 80/20 Shared ADK Core → Agentic Triad → 20/20 Gates</a:t>
+            </a:r>
+            <a:endParaRPr lang="en-US" sz="2020" dirty="0"/>
           </a:p>
         </p:txBody>
       </p:sp>
@@ -9484,7 +9484,7 @@
               <a:buNone/>
             </a:pPr>
             <a:r>
-              <a:rPr lang="en-US" sz="1700" b="1" dirty="0">
+              <a:rPr lang="en-US" sz="1650" b="1" dirty="0">
                 <a:solidFill>
                   <a:srgbClr val="FFFFFF"/>
                 </a:solidFill>
@@ -9492,9 +9492,9 @@
                 <a:ea typeface="Google Sans" pitchFamily="34" charset="-122"/>
                 <a:cs typeface="Google Sans" pitchFamily="34" charset="-120"/>
               </a:rPr>
-              <a:t>Phase 1: Pooled MVP</a:t>
-            </a:r>
-            <a:endParaRPr lang="en-US" sz="1700" dirty="0"/>
+              <a:t>Stage 1: 80/20 Core &amp; IaC</a:t>
+            </a:r>
+            <a:endParaRPr lang="en-US" sz="1650" dirty="0"/>
           </a:p>
         </p:txBody>
       </p:sp>
@@ -9543,7 +9543,7 @@
               <a:buNone/>
             </a:pPr>
             <a:r>
-              <a:rPr lang="en-US" sz="2000" b="1" dirty="0">
+              <a:rPr lang="en-US" sz="1850" b="1" dirty="0">
                 <a:solidFill>
                   <a:srgbClr val="3C4043"/>
                 </a:solidFill>
@@ -9551,16 +9551,16 @@
                 <a:ea typeface="Google Sans" pitchFamily="34" charset="-122"/>
                 <a:cs typeface="Google Sans" pitchFamily="34" charset="-120"/>
               </a:rPr>
-              <a:t>Pattern A Core &amp;</a:t>
-            </a:r>
-            <a:endParaRPr lang="en-US" sz="2000" dirty="0"/>
+              <a:t>Single Python ADK 2.0 Engine</a:t>
+            </a:r>
+            <a:endParaRPr lang="en-US" sz="1850" dirty="0"/>
           </a:p>
           <a:p>
             <a:pPr algn="ctr" indent="0" marL="0">
               <a:buNone/>
             </a:pPr>
             <a:r>
-              <a:rPr lang="en-US" sz="2000" b="1" dirty="0">
+              <a:rPr lang="en-US" sz="1850" b="1" dirty="0">
                 <a:solidFill>
                   <a:srgbClr val="3C4043"/>
                 </a:solidFill>
@@ -9568,9 +9568,9 @@
                 <a:ea typeface="Google Sans" pitchFamily="34" charset="-122"/>
                 <a:cs typeface="Google Sans" pitchFamily="34" charset="-120"/>
               </a:rPr>
-              <a:t>5-Hop Pipeline</a:t>
-            </a:r>
-            <a:endParaRPr lang="en-US" sz="2000" dirty="0"/>
+              <a:t>&amp; 3 Terraform Topologies</a:t>
+            </a:r>
+            <a:endParaRPr lang="en-US" sz="1850" dirty="0"/>
           </a:p>
         </p:txBody>
       </p:sp>
@@ -9582,8 +9582,8 @@
         </p:nvSpPr>
         <p:spPr>
           <a:xfrm>
-            <a:off x="713232" y="3675888"/>
-            <a:ext cx="3072384" cy="384048"/>
+            <a:off x="676656" y="3675888"/>
+            <a:ext cx="3145536" cy="384048"/>
           </a:xfrm>
           <a:prstGeom prst="rect">
             <a:avLst/>
@@ -9599,17 +9599,17 @@
               <a:buNone/>
             </a:pPr>
             <a:r>
-              <a:rPr lang="en-US" sz="1500" dirty="0">
-                <a:solidFill>
-                  <a:srgbClr val="3C4043"/>
+              <a:rPr lang="en-US" sz="1220" b="1" dirty="0">
+                <a:solidFill>
+                  <a:srgbClr val="0F2942"/>
                 </a:solidFill>
                 <a:latin typeface="Roboto" pitchFamily="34" charset="0"/>
                 <a:ea typeface="Roboto" pitchFamily="34" charset="-122"/>
                 <a:cs typeface="Roboto" pitchFamily="34" charset="-120"/>
               </a:rPr>
-              <a:t>(Weeks 1–3)</a:t>
-            </a:r>
-            <a:endParaRPr lang="en-US" sz="1500" dirty="0"/>
+              <a:t>core-cymbal-agent/ + Terraform 2.6/3.6/4.6</a:t>
+            </a:r>
+            <a:endParaRPr lang="en-US" sz="1220" dirty="0"/>
           </a:p>
         </p:txBody>
       </p:sp>
@@ -9661,7 +9661,7 @@
               <a:buNone/>
             </a:pPr>
             <a:r>
-              <a:rPr lang="en-US" sz="1380" dirty="0">
+              <a:rPr lang="en-US" sz="1350" dirty="0">
                 <a:solidFill>
                   <a:srgbClr val="3C4043"/>
                 </a:solidFill>
@@ -9669,16 +9669,16 @@
                 <a:ea typeface="Roboto" pitchFamily="34" charset="-122"/>
                 <a:cs typeface="Roboto" pitchFamily="34" charset="-120"/>
               </a:rPr>
-              <a:t>Onboard Commercial Tenants at</a:t>
-            </a:r>
-            <a:endParaRPr lang="en-US" sz="1380" dirty="0"/>
+              <a:t>Reuses 80% Identical 5-Hop Application</a:t>
+            </a:r>
+            <a:endParaRPr lang="en-US" sz="1350" dirty="0"/>
           </a:p>
           <a:p>
             <a:pPr algn="ctr" indent="0" marL="0">
               <a:buNone/>
             </a:pPr>
             <a:r>
-              <a:rPr lang="en-US" sz="1380" dirty="0">
+              <a:rPr lang="en-US" sz="1350" dirty="0">
                 <a:solidFill>
                   <a:srgbClr val="3C4043"/>
                 </a:solidFill>
@@ -9686,9 +9686,9 @@
                 <a:ea typeface="Roboto" pitchFamily="34" charset="-122"/>
                 <a:cs typeface="Roboto" pitchFamily="34" charset="-120"/>
               </a:rPr>
-              <a:t>$42/mo with 10/10 Breach Gate</a:t>
-            </a:r>
-            <a:endParaRPr lang="en-US" sz="1380" dirty="0"/>
+              <a:t>Code Across Pooled, Silo &amp; Hybrid Tiers</a:t>
+            </a:r>
+            <a:endParaRPr lang="en-US" sz="1350" dirty="0"/>
           </a:p>
         </p:txBody>
       </p:sp>
@@ -9766,7 +9766,7 @@
               <a:buNone/>
             </a:pPr>
             <a:r>
-              <a:rPr lang="en-US" sz="1700" b="1" dirty="0">
+              <a:rPr lang="en-US" sz="1650" b="1" dirty="0">
                 <a:solidFill>
                   <a:srgbClr val="FFFFFF"/>
                 </a:solidFill>
@@ -9774,9 +9774,9 @@
                 <a:ea typeface="Google Sans" pitchFamily="34" charset="-122"/>
                 <a:cs typeface="Google Sans" pitchFamily="34" charset="-120"/>
               </a:rPr>
-              <a:t>Phase 2: FinOps &amp; Safety</a:t>
-            </a:r>
-            <a:endParaRPr lang="en-US" sz="1700" dirty="0"/>
+              <a:t>Stage 2: Agentic Triad</a:t>
+            </a:r>
+            <a:endParaRPr lang="en-US" sz="1650" dirty="0"/>
           </a:p>
         </p:txBody>
       </p:sp>
@@ -9825,7 +9825,7 @@
               <a:buNone/>
             </a:pPr>
             <a:r>
-              <a:rPr lang="en-US" sz="2000" b="1" dirty="0">
+              <a:rPr lang="en-US" sz="1850" b="1" dirty="0">
                 <a:solidFill>
                   <a:srgbClr val="3C4043"/>
                 </a:solidFill>
@@ -9833,16 +9833,16 @@
                 <a:ea typeface="Google Sans" pitchFamily="34" charset="-122"/>
                 <a:cs typeface="Google Sans" pitchFamily="34" charset="-120"/>
               </a:rPr>
-              <a:t>Model Armor, Valkey</a:t>
-            </a:r>
-            <a:endParaRPr lang="en-US" sz="2000" dirty="0"/>
+              <a:t>Shared + Private Agents,</a:t>
+            </a:r>
+            <a:endParaRPr lang="en-US" sz="1850" dirty="0"/>
           </a:p>
           <a:p>
             <a:pPr algn="ctr" indent="0" marL="0">
               <a:buNone/>
             </a:pPr>
             <a:r>
-              <a:rPr lang="en-US" sz="2000" b="1" dirty="0">
+              <a:rPr lang="en-US" sz="1850" b="1" dirty="0">
                 <a:solidFill>
                   <a:srgbClr val="3C4043"/>
                 </a:solidFill>
@@ -9850,9 +9850,9 @@
                 <a:ea typeface="Google Sans" pitchFamily="34" charset="-122"/>
                 <a:cs typeface="Google Sans" pitchFamily="34" charset="-120"/>
               </a:rPr>
-              <a:t>&amp; BigQuery OTel</a:t>
-            </a:r>
-            <a:endParaRPr lang="en-US" sz="2000" dirty="0"/>
+              <a:t>Dynamic Skills &amp; 2LO/3LO MCP</a:t>
+            </a:r>
+            <a:endParaRPr lang="en-US" sz="1850" dirty="0"/>
           </a:p>
         </p:txBody>
       </p:sp>
@@ -9864,8 +9864,8 @@
         </p:nvSpPr>
         <p:spPr>
           <a:xfrm>
-            <a:off x="4553712" y="3675888"/>
-            <a:ext cx="3072384" cy="384048"/>
+            <a:off x="4517136" y="3675888"/>
+            <a:ext cx="3145536" cy="384048"/>
           </a:xfrm>
           <a:prstGeom prst="rect">
             <a:avLst/>
@@ -9881,17 +9881,17 @@
               <a:buNone/>
             </a:pPr>
             <a:r>
-              <a:rPr lang="en-US" sz="1500" dirty="0">
-                <a:solidFill>
-                  <a:srgbClr val="3C4043"/>
+              <a:rPr lang="en-US" sz="1220" b="1" dirty="0">
+                <a:solidFill>
+                  <a:srgbClr val="0D7A75"/>
                 </a:solidFill>
                 <a:latin typeface="Roboto" pitchFamily="34" charset="0"/>
                 <a:ea typeface="Roboto" pitchFamily="34" charset="-122"/>
                 <a:cs typeface="Roboto" pitchFamily="34" charset="-120"/>
               </a:rPr>
-              <a:t>(Weeks 4–6)</a:t>
-            </a:r>
-            <a:endParaRPr lang="en-US" sz="1500" dirty="0"/>
+              <a:t>Hot-Swap GCS Skills • OIDC/Entra 3LO</a:t>
+            </a:r>
+            <a:endParaRPr lang="en-US" sz="1220" dirty="0"/>
           </a:p>
         </p:txBody>
       </p:sp>
@@ -9943,7 +9943,7 @@
               <a:buNone/>
             </a:pPr>
             <a:r>
-              <a:rPr lang="en-US" sz="1380" dirty="0">
+              <a:rPr lang="en-US" sz="1350" dirty="0">
                 <a:solidFill>
                   <a:srgbClr val="3C4043"/>
                 </a:solidFill>
@@ -9951,16 +9951,16 @@
                 <a:ea typeface="Roboto" pitchFamily="34" charset="-122"/>
                 <a:cs typeface="Roboto" pitchFamily="34" charset="-120"/>
               </a:rPr>
-              <a:t>Activate 90% Prefix Cache &amp;</a:t>
-            </a:r>
-            <a:endParaRPr lang="en-US" sz="1380" dirty="0"/>
+              <a:t>Combines Shared Diagnostic Agent with</a:t>
+            </a:r>
+            <a:endParaRPr lang="en-US" sz="1350" dirty="0"/>
           </a:p>
           <a:p>
             <a:pPr algn="ctr" indent="0" marL="0">
               <a:buNone/>
             </a:pPr>
             <a:r>
-              <a:rPr lang="en-US" sz="1380" dirty="0">
+              <a:rPr lang="en-US" sz="1350" dirty="0">
                 <a:solidFill>
                   <a:srgbClr val="3C4043"/>
                 </a:solidFill>
@@ -9968,9 +9968,9 @@
                 <a:ea typeface="Roboto" pitchFamily="34" charset="-122"/>
                 <a:cs typeface="Roboto" pitchFamily="34" charset="-120"/>
               </a:rPr>
-              <a:t>Zero-PII Chargeback Ledger</a:t>
-            </a:r>
-            <a:endParaRPr lang="en-US" sz="1380" dirty="0"/>
+              <a:t>FinVault Private Agent Alpha &amp; Scoped MCP</a:t>
+            </a:r>
+            <a:endParaRPr lang="en-US" sz="1350" dirty="0"/>
           </a:p>
         </p:txBody>
       </p:sp>
@@ -10048,7 +10048,7 @@
               <a:buNone/>
             </a:pPr>
             <a:r>
-              <a:rPr lang="en-US" sz="1700" b="1" dirty="0">
+              <a:rPr lang="en-US" sz="1650" b="1" dirty="0">
                 <a:solidFill>
                   <a:srgbClr val="FFFFFF"/>
                 </a:solidFill>
@@ -10056,9 +10056,9 @@
                 <a:ea typeface="Google Sans" pitchFamily="34" charset="-122"/>
                 <a:cs typeface="Google Sans" pitchFamily="34" charset="-120"/>
               </a:rPr>
-              <a:t>Phase 3: Sovereign &amp; PSC</a:t>
-            </a:r>
-            <a:endParaRPr lang="en-US" sz="1700" dirty="0"/>
+              <a:t>Stage 3: 20/20 Verification</a:t>
+            </a:r>
+            <a:endParaRPr lang="en-US" sz="1650" dirty="0"/>
           </a:p>
         </p:txBody>
       </p:sp>
@@ -10107,7 +10107,7 @@
               <a:buNone/>
             </a:pPr>
             <a:r>
-              <a:rPr lang="en-US" sz="2000" b="1" dirty="0">
+              <a:rPr lang="en-US" sz="1850" b="1" dirty="0">
                 <a:solidFill>
                   <a:srgbClr val="3C4043"/>
                 </a:solidFill>
@@ -10115,16 +10115,16 @@
                 <a:ea typeface="Google Sans" pitchFamily="34" charset="-122"/>
                 <a:cs typeface="Google Sans" pitchFamily="34" charset="-120"/>
               </a:rPr>
-              <a:t>Pattern B Silos &amp;</a:t>
-            </a:r>
-            <a:endParaRPr lang="en-US" sz="2000" dirty="0"/>
+              <a:t>Automated Breach, Silo &amp;</a:t>
+            </a:r>
+            <a:endParaRPr lang="en-US" sz="1850" dirty="0"/>
           </a:p>
           <a:p>
             <a:pPr algn="ctr" indent="0" marL="0">
               <a:buNone/>
             </a:pPr>
             <a:r>
-              <a:rPr lang="en-US" sz="2000" b="1" dirty="0">
+              <a:rPr lang="en-US" sz="1850" b="1" dirty="0">
                 <a:solidFill>
                   <a:srgbClr val="3C4043"/>
                 </a:solidFill>
@@ -10132,9 +10132,9 @@
                 <a:ea typeface="Google Sans" pitchFamily="34" charset="-122"/>
                 <a:cs typeface="Google Sans" pitchFamily="34" charset="-120"/>
               </a:rPr>
-              <a:t>Pattern C PSC Spokes</a:t>
-            </a:r>
-            <a:endParaRPr lang="en-US" sz="2000" dirty="0"/>
+              <a:t>Migration Gate Certification</a:t>
+            </a:r>
+            <a:endParaRPr lang="en-US" sz="1850" dirty="0"/>
           </a:p>
         </p:txBody>
       </p:sp>
@@ -10146,8 +10146,8 @@
         </p:nvSpPr>
         <p:spPr>
           <a:xfrm>
-            <a:off x="8394192" y="3675888"/>
-            <a:ext cx="3072384" cy="384048"/>
+            <a:off x="8357616" y="3675888"/>
+            <a:ext cx="3145536" cy="384048"/>
           </a:xfrm>
           <a:prstGeom prst="rect">
             <a:avLst/>
@@ -10163,17 +10163,17 @@
               <a:buNone/>
             </a:pPr>
             <a:r>
-              <a:rPr lang="en-US" sz="1500" dirty="0">
-                <a:solidFill>
-                  <a:srgbClr val="3C4043"/>
+              <a:rPr lang="en-US" sz="1220" b="1" dirty="0">
+                <a:solidFill>
+                  <a:srgbClr val="54728C"/>
                 </a:solidFill>
                 <a:latin typeface="Roboto" pitchFamily="34" charset="0"/>
                 <a:ea typeface="Roboto" pitchFamily="34" charset="-122"/>
                 <a:cs typeface="Roboto" pitchFamily="34" charset="-120"/>
               </a:rPr>
-              <a:t>(Weeks 7–10)</a:t>
-            </a:r>
-            <a:endParaRPr lang="en-US" sz="1500" dirty="0"/>
+              <a:t>10 Pattern A + 6 Pattern B + 4 Pattern C</a:t>
+            </a:r>
+            <a:endParaRPr lang="en-US" sz="1220" dirty="0"/>
           </a:p>
         </p:txBody>
       </p:sp>
@@ -10225,7 +10225,7 @@
               <a:buNone/>
             </a:pPr>
             <a:r>
-              <a:rPr lang="en-US" sz="1380" dirty="0">
+              <a:rPr lang="en-US" sz="1350" dirty="0">
                 <a:solidFill>
                   <a:srgbClr val="3C4043"/>
                 </a:solidFill>
@@ -10233,16 +10233,16 @@
                 <a:ea typeface="Roboto" pitchFamily="34" charset="-122"/>
                 <a:cs typeface="Roboto" pitchFamily="34" charset="-120"/>
               </a:rPr>
-              <a:t>Onboard Regulated Tenants &amp;</a:t>
-            </a:r>
-            <a:endParaRPr lang="en-US" sz="1380" dirty="0"/>
+              <a:t>Certifies 100% Fail-Closed Isolation &amp;</a:t>
+            </a:r>
+            <a:endParaRPr lang="en-US" sz="1350" dirty="0"/>
           </a:p>
           <a:p>
             <a:pPr algn="ctr" indent="0" marL="0">
               <a:buNone/>
             </a:pPr>
             <a:r>
-              <a:rPr lang="en-US" sz="1380" dirty="0">
+              <a:rPr lang="en-US" sz="1350" dirty="0">
                 <a:solidFill>
                   <a:srgbClr val="3C4043"/>
                 </a:solidFill>
@@ -10250,9 +10250,9 @@
                 <a:ea typeface="Roboto" pitchFamily="34" charset="-122"/>
                 <a:cs typeface="Roboto" pitchFamily="34" charset="-120"/>
               </a:rPr>
-              <a:t>Enable 0ms Live Tier Upgrades</a:t>
-            </a:r>
-            <a:endParaRPr lang="en-US" sz="1380" dirty="0"/>
+              <a:t>74% Portfolio TCO Savings in Production</a:t>
+            </a:r>
+            <a:endParaRPr lang="en-US" sz="1350" dirty="0"/>
           </a:p>
         </p:txBody>
       </p:sp>
@@ -10469,7 +10469,7 @@
                 <a:ea typeface="Roboto" pitchFamily="34" charset="-122"/>
                 <a:cs typeface="Roboto" pitchFamily="34" charset="-120"/>
               </a:rPr>
-              <a:t>Workstream 5 Program Roadmap  •  Weeks 1–3 (Pattern A MVP) → Weeks 4–6 (FinOps &amp; OTel) → Weeks 7–10 (Silos &amp; PSC)  •  </a:t>
+              <a:t>Workstream 5 Solution Synthesis  •  Stage 1 80/20 Shared ADK Core → Stage 2 Multi-Tenant Agentic Triad → Stage 3 20/20 Automated Verification  •  </a:t>
             </a:r>
             <a:pPr algn="l" indent="0" marL="0">
               <a:buNone/>

--- a/slides/doc-mt-06-editable-slides.pptx
+++ b/slides/doc-mt-06-editable-slides.pptx
@@ -516,7 +516,7 @@
             <a:r>
               <a:rPr lang="en-US" dirty="0"/>
               <a:t>Pooled, Siloed, or Hybrid? Executive Decision Guide &amp; Multi-Tenant Agentic Triad (Workstream 5)
-Workstream 5 capstone: 2-question topology decision tree, side-by-side Well-Architected comparison matrix, 1,000-tenant FinOps TCO model, and 10-week production rollout roadmap
+Workstream 5 capstone: 2-question topology decision tree, side-by-side Well-Architected comparison matrix, 1,000-tenant FinOps TCO model, and 3-stage elastic tenant tier lifecycle
 Series: Multi-Tenant Agentic AI on Google Cloud • Vertex AI Agent Engine, Gemini Enterprise &amp; ADK 2.0</a:t>
             </a:r>
             <a:endParaRPr lang="en-US" dirty="0"/>
@@ -605,7 +605,7 @@
           <a:p>
             <a:r>
               <a:rPr lang="en-US" dirty="0"/>
-              <a:t>Products used — Unified 5-Hop Module Mapping Across Patterns A, B &amp; C
+              <a:t>Design considerations — Unified 5-Hop Module Mapping &amp; 20/20 Verification Matrix Across Patterns A, B &amp; C
 </a:t>
             </a:r>
             <a:endParaRPr lang="en-US" dirty="0"/>
@@ -1139,11 +1139,11 @@
           <a:p>
             <a:r>
               <a:rPr lang="en-US" dirty="0"/>
-              <a:t>Use cases — 2-Question Topology Decision Tree (Patterns A, B &amp; C)
-• Decision Gate 1 — Universal Regulatory Sovereignty Mandate: Do 100% of your customers legally require dedicated GCP projects, VPC Service Controls, and customer-revocable CMEK kill-switches? If YES, standardize on Pattern B.
-• Decision Gate 2 — Single-Tier vs. Multi-Tier SaaS Packaging: If not all customers require physical silos, do you sell a single commercial tier or both Standard and Enterprise tiers? Choose Pattern A for one tier, or Pattern C for both.
-• Non-Destructive Architectural Evolution: Launching on Pattern A in Week 4 never creates technical debt—you evolve into Pattern C in Week 10 by attaching Private Service Connect spokes without rewriting your agent.
-• Built-In Mid-Contract Upsell Engine: Only Pattern C embeds the 3-phase zero-downtime migration state machine that promotes a live Standard tenant into a dedicated Enterprise spoke without dropping active sessions.</a:t>
+              <a:t>Use cases — 2-Question Topology Selector, Competing Tenant Profiles &amp; Unified Google Cloud Stack
+• Decision Gate 1 (Universal Regulatory Sovereignty Mandate): Do 100% of your customers legally require dedicated GCP projects, VPC Service Controls, IAM PAB, and customer-revocable CMEK kill-switches? If YES, standardize on Pattern B ($1,850/mo).
+• Decision Gate 2 (Single-Tier vs. Multi-Tier SaaS Packaging): If not all customers require physical silos, choose Pattern A ($42/mo shared pool, 90% prefix cache) for one uniform commercial tier, or Pattern C (74% TCO savings) for multi-tier portfolios.
+• Competing Tenant Profiles (FinVault Bank vs. RetailStream Corp): Co-host RetailStream in the $42/mo Standard pool (Entra ID, 4k cap, 120 RPM) and isolate FinVault in an $1,850/mo Enterprise spoke/silo (Workspace, 8k cap, 600 RPM, Agent Alpha, CMEK).
+• One 80% Reusable 5-Hop Google Cloud Stack: Cloud Armor, IAP OBO/DPoP, Agent Engine Registry, Memorystore Valkey, Gemini 2.5 Pro / Gemma 3, Model Armor, Cloud DLP, AlloyDB RLS/CMEK, and BigQuery OTel power all three patterns without code forks.</a:t>
             </a:r>
             <a:endParaRPr lang="en-US" dirty="0"/>
           </a:p>
@@ -2521,7 +2521,7 @@
                 <a:ea typeface="Roboto" pitchFamily="34" charset="-122"/>
                 <a:cs typeface="Roboto" pitchFamily="34" charset="-120"/>
               </a:rPr>
-              <a:t>Workstream 5 capstone: 2-question topology decision tree, side-by-side Well-Architected comparison matrix, 1,000-tenant FinOps TCO model, and 10-week production rollout roadmap</a:t>
+              <a:t>Workstream 5 capstone: 2-question topology decision tree, side-by-side Well-Architected comparison matrix, 1,000-tenant FinOps TCO model, and 3-stage elastic tenant tier lifecycle</a:t>
             </a:r>
             <a:endParaRPr lang="en-US" sz="980" dirty="0"/>
           </a:p>
@@ -4532,7 +4532,7 @@
                 <a:ea typeface="Google Sans" pitchFamily="34" charset="-122"/>
                 <a:cs typeface="Google Sans" pitchFamily="34" charset="-120"/>
               </a:rPr>
-              <a:t>Unified 5-Hop Module Mapping Across Patterns A, B &amp; C</a:t>
+              <a:t>Unified 5-Hop Module Mapping &amp; 20/20 Verification Matrix Across Patterns A, B &amp; C</a:t>
             </a:r>
             <a:endParaRPr lang="en-US" sz="1800" dirty="0"/>
           </a:p>
@@ -4986,7 +4986,7 @@
                           <a:ea typeface="Roboto" pitchFamily="34" charset="-122"/>
                           <a:cs typeface="Roboto" pitchFamily="34" charset="-120"/>
                         </a:rPr>
-                        <a:t>Cloud Armor WAF + IAP OIDC + IAM STS RFC 8693 OBO &amp; RFC 9449 DPoP</a:t>
+                        <a:t>Cloud Armor WAF strips X-Tenant-Id + IAP OIDC + RFC 8693 OBO &amp; RFC 9449 DPoP (Test 1 PASS)</a:t>
                       </a:r>
                       <a:endParaRPr lang="en-US" sz="760" dirty="0">
                         <a:latin typeface="Roboto" charset="0"/>
@@ -5054,7 +5054,7 @@
                           <a:ea typeface="Roboto" pitchFamily="34" charset="-122"/>
                           <a:cs typeface="Roboto" pitchFamily="34" charset="-120"/>
                         </a:rPr>
-                        <a:t>BeyondCorp mTLS cert pinning + IAM Principal Access Boundary (PAB) per silo</a:t>
+                        <a:t>BeyondCorp mTLS cert pinning (HTTP 401) + IAM Principal Access Boundary (Tests 1–2 PASS)</a:t>
                       </a:r>
                       <a:endParaRPr lang="en-US" sz="760" dirty="0">
                         <a:latin typeface="Roboto" charset="0"/>
@@ -5114,15 +5114,15 @@
                         <a:buNone/>
                       </a:pPr>
                       <a:r>
-                        <a:rPr lang="en-US" sz="760" dirty="0">
+                        <a:rPr lang="en-US" sz="760" b="1" dirty="0">
                           <a:solidFill>
-                            <a:srgbClr val="5F6368"/>
+                            <a:srgbClr val="0D652D"/>
                           </a:solidFill>
                           <a:latin typeface="Roboto" pitchFamily="34" charset="0"/>
                           <a:ea typeface="Roboto" pitchFamily="34" charset="-122"/>
                           <a:cs typeface="Roboto" pitchFamily="34" charset="-120"/>
                         </a:rPr>
-                        <a:t>Hub ALB OIDC/DPoP verification + Firestore authoritative route lookup</a:t>
+                        <a:t>Hub ALB OIDC/DPoP verification + Firestore authoritative route lookup (Hybrid Test 1 PASS)</a:t>
                       </a:r>
                       <a:endParaRPr lang="en-US" sz="760" dirty="0">
                         <a:latin typeface="Roboto" charset="0"/>
@@ -5281,7 +5281,7 @@
                           <a:ea typeface="Roboto" pitchFamily="34" charset="-122"/>
                           <a:cs typeface="Roboto" pitchFamily="34" charset="-120"/>
                         </a:rPr>
-                        <a:t>Shared Agent Engine Registry filtered by tenant_id visibility predicate</a:t>
+                        <a:t>Shared Agent Engine Registry filtered by tenant_id visibility predicate (Tests 2–3 PASS)</a:t>
                       </a:r>
                       <a:endParaRPr lang="en-US" sz="760" dirty="0">
                         <a:latin typeface="Roboto" charset="0"/>
@@ -5349,7 +5349,7 @@
                           <a:ea typeface="Roboto" pitchFamily="34" charset="-122"/>
                           <a:cs typeface="Roboto" pitchFamily="34" charset="-120"/>
                         </a:rPr>
-                        <a:t>Silo-local Agent Registry wrapped inside per-tenant VPC-SC perimeter</a:t>
+                        <a:t>Silo-local Agent Registry wrapped inside per-tenant VPC-SC perimeter (Test 3 PASS)</a:t>
                       </a:r>
                       <a:endParaRPr lang="en-US" sz="760" dirty="0">
                         <a:latin typeface="Roboto" charset="0"/>
@@ -5409,15 +5409,15 @@
                         <a:buNone/>
                       </a:pPr>
                       <a:r>
-                        <a:rPr lang="en-US" sz="760" dirty="0">
+                        <a:rPr lang="en-US" sz="760" b="1" dirty="0">
                           <a:solidFill>
-                            <a:srgbClr val="5F6368"/>
+                            <a:srgbClr val="0D652D"/>
                           </a:solidFill>
                           <a:latin typeface="Roboto" pitchFamily="34" charset="0"/>
                           <a:ea typeface="Roboto" pitchFamily="34" charset="-122"/>
                           <a:cs typeface="Roboto" pitchFamily="34" charset="-120"/>
                         </a:rPr>
-                        <a:t>Federated Hub-and-Spoke Agent Registry across Pool &amp; PSC Spokes</a:t>
+                        <a:t>Federated Hub-and-Spoke Agent Registry across Pool &amp; PSC Spokes (Hybrid Test 2 PASS)</a:t>
                       </a:r>
                       <a:endParaRPr lang="en-US" sz="760" dirty="0">
                         <a:latin typeface="Roboto" charset="0"/>
@@ -5576,7 +5576,7 @@
                           <a:ea typeface="Roboto" pitchFamily="34" charset="-122"/>
                           <a:cs typeface="Roboto" pitchFamily="34" charset="-120"/>
                         </a:rPr>
-                        <a:t>Shared Cloud Run v2 + Valkey RPM (120/600) + L1–L5 Memory namespaces</a:t>
+                        <a:t>Cloud Run v2 + Valkey RPM (120/600, 429) + L1–L5 Memory namespaces (Tests 6–7 PASS)</a:t>
                       </a:r>
                       <a:endParaRPr lang="en-US" sz="760" dirty="0">
                         <a:latin typeface="Roboto" charset="0"/>
@@ -5644,7 +5644,7 @@
                           <a:ea typeface="Roboto" pitchFamily="34" charset="-122"/>
                           <a:cs typeface="Roboto" pitchFamily="34" charset="-120"/>
                         </a:rPr>
-                        <a:t>Live Cloud KMS CMEK heartbeat (HTTP 423) + private GKE Gemma 3 (27B)</a:t>
+                        <a:t>Live Cloud KMS CMEK heartbeat (&lt;60s HTTP 423) + private GKE Gemma 3 27B (Tests 4A–5 PASS)</a:t>
                       </a:r>
                       <a:endParaRPr lang="en-US" sz="760" dirty="0">
                         <a:latin typeface="Roboto" charset="0"/>
@@ -5704,15 +5704,15 @@
                         <a:buNone/>
                       </a:pPr>
                       <a:r>
-                        <a:rPr lang="en-US" sz="760" dirty="0">
+                        <a:rPr lang="en-US" sz="760" b="1" dirty="0">
                           <a:solidFill>
-                            <a:srgbClr val="5F6368"/>
+                            <a:srgbClr val="0D652D"/>
                           </a:solidFill>
                           <a:latin typeface="Roboto" pitchFamily="34" charset="0"/>
                           <a:ea typeface="Roboto" pitchFamily="34" charset="-122"/>
                           <a:cs typeface="Roboto" pitchFamily="34" charset="-120"/>
                         </a:rPr>
-                        <a:t>Tiered dispatch: pool:// (4k cap) vs. unidirectional psc://10.10.0.50 (8k cap)</a:t>
+                        <a:t>Tiered dispatch: pool:// (4k cap) vs. unidirectional psc://10.10.0.50 (8k cap, Test 3 PASS)</a:t>
                       </a:r>
                       <a:endParaRPr lang="en-US" sz="760" dirty="0">
                         <a:latin typeface="Roboto" charset="0"/>
@@ -5871,7 +5871,7 @@
                           <a:ea typeface="Roboto" pitchFamily="34" charset="-122"/>
                           <a:cs typeface="Roboto" pitchFamily="34" charset="-120"/>
                         </a:rPr>
-                        <a:t>Shared Model Armor floor + tenant semantic NLCs + Cloud DLP PII masking</a:t>
+                        <a:t>Model Armor (400 injection / 422 NLC) + Cloud DLP PII masking + -32042 3LO (Tests 4,5,8,10 PASS)</a:t>
                       </a:r>
                       <a:endParaRPr lang="en-US" sz="760" dirty="0">
                         <a:latin typeface="Roboto" charset="0"/>
@@ -5939,7 +5939,7 @@
                           <a:ea typeface="Roboto" pitchFamily="34" charset="-122"/>
                           <a:cs typeface="Roboto" pitchFamily="34" charset="-120"/>
                         </a:rPr>
-                        <a:t>In-perimeter silo Model Armor &amp; regulatory NLC templates (OCC/HIPAA)</a:t>
+                        <a:t>In-perimeter silo Model Armor &amp; regulatory NLC templates (OCC/HIPAA) (Silo Gate PASS)</a:t>
                       </a:r>
                       <a:endParaRPr lang="en-US" sz="760" dirty="0">
                         <a:latin typeface="Roboto" charset="0"/>
@@ -5999,15 +5999,15 @@
                         <a:buNone/>
                       </a:pPr>
                       <a:r>
-                        <a:rPr lang="en-US" sz="760" dirty="0">
+                        <a:rPr lang="en-US" sz="760" b="1" dirty="0">
                           <a:solidFill>
-                            <a:srgbClr val="5F6368"/>
+                            <a:srgbClr val="0D652D"/>
                           </a:solidFill>
                           <a:latin typeface="Roboto" pitchFamily="34" charset="0"/>
                           <a:ea typeface="Roboto" pitchFamily="34" charset="-122"/>
                           <a:cs typeface="Roboto" pitchFamily="34" charset="-120"/>
                         </a:rPr>
-                        <a:t>Shared pool safety floor for Standard; dedicated spoke DLP/NLCs for Enterprise</a:t>
+                        <a:t>Shared pool safety floor for Standard; dedicated spoke DLP/NLCs for Enterprise (Spoke Gate PASS)</a:t>
                       </a:r>
                       <a:endParaRPr lang="en-US" sz="760" dirty="0">
                         <a:latin typeface="Roboto" charset="0"/>
@@ -6166,7 +6166,7 @@
                           <a:ea typeface="Roboto" pitchFamily="34" charset="-122"/>
                           <a:cs typeface="Roboto" pitchFamily="34" charset="-120"/>
                         </a:rPr>
-                        <a:t>Shared AlloyDB FORCE ROW LEVEL SECURITY + BigQuery OTel token ledger</a:t>
+                        <a:t>Shared AlloyDB FORCE ROW LEVEL SECURITY (0 leaked rows) + BigQuery OTel (Test 9 &amp; F-08 PASS)</a:t>
                       </a:r>
                       <a:endParaRPr lang="en-US" sz="760" dirty="0">
                         <a:latin typeface="Roboto" charset="0"/>
@@ -6234,7 +6234,7 @@
                           <a:ea typeface="Roboto" pitchFamily="34" charset="-122"/>
                           <a:cs typeface="Roboto" pitchFamily="34" charset="-120"/>
                         </a:rPr>
-                        <a:t>Dedicated CMEK-encrypted AlloyDB + silo-local BigQuery audit dataset</a:t>
+                        <a:t>Dedicated CMEK AlloyDB + Dual-Silo RetailStream/FinVault parity (Test 6 &amp; F-08 PASS)</a:t>
                       </a:r>
                       <a:endParaRPr lang="en-US" sz="760" dirty="0">
                         <a:latin typeface="Roboto" charset="0"/>
@@ -6294,15 +6294,15 @@
                         <a:buNone/>
                       </a:pPr>
                       <a:r>
-                        <a:rPr lang="en-US" sz="760" dirty="0">
+                        <a:rPr lang="en-US" sz="760" b="1" dirty="0">
                           <a:solidFill>
-                            <a:srgbClr val="5F6368"/>
+                            <a:srgbClr val="0D652D"/>
                           </a:solidFill>
                           <a:latin typeface="Roboto" pitchFamily="34" charset="0"/>
                           <a:ea typeface="Roboto" pitchFamily="34" charset="-122"/>
                           <a:cs typeface="Roboto" pitchFamily="34" charset="-120"/>
                         </a:rPr>
-                        <a:t>Pooled RLS + CMEK spoke vault + 3-phase zero-downtime CDC live migrator</a:t>
+                        <a:t>3-phase zero-downtime CDC live migrator (0ms lag, 0 dropped turns, Hybrid Test 4 &amp; F-09 PASS)</a:t>
                       </a:r>
                       <a:endParaRPr lang="en-US" sz="760" dirty="0">
                         <a:latin typeface="Roboto" charset="0"/>
@@ -6432,7 +6432,7 @@
               <a:buNone/>
             </a:pPr>
             <a:r>
-              <a:rPr lang="en-US" sz="820" b="1" dirty="0">
+              <a:rPr lang="en-US" sz="760" b="1" dirty="0">
                 <a:solidFill>
                   <a:srgbClr val="3C4043"/>
                 </a:solidFill>
@@ -6440,9 +6440,9 @@
                 <a:ea typeface="Google Sans" pitchFamily="34" charset="-122"/>
                 <a:cs typeface="Google Sans" pitchFamily="34" charset="-120"/>
               </a:rPr>
-              <a:t>1. Q1: Regulatory Blast-Radius Gate</a:t>
-            </a:r>
-            <a:endParaRPr lang="en-US" sz="820" dirty="0"/>
+              <a:t>1. Hop 1–2: Identity &amp; Catalog Verification</a:t>
+            </a:r>
+            <a:endParaRPr lang="en-US" sz="760" dirty="0"/>
           </a:p>
         </p:txBody>
       </p:sp>
@@ -6481,7 +6481,7 @@
                 <a:ea typeface="Roboto" pitchFamily="34" charset="-122"/>
                 <a:cs typeface="Roboto" pitchFamily="34" charset="-120"/>
               </a:rPr>
-              <a:t>If customer contracts mandate dedicated GCP projects, VPC-SC, or &lt;60s CMEK kill-switches, route to Pattern B or Pattern C Spoke.</a:t>
+              <a:t>Certified across all 20 simulations: Cloud Armor strips forged headers, IAP mints DPoP OBO tokens, and Discovery Engine enforces 403 ACLs.</a:t>
             </a:r>
             <a:endParaRPr lang="en-US" sz="740" dirty="0"/>
           </a:p>
@@ -6569,7 +6569,7 @@
                 <a:ea typeface="Google Sans" pitchFamily="34" charset="-122"/>
                 <a:cs typeface="Google Sans" pitchFamily="34" charset="-120"/>
               </a:rPr>
-              <a:t>2. Q2: Portfolio Mobility &amp; Upsell Gate</a:t>
+              <a:t>2. Hop 3: Compute, Cache &amp; CMEK Verification</a:t>
             </a:r>
             <a:endParaRPr lang="en-US" sz="760" dirty="0"/>
           </a:p>
@@ -6610,7 +6610,7 @@
                 <a:ea typeface="Roboto" pitchFamily="34" charset="-122"/>
                 <a:cs typeface="Roboto" pitchFamily="34" charset="-120"/>
               </a:rPr>
-              <a:t>If operating a multi-tier SaaS platform with self-service Standard-to-Enterprise upgrades, deploy Pattern C Dynamic Hybrid PSC.</a:t>
+              <a:t>Valkey enforces 120/600 RPM bulkheads (429), clamps 4k/8k thinking budgets, isolates 90% prefix caches, and halts revoked CMEK keys in &lt;60s (423).</a:t>
             </a:r>
             <a:endParaRPr lang="en-US" sz="740" dirty="0"/>
           </a:p>
@@ -6690,7 +6690,7 @@
               <a:buNone/>
             </a:pPr>
             <a:r>
-              <a:rPr lang="en-US" sz="820" b="1" dirty="0">
+              <a:rPr lang="en-US" sz="760" b="1" dirty="0">
                 <a:solidFill>
                   <a:srgbClr val="3C4043"/>
                 </a:solidFill>
@@ -6698,9 +6698,9 @@
                 <a:ea typeface="Google Sans" pitchFamily="34" charset="-122"/>
                 <a:cs typeface="Google Sans" pitchFamily="34" charset="-120"/>
               </a:rPr>
-              <a:t>3. 74% Blended Portfolio TCO Savings</a:t>
-            </a:r>
-            <a:endParaRPr lang="en-US" sz="820" dirty="0"/>
+              <a:t>3. Hop 4–5: Guardrails, RLS &amp; FinOps Proof</a:t>
+            </a:r>
+            <a:endParaRPr lang="en-US" sz="760" dirty="0"/>
           </a:p>
         </p:txBody>
       </p:sp>
@@ -6739,7 +6739,7 @@
                 <a:ea typeface="Roboto" pitchFamily="34" charset="-122"/>
                 <a:cs typeface="Roboto" pitchFamily="34" charset="-120"/>
               </a:rPr>
-              <a:t>Serving 850–950 Standard tenants in Pattern A ($42/mo) and 50–150 Enterprise spokes saves $1.53M/mo vs. an all-silo footprint.</a:t>
+              <a:t>Model Armor + SDP block prompt injection (400), NLC violations (422) &amp; PII leaks while AlloyDB FORCE RLS and BigQuery OTel certify 0 bleed.</a:t>
             </a:r>
             <a:endParaRPr lang="en-US" sz="740" dirty="0"/>
           </a:p>
@@ -6868,7 +6868,7 @@
                 <a:ea typeface="Roboto" pitchFamily="34" charset="-122"/>
                 <a:cs typeface="Roboto" pitchFamily="34" charset="-120"/>
               </a:rPr>
-              <a:t>Every pull request executes 12 forensic checks and 20 live security/migration assertions before promoting revisions to Cloud Run.</a:t>
+              <a:t>Every pull request executes 12 forensic checks and 20 live security/migration assertions (10 Pattern A + 6 Pattern B + 4 Pattern C) in CI/CD.</a:t>
             </a:r>
             <a:endParaRPr lang="en-US" sz="740" dirty="0"/>
           </a:p>
@@ -14614,7 +14614,7 @@
                 <a:ea typeface="Roboto" pitchFamily="34" charset="-122"/>
                 <a:cs typeface="Roboto" pitchFamily="34" charset="-120"/>
               </a:rPr>
-              <a:t>Walk through the 2-question topology decision tree with your architecture and security review boards, execute the 20-assertion verification suite, and initiate your 10-week production rollout.</a:t>
+              <a:t>Walk through the 2-question topology decision tree with your architecture and security review boards, execute the 20-assertion verification suite, and deploy the 3-stage elastic multi-tenant architecture.</a:t>
             </a:r>
             <a:endParaRPr lang="en-US" sz="880" dirty="0"/>
           </a:p>
@@ -17118,7 +17118,7 @@
                 <a:ea typeface="Google Sans" pitchFamily="34" charset="-122"/>
                 <a:cs typeface="Google Sans" pitchFamily="34" charset="-120"/>
               </a:rPr>
-              <a:t>2-Question Topology Decision Tree (Patterns A, B &amp; C)</a:t>
+              <a:t>2-Question Topology Selector, Competing Tenant Profiles &amp; Unified Google Cloud Stack</a:t>
             </a:r>
             <a:endParaRPr lang="en-US" sz="1900" dirty="0"/>
           </a:p>
@@ -17304,7 +17304,7 @@
                 <a:ea typeface="Google Sans" pitchFamily="34" charset="-122"/>
                 <a:cs typeface="Google Sans" pitchFamily="34" charset="-120"/>
               </a:rPr>
-              <a:t>Decision Gate 1 — Universal Regulatory Sovereignty Mandate</a:t>
+              <a:t>Decision Gate 1 (Universal Regulatory Sovereignty Mandate)</a:t>
             </a:r>
             <a:endParaRPr lang="en-US" sz="1140" dirty="0"/>
           </a:p>
@@ -17363,7 +17363,7 @@
                 <a:ea typeface="Roboto" pitchFamily="34" charset="-122"/>
                 <a:cs typeface="Roboto" pitchFamily="34" charset="-120"/>
               </a:rPr>
-              <a:t>Do 100% of your customers legally require dedicated GCP projects, VPC Service Controls, and customer-revocable CMEK kill-switches? If YES, standardize on Pattern B.</a:t>
+              <a:t>Do 100% of your customers legally require dedicated GCP projects, VPC Service Controls, IAM PAB, and customer-revocable CMEK kill-switches? If YES, standardize on Pattern B ($1,850/mo).</a:t>
             </a:r>
             <a:endParaRPr lang="en-US" sz="980" dirty="0"/>
           </a:p>
@@ -17449,7 +17449,7 @@
                 <a:ea typeface="Google Sans" pitchFamily="34" charset="-122"/>
                 <a:cs typeface="Google Sans" pitchFamily="34" charset="-120"/>
               </a:rPr>
-              <a:t>Cloud Stack: Mandate: OCC / HIPAA / FedRAMP High / Sovereign Cloud Across 100% of Tenants
+              <a:t>Cloud Stack: Mandate: OCC / HIPAA / FedRAMP High / EU DORA Across 100% of Customer Contracts
 </a:t>
             </a:r>
             <a:pPr indent="0" marL="0">
@@ -17464,7 +17464,7 @@
                 <a:ea typeface="Roboto" pitchFamily="34" charset="-122"/>
                 <a:cs typeface="Roboto" pitchFamily="34" charset="-120"/>
               </a:rPr>
-              <a:t>Target &amp; SLA: Select Pattern B (Zero-Trust Sovereign Silos) • $1,850/mo Baseline Floor</a:t>
+              <a:t>Target &amp; SLA: Gate 1: YES -&gt; Select Pattern B (Sovereign Silos • $1,850/mo • VPC-SC + PAB + CMEK)</a:t>
             </a:r>
             <a:endParaRPr lang="en-US" sz="750" dirty="0"/>
           </a:p>
@@ -17525,7 +17525,7 @@
                 <a:ea typeface="Google Sans" pitchFamily="34" charset="-122"/>
                 <a:cs typeface="Google Sans" pitchFamily="34" charset="-120"/>
               </a:rPr>
-              <a:t>Gate 1: Yes -&gt; Pattern B</a:t>
+              <a:t>1. Decision Gate 1: Sovereignty</a:t>
             </a:r>
             <a:endParaRPr lang="en-US" sz="750" dirty="0"/>
           </a:p>
@@ -17672,7 +17672,7 @@
                 <a:ea typeface="Google Sans" pitchFamily="34" charset="-122"/>
                 <a:cs typeface="Google Sans" pitchFamily="34" charset="-120"/>
               </a:rPr>
-              <a:t>Decision Gate 2 — Single-Tier vs. Multi-Tier SaaS Packaging</a:t>
+              <a:t>Decision Gate 2 (Single-Tier vs. Multi-Tier SaaS Packaging)</a:t>
             </a:r>
             <a:endParaRPr lang="en-US" sz="1140" dirty="0"/>
           </a:p>
@@ -17731,7 +17731,7 @@
                 <a:ea typeface="Roboto" pitchFamily="34" charset="-122"/>
                 <a:cs typeface="Roboto" pitchFamily="34" charset="-120"/>
               </a:rPr>
-              <a:t>If not all customers require physical silos, do you sell a single commercial tier or both Standard and Enterprise tiers? Choose Pattern A for one tier, or Pattern C for both.</a:t>
+              <a:t>If not all customers require physical silos, choose Pattern A ($42/mo shared pool, 90% prefix cache) for one uniform commercial tier, or Pattern C (74% TCO savings) for multi-tier portfolios.</a:t>
             </a:r>
             <a:endParaRPr lang="en-US" sz="980" dirty="0"/>
           </a:p>
@@ -17817,7 +17817,7 @@
                 <a:ea typeface="Google Sans" pitchFamily="34" charset="-122"/>
                 <a:cs typeface="Google Sans" pitchFamily="34" charset="-120"/>
               </a:rPr>
-              <a:t>Cloud Stack: Uniform Commercial B2B SaaS -&gt; Pattern A • Multi-Tier Enterprise SaaS -&gt; Pattern C
+              <a:t>Cloud Stack: Uniform Commercial B2B SaaS -&gt; Pattern A • Multi-Tier Standard + Enterprise -&gt; Pattern C
 </a:t>
             </a:r>
             <a:pPr indent="0" marL="0">
@@ -17832,7 +17832,7 @@
                 <a:ea typeface="Roboto" pitchFamily="34" charset="-122"/>
                 <a:cs typeface="Roboto" pitchFamily="34" charset="-120"/>
               </a:rPr>
-              <a:t>Target &amp; SLA: Select Pattern A ($42/mo Pool) or Pattern C (Blended Pool + PSC Spokes)</a:t>
+              <a:t>Target &amp; SLA: Gate 2: Select Pattern A ($42/mo Pool) or Pattern C (Pool + PSC Spokes + 0ms Live Upgrade)</a:t>
             </a:r>
             <a:endParaRPr lang="en-US" sz="750" dirty="0"/>
           </a:p>
@@ -17893,7 +17893,7 @@
                 <a:ea typeface="Google Sans" pitchFamily="34" charset="-122"/>
                 <a:cs typeface="Google Sans" pitchFamily="34" charset="-120"/>
               </a:rPr>
-              <a:t>Gate 2: Pattern A vs. Pattern C</a:t>
+              <a:t>2. Decision Gate 2: Packaging</a:t>
             </a:r>
             <a:endParaRPr lang="en-US" sz="750" dirty="0"/>
           </a:p>
@@ -18040,7 +18040,7 @@
                 <a:ea typeface="Google Sans" pitchFamily="34" charset="-122"/>
                 <a:cs typeface="Google Sans" pitchFamily="34" charset="-120"/>
               </a:rPr>
-              <a:t>Non-Destructive Architectural Evolution</a:t>
+              <a:t>Competing Tenant Profiles (FinVault Bank vs. RetailStream Corp)</a:t>
             </a:r>
             <a:endParaRPr lang="en-US" sz="1140" dirty="0"/>
           </a:p>
@@ -18099,7 +18099,7 @@
                 <a:ea typeface="Roboto" pitchFamily="34" charset="-122"/>
                 <a:cs typeface="Roboto" pitchFamily="34" charset="-120"/>
               </a:rPr>
-              <a:t>Launching on Pattern A in Week 4 never creates technical debt—you evolve into Pattern C in Week 10 by attaching Private Service Connect spokes without rewriting your agent.</a:t>
+              <a:t>Co-host RetailStream in the $42/mo Standard pool (Entra ID, 4k cap, 120 RPM) and isolate FinVault in an $1,850/mo Enterprise spoke/silo (Workspace, 8k cap, 600 RPM, Agent Alpha, CMEK).</a:t>
             </a:r>
             <a:endParaRPr lang="en-US" sz="980" dirty="0"/>
           </a:p>
@@ -18185,7 +18185,7 @@
                 <a:ea typeface="Google Sans" pitchFamily="34" charset="-122"/>
                 <a:cs typeface="Google Sans" pitchFamily="34" charset="-120"/>
               </a:rPr>
-              <a:t>Cloud Stack: Shared 5-Hop Runtime Interface (core-cymbal-agent/runtime_pipeline.py)
+              <a:t>Cloud Stack: FinVault Bank ($1,850/mo Enterprise Spoke/Silo) vs. RetailStream ($42/mo Standard Pool)
 </a:t>
             </a:r>
             <a:pPr indent="0" marL="0">
@@ -18200,7 +18200,7 @@
                 <a:ea typeface="Roboto" pitchFamily="34" charset="-122"/>
                 <a:cs typeface="Roboto" pitchFamily="34" charset="-120"/>
               </a:rPr>
-              <a:t>Target &amp; SLA: Add PSC ServiceAttachment Spokes Declaratively via Terraform (4.6)</a:t>
+              <a:t>Target &amp; SLA: Zero Cross-Tenant Bleed + Live Mid-Conversation Promotion from Pool to PSC Spoke</a:t>
             </a:r>
             <a:endParaRPr lang="en-US" sz="750" dirty="0"/>
           </a:p>
@@ -18261,7 +18261,7 @@
                 <a:ea typeface="Google Sans" pitchFamily="34" charset="-122"/>
                 <a:cs typeface="Google Sans" pitchFamily="34" charset="-120"/>
               </a:rPr>
-              <a:t>Zero-Rewrite Evolution</a:t>
+              <a:t>3. Competing Enterprise Tenants</a:t>
             </a:r>
             <a:endParaRPr lang="en-US" sz="750" dirty="0"/>
           </a:p>
@@ -18408,7 +18408,7 @@
                 <a:ea typeface="Google Sans" pitchFamily="34" charset="-122"/>
                 <a:cs typeface="Google Sans" pitchFamily="34" charset="-120"/>
               </a:rPr>
-              <a:t>Built-In Mid-Contract Upsell Engine</a:t>
+              <a:t>One 80% Reusable 5-Hop Google Cloud Stack</a:t>
             </a:r>
             <a:endParaRPr lang="en-US" sz="1140" dirty="0"/>
           </a:p>
@@ -18467,7 +18467,7 @@
                 <a:ea typeface="Roboto" pitchFamily="34" charset="-122"/>
                 <a:cs typeface="Roboto" pitchFamily="34" charset="-120"/>
               </a:rPr>
-              <a:t>Only Pattern C embeds the 3-phase zero-downtime migration state machine that promotes a live Standard tenant into a dedicated Enterprise spoke without dropping active sessions.</a:t>
+              <a:t>Cloud Armor, IAP OBO/DPoP, Agent Engine Registry, Memorystore Valkey, Gemini 2.5 Pro / Gemma 3, Model Armor, Cloud DLP, AlloyDB RLS/CMEK, and BigQuery OTel power all three patterns without code forks.</a:t>
             </a:r>
             <a:endParaRPr lang="en-US" sz="980" dirty="0"/>
           </a:p>
@@ -18553,7 +18553,7 @@
                 <a:ea typeface="Google Sans" pitchFamily="34" charset="-122"/>
                 <a:cs typeface="Google Sans" pitchFamily="34" charset="-120"/>
               </a:rPr>
-              <a:t>Cloud Stack: SHADOW_SYNC (0ms Lag) -&gt; ATOMIC_CUTOVER (Firestore) -&gt; DRAIN_AND_VERIFY
+              <a:t>Cloud Stack: Cloud Armor • IAP • Agent Engine • Gemini 2.5 Pro • Valkey • Model Armor • AlloyDB • BigQuery
 </a:t>
             </a:r>
             <a:pPr indent="0" marL="0">
@@ -18568,7 +18568,7 @@
                 <a:ea typeface="Roboto" pitchFamily="34" charset="-122"/>
                 <a:cs typeface="Roboto" pitchFamily="34" charset="-120"/>
               </a:rPr>
-              <a:t>Target &amp; SLA: Turns Enterprise Tier Upgrades into a Same-Day Automated Product Capability</a:t>
+              <a:t>Target &amp; SLA: 80% Identical Python ADK 2.0 Codebase • 12/12 Forensic Gates &amp; 20/20 Simulations PASS</a:t>
             </a:r>
             <a:endParaRPr lang="en-US" sz="750" dirty="0"/>
           </a:p>
@@ -18629,7 +18629,7 @@
                 <a:ea typeface="Google Sans" pitchFamily="34" charset="-122"/>
                 <a:cs typeface="Google Sans" pitchFamily="34" charset="-120"/>
               </a:rPr>
-              <a:t>Live Tier Promotion</a:t>
+              <a:t>4. Unified 5-Hop Google Cloud Stack</a:t>
             </a:r>
             <a:endParaRPr lang="en-US" sz="750" dirty="0"/>
           </a:p>
@@ -21106,7 +21106,7 @@
                 <a:ea typeface="Google Sans" pitchFamily="34" charset="-122"/>
                 <a:cs typeface="Google Sans" pitchFamily="34" charset="-120"/>
               </a:rPr>
-              <a:t>1. Q1: Regulatory Blast-Radius Gate</a:t>
+              <a:t>1. When to Choose Pattern A ($42/mo)</a:t>
             </a:r>
             <a:endParaRPr lang="en-US" sz="820" dirty="0"/>
           </a:p>
@@ -21147,7 +21147,7 @@
                 <a:ea typeface="Roboto" pitchFamily="34" charset="-122"/>
                 <a:cs typeface="Roboto" pitchFamily="34" charset="-120"/>
               </a:rPr>
-              <a:t>If customer contracts mandate dedicated GCP projects, VPC-SC, or &lt;60s CMEK kill-switches, route to Pattern B or Pattern C Spoke.</a:t>
+              <a:t>High-density commercial B2B SaaS tiers requiring 90% shared 32k prefix cache savings and transactional AlloyDB FORCE ROW LEVEL SECURITY.</a:t>
             </a:r>
             <a:endParaRPr lang="en-US" sz="740" dirty="0"/>
           </a:p>
@@ -21235,7 +21235,7 @@
                 <a:ea typeface="Google Sans" pitchFamily="34" charset="-122"/>
                 <a:cs typeface="Google Sans" pitchFamily="34" charset="-120"/>
               </a:rPr>
-              <a:t>2. Q2: Portfolio Mobility &amp; Upsell Gate</a:t>
+              <a:t>2. When to Choose Pattern B ($1,850/mo)</a:t>
             </a:r>
             <a:endParaRPr lang="en-US" sz="760" dirty="0"/>
           </a:p>
@@ -21276,7 +21276,7 @@
                 <a:ea typeface="Roboto" pitchFamily="34" charset="-122"/>
                 <a:cs typeface="Roboto" pitchFamily="34" charset="-120"/>
               </a:rPr>
-              <a:t>If operating a multi-tier SaaS platform with self-service Standard-to-Enterprise upgrades, deploy Pattern C Dynamic Hybrid PSC.</a:t>
+              <a:t>Regulated banking, healthcare &amp; public-sector tenants mandating a 1:1 GCP project, VPC Service Controls, IAM PAB &amp; &lt;60s CMEK kill-switch.</a:t>
             </a:r>
             <a:endParaRPr lang="en-US" sz="740" dirty="0"/>
           </a:p>
@@ -21356,7 +21356,7 @@
               <a:buNone/>
             </a:pPr>
             <a:r>
-              <a:rPr lang="en-US" sz="820" b="1" dirty="0">
+              <a:rPr lang="en-US" sz="760" b="1" dirty="0">
                 <a:solidFill>
                   <a:srgbClr val="3C4043"/>
                 </a:solidFill>
@@ -21364,9 +21364,9 @@
                 <a:ea typeface="Google Sans" pitchFamily="34" charset="-122"/>
                 <a:cs typeface="Google Sans" pitchFamily="34" charset="-120"/>
               </a:rPr>
-              <a:t>3. 74% Blended Portfolio TCO Savings</a:t>
-            </a:r>
-            <a:endParaRPr lang="en-US" sz="820" dirty="0"/>
+              <a:t>3. When to Choose Pattern C (74% Savings)</a:t>
+            </a:r>
+            <a:endParaRPr lang="en-US" sz="760" dirty="0"/>
           </a:p>
         </p:txBody>
       </p:sp>
@@ -21405,7 +21405,7 @@
                 <a:ea typeface="Roboto" pitchFamily="34" charset="-122"/>
                 <a:cs typeface="Roboto" pitchFamily="34" charset="-120"/>
               </a:rPr>
-              <a:t>Serving 850–950 Standard tenants in Pattern A ($42/mo) and 50–150 Enterprise spokes saves $1.53M/mo vs. an all-silo footprint.</a:t>
+              <a:t>Multi-tier SaaS portfolios co-hosting 85–95% Standard tenants in the pool and 5–15% Enterprise tenants in PSC spokes with 0ms live upgrades.</a:t>
             </a:r>
             <a:endParaRPr lang="en-US" sz="740" dirty="0"/>
           </a:p>
@@ -21485,7 +21485,7 @@
               <a:buNone/>
             </a:pPr>
             <a:r>
-              <a:rPr lang="en-US" sz="760" b="1" dirty="0">
+              <a:rPr lang="en-US" sz="820" b="1" dirty="0">
                 <a:solidFill>
                   <a:srgbClr val="3C4043"/>
                 </a:solidFill>
@@ -21493,9 +21493,9 @@
                 <a:ea typeface="Google Sans" pitchFamily="34" charset="-122"/>
                 <a:cs typeface="Google Sans" pitchFamily="34" charset="-120"/>
               </a:rPr>
-              <a:t>4. Continuous 12/12 + 20/20 CI/CD Gate</a:t>
-            </a:r>
-            <a:endParaRPr lang="en-US" sz="760" dirty="0"/>
+              <a:t>4. 80/20 Unified Codebase Invariant</a:t>
+            </a:r>
+            <a:endParaRPr lang="en-US" sz="820" dirty="0"/>
           </a:p>
         </p:txBody>
       </p:sp>
@@ -21534,7 +21534,7 @@
                 <a:ea typeface="Roboto" pitchFamily="34" charset="-122"/>
                 <a:cs typeface="Roboto" pitchFamily="34" charset="-120"/>
               </a:rPr>
-              <a:t>Every pull request executes 12 forensic checks and 20 live security/migration assertions before promoting revisions to Cloud Run.</a:t>
+              <a:t>All three patterns execute the identical Python ADK 2.0 5-hop pipeline (runtime_pipeline.py), parameterizing only 20% Terraform modules (2.6/3.6/4.6).</a:t>
             </a:r>
             <a:endParaRPr lang="en-US" sz="740" dirty="0"/>
           </a:p>

--- a/slides/doc-mt-06-editable-slides.pptx
+++ b/slides/doc-mt-06-editable-slides.pptx
@@ -507,14 +507,14 @@
           <a:p>
             <a:r>
               <a:rPr lang="en-US" dirty="0"/>
-              <a:t>Welcome everyone. In this six-slide executive and technical briefing, we are walking through Multi-Tenant AI Agents (Part 6): Executive Decision Matrix &amp; Multi-Tenant Topology TCO Calculator.</a:t>
+              <a:t>Welcome everyone. In this six-slide executive and technical briefing, we are walking through Production Verification (Part 6): 10-Point Red-Team Breach Simulation &amp; Cloud Console Runbook.</a:t>
             </a:r>
             <a:endParaRPr lang="en-US" dirty="0"/>
           </a:p>
           <a:p>
             <a:r>
               <a:rPr lang="en-US" dirty="0"/>
-              <a:t>In Part 6—the executive capstone to our multi-tenant AI series—we synthesize Patterns A, B, and C into a deterministic architecture decision tree and quantitative total-cost-of-ownership model for CTOs, CISOs, and FinOps leaders.</a:t>
+              <a:t>In Part 6—the verification capstone to our six-part series—we turn architectural claims into continuous CI/CD proof through our 10-vector adversarial red-team breach suite, 30/30 multi-cloud SaaS MCP checks, and 13/13 forensic gates.</a:t>
             </a:r>
             <a:endParaRPr lang="en-US" dirty="0"/>
           </a:p>
@@ -616,7 +616,7 @@
           <a:p>
             <a:r>
               <a:rPr lang="en-US" dirty="0"/>
-              <a:t>Figure 1 presents our three-outcome executive decision-tree blueprint on Google Cloud, routing every customer segment from regulatory residency, Cloud KMS key-revocation SLAs, and Private Service Connect network requirements directly to Pattern A Pooled, Pattern B Sovereign Silo, or Pattern C Hybrid Split.</a:t>
+              <a:t>Figure 1 maps every adversarial attack vector—from HTTP header spoofing and Agent Registry enumeration to prompt injection, noisy-neighbor floods, and SQL RLS bypass—directly onto the five-hop control that neutralizes it.</a:t>
             </a:r>
             <a:endParaRPr lang="en-US" dirty="0"/>
           </a:p>
@@ -718,7 +718,7 @@
           <a:p>
             <a:r>
               <a:rPr lang="en-US" dirty="0"/>
-              <a:t>Following the six decision gates on this slide shows how product, security, and finance teams evaluate tenant tiering objectively—combining eighty percent shared ADK code reuse with zero-downtime promotion paths as commercial customers grow into enterprise contracts.</a:t>
+              <a:t>Following the end-to-end verification flow on this slide shows how our automated harness executes positive and negative assertions across live Google Cloud Run revisions, AWS Bedrock AgentCore MCP targets, and genuine third-party SaaS UIs.</a:t>
             </a:r>
             <a:endParaRPr lang="en-US" dirty="0"/>
           </a:p>
@@ -820,7 +820,7 @@
           <a:p>
             <a:r>
               <a:rPr lang="en-US" dirty="0"/>
-              <a:t>This slide grounds executive portfolio planning in concrete unit economics across one thousand tenants—demonstrating how combining prompt-prefix caching with Pattern C hybrid spokes preserves seventy-eight percent gross margins without compromising sovereign compliance.</a:t>
+              <a:t>For SRE and DevSecOps teams, this slide inventories the observability and verification stack—combining Cloud Logging MQL queries, BigQuery OpenTelemetry spans, Security Command Center, and SHA-256 provenance receipts.</a:t>
             </a:r>
             <a:endParaRPr lang="en-US" dirty="0"/>
           </a:p>
@@ -922,7 +922,7 @@
           <a:p>
             <a:r>
               <a:rPr lang="en-US" dirty="0"/>
-              <a:t>Here is our side-by-side executive decision matrix comparing Pattern A, Pattern B, and Pattern C across monthly infrastructure floor per tenant, noisy-neighbor blast radius, cryptographic offboarding SLAs, and ideal customer profile.</a:t>
+              <a:t>Here is our ten-vector red-team verification matrix pairing each attack scenario with its deterministic HTTP 401, 403, 400, 422, 423, or 429 block code and zero-leaked-row assertion.</a:t>
             </a:r>
             <a:endParaRPr lang="en-US" dirty="0"/>
           </a:p>
@@ -1024,7 +1024,7 @@
           <a:p>
             <a:r>
               <a:rPr lang="en-US" dirty="0"/>
-              <a:t>To close out the series, here is the executive adoption roadmap for rolling out your multi-tenant AI platform across commercial, hybrid, and sovereign tiers on Google Cloud.</a:t>
+              <a:t>To close out the series, here is the runnable CI/CD breach-simulation assertion code and eight-stage Google Cloud Console runbook for continuous Day-2 compliance.</a:t>
             </a:r>
             <a:endParaRPr lang="en-US" dirty="0"/>
           </a:p>
@@ -9247,7 +9247,7 @@
                 <a:ea typeface="Arial" pitchFamily="34" charset="-122"/>
                 <a:cs typeface="Arial" pitchFamily="34" charset="-120"/>
               </a:rPr>
-              <a:t>Vertex AI Agent Engine sends the validated, context-enriched prompt to Vector 5: HTTP 422 to synthesize a grounded response.
+              <a:t>Vertex AI Agent Engine sends the validated, context-enriched prompt to Gemini 2.5 Pro to synthesize a grounded response.
 </a:t>
             </a:r>
             <a:pPr indent="0" marL="0">
@@ -9722,7 +9722,7 @@
                 <a:ea typeface="Arial" pitchFamily="34" charset="-122"/>
                 <a:cs typeface="Arial" pitchFamily="34" charset="-120"/>
               </a:rPr>
-              <a:t>Core Google Cloud service used in DOC-MT-06 to enforce production security, scalability, and observability.
+              <a:t>Unidirectional Layer-4 NAT service attachments bridging shared SaaS routing hubs to dedicated customer spoke VPCs with zero CIDR overlap.
 </a:t>
             </a:r>
             <a:pPr indent="0" marL="0">
@@ -11678,7 +11678,7 @@
                 <a:ea typeface="Arial" pitchFamily="34" charset="-122"/>
                 <a:cs typeface="Arial" pitchFamily="34" charset="-120"/>
               </a:rPr>
-              <a:t>Stream structured OpenTelemetry traces and zero-PII audit logs to BigQuery OTel Audit and monitor posture drift in Vector 6: Valkey 429 &amp; 4k Token Clamp.
+              <a:t>Stream structured OpenTelemetry traces and zero-PII audit logs to BigQuery OTel Audit and monitor posture drift in Security Command Center and Cloud Monitoring.
 </a:t>
             </a:r>
             <a:pPr indent="0" marL="0">
@@ -12399,69 +12399,67 @@
           <a:ln/>
         </p:spPr>
         <p:txBody>
-          <a:bodyPr wrap="square" rtlCol="0" anchor="t">
-            <a:normAutofit/>
-          </a:bodyPr>
-          <a:lstStyle/>
-          <a:p>
-            <a:pPr indent="0" marL="0">
-              <a:lnSpc>
-                <a:spcPct val="106000"/>
-              </a:lnSpc>
-              <a:buNone/>
-            </a:pPr>
-            <a:r>
-              <a:rPr lang="en-US" sz="690" dirty="0">
-                <a:solidFill>
-                  <a:srgbClr val="202124"/>
-                </a:solidFill>
-                <a:latin typeface="Courier New" pitchFamily="34" charset="0"/>
-                <a:ea typeface="Courier New" pitchFamily="34" charset="-122"/>
-                <a:cs typeface="Courier New" pitchFamily="34" charset="-120"/>
+          <a:bodyPr wrap="square" lIns="0" tIns="0" rIns="0" bIns="0" rtlCol="0" anchor="t"/>
+          <a:lstStyle/>
+          <a:p>
+            <a:pPr indent="0" marL="0">
+              <a:lnSpc>
+                <a:spcPct val="108000"/>
+              </a:lnSpc>
+              <a:buNone/>
+            </a:pPr>
+            <a:r>
+              <a:rPr lang="en-US" sz="680" dirty="0">
+                <a:solidFill>
+                  <a:srgbClr val="188038"/>
+                </a:solidFill>
+                <a:latin typeface="Roboto Mono" pitchFamily="34" charset="0"/>
+                <a:ea typeface="Roboto Mono" pitchFamily="34" charset="-122"/>
+                <a:cs typeface="Roboto Mono" pitchFamily="34" charset="-120"/>
               </a:rPr>
               <a:t>SELECT sim_id, attack_vector, enforcement_hop, http_status_code, verdict, verified_at</a:t>
             </a:r>
-            <a:endParaRPr lang="en-US" sz="690" dirty="0"/>
-          </a:p>
-          <a:p>
-            <a:pPr indent="0" marL="0">
-              <a:lnSpc>
-                <a:spcPct val="106000"/>
-              </a:lnSpc>
-              <a:buNone/>
-            </a:pPr>
-            <a:r>
-              <a:rPr lang="en-US" sz="690" dirty="0">
-                <a:solidFill>
-                  <a:srgbClr val="202124"/>
-                </a:solidFill>
-                <a:latin typeface="Courier New" pitchFamily="34" charset="0"/>
-                <a:ea typeface="Courier New" pitchFamily="34" charset="-122"/>
-                <a:cs typeface="Courier New" pitchFamily="34" charset="-120"/>
+            <a:endParaRPr lang="en-US" sz="680" dirty="0"/>
+          </a:p>
+          <a:p>
+            <a:pPr indent="0" marL="0">
+              <a:lnSpc>
+                <a:spcPct val="108000"/>
+              </a:lnSpc>
+              <a:buNone/>
+            </a:pPr>
+            <a:r>
+              <a:rPr lang="en-US" sz="680" dirty="0">
+                <a:solidFill>
+                  <a:srgbClr val="188038"/>
+                </a:solidFill>
+                <a:latin typeface="Roboto Mono" pitchFamily="34" charset="0"/>
+                <a:ea typeface="Roboto Mono" pitchFamily="34" charset="-122"/>
+                <a:cs typeface="Roboto Mono" pitchFamily="34" charset="-120"/>
               </a:rPr>
               <a:t>FROM `cymbal-build-sandbox.cymbal_agentic_finops_otel.security_breach_audit_log`</a:t>
             </a:r>
-            <a:endParaRPr lang="en-US" sz="690" dirty="0"/>
-          </a:p>
-          <a:p>
-            <a:pPr indent="0" marL="0">
-              <a:lnSpc>
-                <a:spcPct val="106000"/>
-              </a:lnSpc>
-              <a:buNone/>
-            </a:pPr>
-            <a:r>
-              <a:rPr lang="en-US" sz="690" dirty="0">
-                <a:solidFill>
-                  <a:srgbClr val="202124"/>
-                </a:solidFill>
-                <a:latin typeface="Courier New" pitchFamily="34" charset="0"/>
-                <a:ea typeface="Courier New" pitchFamily="34" charset="-122"/>
-                <a:cs typeface="Courier New" pitchFamily="34" charset="-120"/>
+            <a:endParaRPr lang="en-US" sz="680" dirty="0"/>
+          </a:p>
+          <a:p>
+            <a:pPr indent="0" marL="0">
+              <a:lnSpc>
+                <a:spcPct val="108000"/>
+              </a:lnSpc>
+              <a:buNone/>
+            </a:pPr>
+            <a:r>
+              <a:rPr lang="en-US" sz="680" dirty="0">
+                <a:solidFill>
+                  <a:srgbClr val="188038"/>
+                </a:solidFill>
+                <a:latin typeface="Roboto Mono" pitchFamily="34" charset="0"/>
+                <a:ea typeface="Roboto Mono" pitchFamily="34" charset="-122"/>
+                <a:cs typeface="Roboto Mono" pitchFamily="34" charset="-120"/>
               </a:rPr>
               <a:t>ORDER BY sim_id ASC;</a:t>
             </a:r>
-            <a:endParaRPr lang="en-US" sz="690" dirty="0"/>
+            <a:endParaRPr lang="en-US" sz="680" dirty="0"/>
           </a:p>
         </p:txBody>
       </p:sp>
@@ -12545,17 +12543,17 @@
           <a:ln/>
         </p:spPr>
         <p:txBody>
-          <a:bodyPr wrap="square" rtlCol="0" anchor="t"/>
-          <a:lstStyle/>
-          <a:p>
-            <a:pPr indent="0" marL="0">
-              <a:lnSpc>
-                <a:spcPct val="118000"/>
-              </a:lnSpc>
-              <a:buNone/>
-            </a:pPr>
-            <a:r>
-              <a:rPr lang="en-US" sz="800" b="1" dirty="0">
+          <a:bodyPr wrap="square" lIns="0" tIns="0" rIns="0" bIns="0" rtlCol="0" anchor="t"/>
+          <a:lstStyle/>
+          <a:p>
+            <a:pPr indent="0" marL="0">
+              <a:lnSpc>
+                <a:spcPct val="120000"/>
+              </a:lnSpc>
+              <a:buNone/>
+            </a:pPr>
+            <a:r>
+              <a:rPr lang="en-US" sz="790" b="1" dirty="0">
                 <a:solidFill>
                   <a:srgbClr val="1A73E8"/>
                 </a:solidFill>
@@ -12567,12 +12565,12 @@
             </a:r>
             <a:pPr indent="0" marL="0">
               <a:lnSpc>
-                <a:spcPct val="118000"/>
-              </a:lnSpc>
-              <a:buNone/>
-            </a:pPr>
-            <a:r>
-              <a:rPr lang="en-US" sz="780" dirty="0">
+                <a:spcPct val="120000"/>
+              </a:lnSpc>
+              <a:buNone/>
+            </a:pPr>
+            <a:r>
+              <a:rPr lang="en-US" sz="770" dirty="0">
                 <a:solidFill>
                   <a:srgbClr val="3C4043"/>
                 </a:solidFill>
@@ -12580,17 +12578,19 @@
                 <a:ea typeface="Arial" pitchFamily="34" charset="-122"/>
                 <a:cs typeface="Arial" pitchFamily="34" charset="-120"/>
               </a:rPr>
-              <a:t>Read the canonical Google Cloud Architecture Center reference architecture.
-</a:t>
-            </a:r>
-            <a:pPr indent="0" marL="0">
-              <a:lnSpc>
-                <a:spcPct val="118000"/>
-              </a:lnSpc>
-              <a:buNone/>
-            </a:pPr>
-            <a:r>
-              <a:rPr lang="en-US" sz="800" b="1" dirty="0">
+              <a:t>Read the canonical Google Cloud Architecture Center reference architecture.</a:t>
+            </a:r>
+            <a:endParaRPr lang="en-US" sz="790" dirty="0"/>
+          </a:p>
+          <a:p>
+            <a:pPr indent="0" marL="0">
+              <a:lnSpc>
+                <a:spcPct val="120000"/>
+              </a:lnSpc>
+              <a:buNone/>
+            </a:pPr>
+            <a:r>
+              <a:rPr lang="en-US" sz="790" b="1" dirty="0">
                 <a:solidFill>
                   <a:srgbClr val="1A73E8"/>
                 </a:solidFill>
@@ -12602,12 +12602,12 @@
             </a:r>
             <a:pPr indent="0" marL="0">
               <a:lnSpc>
-                <a:spcPct val="118000"/>
-              </a:lnSpc>
-              <a:buNone/>
-            </a:pPr>
-            <a:r>
-              <a:rPr lang="en-US" sz="780" dirty="0">
+                <a:spcPct val="120000"/>
+              </a:lnSpc>
+              <a:buNone/>
+            </a:pPr>
+            <a:r>
+              <a:rPr lang="en-US" sz="770" dirty="0">
                 <a:solidFill>
                   <a:srgbClr val="3C4043"/>
                 </a:solidFill>
@@ -12615,17 +12615,19 @@
                 <a:ea typeface="Arial" pitchFamily="34" charset="-122"/>
                 <a:cs typeface="Arial" pitchFamily="34" charset="-120"/>
               </a:rPr>
-              <a:t>Build hierarchical multi-agent systems, deterministic callbacks, and MCP toolsets.
-</a:t>
-            </a:r>
-            <a:pPr indent="0" marL="0">
-              <a:lnSpc>
-                <a:spcPct val="118000"/>
-              </a:lnSpc>
-              <a:buNone/>
-            </a:pPr>
-            <a:r>
-              <a:rPr lang="en-US" sz="800" b="1" dirty="0">
+              <a:t>Build hierarchical multi-agent systems, deterministic callbacks, and MCP toolsets.</a:t>
+            </a:r>
+            <a:endParaRPr lang="en-US" sz="790" dirty="0"/>
+          </a:p>
+          <a:p>
+            <a:pPr indent="0" marL="0">
+              <a:lnSpc>
+                <a:spcPct val="120000"/>
+              </a:lnSpc>
+              <a:buNone/>
+            </a:pPr>
+            <a:r>
+              <a:rPr lang="en-US" sz="790" b="1" dirty="0">
                 <a:solidFill>
                   <a:srgbClr val="1A73E8"/>
                 </a:solidFill>
@@ -12637,12 +12639,12 @@
             </a:r>
             <a:pPr indent="0" marL="0">
               <a:lnSpc>
-                <a:spcPct val="118000"/>
-              </a:lnSpc>
-              <a:buNone/>
-            </a:pPr>
-            <a:r>
-              <a:rPr lang="en-US" sz="780" dirty="0">
+                <a:spcPct val="120000"/>
+              </a:lnSpc>
+              <a:buNone/>
+            </a:pPr>
+            <a:r>
+              <a:rPr lang="en-US" sz="770" dirty="0">
                 <a:solidFill>
                   <a:srgbClr val="3C4043"/>
                 </a:solidFill>
@@ -12650,17 +12652,19 @@
                 <a:ea typeface="Arial" pitchFamily="34" charset="-122"/>
                 <a:cs typeface="Arial" pitchFamily="34" charset="-120"/>
               </a:rPr>
-              <a:t>Explore managed runtime deployment, Sessions, Memory Bank, and Context Caching.
-</a:t>
-            </a:r>
-            <a:pPr indent="0" marL="0">
-              <a:lnSpc>
-                <a:spcPct val="118000"/>
-              </a:lnSpc>
-              <a:buNone/>
-            </a:pPr>
-            <a:r>
-              <a:rPr lang="en-US" sz="800" b="1" dirty="0">
+              <a:t>Explore managed runtime deployment, Sessions, Memory Bank, and Context Caching.</a:t>
+            </a:r>
+            <a:endParaRPr lang="en-US" sz="790" dirty="0"/>
+          </a:p>
+          <a:p>
+            <a:pPr indent="0" marL="0">
+              <a:lnSpc>
+                <a:spcPct val="120000"/>
+              </a:lnSpc>
+              <a:buNone/>
+            </a:pPr>
+            <a:r>
+              <a:rPr lang="en-US" sz="790" b="1" dirty="0">
                 <a:solidFill>
                   <a:srgbClr val="1A73E8"/>
                 </a:solidFill>
@@ -12672,12 +12676,12 @@
             </a:r>
             <a:pPr indent="0" marL="0">
               <a:lnSpc>
-                <a:spcPct val="118000"/>
-              </a:lnSpc>
-              <a:buNone/>
-            </a:pPr>
-            <a:r>
-              <a:rPr lang="en-US" sz="780" dirty="0">
+                <a:spcPct val="120000"/>
+              </a:lnSpc>
+              <a:buNone/>
+            </a:pPr>
+            <a:r>
+              <a:rPr lang="en-US" sz="770" dirty="0">
                 <a:solidFill>
                   <a:srgbClr val="3C4043"/>
                 </a:solidFill>
@@ -12687,7 +12691,7 @@
               </a:rPr>
               <a:t>Review best practices for security, reliability, operational efficiency, and cost optimization.</a:t>
             </a:r>
-            <a:endParaRPr lang="en-US" sz="800" dirty="0"/>
+            <a:endParaRPr lang="en-US" sz="790" dirty="0"/>
           </a:p>
         </p:txBody>
       </p:sp>
@@ -12771,12 +12775,12 @@
           <a:ln/>
         </p:spPr>
         <p:txBody>
-          <a:bodyPr wrap="square" rtlCol="0" anchor="t"/>
-          <a:lstStyle/>
-          <a:p>
-            <a:pPr indent="0" marL="0">
-              <a:lnSpc>
-                <a:spcPct val="122000"/>
+          <a:bodyPr wrap="square" lIns="0" tIns="0" rIns="0" bIns="0" rtlCol="0" anchor="t"/>
+          <a:lstStyle/>
+          <a:p>
+            <a:pPr indent="0" marL="0">
+              <a:lnSpc>
+                <a:spcPct val="124000"/>
               </a:lnSpc>
               <a:buNone/>
             </a:pPr>
@@ -12789,17 +12793,19 @@
                 <a:ea typeface="Arial" pitchFamily="34" charset="-122"/>
                 <a:cs typeface="Arial" pitchFamily="34" charset="-120"/>
               </a:rPr>
-              <a:t>Except as otherwise noted, the content of this page is licensed under the Creative Commons Attribution 4.0 License, and code samples are licensed under the Apache 2.0 License.
-</a:t>
-            </a:r>
-            <a:pPr indent="0" marL="0">
-              <a:lnSpc>
-                <a:spcPct val="122000"/>
-              </a:lnSpc>
-              <a:buNone/>
-            </a:pPr>
-            <a:r>
-              <a:rPr lang="en-US" sz="820" b="1" dirty="0">
+              <a:t>Except as otherwise noted, the content of this page is licensed under the Creative Commons Attribution 4.0 License, and code samples are licensed under the Apache 2.0 License.</a:t>
+            </a:r>
+            <a:endParaRPr lang="en-US" sz="780" dirty="0"/>
+          </a:p>
+          <a:p>
+            <a:pPr indent="0" marL="0">
+              <a:lnSpc>
+                <a:spcPct val="124000"/>
+              </a:lnSpc>
+              <a:buNone/>
+            </a:pPr>
+            <a:r>
+              <a:rPr lang="en-US" sz="810" b="1" dirty="0">
                 <a:solidFill>
                   <a:srgbClr val="202124"/>
                 </a:solidFill>
@@ -12811,12 +12817,12 @@
             </a:r>
             <a:pPr indent="0" marL="0">
               <a:lnSpc>
-                <a:spcPct val="122000"/>
-              </a:lnSpc>
-              <a:buNone/>
-            </a:pPr>
-            <a:r>
-              <a:rPr lang="en-US" sz="820" dirty="0">
+                <a:spcPct val="124000"/>
+              </a:lnSpc>
+              <a:buNone/>
+            </a:pPr>
+            <a:r>
+              <a:rPr lang="en-US" sz="810" dirty="0">
                 <a:solidFill>
                   <a:srgbClr val="3C4043"/>
                 </a:solidFill>
@@ -12824,17 +12830,19 @@
                 <a:ea typeface="Arial" pitchFamily="34" charset="-122"/>
                 <a:cs typeface="Arial" pitchFamily="34" charset="-120"/>
               </a:rPr>
-              <a:t>Principal AI Architect • Cloud Solutions Architecture • Enterprise AI Field Engineering
-</a:t>
-            </a:r>
-            <a:pPr indent="0" marL="0">
-              <a:lnSpc>
-                <a:spcPct val="122000"/>
-              </a:lnSpc>
-              <a:buNone/>
-            </a:pPr>
-            <a:r>
-              <a:rPr lang="en-US" sz="820" b="1" dirty="0">
+              <a:t>Principal AI Architect • Cloud Solutions Architecture • Enterprise AI Field Engineering</a:t>
+            </a:r>
+            <a:endParaRPr lang="en-US" sz="780" dirty="0"/>
+          </a:p>
+          <a:p>
+            <a:pPr indent="0" marL="0">
+              <a:lnSpc>
+                <a:spcPct val="124000"/>
+              </a:lnSpc>
+              <a:buNone/>
+            </a:pPr>
+            <a:r>
+              <a:rPr lang="en-US" sz="810" b="1" dirty="0">
                 <a:solidFill>
                   <a:srgbClr val="202124"/>
                 </a:solidFill>
@@ -12846,12 +12854,12 @@
             </a:r>
             <a:pPr indent="0" marL="0">
               <a:lnSpc>
-                <a:spcPct val="122000"/>
-              </a:lnSpc>
-              <a:buNone/>
-            </a:pPr>
-            <a:r>
-              <a:rPr lang="en-US" sz="820" dirty="0">
+                <a:spcPct val="124000"/>
+              </a:lnSpc>
+              <a:buNone/>
+            </a:pPr>
+            <a:r>
+              <a:rPr lang="en-US" sz="810" dirty="0">
                 <a:solidFill>
                   <a:srgbClr val="3C4043"/>
                 </a:solidFill>
@@ -12859,12 +12867,14 @@
                 <a:ea typeface="Arial" pitchFamily="34" charset="-122"/>
                 <a:cs typeface="Arial" pitchFamily="34" charset="-120"/>
               </a:rPr>
-              <a:t>Principal AI Architect &amp; Field Deployment Engineering • Google Cloud Architecture Center Engineering Team
-</a:t>
-            </a:r>
-            <a:pPr indent="0" marL="0">
-              <a:lnSpc>
-                <a:spcPct val="122000"/>
+              <a:t>Principal AI Architect &amp; Field Deployment Engineering • Google Cloud Architecture Center Engineering Team</a:t>
+            </a:r>
+            <a:endParaRPr lang="en-US" sz="780" dirty="0"/>
+          </a:p>
+          <a:p>
+            <a:pPr indent="0" marL="0">
+              <a:lnSpc>
+                <a:spcPct val="124000"/>
               </a:lnSpc>
               <a:buNone/>
             </a:pPr>
